--- a/docs/plots/carbo/jx_carbo_linsubhr_dosedisc_aki2.pptx
+++ b/docs/plots/carbo/jx_carbo_linsubhr_dosedisc_aki2.pptx
@@ -3132,557 +3132,572 @@
           <p:spPr>
             <a:xfrm>
               <a:off x="1172049" y="1896563"/>
-              <a:ext cx="7090630" cy="3483600"/>
+              <a:ext cx="7090630" cy="3453563"/>
             </a:xfrm>
             <a:custGeom>
               <a:avLst/>
               <a:pathLst>
-                <a:path w="7090630" h="3483600">
+                <a:path w="7090630" h="3453563">
                   <a:moveTo>
-                    <a:pt x="0" y="2432371"/>
+                    <a:pt x="0" y="1181659"/>
                   </a:moveTo>
                   <a:lnTo>
-                    <a:pt x="71622" y="2442038"/>
-                  </a:lnTo>
-                  <a:lnTo>
-                    <a:pt x="143245" y="2451628"/>
-                  </a:lnTo>
-                  <a:lnTo>
-                    <a:pt x="214867" y="2461143"/>
-                  </a:lnTo>
-                  <a:lnTo>
-                    <a:pt x="286490" y="2470582"/>
-                  </a:lnTo>
-                  <a:lnTo>
-                    <a:pt x="358112" y="2479946"/>
-                  </a:lnTo>
-                  <a:lnTo>
-                    <a:pt x="429735" y="2489236"/>
-                  </a:lnTo>
-                  <a:lnTo>
-                    <a:pt x="501357" y="2498453"/>
-                  </a:lnTo>
-                  <a:lnTo>
-                    <a:pt x="572980" y="2507596"/>
-                  </a:lnTo>
-                  <a:lnTo>
-                    <a:pt x="644602" y="2516667"/>
-                  </a:lnTo>
-                  <a:lnTo>
-                    <a:pt x="716225" y="2525666"/>
-                  </a:lnTo>
-                  <a:lnTo>
-                    <a:pt x="787847" y="2534594"/>
-                  </a:lnTo>
-                  <a:lnTo>
-                    <a:pt x="859470" y="2543451"/>
-                  </a:lnTo>
-                  <a:lnTo>
-                    <a:pt x="931092" y="2552238"/>
-                  </a:lnTo>
-                  <a:lnTo>
-                    <a:pt x="1002715" y="2560955"/>
-                  </a:lnTo>
-                  <a:lnTo>
-                    <a:pt x="1074337" y="2569604"/>
-                  </a:lnTo>
-                  <a:lnTo>
-                    <a:pt x="1145960" y="2578183"/>
-                  </a:lnTo>
-                  <a:lnTo>
-                    <a:pt x="1217582" y="2586695"/>
-                  </a:lnTo>
-                  <a:lnTo>
-                    <a:pt x="1289205" y="2595140"/>
-                  </a:lnTo>
-                  <a:lnTo>
-                    <a:pt x="1360827" y="2603517"/>
-                  </a:lnTo>
-                  <a:lnTo>
-                    <a:pt x="1432450" y="2611828"/>
-                  </a:lnTo>
-                  <a:lnTo>
-                    <a:pt x="1504073" y="2620074"/>
-                  </a:lnTo>
-                  <a:lnTo>
-                    <a:pt x="1575695" y="2628254"/>
-                  </a:lnTo>
-                  <a:lnTo>
-                    <a:pt x="1647318" y="2636369"/>
-                  </a:lnTo>
-                  <a:lnTo>
-                    <a:pt x="1718940" y="2644420"/>
-                  </a:lnTo>
-                  <a:lnTo>
-                    <a:pt x="1790563" y="2652407"/>
-                  </a:lnTo>
-                  <a:lnTo>
-                    <a:pt x="1862185" y="2660331"/>
-                  </a:lnTo>
-                  <a:lnTo>
-                    <a:pt x="1933808" y="2668192"/>
-                  </a:lnTo>
-                  <a:lnTo>
-                    <a:pt x="2005430" y="2675990"/>
-                  </a:lnTo>
-                  <a:lnTo>
-                    <a:pt x="2077053" y="2683727"/>
-                  </a:lnTo>
-                  <a:lnTo>
-                    <a:pt x="2148675" y="2691403"/>
-                  </a:lnTo>
-                  <a:lnTo>
-                    <a:pt x="2220298" y="2699018"/>
-                  </a:lnTo>
-                  <a:lnTo>
-                    <a:pt x="2291920" y="2706573"/>
-                  </a:lnTo>
-                  <a:lnTo>
-                    <a:pt x="2363543" y="2714067"/>
-                  </a:lnTo>
-                  <a:lnTo>
-                    <a:pt x="2435165" y="2721503"/>
-                  </a:lnTo>
-                  <a:lnTo>
-                    <a:pt x="2506788" y="2728879"/>
-                  </a:lnTo>
-                  <a:lnTo>
-                    <a:pt x="2578410" y="2736197"/>
-                  </a:lnTo>
-                  <a:lnTo>
-                    <a:pt x="2650033" y="2743457"/>
-                  </a:lnTo>
-                  <a:lnTo>
-                    <a:pt x="2721655" y="2750660"/>
-                  </a:lnTo>
-                  <a:lnTo>
-                    <a:pt x="2793278" y="2757805"/>
-                  </a:lnTo>
-                  <a:lnTo>
-                    <a:pt x="2864901" y="2764894"/>
-                  </a:lnTo>
-                  <a:lnTo>
-                    <a:pt x="2936523" y="2771927"/>
-                  </a:lnTo>
-                  <a:lnTo>
-                    <a:pt x="3008146" y="2778904"/>
-                  </a:lnTo>
-                  <a:lnTo>
-                    <a:pt x="3079768" y="2769006"/>
-                  </a:lnTo>
-                  <a:lnTo>
-                    <a:pt x="3151391" y="2734357"/>
-                  </a:lnTo>
-                  <a:lnTo>
-                    <a:pt x="3223013" y="2698349"/>
-                  </a:lnTo>
-                  <a:lnTo>
-                    <a:pt x="3294636" y="2660930"/>
-                  </a:lnTo>
-                  <a:lnTo>
-                    <a:pt x="3366258" y="2622043"/>
-                  </a:lnTo>
-                  <a:lnTo>
-                    <a:pt x="3437881" y="2581631"/>
-                  </a:lnTo>
-                  <a:lnTo>
-                    <a:pt x="3509503" y="2539635"/>
-                  </a:lnTo>
-                  <a:lnTo>
-                    <a:pt x="3581126" y="2495992"/>
-                  </a:lnTo>
-                  <a:lnTo>
-                    <a:pt x="3652748" y="2450637"/>
-                  </a:lnTo>
-                  <a:lnTo>
-                    <a:pt x="3724371" y="2403504"/>
-                  </a:lnTo>
-                  <a:lnTo>
-                    <a:pt x="3795993" y="2354523"/>
-                  </a:lnTo>
-                  <a:lnTo>
-                    <a:pt x="3867616" y="2303622"/>
-                  </a:lnTo>
-                  <a:lnTo>
-                    <a:pt x="3939238" y="2250724"/>
-                  </a:lnTo>
-                  <a:lnTo>
-                    <a:pt x="4010861" y="2195752"/>
-                  </a:lnTo>
-                  <a:lnTo>
-                    <a:pt x="4082483" y="2138625"/>
-                  </a:lnTo>
-                  <a:lnTo>
-                    <a:pt x="4154106" y="2079258"/>
-                  </a:lnTo>
-                  <a:lnTo>
-                    <a:pt x="4225729" y="2017562"/>
-                  </a:lnTo>
-                  <a:lnTo>
-                    <a:pt x="4297351" y="1953448"/>
-                  </a:lnTo>
-                  <a:lnTo>
-                    <a:pt x="4368974" y="1886819"/>
-                  </a:lnTo>
-                  <a:lnTo>
-                    <a:pt x="4440596" y="1817578"/>
-                  </a:lnTo>
-                  <a:lnTo>
-                    <a:pt x="4512219" y="1745622"/>
-                  </a:lnTo>
-                  <a:lnTo>
-                    <a:pt x="4583841" y="1670844"/>
-                  </a:lnTo>
-                  <a:lnTo>
-                    <a:pt x="4655464" y="1593134"/>
-                  </a:lnTo>
-                  <a:lnTo>
-                    <a:pt x="4727086" y="1512377"/>
-                  </a:lnTo>
-                  <a:lnTo>
-                    <a:pt x="4798709" y="1428453"/>
-                  </a:lnTo>
-                  <a:lnTo>
-                    <a:pt x="4870331" y="1341239"/>
-                  </a:lnTo>
-                  <a:lnTo>
-                    <a:pt x="4941954" y="1250605"/>
-                  </a:lnTo>
-                  <a:lnTo>
-                    <a:pt x="5013576" y="1156416"/>
-                  </a:lnTo>
-                  <a:lnTo>
-                    <a:pt x="5085199" y="1058535"/>
-                  </a:lnTo>
-                  <a:lnTo>
-                    <a:pt x="5156821" y="956815"/>
-                  </a:lnTo>
-                  <a:lnTo>
-                    <a:pt x="5228444" y="851107"/>
-                  </a:lnTo>
-                  <a:lnTo>
-                    <a:pt x="5300066" y="741253"/>
-                  </a:lnTo>
-                  <a:lnTo>
-                    <a:pt x="5371689" y="627092"/>
-                  </a:lnTo>
-                  <a:lnTo>
-                    <a:pt x="5443311" y="508455"/>
-                  </a:lnTo>
-                  <a:lnTo>
-                    <a:pt x="5514934" y="385166"/>
-                  </a:lnTo>
-                  <a:lnTo>
-                    <a:pt x="5586557" y="257042"/>
-                  </a:lnTo>
-                  <a:lnTo>
-                    <a:pt x="5658179" y="123894"/>
-                  </a:lnTo>
-                  <a:lnTo>
-                    <a:pt x="5722310" y="0"/>
+                    <a:pt x="71622" y="1241513"/>
+                  </a:lnTo>
+                  <a:lnTo>
+                    <a:pt x="143245" y="1299917"/>
+                  </a:lnTo>
+                  <a:lnTo>
+                    <a:pt x="214867" y="1356907"/>
+                  </a:lnTo>
+                  <a:lnTo>
+                    <a:pt x="286490" y="1412516"/>
+                  </a:lnTo>
+                  <a:lnTo>
+                    <a:pt x="358112" y="1466778"/>
+                  </a:lnTo>
+                  <a:lnTo>
+                    <a:pt x="429735" y="1519726"/>
+                  </a:lnTo>
+                  <a:lnTo>
+                    <a:pt x="501357" y="1571391"/>
+                  </a:lnTo>
+                  <a:lnTo>
+                    <a:pt x="572980" y="1621805"/>
+                  </a:lnTo>
+                  <a:lnTo>
+                    <a:pt x="644602" y="1670997"/>
+                  </a:lnTo>
+                  <a:lnTo>
+                    <a:pt x="716225" y="1718998"/>
+                  </a:lnTo>
+                  <a:lnTo>
+                    <a:pt x="787847" y="1765837"/>
+                  </a:lnTo>
+                  <a:lnTo>
+                    <a:pt x="859470" y="1811540"/>
+                  </a:lnTo>
+                  <a:lnTo>
+                    <a:pt x="931092" y="1856137"/>
+                  </a:lnTo>
+                  <a:lnTo>
+                    <a:pt x="1002715" y="1899653"/>
+                  </a:lnTo>
+                  <a:lnTo>
+                    <a:pt x="1074337" y="1942116"/>
+                  </a:lnTo>
+                  <a:lnTo>
+                    <a:pt x="1145960" y="1983549"/>
+                  </a:lnTo>
+                  <a:lnTo>
+                    <a:pt x="1217582" y="2023980"/>
+                  </a:lnTo>
+                  <a:lnTo>
+                    <a:pt x="1289205" y="2063430"/>
+                  </a:lnTo>
+                  <a:lnTo>
+                    <a:pt x="1360827" y="2101925"/>
+                  </a:lnTo>
+                  <a:lnTo>
+                    <a:pt x="1432450" y="2139488"/>
+                  </a:lnTo>
+                  <a:lnTo>
+                    <a:pt x="1504073" y="2176141"/>
+                  </a:lnTo>
+                  <a:lnTo>
+                    <a:pt x="1575695" y="2211906"/>
+                  </a:lnTo>
+                  <a:lnTo>
+                    <a:pt x="1647318" y="2246805"/>
+                  </a:lnTo>
+                  <a:lnTo>
+                    <a:pt x="1718940" y="2280858"/>
+                  </a:lnTo>
+                  <a:lnTo>
+                    <a:pt x="1790563" y="2314087"/>
+                  </a:lnTo>
+                  <a:lnTo>
+                    <a:pt x="1862185" y="2346510"/>
+                  </a:lnTo>
+                  <a:lnTo>
+                    <a:pt x="1933808" y="2378148"/>
+                  </a:lnTo>
+                  <a:lnTo>
+                    <a:pt x="2005430" y="2409020"/>
+                  </a:lnTo>
+                  <a:lnTo>
+                    <a:pt x="2077053" y="2439144"/>
+                  </a:lnTo>
+                  <a:lnTo>
+                    <a:pt x="2148675" y="2468539"/>
+                  </a:lnTo>
+                  <a:lnTo>
+                    <a:pt x="2220298" y="2497221"/>
+                  </a:lnTo>
+                  <a:lnTo>
+                    <a:pt x="2291920" y="2525208"/>
+                  </a:lnTo>
+                  <a:lnTo>
+                    <a:pt x="2363543" y="2552518"/>
+                  </a:lnTo>
+                  <a:lnTo>
+                    <a:pt x="2435165" y="2579166"/>
+                  </a:lnTo>
+                  <a:lnTo>
+                    <a:pt x="2506788" y="2605169"/>
+                  </a:lnTo>
+                  <a:lnTo>
+                    <a:pt x="2578410" y="2630542"/>
+                  </a:lnTo>
+                  <a:lnTo>
+                    <a:pt x="2650033" y="2655300"/>
+                  </a:lnTo>
+                  <a:lnTo>
+                    <a:pt x="2721655" y="2679458"/>
+                  </a:lnTo>
+                  <a:lnTo>
+                    <a:pt x="2793278" y="2703031"/>
+                  </a:lnTo>
+                  <a:lnTo>
+                    <a:pt x="2864901" y="2726034"/>
+                  </a:lnTo>
+                  <a:lnTo>
+                    <a:pt x="2936523" y="2748479"/>
+                  </a:lnTo>
+                  <a:lnTo>
+                    <a:pt x="3008146" y="2770380"/>
+                  </a:lnTo>
+                  <a:lnTo>
+                    <a:pt x="3079768" y="2770410"/>
+                  </a:lnTo>
+                  <a:lnTo>
+                    <a:pt x="3151391" y="2739330"/>
+                  </a:lnTo>
+                  <a:lnTo>
+                    <a:pt x="3223013" y="2707156"/>
+                  </a:lnTo>
+                  <a:lnTo>
+                    <a:pt x="3294636" y="2673847"/>
+                  </a:lnTo>
+                  <a:lnTo>
+                    <a:pt x="3366258" y="2639366"/>
+                  </a:lnTo>
+                  <a:lnTo>
+                    <a:pt x="3437881" y="2603670"/>
+                  </a:lnTo>
+                  <a:lnTo>
+                    <a:pt x="3509503" y="2566716"/>
+                  </a:lnTo>
+                  <a:lnTo>
+                    <a:pt x="3581126" y="2528461"/>
+                  </a:lnTo>
+                  <a:lnTo>
+                    <a:pt x="3652748" y="2488858"/>
+                  </a:lnTo>
+                  <a:lnTo>
+                    <a:pt x="3724371" y="2447859"/>
+                  </a:lnTo>
+                  <a:lnTo>
+                    <a:pt x="3795993" y="2405417"/>
+                  </a:lnTo>
+                  <a:lnTo>
+                    <a:pt x="3867616" y="2361479"/>
+                  </a:lnTo>
+                  <a:lnTo>
+                    <a:pt x="3939238" y="2315993"/>
+                  </a:lnTo>
+                  <a:lnTo>
+                    <a:pt x="4010861" y="2268905"/>
+                  </a:lnTo>
+                  <a:lnTo>
+                    <a:pt x="4082483" y="2220158"/>
+                  </a:lnTo>
+                  <a:lnTo>
+                    <a:pt x="4154106" y="2169694"/>
+                  </a:lnTo>
+                  <a:lnTo>
+                    <a:pt x="4225729" y="2117452"/>
+                  </a:lnTo>
+                  <a:lnTo>
+                    <a:pt x="4297351" y="2063369"/>
+                  </a:lnTo>
+                  <a:lnTo>
+                    <a:pt x="4368974" y="2007382"/>
+                  </a:lnTo>
+                  <a:lnTo>
+                    <a:pt x="4440596" y="1949422"/>
+                  </a:lnTo>
+                  <a:lnTo>
+                    <a:pt x="4512219" y="1889420"/>
+                  </a:lnTo>
+                  <a:lnTo>
+                    <a:pt x="4583841" y="1827304"/>
+                  </a:lnTo>
+                  <a:lnTo>
+                    <a:pt x="4655464" y="1763001"/>
+                  </a:lnTo>
+                  <a:lnTo>
+                    <a:pt x="4727086" y="1696432"/>
+                  </a:lnTo>
+                  <a:lnTo>
+                    <a:pt x="4798709" y="1627517"/>
+                  </a:lnTo>
+                  <a:lnTo>
+                    <a:pt x="4870331" y="1556175"/>
+                  </a:lnTo>
+                  <a:lnTo>
+                    <a:pt x="4941954" y="1482320"/>
+                  </a:lnTo>
+                  <a:lnTo>
+                    <a:pt x="5013576" y="1405863"/>
+                  </a:lnTo>
+                  <a:lnTo>
+                    <a:pt x="5085199" y="1326712"/>
+                  </a:lnTo>
+                  <a:lnTo>
+                    <a:pt x="5156821" y="1244774"/>
+                  </a:lnTo>
+                  <a:lnTo>
+                    <a:pt x="5228444" y="1159948"/>
+                  </a:lnTo>
+                  <a:lnTo>
+                    <a:pt x="5300066" y="1072134"/>
+                  </a:lnTo>
+                  <a:lnTo>
+                    <a:pt x="5371689" y="981227"/>
+                  </a:lnTo>
+                  <a:lnTo>
+                    <a:pt x="5443311" y="887117"/>
+                  </a:lnTo>
+                  <a:lnTo>
+                    <a:pt x="5514934" y="789692"/>
+                  </a:lnTo>
+                  <a:lnTo>
+                    <a:pt x="5586557" y="688835"/>
+                  </a:lnTo>
+                  <a:lnTo>
+                    <a:pt x="5658179" y="584425"/>
+                  </a:lnTo>
+                  <a:lnTo>
+                    <a:pt x="5729802" y="476336"/>
+                  </a:lnTo>
+                  <a:lnTo>
+                    <a:pt x="5801424" y="364440"/>
+                  </a:lnTo>
+                  <a:lnTo>
+                    <a:pt x="5873047" y="248602"/>
+                  </a:lnTo>
+                  <a:lnTo>
+                    <a:pt x="5944669" y="128683"/>
+                  </a:lnTo>
+                  <a:lnTo>
+                    <a:pt x="6016292" y="4539"/>
+                  </a:lnTo>
+                  <a:lnTo>
+                    <a:pt x="6018822" y="0"/>
                   </a:lnTo>
                   <a:lnTo>
                     <a:pt x="7090630" y="0"/>
                   </a:lnTo>
                   <a:lnTo>
-                    <a:pt x="7090630" y="3097385"/>
-                  </a:lnTo>
-                  <a:lnTo>
-                    <a:pt x="7019007" y="3092951"/>
-                  </a:lnTo>
-                  <a:lnTo>
-                    <a:pt x="6947385" y="3088482"/>
-                  </a:lnTo>
-                  <a:lnTo>
-                    <a:pt x="6875762" y="3083977"/>
-                  </a:lnTo>
-                  <a:lnTo>
-                    <a:pt x="6804139" y="3079436"/>
-                  </a:lnTo>
-                  <a:lnTo>
-                    <a:pt x="6732517" y="3074859"/>
-                  </a:lnTo>
-                  <a:lnTo>
-                    <a:pt x="6660894" y="3070245"/>
-                  </a:lnTo>
-                  <a:lnTo>
-                    <a:pt x="6589272" y="3065595"/>
-                  </a:lnTo>
-                  <a:lnTo>
-                    <a:pt x="6517649" y="3060907"/>
-                  </a:lnTo>
-                  <a:lnTo>
-                    <a:pt x="6446027" y="3056182"/>
-                  </a:lnTo>
-                  <a:lnTo>
-                    <a:pt x="6374404" y="3051419"/>
-                  </a:lnTo>
-                  <a:lnTo>
-                    <a:pt x="6302782" y="3046618"/>
-                  </a:lnTo>
-                  <a:lnTo>
-                    <a:pt x="6231159" y="3041779"/>
-                  </a:lnTo>
-                  <a:lnTo>
-                    <a:pt x="6159537" y="3036901"/>
-                  </a:lnTo>
-                  <a:lnTo>
-                    <a:pt x="6087914" y="3031984"/>
-                  </a:lnTo>
-                  <a:lnTo>
-                    <a:pt x="6016292" y="3027028"/>
-                  </a:lnTo>
-                  <a:lnTo>
-                    <a:pt x="5944669" y="3022032"/>
-                  </a:lnTo>
-                  <a:lnTo>
-                    <a:pt x="5873047" y="3016997"/>
-                  </a:lnTo>
-                  <a:lnTo>
-                    <a:pt x="5801424" y="3011921"/>
-                  </a:lnTo>
-                  <a:lnTo>
-                    <a:pt x="5729802" y="3006805"/>
-                  </a:lnTo>
-                  <a:lnTo>
-                    <a:pt x="5658179" y="3001648"/>
-                  </a:lnTo>
-                  <a:lnTo>
-                    <a:pt x="5586557" y="2996449"/>
-                  </a:lnTo>
-                  <a:lnTo>
-                    <a:pt x="5514934" y="2991209"/>
-                  </a:lnTo>
-                  <a:lnTo>
-                    <a:pt x="5443311" y="2985928"/>
-                  </a:lnTo>
-                  <a:lnTo>
-                    <a:pt x="5371689" y="2980604"/>
-                  </a:lnTo>
-                  <a:lnTo>
-                    <a:pt x="5300066" y="2975237"/>
-                  </a:lnTo>
-                  <a:lnTo>
-                    <a:pt x="5228444" y="2969828"/>
-                  </a:lnTo>
-                  <a:lnTo>
-                    <a:pt x="5156821" y="2964376"/>
-                  </a:lnTo>
-                  <a:lnTo>
-                    <a:pt x="5085199" y="2958880"/>
-                  </a:lnTo>
-                  <a:lnTo>
-                    <a:pt x="5013576" y="2953340"/>
-                  </a:lnTo>
-                  <a:lnTo>
-                    <a:pt x="4941954" y="2947756"/>
-                  </a:lnTo>
-                  <a:lnTo>
-                    <a:pt x="4870331" y="2942127"/>
-                  </a:lnTo>
-                  <a:lnTo>
-                    <a:pt x="4798709" y="2936454"/>
-                  </a:lnTo>
-                  <a:lnTo>
-                    <a:pt x="4727086" y="2930735"/>
-                  </a:lnTo>
-                  <a:lnTo>
-                    <a:pt x="4655464" y="2924970"/>
-                  </a:lnTo>
-                  <a:lnTo>
-                    <a:pt x="4583841" y="2919159"/>
-                  </a:lnTo>
-                  <a:lnTo>
-                    <a:pt x="4512219" y="2913302"/>
-                  </a:lnTo>
-                  <a:lnTo>
-                    <a:pt x="4440596" y="2907399"/>
-                  </a:lnTo>
-                  <a:lnTo>
-                    <a:pt x="4368974" y="2901448"/>
-                  </a:lnTo>
-                  <a:lnTo>
-                    <a:pt x="4297351" y="2895449"/>
-                  </a:lnTo>
-                  <a:lnTo>
-                    <a:pt x="4225729" y="2889403"/>
-                  </a:lnTo>
-                  <a:lnTo>
-                    <a:pt x="4154106" y="2883308"/>
-                  </a:lnTo>
-                  <a:lnTo>
-                    <a:pt x="4082483" y="2877165"/>
-                  </a:lnTo>
-                  <a:lnTo>
-                    <a:pt x="4010861" y="2870973"/>
-                  </a:lnTo>
-                  <a:lnTo>
-                    <a:pt x="3939238" y="2864731"/>
-                  </a:lnTo>
-                  <a:lnTo>
-                    <a:pt x="3867616" y="2858439"/>
-                  </a:lnTo>
-                  <a:lnTo>
-                    <a:pt x="3795993" y="2852097"/>
-                  </a:lnTo>
-                  <a:lnTo>
-                    <a:pt x="3724371" y="2845705"/>
-                  </a:lnTo>
-                  <a:lnTo>
-                    <a:pt x="3652748" y="2839261"/>
-                  </a:lnTo>
-                  <a:lnTo>
-                    <a:pt x="3581126" y="2832766"/>
-                  </a:lnTo>
-                  <a:lnTo>
-                    <a:pt x="3509503" y="2826219"/>
-                  </a:lnTo>
-                  <a:lnTo>
-                    <a:pt x="3437881" y="2819620"/>
-                  </a:lnTo>
-                  <a:lnTo>
-                    <a:pt x="3366258" y="2812968"/>
-                  </a:lnTo>
-                  <a:lnTo>
-                    <a:pt x="3294636" y="2806263"/>
-                  </a:lnTo>
-                  <a:lnTo>
-                    <a:pt x="3223013" y="2799505"/>
-                  </a:lnTo>
-                  <a:lnTo>
-                    <a:pt x="3151391" y="2792692"/>
-                  </a:lnTo>
-                  <a:lnTo>
-                    <a:pt x="3079768" y="2785825"/>
-                  </a:lnTo>
-                  <a:lnTo>
-                    <a:pt x="3008146" y="2802348"/>
-                  </a:lnTo>
-                  <a:lnTo>
-                    <a:pt x="2936523" y="2834431"/>
-                  </a:lnTo>
-                  <a:lnTo>
-                    <a:pt x="2864901" y="2865304"/>
-                  </a:lnTo>
-                  <a:lnTo>
-                    <a:pt x="2793278" y="2895012"/>
-                  </a:lnTo>
-                  <a:lnTo>
-                    <a:pt x="2721655" y="2923599"/>
-                  </a:lnTo>
-                  <a:lnTo>
-                    <a:pt x="2650033" y="2951108"/>
-                  </a:lnTo>
-                  <a:lnTo>
-                    <a:pt x="2578410" y="2977578"/>
-                  </a:lnTo>
-                  <a:lnTo>
-                    <a:pt x="2506788" y="3003050"/>
-                  </a:lnTo>
-                  <a:lnTo>
-                    <a:pt x="2435165" y="3027561"/>
-                  </a:lnTo>
-                  <a:lnTo>
-                    <a:pt x="2363543" y="3051146"/>
-                  </a:lnTo>
-                  <a:lnTo>
-                    <a:pt x="2291920" y="3073842"/>
-                  </a:lnTo>
-                  <a:lnTo>
-                    <a:pt x="2220298" y="3095682"/>
-                  </a:lnTo>
-                  <a:lnTo>
-                    <a:pt x="2148675" y="3116697"/>
-                  </a:lnTo>
-                  <a:lnTo>
-                    <a:pt x="2077053" y="3136920"/>
-                  </a:lnTo>
-                  <a:lnTo>
-                    <a:pt x="2005430" y="3156379"/>
-                  </a:lnTo>
-                  <a:lnTo>
-                    <a:pt x="1933808" y="3175104"/>
-                  </a:lnTo>
-                  <a:lnTo>
-                    <a:pt x="1862185" y="3193123"/>
-                  </a:lnTo>
-                  <a:lnTo>
-                    <a:pt x="1790563" y="3210462"/>
-                  </a:lnTo>
-                  <a:lnTo>
-                    <a:pt x="1718940" y="3227146"/>
-                  </a:lnTo>
-                  <a:lnTo>
-                    <a:pt x="1647318" y="3243201"/>
-                  </a:lnTo>
-                  <a:lnTo>
-                    <a:pt x="1575695" y="3258650"/>
-                  </a:lnTo>
-                  <a:lnTo>
-                    <a:pt x="1504073" y="3273517"/>
-                  </a:lnTo>
-                  <a:lnTo>
-                    <a:pt x="1432450" y="3287822"/>
-                  </a:lnTo>
-                  <a:lnTo>
-                    <a:pt x="1360827" y="3301587"/>
-                  </a:lnTo>
-                  <a:lnTo>
-                    <a:pt x="1289205" y="3314833"/>
-                  </a:lnTo>
-                  <a:lnTo>
-                    <a:pt x="1217582" y="3327580"/>
-                  </a:lnTo>
-                  <a:lnTo>
-                    <a:pt x="1145960" y="3339845"/>
-                  </a:lnTo>
-                  <a:lnTo>
-                    <a:pt x="1074337" y="3351648"/>
-                  </a:lnTo>
-                  <a:lnTo>
-                    <a:pt x="1002715" y="3363005"/>
-                  </a:lnTo>
-                  <a:lnTo>
-                    <a:pt x="931092" y="3373934"/>
-                  </a:lnTo>
-                  <a:lnTo>
-                    <a:pt x="859470" y="3384450"/>
-                  </a:lnTo>
-                  <a:lnTo>
-                    <a:pt x="787847" y="3394570"/>
-                  </a:lnTo>
-                  <a:lnTo>
-                    <a:pt x="716225" y="3404307"/>
-                  </a:lnTo>
-                  <a:lnTo>
-                    <a:pt x="644602" y="3413678"/>
-                  </a:lnTo>
-                  <a:lnTo>
-                    <a:pt x="572980" y="3422694"/>
-                  </a:lnTo>
-                  <a:lnTo>
-                    <a:pt x="501357" y="3431371"/>
-                  </a:lnTo>
-                  <a:lnTo>
-                    <a:pt x="429735" y="3439720"/>
-                  </a:lnTo>
-                  <a:lnTo>
-                    <a:pt x="358112" y="3447754"/>
-                  </a:lnTo>
-                  <a:lnTo>
-                    <a:pt x="286490" y="3455485"/>
-                  </a:lnTo>
-                  <a:lnTo>
-                    <a:pt x="214867" y="3462924"/>
-                  </a:lnTo>
-                  <a:lnTo>
-                    <a:pt x="143245" y="3470083"/>
-                  </a:lnTo>
-                  <a:lnTo>
-                    <a:pt x="71622" y="3476971"/>
-                  </a:lnTo>
-                  <a:lnTo>
-                    <a:pt x="0" y="3483600"/>
+                    <a:pt x="7090630" y="3434578"/>
+                  </a:lnTo>
+                  <a:lnTo>
+                    <a:pt x="7019007" y="3429165"/>
+                  </a:lnTo>
+                  <a:lnTo>
+                    <a:pt x="6947385" y="3423617"/>
+                  </a:lnTo>
+                  <a:lnTo>
+                    <a:pt x="6875762" y="3417932"/>
+                  </a:lnTo>
+                  <a:lnTo>
+                    <a:pt x="6804139" y="3412105"/>
+                  </a:lnTo>
+                  <a:lnTo>
+                    <a:pt x="6732517" y="3406134"/>
+                  </a:lnTo>
+                  <a:lnTo>
+                    <a:pt x="6660894" y="3400015"/>
+                  </a:lnTo>
+                  <a:lnTo>
+                    <a:pt x="6589272" y="3393744"/>
+                  </a:lnTo>
+                  <a:lnTo>
+                    <a:pt x="6517649" y="3387317"/>
+                  </a:lnTo>
+                  <a:lnTo>
+                    <a:pt x="6446027" y="3380730"/>
+                  </a:lnTo>
+                  <a:lnTo>
+                    <a:pt x="6374404" y="3373980"/>
+                  </a:lnTo>
+                  <a:lnTo>
+                    <a:pt x="6302782" y="3367063"/>
+                  </a:lnTo>
+                  <a:lnTo>
+                    <a:pt x="6231159" y="3359973"/>
+                  </a:lnTo>
+                  <a:lnTo>
+                    <a:pt x="6159537" y="3352708"/>
+                  </a:lnTo>
+                  <a:lnTo>
+                    <a:pt x="6087914" y="3345262"/>
+                  </a:lnTo>
+                  <a:lnTo>
+                    <a:pt x="6016292" y="3337632"/>
+                  </a:lnTo>
+                  <a:lnTo>
+                    <a:pt x="5944669" y="3329812"/>
+                  </a:lnTo>
+                  <a:lnTo>
+                    <a:pt x="5873047" y="3321798"/>
+                  </a:lnTo>
+                  <a:lnTo>
+                    <a:pt x="5801424" y="3313585"/>
+                  </a:lnTo>
+                  <a:lnTo>
+                    <a:pt x="5729802" y="3305168"/>
+                  </a:lnTo>
+                  <a:lnTo>
+                    <a:pt x="5658179" y="3296543"/>
+                  </a:lnTo>
+                  <a:lnTo>
+                    <a:pt x="5586557" y="3287703"/>
+                  </a:lnTo>
+                  <a:lnTo>
+                    <a:pt x="5514934" y="3278643"/>
+                  </a:lnTo>
+                  <a:lnTo>
+                    <a:pt x="5443311" y="3269359"/>
+                  </a:lnTo>
+                  <a:lnTo>
+                    <a:pt x="5371689" y="3259844"/>
+                  </a:lnTo>
+                  <a:lnTo>
+                    <a:pt x="5300066" y="3250094"/>
+                  </a:lnTo>
+                  <a:lnTo>
+                    <a:pt x="5228444" y="3240101"/>
+                  </a:lnTo>
+                  <a:lnTo>
+                    <a:pt x="5156821" y="3229860"/>
+                  </a:lnTo>
+                  <a:lnTo>
+                    <a:pt x="5085199" y="3219364"/>
+                  </a:lnTo>
+                  <a:lnTo>
+                    <a:pt x="5013576" y="3208609"/>
+                  </a:lnTo>
+                  <a:lnTo>
+                    <a:pt x="4941954" y="3197586"/>
+                  </a:lnTo>
+                  <a:lnTo>
+                    <a:pt x="4870331" y="3186289"/>
+                  </a:lnTo>
+                  <a:lnTo>
+                    <a:pt x="4798709" y="3174713"/>
+                  </a:lnTo>
+                  <a:lnTo>
+                    <a:pt x="4727086" y="3162848"/>
+                  </a:lnTo>
+                  <a:lnTo>
+                    <a:pt x="4655464" y="3150690"/>
+                  </a:lnTo>
+                  <a:lnTo>
+                    <a:pt x="4583841" y="3138229"/>
+                  </a:lnTo>
+                  <a:lnTo>
+                    <a:pt x="4512219" y="3125459"/>
+                  </a:lnTo>
+                  <a:lnTo>
+                    <a:pt x="4440596" y="3112372"/>
+                  </a:lnTo>
+                  <a:lnTo>
+                    <a:pt x="4368974" y="3098961"/>
+                  </a:lnTo>
+                  <a:lnTo>
+                    <a:pt x="4297351" y="3085216"/>
+                  </a:lnTo>
+                  <a:lnTo>
+                    <a:pt x="4225729" y="3071130"/>
+                  </a:lnTo>
+                  <a:lnTo>
+                    <a:pt x="4154106" y="3056695"/>
+                  </a:lnTo>
+                  <a:lnTo>
+                    <a:pt x="4082483" y="3041901"/>
+                  </a:lnTo>
+                  <a:lnTo>
+                    <a:pt x="4010861" y="3026740"/>
+                  </a:lnTo>
+                  <a:lnTo>
+                    <a:pt x="3939238" y="3011202"/>
+                  </a:lnTo>
+                  <a:lnTo>
+                    <a:pt x="3867616" y="2995279"/>
+                  </a:lnTo>
+                  <a:lnTo>
+                    <a:pt x="3795993" y="2978960"/>
+                  </a:lnTo>
+                  <a:lnTo>
+                    <a:pt x="3724371" y="2962237"/>
+                  </a:lnTo>
+                  <a:lnTo>
+                    <a:pt x="3652748" y="2945098"/>
+                  </a:lnTo>
+                  <a:lnTo>
+                    <a:pt x="3581126" y="2927534"/>
+                  </a:lnTo>
+                  <a:lnTo>
+                    <a:pt x="3509503" y="2909534"/>
+                  </a:lnTo>
+                  <a:lnTo>
+                    <a:pt x="3437881" y="2891087"/>
+                  </a:lnTo>
+                  <a:lnTo>
+                    <a:pt x="3366258" y="2872182"/>
+                  </a:lnTo>
+                  <a:lnTo>
+                    <a:pt x="3294636" y="2852807"/>
+                  </a:lnTo>
+                  <a:lnTo>
+                    <a:pt x="3223013" y="2832952"/>
+                  </a:lnTo>
+                  <a:lnTo>
+                    <a:pt x="3151391" y="2812604"/>
+                  </a:lnTo>
+                  <a:lnTo>
+                    <a:pt x="3079768" y="2791751"/>
+                  </a:lnTo>
+                  <a:lnTo>
+                    <a:pt x="3008146" y="2800432"/>
+                  </a:lnTo>
+                  <a:lnTo>
+                    <a:pt x="2936523" y="2829432"/>
+                  </a:lnTo>
+                  <a:lnTo>
+                    <a:pt x="2864901" y="2857446"/>
+                  </a:lnTo>
+                  <a:lnTo>
+                    <a:pt x="2793278" y="2884506"/>
+                  </a:lnTo>
+                  <a:lnTo>
+                    <a:pt x="2721655" y="2910646"/>
+                  </a:lnTo>
+                  <a:lnTo>
+                    <a:pt x="2650033" y="2935895"/>
+                  </a:lnTo>
+                  <a:lnTo>
+                    <a:pt x="2578410" y="2960286"/>
+                  </a:lnTo>
+                  <a:lnTo>
+                    <a:pt x="2506788" y="2983847"/>
+                  </a:lnTo>
+                  <a:lnTo>
+                    <a:pt x="2435165" y="3006606"/>
+                  </a:lnTo>
+                  <a:lnTo>
+                    <a:pt x="2363543" y="3028590"/>
+                  </a:lnTo>
+                  <a:lnTo>
+                    <a:pt x="2291920" y="3049826"/>
+                  </a:lnTo>
+                  <a:lnTo>
+                    <a:pt x="2220298" y="3070340"/>
+                  </a:lnTo>
+                  <a:lnTo>
+                    <a:pt x="2148675" y="3090156"/>
+                  </a:lnTo>
+                  <a:lnTo>
+                    <a:pt x="2077053" y="3109297"/>
+                  </a:lnTo>
+                  <a:lnTo>
+                    <a:pt x="2005430" y="3127787"/>
+                  </a:lnTo>
+                  <a:lnTo>
+                    <a:pt x="1933808" y="3145647"/>
+                  </a:lnTo>
+                  <a:lnTo>
+                    <a:pt x="1862185" y="3162900"/>
+                  </a:lnTo>
+                  <a:lnTo>
+                    <a:pt x="1790563" y="3179566"/>
+                  </a:lnTo>
+                  <a:lnTo>
+                    <a:pt x="1718940" y="3195665"/>
+                  </a:lnTo>
+                  <a:lnTo>
+                    <a:pt x="1647318" y="3211215"/>
+                  </a:lnTo>
+                  <a:lnTo>
+                    <a:pt x="1575695" y="3226237"/>
+                  </a:lnTo>
+                  <a:lnTo>
+                    <a:pt x="1504073" y="3240747"/>
+                  </a:lnTo>
+                  <a:lnTo>
+                    <a:pt x="1432450" y="3254764"/>
+                  </a:lnTo>
+                  <a:lnTo>
+                    <a:pt x="1360827" y="3268304"/>
+                  </a:lnTo>
+                  <a:lnTo>
+                    <a:pt x="1289205" y="3281383"/>
+                  </a:lnTo>
+                  <a:lnTo>
+                    <a:pt x="1217582" y="3294017"/>
+                  </a:lnTo>
+                  <a:lnTo>
+                    <a:pt x="1145960" y="3306221"/>
+                  </a:lnTo>
+                  <a:lnTo>
+                    <a:pt x="1074337" y="3318009"/>
+                  </a:lnTo>
+                  <a:lnTo>
+                    <a:pt x="1002715" y="3329397"/>
+                  </a:lnTo>
+                  <a:lnTo>
+                    <a:pt x="931092" y="3340397"/>
+                  </a:lnTo>
+                  <a:lnTo>
+                    <a:pt x="859470" y="3351022"/>
+                  </a:lnTo>
+                  <a:lnTo>
+                    <a:pt x="787847" y="3361286"/>
+                  </a:lnTo>
+                  <a:lnTo>
+                    <a:pt x="716225" y="3371201"/>
+                  </a:lnTo>
+                  <a:lnTo>
+                    <a:pt x="644602" y="3380778"/>
+                  </a:lnTo>
+                  <a:lnTo>
+                    <a:pt x="572980" y="3390030"/>
+                  </a:lnTo>
+                  <a:lnTo>
+                    <a:pt x="501357" y="3398966"/>
+                  </a:lnTo>
+                  <a:lnTo>
+                    <a:pt x="429735" y="3407599"/>
+                  </a:lnTo>
+                  <a:lnTo>
+                    <a:pt x="358112" y="3415938"/>
+                  </a:lnTo>
+                  <a:lnTo>
+                    <a:pt x="286490" y="3423993"/>
+                  </a:lnTo>
+                  <a:lnTo>
+                    <a:pt x="214867" y="3431774"/>
+                  </a:lnTo>
+                  <a:lnTo>
+                    <a:pt x="143245" y="3439290"/>
+                  </a:lnTo>
+                  <a:lnTo>
+                    <a:pt x="71622" y="3446550"/>
+                  </a:lnTo>
+                  <a:lnTo>
+                    <a:pt x="0" y="3453563"/>
                   </a:lnTo>
                   <a:close/>
                 </a:path>
@@ -3709,254 +3724,269 @@
           <p:spPr>
             <a:xfrm>
               <a:off x="1172049" y="1896563"/>
-              <a:ext cx="5722310" cy="2778904"/>
+              <a:ext cx="6018822" cy="2770410"/>
             </a:xfrm>
             <a:custGeom>
               <a:avLst/>
               <a:pathLst>
-                <a:path w="5722310" h="2778904">
+                <a:path w="6018822" h="2770410">
                   <a:moveTo>
-                    <a:pt x="0" y="2432371"/>
+                    <a:pt x="0" y="1181659"/>
                   </a:moveTo>
                   <a:lnTo>
-                    <a:pt x="71622" y="2442038"/>
-                  </a:lnTo>
-                  <a:lnTo>
-                    <a:pt x="143245" y="2451628"/>
-                  </a:lnTo>
-                  <a:lnTo>
-                    <a:pt x="214867" y="2461143"/>
-                  </a:lnTo>
-                  <a:lnTo>
-                    <a:pt x="286490" y="2470582"/>
-                  </a:lnTo>
-                  <a:lnTo>
-                    <a:pt x="358112" y="2479946"/>
-                  </a:lnTo>
-                  <a:lnTo>
-                    <a:pt x="429735" y="2489236"/>
-                  </a:lnTo>
-                  <a:lnTo>
-                    <a:pt x="501357" y="2498453"/>
-                  </a:lnTo>
-                  <a:lnTo>
-                    <a:pt x="572980" y="2507596"/>
-                  </a:lnTo>
-                  <a:lnTo>
-                    <a:pt x="644602" y="2516667"/>
-                  </a:lnTo>
-                  <a:lnTo>
-                    <a:pt x="716225" y="2525666"/>
-                  </a:lnTo>
-                  <a:lnTo>
-                    <a:pt x="787847" y="2534594"/>
-                  </a:lnTo>
-                  <a:lnTo>
-                    <a:pt x="859470" y="2543451"/>
-                  </a:lnTo>
-                  <a:lnTo>
-                    <a:pt x="931092" y="2552238"/>
-                  </a:lnTo>
-                  <a:lnTo>
-                    <a:pt x="1002715" y="2560955"/>
-                  </a:lnTo>
-                  <a:lnTo>
-                    <a:pt x="1074337" y="2569604"/>
-                  </a:lnTo>
-                  <a:lnTo>
-                    <a:pt x="1145960" y="2578183"/>
-                  </a:lnTo>
-                  <a:lnTo>
-                    <a:pt x="1217582" y="2586695"/>
-                  </a:lnTo>
-                  <a:lnTo>
-                    <a:pt x="1289205" y="2595140"/>
-                  </a:lnTo>
-                  <a:lnTo>
-                    <a:pt x="1360827" y="2603517"/>
-                  </a:lnTo>
-                  <a:lnTo>
-                    <a:pt x="1432450" y="2611828"/>
-                  </a:lnTo>
-                  <a:lnTo>
-                    <a:pt x="1504073" y="2620074"/>
-                  </a:lnTo>
-                  <a:lnTo>
-                    <a:pt x="1575695" y="2628254"/>
-                  </a:lnTo>
-                  <a:lnTo>
-                    <a:pt x="1647318" y="2636369"/>
-                  </a:lnTo>
-                  <a:lnTo>
-                    <a:pt x="1718940" y="2644420"/>
-                  </a:lnTo>
-                  <a:lnTo>
-                    <a:pt x="1790563" y="2652407"/>
-                  </a:lnTo>
-                  <a:lnTo>
-                    <a:pt x="1862185" y="2660331"/>
-                  </a:lnTo>
-                  <a:lnTo>
-                    <a:pt x="1933808" y="2668192"/>
-                  </a:lnTo>
-                  <a:lnTo>
-                    <a:pt x="2005430" y="2675990"/>
-                  </a:lnTo>
-                  <a:lnTo>
-                    <a:pt x="2077053" y="2683727"/>
-                  </a:lnTo>
-                  <a:lnTo>
-                    <a:pt x="2148675" y="2691403"/>
-                  </a:lnTo>
-                  <a:lnTo>
-                    <a:pt x="2220298" y="2699018"/>
-                  </a:lnTo>
-                  <a:lnTo>
-                    <a:pt x="2291920" y="2706573"/>
-                  </a:lnTo>
-                  <a:lnTo>
-                    <a:pt x="2363543" y="2714067"/>
-                  </a:lnTo>
-                  <a:lnTo>
-                    <a:pt x="2435165" y="2721503"/>
-                  </a:lnTo>
-                  <a:lnTo>
-                    <a:pt x="2506788" y="2728879"/>
-                  </a:lnTo>
-                  <a:lnTo>
-                    <a:pt x="2578410" y="2736197"/>
-                  </a:lnTo>
-                  <a:lnTo>
-                    <a:pt x="2650033" y="2743457"/>
-                  </a:lnTo>
-                  <a:lnTo>
-                    <a:pt x="2721655" y="2750660"/>
-                  </a:lnTo>
-                  <a:lnTo>
-                    <a:pt x="2793278" y="2757805"/>
-                  </a:lnTo>
-                  <a:lnTo>
-                    <a:pt x="2864901" y="2764894"/>
-                  </a:lnTo>
-                  <a:lnTo>
-                    <a:pt x="2936523" y="2771927"/>
-                  </a:lnTo>
-                  <a:lnTo>
-                    <a:pt x="3008146" y="2778904"/>
-                  </a:lnTo>
-                  <a:lnTo>
-                    <a:pt x="3079768" y="2769006"/>
-                  </a:lnTo>
-                  <a:lnTo>
-                    <a:pt x="3151391" y="2734357"/>
-                  </a:lnTo>
-                  <a:lnTo>
-                    <a:pt x="3223013" y="2698349"/>
-                  </a:lnTo>
-                  <a:lnTo>
-                    <a:pt x="3294636" y="2660930"/>
-                  </a:lnTo>
-                  <a:lnTo>
-                    <a:pt x="3366258" y="2622043"/>
-                  </a:lnTo>
-                  <a:lnTo>
-                    <a:pt x="3437881" y="2581631"/>
-                  </a:lnTo>
-                  <a:lnTo>
-                    <a:pt x="3509503" y="2539635"/>
-                  </a:lnTo>
-                  <a:lnTo>
-                    <a:pt x="3581126" y="2495992"/>
-                  </a:lnTo>
-                  <a:lnTo>
-                    <a:pt x="3652748" y="2450637"/>
-                  </a:lnTo>
-                  <a:lnTo>
-                    <a:pt x="3724371" y="2403504"/>
-                  </a:lnTo>
-                  <a:lnTo>
-                    <a:pt x="3795993" y="2354523"/>
-                  </a:lnTo>
-                  <a:lnTo>
-                    <a:pt x="3867616" y="2303622"/>
-                  </a:lnTo>
-                  <a:lnTo>
-                    <a:pt x="3939238" y="2250724"/>
-                  </a:lnTo>
-                  <a:lnTo>
-                    <a:pt x="4010861" y="2195752"/>
-                  </a:lnTo>
-                  <a:lnTo>
-                    <a:pt x="4082483" y="2138625"/>
-                  </a:lnTo>
-                  <a:lnTo>
-                    <a:pt x="4154106" y="2079258"/>
-                  </a:lnTo>
-                  <a:lnTo>
-                    <a:pt x="4225729" y="2017562"/>
-                  </a:lnTo>
-                  <a:lnTo>
-                    <a:pt x="4297351" y="1953448"/>
-                  </a:lnTo>
-                  <a:lnTo>
-                    <a:pt x="4368974" y="1886819"/>
-                  </a:lnTo>
-                  <a:lnTo>
-                    <a:pt x="4440596" y="1817578"/>
-                  </a:lnTo>
-                  <a:lnTo>
-                    <a:pt x="4512219" y="1745622"/>
-                  </a:lnTo>
-                  <a:lnTo>
-                    <a:pt x="4583841" y="1670844"/>
-                  </a:lnTo>
-                  <a:lnTo>
-                    <a:pt x="4655464" y="1593134"/>
-                  </a:lnTo>
-                  <a:lnTo>
-                    <a:pt x="4727086" y="1512377"/>
-                  </a:lnTo>
-                  <a:lnTo>
-                    <a:pt x="4798709" y="1428453"/>
-                  </a:lnTo>
-                  <a:lnTo>
-                    <a:pt x="4870331" y="1341239"/>
-                  </a:lnTo>
-                  <a:lnTo>
-                    <a:pt x="4941954" y="1250605"/>
-                  </a:lnTo>
-                  <a:lnTo>
-                    <a:pt x="5013576" y="1156416"/>
-                  </a:lnTo>
-                  <a:lnTo>
-                    <a:pt x="5085199" y="1058535"/>
-                  </a:lnTo>
-                  <a:lnTo>
-                    <a:pt x="5156821" y="956815"/>
-                  </a:lnTo>
-                  <a:lnTo>
-                    <a:pt x="5228444" y="851107"/>
-                  </a:lnTo>
-                  <a:lnTo>
-                    <a:pt x="5300066" y="741253"/>
-                  </a:lnTo>
-                  <a:lnTo>
-                    <a:pt x="5371689" y="627092"/>
-                  </a:lnTo>
-                  <a:lnTo>
-                    <a:pt x="5443311" y="508455"/>
-                  </a:lnTo>
-                  <a:lnTo>
-                    <a:pt x="5514934" y="385166"/>
-                  </a:lnTo>
-                  <a:lnTo>
-                    <a:pt x="5586557" y="257042"/>
-                  </a:lnTo>
-                  <a:lnTo>
-                    <a:pt x="5658179" y="123894"/>
-                  </a:lnTo>
-                  <a:lnTo>
-                    <a:pt x="5722310" y="0"/>
+                    <a:pt x="71622" y="1241513"/>
+                  </a:lnTo>
+                  <a:lnTo>
+                    <a:pt x="143245" y="1299917"/>
+                  </a:lnTo>
+                  <a:lnTo>
+                    <a:pt x="214867" y="1356907"/>
+                  </a:lnTo>
+                  <a:lnTo>
+                    <a:pt x="286490" y="1412516"/>
+                  </a:lnTo>
+                  <a:lnTo>
+                    <a:pt x="358112" y="1466778"/>
+                  </a:lnTo>
+                  <a:lnTo>
+                    <a:pt x="429735" y="1519726"/>
+                  </a:lnTo>
+                  <a:lnTo>
+                    <a:pt x="501357" y="1571391"/>
+                  </a:lnTo>
+                  <a:lnTo>
+                    <a:pt x="572980" y="1621805"/>
+                  </a:lnTo>
+                  <a:lnTo>
+                    <a:pt x="644602" y="1670997"/>
+                  </a:lnTo>
+                  <a:lnTo>
+                    <a:pt x="716225" y="1718998"/>
+                  </a:lnTo>
+                  <a:lnTo>
+                    <a:pt x="787847" y="1765837"/>
+                  </a:lnTo>
+                  <a:lnTo>
+                    <a:pt x="859470" y="1811540"/>
+                  </a:lnTo>
+                  <a:lnTo>
+                    <a:pt x="931092" y="1856137"/>
+                  </a:lnTo>
+                  <a:lnTo>
+                    <a:pt x="1002715" y="1899653"/>
+                  </a:lnTo>
+                  <a:lnTo>
+                    <a:pt x="1074337" y="1942116"/>
+                  </a:lnTo>
+                  <a:lnTo>
+                    <a:pt x="1145960" y="1983549"/>
+                  </a:lnTo>
+                  <a:lnTo>
+                    <a:pt x="1217582" y="2023980"/>
+                  </a:lnTo>
+                  <a:lnTo>
+                    <a:pt x="1289205" y="2063430"/>
+                  </a:lnTo>
+                  <a:lnTo>
+                    <a:pt x="1360827" y="2101925"/>
+                  </a:lnTo>
+                  <a:lnTo>
+                    <a:pt x="1432450" y="2139488"/>
+                  </a:lnTo>
+                  <a:lnTo>
+                    <a:pt x="1504073" y="2176141"/>
+                  </a:lnTo>
+                  <a:lnTo>
+                    <a:pt x="1575695" y="2211906"/>
+                  </a:lnTo>
+                  <a:lnTo>
+                    <a:pt x="1647318" y="2246805"/>
+                  </a:lnTo>
+                  <a:lnTo>
+                    <a:pt x="1718940" y="2280858"/>
+                  </a:lnTo>
+                  <a:lnTo>
+                    <a:pt x="1790563" y="2314087"/>
+                  </a:lnTo>
+                  <a:lnTo>
+                    <a:pt x="1862185" y="2346510"/>
+                  </a:lnTo>
+                  <a:lnTo>
+                    <a:pt x="1933808" y="2378148"/>
+                  </a:lnTo>
+                  <a:lnTo>
+                    <a:pt x="2005430" y="2409020"/>
+                  </a:lnTo>
+                  <a:lnTo>
+                    <a:pt x="2077053" y="2439144"/>
+                  </a:lnTo>
+                  <a:lnTo>
+                    <a:pt x="2148675" y="2468539"/>
+                  </a:lnTo>
+                  <a:lnTo>
+                    <a:pt x="2220298" y="2497221"/>
+                  </a:lnTo>
+                  <a:lnTo>
+                    <a:pt x="2291920" y="2525208"/>
+                  </a:lnTo>
+                  <a:lnTo>
+                    <a:pt x="2363543" y="2552518"/>
+                  </a:lnTo>
+                  <a:lnTo>
+                    <a:pt x="2435165" y="2579166"/>
+                  </a:lnTo>
+                  <a:lnTo>
+                    <a:pt x="2506788" y="2605169"/>
+                  </a:lnTo>
+                  <a:lnTo>
+                    <a:pt x="2578410" y="2630542"/>
+                  </a:lnTo>
+                  <a:lnTo>
+                    <a:pt x="2650033" y="2655300"/>
+                  </a:lnTo>
+                  <a:lnTo>
+                    <a:pt x="2721655" y="2679458"/>
+                  </a:lnTo>
+                  <a:lnTo>
+                    <a:pt x="2793278" y="2703031"/>
+                  </a:lnTo>
+                  <a:lnTo>
+                    <a:pt x="2864901" y="2726034"/>
+                  </a:lnTo>
+                  <a:lnTo>
+                    <a:pt x="2936523" y="2748479"/>
+                  </a:lnTo>
+                  <a:lnTo>
+                    <a:pt x="3008146" y="2770380"/>
+                  </a:lnTo>
+                  <a:lnTo>
+                    <a:pt x="3079768" y="2770410"/>
+                  </a:lnTo>
+                  <a:lnTo>
+                    <a:pt x="3151391" y="2739330"/>
+                  </a:lnTo>
+                  <a:lnTo>
+                    <a:pt x="3223013" y="2707156"/>
+                  </a:lnTo>
+                  <a:lnTo>
+                    <a:pt x="3294636" y="2673847"/>
+                  </a:lnTo>
+                  <a:lnTo>
+                    <a:pt x="3366258" y="2639366"/>
+                  </a:lnTo>
+                  <a:lnTo>
+                    <a:pt x="3437881" y="2603670"/>
+                  </a:lnTo>
+                  <a:lnTo>
+                    <a:pt x="3509503" y="2566716"/>
+                  </a:lnTo>
+                  <a:lnTo>
+                    <a:pt x="3581126" y="2528461"/>
+                  </a:lnTo>
+                  <a:lnTo>
+                    <a:pt x="3652748" y="2488858"/>
+                  </a:lnTo>
+                  <a:lnTo>
+                    <a:pt x="3724371" y="2447859"/>
+                  </a:lnTo>
+                  <a:lnTo>
+                    <a:pt x="3795993" y="2405417"/>
+                  </a:lnTo>
+                  <a:lnTo>
+                    <a:pt x="3867616" y="2361479"/>
+                  </a:lnTo>
+                  <a:lnTo>
+                    <a:pt x="3939238" y="2315993"/>
+                  </a:lnTo>
+                  <a:lnTo>
+                    <a:pt x="4010861" y="2268905"/>
+                  </a:lnTo>
+                  <a:lnTo>
+                    <a:pt x="4082483" y="2220158"/>
+                  </a:lnTo>
+                  <a:lnTo>
+                    <a:pt x="4154106" y="2169694"/>
+                  </a:lnTo>
+                  <a:lnTo>
+                    <a:pt x="4225729" y="2117452"/>
+                  </a:lnTo>
+                  <a:lnTo>
+                    <a:pt x="4297351" y="2063369"/>
+                  </a:lnTo>
+                  <a:lnTo>
+                    <a:pt x="4368974" y="2007382"/>
+                  </a:lnTo>
+                  <a:lnTo>
+                    <a:pt x="4440596" y="1949422"/>
+                  </a:lnTo>
+                  <a:lnTo>
+                    <a:pt x="4512219" y="1889420"/>
+                  </a:lnTo>
+                  <a:lnTo>
+                    <a:pt x="4583841" y="1827304"/>
+                  </a:lnTo>
+                  <a:lnTo>
+                    <a:pt x="4655464" y="1763001"/>
+                  </a:lnTo>
+                  <a:lnTo>
+                    <a:pt x="4727086" y="1696432"/>
+                  </a:lnTo>
+                  <a:lnTo>
+                    <a:pt x="4798709" y="1627517"/>
+                  </a:lnTo>
+                  <a:lnTo>
+                    <a:pt x="4870331" y="1556175"/>
+                  </a:lnTo>
+                  <a:lnTo>
+                    <a:pt x="4941954" y="1482320"/>
+                  </a:lnTo>
+                  <a:lnTo>
+                    <a:pt x="5013576" y="1405863"/>
+                  </a:lnTo>
+                  <a:lnTo>
+                    <a:pt x="5085199" y="1326712"/>
+                  </a:lnTo>
+                  <a:lnTo>
+                    <a:pt x="5156821" y="1244774"/>
+                  </a:lnTo>
+                  <a:lnTo>
+                    <a:pt x="5228444" y="1159948"/>
+                  </a:lnTo>
+                  <a:lnTo>
+                    <a:pt x="5300066" y="1072134"/>
+                  </a:lnTo>
+                  <a:lnTo>
+                    <a:pt x="5371689" y="981227"/>
+                  </a:lnTo>
+                  <a:lnTo>
+                    <a:pt x="5443311" y="887117"/>
+                  </a:lnTo>
+                  <a:lnTo>
+                    <a:pt x="5514934" y="789692"/>
+                  </a:lnTo>
+                  <a:lnTo>
+                    <a:pt x="5586557" y="688835"/>
+                  </a:lnTo>
+                  <a:lnTo>
+                    <a:pt x="5658179" y="584425"/>
+                  </a:lnTo>
+                  <a:lnTo>
+                    <a:pt x="5729802" y="476336"/>
+                  </a:lnTo>
+                  <a:lnTo>
+                    <a:pt x="5801424" y="364440"/>
+                  </a:lnTo>
+                  <a:lnTo>
+                    <a:pt x="5873047" y="248602"/>
+                  </a:lnTo>
+                  <a:lnTo>
+                    <a:pt x="5944669" y="128683"/>
+                  </a:lnTo>
+                  <a:lnTo>
+                    <a:pt x="6016292" y="4539"/>
+                  </a:lnTo>
+                  <a:lnTo>
+                    <a:pt x="6018822" y="0"/>
                   </a:lnTo>
                 </a:path>
               </a:pathLst>
@@ -3976,312 +4006,312 @@
           </p:nvSpPr>
           <p:spPr>
             <a:xfrm>
-              <a:off x="1172049" y="4682389"/>
-              <a:ext cx="7090630" cy="697774"/>
+              <a:off x="1172049" y="4688314"/>
+              <a:ext cx="7090630" cy="661812"/>
             </a:xfrm>
             <a:custGeom>
               <a:avLst/>
               <a:pathLst>
-                <a:path w="7090630" h="697774">
+                <a:path w="7090630" h="661812">
                   <a:moveTo>
-                    <a:pt x="7090630" y="311559"/>
+                    <a:pt x="7090630" y="642827"/>
                   </a:moveTo>
                   <a:lnTo>
-                    <a:pt x="7019007" y="307125"/>
-                  </a:lnTo>
-                  <a:lnTo>
-                    <a:pt x="6947385" y="302656"/>
-                  </a:lnTo>
-                  <a:lnTo>
-                    <a:pt x="6875762" y="298151"/>
-                  </a:lnTo>
-                  <a:lnTo>
-                    <a:pt x="6804139" y="293610"/>
-                  </a:lnTo>
-                  <a:lnTo>
-                    <a:pt x="6732517" y="289033"/>
-                  </a:lnTo>
-                  <a:lnTo>
-                    <a:pt x="6660894" y="284419"/>
-                  </a:lnTo>
-                  <a:lnTo>
-                    <a:pt x="6589272" y="279769"/>
-                  </a:lnTo>
-                  <a:lnTo>
-                    <a:pt x="6517649" y="275081"/>
-                  </a:lnTo>
-                  <a:lnTo>
-                    <a:pt x="6446027" y="270356"/>
-                  </a:lnTo>
-                  <a:lnTo>
-                    <a:pt x="6374404" y="265593"/>
-                  </a:lnTo>
-                  <a:lnTo>
-                    <a:pt x="6302782" y="260792"/>
-                  </a:lnTo>
-                  <a:lnTo>
-                    <a:pt x="6231159" y="255953"/>
-                  </a:lnTo>
-                  <a:lnTo>
-                    <a:pt x="6159537" y="251075"/>
-                  </a:lnTo>
-                  <a:lnTo>
-                    <a:pt x="6087914" y="246158"/>
-                  </a:lnTo>
-                  <a:lnTo>
-                    <a:pt x="6016292" y="241202"/>
-                  </a:lnTo>
-                  <a:lnTo>
-                    <a:pt x="5944669" y="236206"/>
-                  </a:lnTo>
-                  <a:lnTo>
-                    <a:pt x="5873047" y="231171"/>
-                  </a:lnTo>
-                  <a:lnTo>
-                    <a:pt x="5801424" y="226095"/>
-                  </a:lnTo>
-                  <a:lnTo>
-                    <a:pt x="5729802" y="220979"/>
-                  </a:lnTo>
-                  <a:lnTo>
-                    <a:pt x="5658179" y="215822"/>
-                  </a:lnTo>
-                  <a:lnTo>
-                    <a:pt x="5586557" y="210623"/>
-                  </a:lnTo>
-                  <a:lnTo>
-                    <a:pt x="5514934" y="205383"/>
-                  </a:lnTo>
-                  <a:lnTo>
-                    <a:pt x="5443311" y="200102"/>
-                  </a:lnTo>
-                  <a:lnTo>
-                    <a:pt x="5371689" y="194778"/>
-                  </a:lnTo>
-                  <a:lnTo>
-                    <a:pt x="5300066" y="189412"/>
-                  </a:lnTo>
-                  <a:lnTo>
-                    <a:pt x="5228444" y="184002"/>
-                  </a:lnTo>
-                  <a:lnTo>
-                    <a:pt x="5156821" y="178550"/>
-                  </a:lnTo>
-                  <a:lnTo>
-                    <a:pt x="5085199" y="173054"/>
-                  </a:lnTo>
-                  <a:lnTo>
-                    <a:pt x="5013576" y="167514"/>
-                  </a:lnTo>
-                  <a:lnTo>
-                    <a:pt x="4941954" y="161930"/>
-                  </a:lnTo>
-                  <a:lnTo>
-                    <a:pt x="4870331" y="156301"/>
-                  </a:lnTo>
-                  <a:lnTo>
-                    <a:pt x="4798709" y="150628"/>
-                  </a:lnTo>
-                  <a:lnTo>
-                    <a:pt x="4727086" y="144909"/>
-                  </a:lnTo>
-                  <a:lnTo>
-                    <a:pt x="4655464" y="139144"/>
-                  </a:lnTo>
-                  <a:lnTo>
-                    <a:pt x="4583841" y="133334"/>
-                  </a:lnTo>
-                  <a:lnTo>
-                    <a:pt x="4512219" y="127477"/>
-                  </a:lnTo>
-                  <a:lnTo>
-                    <a:pt x="4440596" y="121573"/>
-                  </a:lnTo>
-                  <a:lnTo>
-                    <a:pt x="4368974" y="115622"/>
-                  </a:lnTo>
-                  <a:lnTo>
-                    <a:pt x="4297351" y="109623"/>
-                  </a:lnTo>
-                  <a:lnTo>
-                    <a:pt x="4225729" y="103577"/>
-                  </a:lnTo>
-                  <a:lnTo>
-                    <a:pt x="4154106" y="97482"/>
-                  </a:lnTo>
-                  <a:lnTo>
-                    <a:pt x="4082483" y="91339"/>
-                  </a:lnTo>
-                  <a:lnTo>
-                    <a:pt x="4010861" y="85147"/>
-                  </a:lnTo>
-                  <a:lnTo>
-                    <a:pt x="3939238" y="78905"/>
-                  </a:lnTo>
-                  <a:lnTo>
-                    <a:pt x="3867616" y="72613"/>
-                  </a:lnTo>
-                  <a:lnTo>
-                    <a:pt x="3795993" y="66271"/>
-                  </a:lnTo>
-                  <a:lnTo>
-                    <a:pt x="3724371" y="59879"/>
-                  </a:lnTo>
-                  <a:lnTo>
-                    <a:pt x="3652748" y="53435"/>
-                  </a:lnTo>
-                  <a:lnTo>
-                    <a:pt x="3581126" y="46940"/>
-                  </a:lnTo>
-                  <a:lnTo>
-                    <a:pt x="3509503" y="40393"/>
-                  </a:lnTo>
-                  <a:lnTo>
-                    <a:pt x="3437881" y="33794"/>
-                  </a:lnTo>
-                  <a:lnTo>
-                    <a:pt x="3366258" y="27142"/>
-                  </a:lnTo>
-                  <a:lnTo>
-                    <a:pt x="3294636" y="20437"/>
-                  </a:lnTo>
-                  <a:lnTo>
-                    <a:pt x="3223013" y="13679"/>
-                  </a:lnTo>
-                  <a:lnTo>
-                    <a:pt x="3151391" y="6866"/>
+                    <a:pt x="7019007" y="637413"/>
+                  </a:lnTo>
+                  <a:lnTo>
+                    <a:pt x="6947385" y="631866"/>
+                  </a:lnTo>
+                  <a:lnTo>
+                    <a:pt x="6875762" y="626180"/>
+                  </a:lnTo>
+                  <a:lnTo>
+                    <a:pt x="6804139" y="620354"/>
+                  </a:lnTo>
+                  <a:lnTo>
+                    <a:pt x="6732517" y="614383"/>
+                  </a:lnTo>
+                  <a:lnTo>
+                    <a:pt x="6660894" y="608263"/>
+                  </a:lnTo>
+                  <a:lnTo>
+                    <a:pt x="6589272" y="601992"/>
+                  </a:lnTo>
+                  <a:lnTo>
+                    <a:pt x="6517649" y="595565"/>
+                  </a:lnTo>
+                  <a:lnTo>
+                    <a:pt x="6446027" y="588979"/>
+                  </a:lnTo>
+                  <a:lnTo>
+                    <a:pt x="6374404" y="582229"/>
+                  </a:lnTo>
+                  <a:lnTo>
+                    <a:pt x="6302782" y="575311"/>
+                  </a:lnTo>
+                  <a:lnTo>
+                    <a:pt x="6231159" y="568222"/>
+                  </a:lnTo>
+                  <a:lnTo>
+                    <a:pt x="6159537" y="560957"/>
+                  </a:lnTo>
+                  <a:lnTo>
+                    <a:pt x="6087914" y="553511"/>
+                  </a:lnTo>
+                  <a:lnTo>
+                    <a:pt x="6016292" y="545880"/>
+                  </a:lnTo>
+                  <a:lnTo>
+                    <a:pt x="5944669" y="538061"/>
+                  </a:lnTo>
+                  <a:lnTo>
+                    <a:pt x="5873047" y="530047"/>
+                  </a:lnTo>
+                  <a:lnTo>
+                    <a:pt x="5801424" y="521834"/>
+                  </a:lnTo>
+                  <a:lnTo>
+                    <a:pt x="5729802" y="513417"/>
+                  </a:lnTo>
+                  <a:lnTo>
+                    <a:pt x="5658179" y="504791"/>
+                  </a:lnTo>
+                  <a:lnTo>
+                    <a:pt x="5586557" y="495951"/>
+                  </a:lnTo>
+                  <a:lnTo>
+                    <a:pt x="5514934" y="486892"/>
+                  </a:lnTo>
+                  <a:lnTo>
+                    <a:pt x="5443311" y="477608"/>
+                  </a:lnTo>
+                  <a:lnTo>
+                    <a:pt x="5371689" y="468093"/>
+                  </a:lnTo>
+                  <a:lnTo>
+                    <a:pt x="5300066" y="458342"/>
+                  </a:lnTo>
+                  <a:lnTo>
+                    <a:pt x="5228444" y="448349"/>
+                  </a:lnTo>
+                  <a:lnTo>
+                    <a:pt x="5156821" y="438108"/>
+                  </a:lnTo>
+                  <a:lnTo>
+                    <a:pt x="5085199" y="427613"/>
+                  </a:lnTo>
+                  <a:lnTo>
+                    <a:pt x="5013576" y="416857"/>
+                  </a:lnTo>
+                  <a:lnTo>
+                    <a:pt x="4941954" y="405834"/>
+                  </a:lnTo>
+                  <a:lnTo>
+                    <a:pt x="4870331" y="394538"/>
+                  </a:lnTo>
+                  <a:lnTo>
+                    <a:pt x="4798709" y="382961"/>
+                  </a:lnTo>
+                  <a:lnTo>
+                    <a:pt x="4727086" y="371097"/>
+                  </a:lnTo>
+                  <a:lnTo>
+                    <a:pt x="4655464" y="358938"/>
+                  </a:lnTo>
+                  <a:lnTo>
+                    <a:pt x="4583841" y="346478"/>
+                  </a:lnTo>
+                  <a:lnTo>
+                    <a:pt x="4512219" y="333708"/>
+                  </a:lnTo>
+                  <a:lnTo>
+                    <a:pt x="4440596" y="320621"/>
+                  </a:lnTo>
+                  <a:lnTo>
+                    <a:pt x="4368974" y="307209"/>
+                  </a:lnTo>
+                  <a:lnTo>
+                    <a:pt x="4297351" y="293465"/>
+                  </a:lnTo>
+                  <a:lnTo>
+                    <a:pt x="4225729" y="279379"/>
+                  </a:lnTo>
+                  <a:lnTo>
+                    <a:pt x="4154106" y="264943"/>
+                  </a:lnTo>
+                  <a:lnTo>
+                    <a:pt x="4082483" y="250149"/>
+                  </a:lnTo>
+                  <a:lnTo>
+                    <a:pt x="4010861" y="234988"/>
+                  </a:lnTo>
+                  <a:lnTo>
+                    <a:pt x="3939238" y="219451"/>
+                  </a:lnTo>
+                  <a:lnTo>
+                    <a:pt x="3867616" y="203527"/>
+                  </a:lnTo>
+                  <a:lnTo>
+                    <a:pt x="3795993" y="187209"/>
+                  </a:lnTo>
+                  <a:lnTo>
+                    <a:pt x="3724371" y="170485"/>
+                  </a:lnTo>
+                  <a:lnTo>
+                    <a:pt x="3652748" y="153347"/>
+                  </a:lnTo>
+                  <a:lnTo>
+                    <a:pt x="3581126" y="135782"/>
+                  </a:lnTo>
+                  <a:lnTo>
+                    <a:pt x="3509503" y="117782"/>
+                  </a:lnTo>
+                  <a:lnTo>
+                    <a:pt x="3437881" y="99335"/>
+                  </a:lnTo>
+                  <a:lnTo>
+                    <a:pt x="3366258" y="80430"/>
+                  </a:lnTo>
+                  <a:lnTo>
+                    <a:pt x="3294636" y="61056"/>
+                  </a:lnTo>
+                  <a:lnTo>
+                    <a:pt x="3223013" y="41201"/>
+                  </a:lnTo>
+                  <a:lnTo>
+                    <a:pt x="3151391" y="20853"/>
                   </a:lnTo>
                   <a:lnTo>
                     <a:pt x="3079768" y="0"/>
                   </a:lnTo>
                   <a:lnTo>
-                    <a:pt x="3008146" y="16522"/>
-                  </a:lnTo>
-                  <a:lnTo>
-                    <a:pt x="2936523" y="48605"/>
-                  </a:lnTo>
-                  <a:lnTo>
-                    <a:pt x="2864901" y="79478"/>
-                  </a:lnTo>
-                  <a:lnTo>
-                    <a:pt x="2793278" y="109186"/>
-                  </a:lnTo>
-                  <a:lnTo>
-                    <a:pt x="2721655" y="137773"/>
-                  </a:lnTo>
-                  <a:lnTo>
-                    <a:pt x="2650033" y="165282"/>
-                  </a:lnTo>
-                  <a:lnTo>
-                    <a:pt x="2578410" y="191752"/>
-                  </a:lnTo>
-                  <a:lnTo>
-                    <a:pt x="2506788" y="217224"/>
-                  </a:lnTo>
-                  <a:lnTo>
-                    <a:pt x="2435165" y="241735"/>
-                  </a:lnTo>
-                  <a:lnTo>
-                    <a:pt x="2363543" y="265321"/>
-                  </a:lnTo>
-                  <a:lnTo>
-                    <a:pt x="2291920" y="288016"/>
-                  </a:lnTo>
-                  <a:lnTo>
-                    <a:pt x="2220298" y="309856"/>
-                  </a:lnTo>
-                  <a:lnTo>
-                    <a:pt x="2148675" y="330871"/>
-                  </a:lnTo>
-                  <a:lnTo>
-                    <a:pt x="2077053" y="351094"/>
-                  </a:lnTo>
-                  <a:lnTo>
-                    <a:pt x="2005430" y="370553"/>
-                  </a:lnTo>
-                  <a:lnTo>
-                    <a:pt x="1933808" y="389278"/>
-                  </a:lnTo>
-                  <a:lnTo>
-                    <a:pt x="1862185" y="407297"/>
-                  </a:lnTo>
-                  <a:lnTo>
-                    <a:pt x="1790563" y="424636"/>
-                  </a:lnTo>
-                  <a:lnTo>
-                    <a:pt x="1718940" y="441320"/>
-                  </a:lnTo>
-                  <a:lnTo>
-                    <a:pt x="1647318" y="457375"/>
-                  </a:lnTo>
-                  <a:lnTo>
-                    <a:pt x="1575695" y="472824"/>
-                  </a:lnTo>
-                  <a:lnTo>
-                    <a:pt x="1504073" y="487691"/>
-                  </a:lnTo>
-                  <a:lnTo>
-                    <a:pt x="1432450" y="501996"/>
-                  </a:lnTo>
-                  <a:lnTo>
-                    <a:pt x="1360827" y="515761"/>
-                  </a:lnTo>
-                  <a:lnTo>
-                    <a:pt x="1289205" y="529008"/>
-                  </a:lnTo>
-                  <a:lnTo>
-                    <a:pt x="1217582" y="541754"/>
-                  </a:lnTo>
-                  <a:lnTo>
-                    <a:pt x="1145960" y="554019"/>
-                  </a:lnTo>
-                  <a:lnTo>
-                    <a:pt x="1074337" y="565822"/>
-                  </a:lnTo>
-                  <a:lnTo>
-                    <a:pt x="1002715" y="577179"/>
-                  </a:lnTo>
-                  <a:lnTo>
-                    <a:pt x="931092" y="588108"/>
-                  </a:lnTo>
-                  <a:lnTo>
-                    <a:pt x="859470" y="598624"/>
-                  </a:lnTo>
-                  <a:lnTo>
-                    <a:pt x="787847" y="608744"/>
-                  </a:lnTo>
-                  <a:lnTo>
-                    <a:pt x="716225" y="618481"/>
-                  </a:lnTo>
-                  <a:lnTo>
-                    <a:pt x="644602" y="627852"/>
-                  </a:lnTo>
-                  <a:lnTo>
-                    <a:pt x="572980" y="636868"/>
-                  </a:lnTo>
-                  <a:lnTo>
-                    <a:pt x="501357" y="645545"/>
-                  </a:lnTo>
-                  <a:lnTo>
-                    <a:pt x="429735" y="653894"/>
-                  </a:lnTo>
-                  <a:lnTo>
-                    <a:pt x="358112" y="661928"/>
-                  </a:lnTo>
-                  <a:lnTo>
-                    <a:pt x="286490" y="669659"/>
-                  </a:lnTo>
-                  <a:lnTo>
-                    <a:pt x="214867" y="677098"/>
-                  </a:lnTo>
-                  <a:lnTo>
-                    <a:pt x="143245" y="684257"/>
-                  </a:lnTo>
-                  <a:lnTo>
-                    <a:pt x="71622" y="691145"/>
-                  </a:lnTo>
-                  <a:lnTo>
-                    <a:pt x="0" y="697774"/>
+                    <a:pt x="3008146" y="8680"/>
+                  </a:lnTo>
+                  <a:lnTo>
+                    <a:pt x="2936523" y="37681"/>
+                  </a:lnTo>
+                  <a:lnTo>
+                    <a:pt x="2864901" y="65694"/>
+                  </a:lnTo>
+                  <a:lnTo>
+                    <a:pt x="2793278" y="92755"/>
+                  </a:lnTo>
+                  <a:lnTo>
+                    <a:pt x="2721655" y="118894"/>
+                  </a:lnTo>
+                  <a:lnTo>
+                    <a:pt x="2650033" y="144144"/>
+                  </a:lnTo>
+                  <a:lnTo>
+                    <a:pt x="2578410" y="168535"/>
+                  </a:lnTo>
+                  <a:lnTo>
+                    <a:pt x="2506788" y="192095"/>
+                  </a:lnTo>
+                  <a:lnTo>
+                    <a:pt x="2435165" y="214854"/>
+                  </a:lnTo>
+                  <a:lnTo>
+                    <a:pt x="2363543" y="236839"/>
+                  </a:lnTo>
+                  <a:lnTo>
+                    <a:pt x="2291920" y="258075"/>
+                  </a:lnTo>
+                  <a:lnTo>
+                    <a:pt x="2220298" y="278588"/>
+                  </a:lnTo>
+                  <a:lnTo>
+                    <a:pt x="2148675" y="298404"/>
+                  </a:lnTo>
+                  <a:lnTo>
+                    <a:pt x="2077053" y="317545"/>
+                  </a:lnTo>
+                  <a:lnTo>
+                    <a:pt x="2005430" y="336035"/>
+                  </a:lnTo>
+                  <a:lnTo>
+                    <a:pt x="1933808" y="353896"/>
+                  </a:lnTo>
+                  <a:lnTo>
+                    <a:pt x="1862185" y="371149"/>
+                  </a:lnTo>
+                  <a:lnTo>
+                    <a:pt x="1790563" y="387814"/>
+                  </a:lnTo>
+                  <a:lnTo>
+                    <a:pt x="1718940" y="403913"/>
+                  </a:lnTo>
+                  <a:lnTo>
+                    <a:pt x="1647318" y="419464"/>
+                  </a:lnTo>
+                  <a:lnTo>
+                    <a:pt x="1575695" y="434486"/>
+                  </a:lnTo>
+                  <a:lnTo>
+                    <a:pt x="1504073" y="448996"/>
+                  </a:lnTo>
+                  <a:lnTo>
+                    <a:pt x="1432450" y="463013"/>
+                  </a:lnTo>
+                  <a:lnTo>
+                    <a:pt x="1360827" y="476552"/>
+                  </a:lnTo>
+                  <a:lnTo>
+                    <a:pt x="1289205" y="489631"/>
+                  </a:lnTo>
+                  <a:lnTo>
+                    <a:pt x="1217582" y="502265"/>
+                  </a:lnTo>
+                  <a:lnTo>
+                    <a:pt x="1145960" y="514469"/>
+                  </a:lnTo>
+                  <a:lnTo>
+                    <a:pt x="1074337" y="526258"/>
+                  </a:lnTo>
+                  <a:lnTo>
+                    <a:pt x="1002715" y="537645"/>
+                  </a:lnTo>
+                  <a:lnTo>
+                    <a:pt x="931092" y="548645"/>
+                  </a:lnTo>
+                  <a:lnTo>
+                    <a:pt x="859470" y="559271"/>
+                  </a:lnTo>
+                  <a:lnTo>
+                    <a:pt x="787847" y="569535"/>
+                  </a:lnTo>
+                  <a:lnTo>
+                    <a:pt x="716225" y="579450"/>
+                  </a:lnTo>
+                  <a:lnTo>
+                    <a:pt x="644602" y="589027"/>
+                  </a:lnTo>
+                  <a:lnTo>
+                    <a:pt x="572980" y="598278"/>
+                  </a:lnTo>
+                  <a:lnTo>
+                    <a:pt x="501357" y="607215"/>
+                  </a:lnTo>
+                  <a:lnTo>
+                    <a:pt x="429735" y="615848"/>
+                  </a:lnTo>
+                  <a:lnTo>
+                    <a:pt x="358112" y="624186"/>
+                  </a:lnTo>
+                  <a:lnTo>
+                    <a:pt x="286490" y="632241"/>
+                  </a:lnTo>
+                  <a:lnTo>
+                    <a:pt x="214867" y="640022"/>
+                  </a:lnTo>
+                  <a:lnTo>
+                    <a:pt x="143245" y="647538"/>
+                  </a:lnTo>
+                  <a:lnTo>
+                    <a:pt x="71622" y="654799"/>
+                  </a:lnTo>
+                  <a:lnTo>
+                    <a:pt x="0" y="661812"/>
                   </a:lnTo>
                 </a:path>
               </a:pathLst>
@@ -4301,309 +4331,309 @@
           </p:nvSpPr>
           <p:spPr>
             <a:xfrm>
-              <a:off x="1172049" y="3492849"/>
-              <a:ext cx="7090630" cy="1602177"/>
+              <a:off x="1172049" y="4392833"/>
+              <a:ext cx="7090630" cy="455001"/>
             </a:xfrm>
             <a:custGeom>
               <a:avLst/>
               <a:pathLst>
-                <a:path w="7090630" h="1602177">
+                <a:path w="7090630" h="455001">
                   <a:moveTo>
-                    <a:pt x="0" y="1602177"/>
+                    <a:pt x="0" y="455001"/>
                   </a:moveTo>
                   <a:lnTo>
-                    <a:pt x="71622" y="1595196"/>
-                  </a:lnTo>
-                  <a:lnTo>
-                    <a:pt x="143245" y="1588107"/>
-                  </a:lnTo>
-                  <a:lnTo>
-                    <a:pt x="214867" y="1580909"/>
-                  </a:lnTo>
-                  <a:lnTo>
-                    <a:pt x="286490" y="1573601"/>
-                  </a:lnTo>
-                  <a:lnTo>
-                    <a:pt x="358112" y="1566180"/>
-                  </a:lnTo>
-                  <a:lnTo>
-                    <a:pt x="429735" y="1558646"/>
-                  </a:lnTo>
-                  <a:lnTo>
-                    <a:pt x="501357" y="1550995"/>
-                  </a:lnTo>
-                  <a:lnTo>
-                    <a:pt x="572980" y="1543227"/>
-                  </a:lnTo>
-                  <a:lnTo>
-                    <a:pt x="644602" y="1535339"/>
-                  </a:lnTo>
-                  <a:lnTo>
-                    <a:pt x="716225" y="1527331"/>
-                  </a:lnTo>
-                  <a:lnTo>
-                    <a:pt x="787847" y="1519199"/>
-                  </a:lnTo>
-                  <a:lnTo>
-                    <a:pt x="859470" y="1510942"/>
-                  </a:lnTo>
-                  <a:lnTo>
-                    <a:pt x="931092" y="1502558"/>
-                  </a:lnTo>
-                  <a:lnTo>
-                    <a:pt x="1002715" y="1494045"/>
-                  </a:lnTo>
-                  <a:lnTo>
-                    <a:pt x="1074337" y="1485402"/>
-                  </a:lnTo>
-                  <a:lnTo>
-                    <a:pt x="1145960" y="1476625"/>
-                  </a:lnTo>
-                  <a:lnTo>
-                    <a:pt x="1217582" y="1467714"/>
-                  </a:lnTo>
-                  <a:lnTo>
-                    <a:pt x="1289205" y="1458665"/>
-                  </a:lnTo>
-                  <a:lnTo>
-                    <a:pt x="1360827" y="1449478"/>
-                  </a:lnTo>
-                  <a:lnTo>
-                    <a:pt x="1432450" y="1440149"/>
-                  </a:lnTo>
-                  <a:lnTo>
-                    <a:pt x="1504073" y="1430677"/>
-                  </a:lnTo>
-                  <a:lnTo>
-                    <a:pt x="1575695" y="1421060"/>
-                  </a:lnTo>
-                  <a:lnTo>
-                    <a:pt x="1647318" y="1411294"/>
-                  </a:lnTo>
-                  <a:lnTo>
-                    <a:pt x="1718940" y="1401379"/>
-                  </a:lnTo>
-                  <a:lnTo>
-                    <a:pt x="1790563" y="1391311"/>
-                  </a:lnTo>
-                  <a:lnTo>
-                    <a:pt x="1862185" y="1381088"/>
-                  </a:lnTo>
-                  <a:lnTo>
-                    <a:pt x="1933808" y="1370708"/>
-                  </a:lnTo>
-                  <a:lnTo>
-                    <a:pt x="2005430" y="1360169"/>
-                  </a:lnTo>
-                  <a:lnTo>
-                    <a:pt x="2077053" y="1349467"/>
-                  </a:lnTo>
-                  <a:lnTo>
-                    <a:pt x="2148675" y="1338601"/>
-                  </a:lnTo>
-                  <a:lnTo>
-                    <a:pt x="2220298" y="1327568"/>
-                  </a:lnTo>
-                  <a:lnTo>
-                    <a:pt x="2291920" y="1316366"/>
-                  </a:lnTo>
-                  <a:lnTo>
-                    <a:pt x="2363543" y="1304991"/>
-                  </a:lnTo>
-                  <a:lnTo>
-                    <a:pt x="2435165" y="1293442"/>
-                  </a:lnTo>
-                  <a:lnTo>
-                    <a:pt x="2506788" y="1281714"/>
-                  </a:lnTo>
-                  <a:lnTo>
-                    <a:pt x="2578410" y="1269807"/>
-                  </a:lnTo>
-                  <a:lnTo>
-                    <a:pt x="2650033" y="1257717"/>
-                  </a:lnTo>
-                  <a:lnTo>
-                    <a:pt x="2721655" y="1245440"/>
-                  </a:lnTo>
-                  <a:lnTo>
-                    <a:pt x="2793278" y="1232975"/>
-                  </a:lnTo>
-                  <a:lnTo>
-                    <a:pt x="2864901" y="1220319"/>
-                  </a:lnTo>
-                  <a:lnTo>
-                    <a:pt x="2936523" y="1207468"/>
-                  </a:lnTo>
-                  <a:lnTo>
-                    <a:pt x="3008146" y="1194419"/>
-                  </a:lnTo>
-                  <a:lnTo>
-                    <a:pt x="3079768" y="1181170"/>
-                  </a:lnTo>
-                  <a:lnTo>
-                    <a:pt x="3151391" y="1167717"/>
-                  </a:lnTo>
-                  <a:lnTo>
-                    <a:pt x="3223013" y="1154057"/>
-                  </a:lnTo>
-                  <a:lnTo>
-                    <a:pt x="3294636" y="1140187"/>
-                  </a:lnTo>
-                  <a:lnTo>
-                    <a:pt x="3366258" y="1126105"/>
-                  </a:lnTo>
-                  <a:lnTo>
-                    <a:pt x="3437881" y="1111805"/>
-                  </a:lnTo>
-                  <a:lnTo>
-                    <a:pt x="3509503" y="1097286"/>
-                  </a:lnTo>
-                  <a:lnTo>
-                    <a:pt x="3581126" y="1082544"/>
-                  </a:lnTo>
-                  <a:lnTo>
-                    <a:pt x="3652748" y="1067575"/>
-                  </a:lnTo>
-                  <a:lnTo>
-                    <a:pt x="3724371" y="1052376"/>
-                  </a:lnTo>
-                  <a:lnTo>
-                    <a:pt x="3795993" y="1036943"/>
-                  </a:lnTo>
-                  <a:lnTo>
-                    <a:pt x="3867616" y="1021273"/>
-                  </a:lnTo>
-                  <a:lnTo>
-                    <a:pt x="3939238" y="1005362"/>
-                  </a:lnTo>
-                  <a:lnTo>
-                    <a:pt x="4010861" y="989207"/>
-                  </a:lnTo>
-                  <a:lnTo>
-                    <a:pt x="4082483" y="972803"/>
-                  </a:lnTo>
-                  <a:lnTo>
-                    <a:pt x="4154106" y="956148"/>
-                  </a:lnTo>
-                  <a:lnTo>
-                    <a:pt x="4225729" y="939236"/>
-                  </a:lnTo>
-                  <a:lnTo>
-                    <a:pt x="4297351" y="922064"/>
-                  </a:lnTo>
-                  <a:lnTo>
-                    <a:pt x="4368974" y="904628"/>
-                  </a:lnTo>
-                  <a:lnTo>
-                    <a:pt x="4440596" y="886924"/>
-                  </a:lnTo>
-                  <a:lnTo>
-                    <a:pt x="4512219" y="868948"/>
-                  </a:lnTo>
-                  <a:lnTo>
-                    <a:pt x="4583841" y="850696"/>
-                  </a:lnTo>
-                  <a:lnTo>
-                    <a:pt x="4655464" y="832163"/>
-                  </a:lnTo>
-                  <a:lnTo>
-                    <a:pt x="4727086" y="813346"/>
-                  </a:lnTo>
-                  <a:lnTo>
-                    <a:pt x="4798709" y="794239"/>
-                  </a:lnTo>
-                  <a:lnTo>
-                    <a:pt x="4870331" y="774838"/>
-                  </a:lnTo>
-                  <a:lnTo>
-                    <a:pt x="4941954" y="755139"/>
-                  </a:lnTo>
-                  <a:lnTo>
-                    <a:pt x="5013576" y="735138"/>
-                  </a:lnTo>
-                  <a:lnTo>
-                    <a:pt x="5085199" y="714829"/>
-                  </a:lnTo>
-                  <a:lnTo>
-                    <a:pt x="5156821" y="694208"/>
-                  </a:lnTo>
-                  <a:lnTo>
-                    <a:pt x="5228444" y="673269"/>
-                  </a:lnTo>
-                  <a:lnTo>
-                    <a:pt x="5300066" y="652009"/>
-                  </a:lnTo>
-                  <a:lnTo>
-                    <a:pt x="5371689" y="630422"/>
-                  </a:lnTo>
-                  <a:lnTo>
-                    <a:pt x="5443311" y="608504"/>
-                  </a:lnTo>
-                  <a:lnTo>
-                    <a:pt x="5514934" y="586248"/>
-                  </a:lnTo>
-                  <a:lnTo>
-                    <a:pt x="5586557" y="563650"/>
-                  </a:lnTo>
-                  <a:lnTo>
-                    <a:pt x="5658179" y="540705"/>
-                  </a:lnTo>
-                  <a:lnTo>
-                    <a:pt x="5729802" y="517407"/>
-                  </a:lnTo>
-                  <a:lnTo>
-                    <a:pt x="5801424" y="493751"/>
-                  </a:lnTo>
-                  <a:lnTo>
-                    <a:pt x="5873047" y="469732"/>
-                  </a:lnTo>
-                  <a:lnTo>
-                    <a:pt x="5944669" y="445343"/>
-                  </a:lnTo>
-                  <a:lnTo>
-                    <a:pt x="6016292" y="420579"/>
-                  </a:lnTo>
-                  <a:lnTo>
-                    <a:pt x="6087914" y="395435"/>
-                  </a:lnTo>
-                  <a:lnTo>
-                    <a:pt x="6159537" y="369904"/>
-                  </a:lnTo>
-                  <a:lnTo>
-                    <a:pt x="6231159" y="343981"/>
-                  </a:lnTo>
-                  <a:lnTo>
-                    <a:pt x="6302782" y="317659"/>
-                  </a:lnTo>
-                  <a:lnTo>
-                    <a:pt x="6374404" y="290933"/>
-                  </a:lnTo>
-                  <a:lnTo>
-                    <a:pt x="6446027" y="263796"/>
-                  </a:lnTo>
-                  <a:lnTo>
-                    <a:pt x="6517649" y="236241"/>
-                  </a:lnTo>
-                  <a:lnTo>
-                    <a:pt x="6589272" y="208264"/>
-                  </a:lnTo>
-                  <a:lnTo>
-                    <a:pt x="6660894" y="179856"/>
-                  </a:lnTo>
-                  <a:lnTo>
-                    <a:pt x="6732517" y="151011"/>
-                  </a:lnTo>
-                  <a:lnTo>
-                    <a:pt x="6804139" y="121723"/>
-                  </a:lnTo>
-                  <a:lnTo>
-                    <a:pt x="6875762" y="91985"/>
-                  </a:lnTo>
-                  <a:lnTo>
-                    <a:pt x="6947385" y="61790"/>
-                  </a:lnTo>
-                  <a:lnTo>
-                    <a:pt x="7019007" y="31130"/>
+                    <a:pt x="71622" y="451449"/>
+                  </a:lnTo>
+                  <a:lnTo>
+                    <a:pt x="143245" y="447880"/>
+                  </a:lnTo>
+                  <a:lnTo>
+                    <a:pt x="214867" y="444293"/>
+                  </a:lnTo>
+                  <a:lnTo>
+                    <a:pt x="286490" y="440687"/>
+                  </a:lnTo>
+                  <a:lnTo>
+                    <a:pt x="358112" y="437063"/>
+                  </a:lnTo>
+                  <a:lnTo>
+                    <a:pt x="429735" y="433421"/>
+                  </a:lnTo>
+                  <a:lnTo>
+                    <a:pt x="501357" y="429761"/>
+                  </a:lnTo>
+                  <a:lnTo>
+                    <a:pt x="572980" y="426082"/>
+                  </a:lnTo>
+                  <a:lnTo>
+                    <a:pt x="644602" y="422384"/>
+                  </a:lnTo>
+                  <a:lnTo>
+                    <a:pt x="716225" y="418668"/>
+                  </a:lnTo>
+                  <a:lnTo>
+                    <a:pt x="787847" y="414932"/>
+                  </a:lnTo>
+                  <a:lnTo>
+                    <a:pt x="859470" y="411178"/>
+                  </a:lnTo>
+                  <a:lnTo>
+                    <a:pt x="931092" y="407405"/>
+                  </a:lnTo>
+                  <a:lnTo>
+                    <a:pt x="1002715" y="403613"/>
+                  </a:lnTo>
+                  <a:lnTo>
+                    <a:pt x="1074337" y="399801"/>
+                  </a:lnTo>
+                  <a:lnTo>
+                    <a:pt x="1145960" y="395971"/>
+                  </a:lnTo>
+                  <a:lnTo>
+                    <a:pt x="1217582" y="392120"/>
+                  </a:lnTo>
+                  <a:lnTo>
+                    <a:pt x="1289205" y="388251"/>
+                  </a:lnTo>
+                  <a:lnTo>
+                    <a:pt x="1360827" y="384361"/>
+                  </a:lnTo>
+                  <a:lnTo>
+                    <a:pt x="1432450" y="380452"/>
+                  </a:lnTo>
+                  <a:lnTo>
+                    <a:pt x="1504073" y="376524"/>
+                  </a:lnTo>
+                  <a:lnTo>
+                    <a:pt x="1575695" y="372575"/>
+                  </a:lnTo>
+                  <a:lnTo>
+                    <a:pt x="1647318" y="368606"/>
+                  </a:lnTo>
+                  <a:lnTo>
+                    <a:pt x="1718940" y="364618"/>
+                  </a:lnTo>
+                  <a:lnTo>
+                    <a:pt x="1790563" y="360609"/>
+                  </a:lnTo>
+                  <a:lnTo>
+                    <a:pt x="1862185" y="356580"/>
+                  </a:lnTo>
+                  <a:lnTo>
+                    <a:pt x="1933808" y="352530"/>
+                  </a:lnTo>
+                  <a:lnTo>
+                    <a:pt x="2005430" y="348460"/>
+                  </a:lnTo>
+                  <a:lnTo>
+                    <a:pt x="2077053" y="344369"/>
+                  </a:lnTo>
+                  <a:lnTo>
+                    <a:pt x="2148675" y="340258"/>
+                  </a:lnTo>
+                  <a:lnTo>
+                    <a:pt x="2220298" y="336125"/>
+                  </a:lnTo>
+                  <a:lnTo>
+                    <a:pt x="2291920" y="331972"/>
+                  </a:lnTo>
+                  <a:lnTo>
+                    <a:pt x="2363543" y="327798"/>
+                  </a:lnTo>
+                  <a:lnTo>
+                    <a:pt x="2435165" y="323603"/>
+                  </a:lnTo>
+                  <a:lnTo>
+                    <a:pt x="2506788" y="319386"/>
+                  </a:lnTo>
+                  <a:lnTo>
+                    <a:pt x="2578410" y="315148"/>
+                  </a:lnTo>
+                  <a:lnTo>
+                    <a:pt x="2650033" y="310889"/>
+                  </a:lnTo>
+                  <a:lnTo>
+                    <a:pt x="2721655" y="306608"/>
+                  </a:lnTo>
+                  <a:lnTo>
+                    <a:pt x="2793278" y="302305"/>
+                  </a:lnTo>
+                  <a:lnTo>
+                    <a:pt x="2864901" y="297981"/>
+                  </a:lnTo>
+                  <a:lnTo>
+                    <a:pt x="2936523" y="293634"/>
+                  </a:lnTo>
+                  <a:lnTo>
+                    <a:pt x="3008146" y="289266"/>
+                  </a:lnTo>
+                  <a:lnTo>
+                    <a:pt x="3079768" y="284876"/>
+                  </a:lnTo>
+                  <a:lnTo>
+                    <a:pt x="3151391" y="280463"/>
+                  </a:lnTo>
+                  <a:lnTo>
+                    <a:pt x="3223013" y="276028"/>
+                  </a:lnTo>
+                  <a:lnTo>
+                    <a:pt x="3294636" y="271570"/>
+                  </a:lnTo>
+                  <a:lnTo>
+                    <a:pt x="3366258" y="267090"/>
+                  </a:lnTo>
+                  <a:lnTo>
+                    <a:pt x="3437881" y="262588"/>
+                  </a:lnTo>
+                  <a:lnTo>
+                    <a:pt x="3509503" y="258062"/>
+                  </a:lnTo>
+                  <a:lnTo>
+                    <a:pt x="3581126" y="253514"/>
+                  </a:lnTo>
+                  <a:lnTo>
+                    <a:pt x="3652748" y="248942"/>
+                  </a:lnTo>
+                  <a:lnTo>
+                    <a:pt x="3724371" y="244348"/>
+                  </a:lnTo>
+                  <a:lnTo>
+                    <a:pt x="3795993" y="239730"/>
+                  </a:lnTo>
+                  <a:lnTo>
+                    <a:pt x="3867616" y="235088"/>
+                  </a:lnTo>
+                  <a:lnTo>
+                    <a:pt x="3939238" y="230424"/>
+                  </a:lnTo>
+                  <a:lnTo>
+                    <a:pt x="4010861" y="225735"/>
+                  </a:lnTo>
+                  <a:lnTo>
+                    <a:pt x="4082483" y="221023"/>
+                  </a:lnTo>
+                  <a:lnTo>
+                    <a:pt x="4154106" y="216287"/>
+                  </a:lnTo>
+                  <a:lnTo>
+                    <a:pt x="4225729" y="211527"/>
+                  </a:lnTo>
+                  <a:lnTo>
+                    <a:pt x="4297351" y="206743"/>
+                  </a:lnTo>
+                  <a:lnTo>
+                    <a:pt x="4368974" y="201935"/>
+                  </a:lnTo>
+                  <a:lnTo>
+                    <a:pt x="4440596" y="197102"/>
+                  </a:lnTo>
+                  <a:lnTo>
+                    <a:pt x="4512219" y="192245"/>
+                  </a:lnTo>
+                  <a:lnTo>
+                    <a:pt x="4583841" y="187363"/>
+                  </a:lnTo>
+                  <a:lnTo>
+                    <a:pt x="4655464" y="182457"/>
+                  </a:lnTo>
+                  <a:lnTo>
+                    <a:pt x="4727086" y="177526"/>
+                  </a:lnTo>
+                  <a:lnTo>
+                    <a:pt x="4798709" y="172569"/>
+                  </a:lnTo>
+                  <a:lnTo>
+                    <a:pt x="4870331" y="167588"/>
+                  </a:lnTo>
+                  <a:lnTo>
+                    <a:pt x="4941954" y="162582"/>
+                  </a:lnTo>
+                  <a:lnTo>
+                    <a:pt x="5013576" y="157550"/>
+                  </a:lnTo>
+                  <a:lnTo>
+                    <a:pt x="5085199" y="152492"/>
+                  </a:lnTo>
+                  <a:lnTo>
+                    <a:pt x="5156821" y="147409"/>
+                  </a:lnTo>
+                  <a:lnTo>
+                    <a:pt x="5228444" y="142301"/>
+                  </a:lnTo>
+                  <a:lnTo>
+                    <a:pt x="5300066" y="137166"/>
+                  </a:lnTo>
+                  <a:lnTo>
+                    <a:pt x="5371689" y="132005"/>
+                  </a:lnTo>
+                  <a:lnTo>
+                    <a:pt x="5443311" y="126819"/>
+                  </a:lnTo>
+                  <a:lnTo>
+                    <a:pt x="5514934" y="121606"/>
+                  </a:lnTo>
+                  <a:lnTo>
+                    <a:pt x="5586557" y="116366"/>
+                  </a:lnTo>
+                  <a:lnTo>
+                    <a:pt x="5658179" y="111100"/>
+                  </a:lnTo>
+                  <a:lnTo>
+                    <a:pt x="5729802" y="105808"/>
+                  </a:lnTo>
+                  <a:lnTo>
+                    <a:pt x="5801424" y="100489"/>
+                  </a:lnTo>
+                  <a:lnTo>
+                    <a:pt x="5873047" y="95142"/>
+                  </a:lnTo>
+                  <a:lnTo>
+                    <a:pt x="5944669" y="89769"/>
+                  </a:lnTo>
+                  <a:lnTo>
+                    <a:pt x="6016292" y="84368"/>
+                  </a:lnTo>
+                  <a:lnTo>
+                    <a:pt x="6087914" y="78940"/>
+                  </a:lnTo>
+                  <a:lnTo>
+                    <a:pt x="6159537" y="73485"/>
+                  </a:lnTo>
+                  <a:lnTo>
+                    <a:pt x="6231159" y="68002"/>
+                  </a:lnTo>
+                  <a:lnTo>
+                    <a:pt x="6302782" y="62491"/>
+                  </a:lnTo>
+                  <a:lnTo>
+                    <a:pt x="6374404" y="56952"/>
+                  </a:lnTo>
+                  <a:lnTo>
+                    <a:pt x="6446027" y="51386"/>
+                  </a:lnTo>
+                  <a:lnTo>
+                    <a:pt x="6517649" y="45791"/>
+                  </a:lnTo>
+                  <a:lnTo>
+                    <a:pt x="6589272" y="40168"/>
+                  </a:lnTo>
+                  <a:lnTo>
+                    <a:pt x="6660894" y="34516"/>
+                  </a:lnTo>
+                  <a:lnTo>
+                    <a:pt x="6732517" y="28836"/>
+                  </a:lnTo>
+                  <a:lnTo>
+                    <a:pt x="6804139" y="23126"/>
+                  </a:lnTo>
+                  <a:lnTo>
+                    <a:pt x="6875762" y="17388"/>
+                  </a:lnTo>
+                  <a:lnTo>
+                    <a:pt x="6947385" y="11621"/>
+                  </a:lnTo>
+                  <a:lnTo>
+                    <a:pt x="7019007" y="5825"/>
                   </a:lnTo>
                   <a:lnTo>
                     <a:pt x="7090630" y="0"/>

--- a/docs/plots/carbo/jx_carbo_linsubhr_dosedisc_aki2.pptx
+++ b/docs/plots/carbo/jx_carbo_linsubhr_dosedisc_aki2.pptx
@@ -3132,572 +3132,563 @@
           <p:spPr>
             <a:xfrm>
               <a:off x="1172049" y="1896563"/>
-              <a:ext cx="7090630" cy="3453563"/>
+              <a:ext cx="7090630" cy="3468749"/>
             </a:xfrm>
             <a:custGeom>
               <a:avLst/>
               <a:pathLst>
-                <a:path w="7090630" h="3453563">
+                <a:path w="7090630" h="3468749">
                   <a:moveTo>
-                    <a:pt x="0" y="1181659"/>
+                    <a:pt x="0" y="2014536"/>
                   </a:moveTo>
                   <a:lnTo>
-                    <a:pt x="71622" y="1241513"/>
-                  </a:lnTo>
-                  <a:lnTo>
-                    <a:pt x="143245" y="1299917"/>
-                  </a:lnTo>
-                  <a:lnTo>
-                    <a:pt x="214867" y="1356907"/>
-                  </a:lnTo>
-                  <a:lnTo>
-                    <a:pt x="286490" y="1412516"/>
-                  </a:lnTo>
-                  <a:lnTo>
-                    <a:pt x="358112" y="1466778"/>
-                  </a:lnTo>
-                  <a:lnTo>
-                    <a:pt x="429735" y="1519726"/>
-                  </a:lnTo>
-                  <a:lnTo>
-                    <a:pt x="501357" y="1571391"/>
-                  </a:lnTo>
-                  <a:lnTo>
-                    <a:pt x="572980" y="1621805"/>
-                  </a:lnTo>
-                  <a:lnTo>
-                    <a:pt x="644602" y="1670997"/>
-                  </a:lnTo>
-                  <a:lnTo>
-                    <a:pt x="716225" y="1718998"/>
-                  </a:lnTo>
-                  <a:lnTo>
-                    <a:pt x="787847" y="1765837"/>
-                  </a:lnTo>
-                  <a:lnTo>
-                    <a:pt x="859470" y="1811540"/>
-                  </a:lnTo>
-                  <a:lnTo>
-                    <a:pt x="931092" y="1856137"/>
-                  </a:lnTo>
-                  <a:lnTo>
-                    <a:pt x="1002715" y="1899653"/>
-                  </a:lnTo>
-                  <a:lnTo>
-                    <a:pt x="1074337" y="1942116"/>
-                  </a:lnTo>
-                  <a:lnTo>
-                    <a:pt x="1145960" y="1983549"/>
-                  </a:lnTo>
-                  <a:lnTo>
-                    <a:pt x="1217582" y="2023980"/>
-                  </a:lnTo>
-                  <a:lnTo>
-                    <a:pt x="1289205" y="2063430"/>
-                  </a:lnTo>
-                  <a:lnTo>
-                    <a:pt x="1360827" y="2101925"/>
-                  </a:lnTo>
-                  <a:lnTo>
-                    <a:pt x="1432450" y="2139488"/>
-                  </a:lnTo>
-                  <a:lnTo>
-                    <a:pt x="1504073" y="2176141"/>
-                  </a:lnTo>
-                  <a:lnTo>
-                    <a:pt x="1575695" y="2211906"/>
-                  </a:lnTo>
-                  <a:lnTo>
-                    <a:pt x="1647318" y="2246805"/>
-                  </a:lnTo>
-                  <a:lnTo>
-                    <a:pt x="1718940" y="2280858"/>
-                  </a:lnTo>
-                  <a:lnTo>
-                    <a:pt x="1790563" y="2314087"/>
-                  </a:lnTo>
-                  <a:lnTo>
-                    <a:pt x="1862185" y="2346510"/>
-                  </a:lnTo>
-                  <a:lnTo>
-                    <a:pt x="1933808" y="2378148"/>
-                  </a:lnTo>
-                  <a:lnTo>
-                    <a:pt x="2005430" y="2409020"/>
-                  </a:lnTo>
-                  <a:lnTo>
-                    <a:pt x="2077053" y="2439144"/>
-                  </a:lnTo>
-                  <a:lnTo>
-                    <a:pt x="2148675" y="2468539"/>
-                  </a:lnTo>
-                  <a:lnTo>
-                    <a:pt x="2220298" y="2497221"/>
-                  </a:lnTo>
-                  <a:lnTo>
-                    <a:pt x="2291920" y="2525208"/>
-                  </a:lnTo>
-                  <a:lnTo>
-                    <a:pt x="2363543" y="2552518"/>
-                  </a:lnTo>
-                  <a:lnTo>
-                    <a:pt x="2435165" y="2579166"/>
-                  </a:lnTo>
-                  <a:lnTo>
-                    <a:pt x="2506788" y="2605169"/>
-                  </a:lnTo>
-                  <a:lnTo>
-                    <a:pt x="2578410" y="2630542"/>
-                  </a:lnTo>
-                  <a:lnTo>
-                    <a:pt x="2650033" y="2655300"/>
-                  </a:lnTo>
-                  <a:lnTo>
-                    <a:pt x="2721655" y="2679458"/>
-                  </a:lnTo>
-                  <a:lnTo>
-                    <a:pt x="2793278" y="2703031"/>
-                  </a:lnTo>
-                  <a:lnTo>
-                    <a:pt x="2864901" y="2726034"/>
-                  </a:lnTo>
-                  <a:lnTo>
-                    <a:pt x="2936523" y="2748479"/>
-                  </a:lnTo>
-                  <a:lnTo>
-                    <a:pt x="3008146" y="2770380"/>
-                  </a:lnTo>
-                  <a:lnTo>
-                    <a:pt x="3079768" y="2770410"/>
-                  </a:lnTo>
-                  <a:lnTo>
-                    <a:pt x="3151391" y="2739330"/>
-                  </a:lnTo>
-                  <a:lnTo>
-                    <a:pt x="3223013" y="2707156"/>
-                  </a:lnTo>
-                  <a:lnTo>
-                    <a:pt x="3294636" y="2673847"/>
-                  </a:lnTo>
-                  <a:lnTo>
-                    <a:pt x="3366258" y="2639366"/>
-                  </a:lnTo>
-                  <a:lnTo>
-                    <a:pt x="3437881" y="2603670"/>
-                  </a:lnTo>
-                  <a:lnTo>
-                    <a:pt x="3509503" y="2566716"/>
-                  </a:lnTo>
-                  <a:lnTo>
-                    <a:pt x="3581126" y="2528461"/>
-                  </a:lnTo>
-                  <a:lnTo>
-                    <a:pt x="3652748" y="2488858"/>
-                  </a:lnTo>
-                  <a:lnTo>
-                    <a:pt x="3724371" y="2447859"/>
-                  </a:lnTo>
-                  <a:lnTo>
-                    <a:pt x="3795993" y="2405417"/>
-                  </a:lnTo>
-                  <a:lnTo>
-                    <a:pt x="3867616" y="2361479"/>
-                  </a:lnTo>
-                  <a:lnTo>
-                    <a:pt x="3939238" y="2315993"/>
-                  </a:lnTo>
-                  <a:lnTo>
-                    <a:pt x="4010861" y="2268905"/>
-                  </a:lnTo>
-                  <a:lnTo>
-                    <a:pt x="4082483" y="2220158"/>
-                  </a:lnTo>
-                  <a:lnTo>
-                    <a:pt x="4154106" y="2169694"/>
-                  </a:lnTo>
-                  <a:lnTo>
-                    <a:pt x="4225729" y="2117452"/>
-                  </a:lnTo>
-                  <a:lnTo>
-                    <a:pt x="4297351" y="2063369"/>
-                  </a:lnTo>
-                  <a:lnTo>
-                    <a:pt x="4368974" y="2007382"/>
-                  </a:lnTo>
-                  <a:lnTo>
-                    <a:pt x="4440596" y="1949422"/>
-                  </a:lnTo>
-                  <a:lnTo>
-                    <a:pt x="4512219" y="1889420"/>
-                  </a:lnTo>
-                  <a:lnTo>
-                    <a:pt x="4583841" y="1827304"/>
-                  </a:lnTo>
-                  <a:lnTo>
-                    <a:pt x="4655464" y="1763001"/>
-                  </a:lnTo>
-                  <a:lnTo>
-                    <a:pt x="4727086" y="1696432"/>
-                  </a:lnTo>
-                  <a:lnTo>
-                    <a:pt x="4798709" y="1627517"/>
-                  </a:lnTo>
-                  <a:lnTo>
-                    <a:pt x="4870331" y="1556175"/>
-                  </a:lnTo>
-                  <a:lnTo>
-                    <a:pt x="4941954" y="1482320"/>
-                  </a:lnTo>
-                  <a:lnTo>
-                    <a:pt x="5013576" y="1405863"/>
-                  </a:lnTo>
-                  <a:lnTo>
-                    <a:pt x="5085199" y="1326712"/>
-                  </a:lnTo>
-                  <a:lnTo>
-                    <a:pt x="5156821" y="1244774"/>
-                  </a:lnTo>
-                  <a:lnTo>
-                    <a:pt x="5228444" y="1159948"/>
-                  </a:lnTo>
-                  <a:lnTo>
-                    <a:pt x="5300066" y="1072134"/>
-                  </a:lnTo>
-                  <a:lnTo>
-                    <a:pt x="5371689" y="981227"/>
-                  </a:lnTo>
-                  <a:lnTo>
-                    <a:pt x="5443311" y="887117"/>
-                  </a:lnTo>
-                  <a:lnTo>
-                    <a:pt x="5514934" y="789692"/>
-                  </a:lnTo>
-                  <a:lnTo>
-                    <a:pt x="5586557" y="688835"/>
-                  </a:lnTo>
-                  <a:lnTo>
-                    <a:pt x="5658179" y="584425"/>
-                  </a:lnTo>
-                  <a:lnTo>
-                    <a:pt x="5729802" y="476336"/>
-                  </a:lnTo>
-                  <a:lnTo>
-                    <a:pt x="5801424" y="364440"/>
-                  </a:lnTo>
-                  <a:lnTo>
-                    <a:pt x="5873047" y="248602"/>
-                  </a:lnTo>
-                  <a:lnTo>
-                    <a:pt x="5944669" y="128683"/>
-                  </a:lnTo>
-                  <a:lnTo>
-                    <a:pt x="6016292" y="4539"/>
-                  </a:lnTo>
-                  <a:lnTo>
-                    <a:pt x="6018822" y="0"/>
+                    <a:pt x="71622" y="2038711"/>
+                  </a:lnTo>
+                  <a:lnTo>
+                    <a:pt x="143245" y="2062530"/>
+                  </a:lnTo>
+                  <a:lnTo>
+                    <a:pt x="214867" y="2085997"/>
+                  </a:lnTo>
+                  <a:lnTo>
+                    <a:pt x="286490" y="2109118"/>
+                  </a:lnTo>
+                  <a:lnTo>
+                    <a:pt x="358112" y="2131898"/>
+                  </a:lnTo>
+                  <a:lnTo>
+                    <a:pt x="429735" y="2154341"/>
+                  </a:lnTo>
+                  <a:lnTo>
+                    <a:pt x="501357" y="2176453"/>
+                  </a:lnTo>
+                  <a:lnTo>
+                    <a:pt x="572980" y="2198239"/>
+                  </a:lnTo>
+                  <a:lnTo>
+                    <a:pt x="644602" y="2219703"/>
+                  </a:lnTo>
+                  <a:lnTo>
+                    <a:pt x="716225" y="2240851"/>
+                  </a:lnTo>
+                  <a:lnTo>
+                    <a:pt x="787847" y="2261686"/>
+                  </a:lnTo>
+                  <a:lnTo>
+                    <a:pt x="859470" y="2282214"/>
+                  </a:lnTo>
+                  <a:lnTo>
+                    <a:pt x="931092" y="2302439"/>
+                  </a:lnTo>
+                  <a:lnTo>
+                    <a:pt x="1002715" y="2322366"/>
+                  </a:lnTo>
+                  <a:lnTo>
+                    <a:pt x="1074337" y="2341998"/>
+                  </a:lnTo>
+                  <a:lnTo>
+                    <a:pt x="1145960" y="2361341"/>
+                  </a:lnTo>
+                  <a:lnTo>
+                    <a:pt x="1217582" y="2380398"/>
+                  </a:lnTo>
+                  <a:lnTo>
+                    <a:pt x="1289205" y="2399174"/>
+                  </a:lnTo>
+                  <a:lnTo>
+                    <a:pt x="1360827" y="2417673"/>
+                  </a:lnTo>
+                  <a:lnTo>
+                    <a:pt x="1432450" y="2435899"/>
+                  </a:lnTo>
+                  <a:lnTo>
+                    <a:pt x="1504073" y="2453856"/>
+                  </a:lnTo>
+                  <a:lnTo>
+                    <a:pt x="1575695" y="2471548"/>
+                  </a:lnTo>
+                  <a:lnTo>
+                    <a:pt x="1647318" y="2488979"/>
+                  </a:lnTo>
+                  <a:lnTo>
+                    <a:pt x="1718940" y="2506152"/>
+                  </a:lnTo>
+                  <a:lnTo>
+                    <a:pt x="1790563" y="2523073"/>
+                  </a:lnTo>
+                  <a:lnTo>
+                    <a:pt x="1862185" y="2539743"/>
+                  </a:lnTo>
+                  <a:lnTo>
+                    <a:pt x="1933808" y="2556167"/>
+                  </a:lnTo>
+                  <a:lnTo>
+                    <a:pt x="2005430" y="2572349"/>
+                  </a:lnTo>
+                  <a:lnTo>
+                    <a:pt x="2077053" y="2588293"/>
+                  </a:lnTo>
+                  <a:lnTo>
+                    <a:pt x="2148675" y="2604000"/>
+                  </a:lnTo>
+                  <a:lnTo>
+                    <a:pt x="2220298" y="2619476"/>
+                  </a:lnTo>
+                  <a:lnTo>
+                    <a:pt x="2291920" y="2634724"/>
+                  </a:lnTo>
+                  <a:lnTo>
+                    <a:pt x="2363543" y="2649747"/>
+                  </a:lnTo>
+                  <a:lnTo>
+                    <a:pt x="2435165" y="2664548"/>
+                  </a:lnTo>
+                  <a:lnTo>
+                    <a:pt x="2506788" y="2679130"/>
+                  </a:lnTo>
+                  <a:lnTo>
+                    <a:pt x="2578410" y="2693497"/>
+                  </a:lnTo>
+                  <a:lnTo>
+                    <a:pt x="2650033" y="2707653"/>
+                  </a:lnTo>
+                  <a:lnTo>
+                    <a:pt x="2721655" y="2721599"/>
+                  </a:lnTo>
+                  <a:lnTo>
+                    <a:pt x="2793278" y="2735340"/>
+                  </a:lnTo>
+                  <a:lnTo>
+                    <a:pt x="2864901" y="2748877"/>
+                  </a:lnTo>
+                  <a:lnTo>
+                    <a:pt x="2936523" y="2762215"/>
+                  </a:lnTo>
+                  <a:lnTo>
+                    <a:pt x="3008146" y="2775356"/>
+                  </a:lnTo>
+                  <a:lnTo>
+                    <a:pt x="3079768" y="2769729"/>
+                  </a:lnTo>
+                  <a:lnTo>
+                    <a:pt x="3151391" y="2736921"/>
+                  </a:lnTo>
+                  <a:lnTo>
+                    <a:pt x="3223013" y="2702893"/>
+                  </a:lnTo>
+                  <a:lnTo>
+                    <a:pt x="3294636" y="2667601"/>
+                  </a:lnTo>
+                  <a:lnTo>
+                    <a:pt x="3366258" y="2630998"/>
+                  </a:lnTo>
+                  <a:lnTo>
+                    <a:pt x="3437881" y="2593035"/>
+                  </a:lnTo>
+                  <a:lnTo>
+                    <a:pt x="3509503" y="2553661"/>
+                  </a:lnTo>
+                  <a:lnTo>
+                    <a:pt x="3581126" y="2512824"/>
+                  </a:lnTo>
+                  <a:lnTo>
+                    <a:pt x="3652748" y="2470469"/>
+                  </a:lnTo>
+                  <a:lnTo>
+                    <a:pt x="3724371" y="2426541"/>
+                  </a:lnTo>
+                  <a:lnTo>
+                    <a:pt x="3795993" y="2380980"/>
+                  </a:lnTo>
+                  <a:lnTo>
+                    <a:pt x="3867616" y="2333726"/>
+                  </a:lnTo>
+                  <a:lnTo>
+                    <a:pt x="3939238" y="2284716"/>
+                  </a:lnTo>
+                  <a:lnTo>
+                    <a:pt x="4010861" y="2233885"/>
+                  </a:lnTo>
+                  <a:lnTo>
+                    <a:pt x="4082483" y="2181166"/>
+                  </a:lnTo>
+                  <a:lnTo>
+                    <a:pt x="4154106" y="2126487"/>
+                  </a:lnTo>
+                  <a:lnTo>
+                    <a:pt x="4225729" y="2069776"/>
+                  </a:lnTo>
+                  <a:lnTo>
+                    <a:pt x="4297351" y="2010958"/>
+                  </a:lnTo>
+                  <a:lnTo>
+                    <a:pt x="4368974" y="1949955"/>
+                  </a:lnTo>
+                  <a:lnTo>
+                    <a:pt x="4440596" y="1886685"/>
+                  </a:lnTo>
+                  <a:lnTo>
+                    <a:pt x="4512219" y="1821063"/>
+                  </a:lnTo>
+                  <a:lnTo>
+                    <a:pt x="4583841" y="1753003"/>
+                  </a:lnTo>
+                  <a:lnTo>
+                    <a:pt x="4655464" y="1682415"/>
+                  </a:lnTo>
+                  <a:lnTo>
+                    <a:pt x="4727086" y="1609203"/>
+                  </a:lnTo>
+                  <a:lnTo>
+                    <a:pt x="4798709" y="1533270"/>
+                  </a:lnTo>
+                  <a:lnTo>
+                    <a:pt x="4870331" y="1454517"/>
+                  </a:lnTo>
+                  <a:lnTo>
+                    <a:pt x="4941954" y="1372836"/>
+                  </a:lnTo>
+                  <a:lnTo>
+                    <a:pt x="5013576" y="1288121"/>
+                  </a:lnTo>
+                  <a:lnTo>
+                    <a:pt x="5085199" y="1200257"/>
+                  </a:lnTo>
+                  <a:lnTo>
+                    <a:pt x="5156821" y="1109129"/>
+                  </a:lnTo>
+                  <a:lnTo>
+                    <a:pt x="5228444" y="1014614"/>
+                  </a:lnTo>
+                  <a:lnTo>
+                    <a:pt x="5300066" y="916588"/>
+                  </a:lnTo>
+                  <a:lnTo>
+                    <a:pt x="5371689" y="814918"/>
+                  </a:lnTo>
+                  <a:lnTo>
+                    <a:pt x="5443311" y="709471"/>
+                  </a:lnTo>
+                  <a:lnTo>
+                    <a:pt x="5514934" y="600106"/>
+                  </a:lnTo>
+                  <a:lnTo>
+                    <a:pt x="5586557" y="486676"/>
+                  </a:lnTo>
+                  <a:lnTo>
+                    <a:pt x="5658179" y="369032"/>
+                  </a:lnTo>
+                  <a:lnTo>
+                    <a:pt x="5729802" y="247016"/>
+                  </a:lnTo>
+                  <a:lnTo>
+                    <a:pt x="5801424" y="120466"/>
+                  </a:lnTo>
+                  <a:lnTo>
+                    <a:pt x="5867161" y="0"/>
                   </a:lnTo>
                   <a:lnTo>
                     <a:pt x="7090630" y="0"/>
                   </a:lnTo>
                   <a:lnTo>
-                    <a:pt x="7090630" y="3434578"/>
-                  </a:lnTo>
-                  <a:lnTo>
-                    <a:pt x="7019007" y="3429165"/>
-                  </a:lnTo>
-                  <a:lnTo>
-                    <a:pt x="6947385" y="3423617"/>
-                  </a:lnTo>
-                  <a:lnTo>
-                    <a:pt x="6875762" y="3417932"/>
-                  </a:lnTo>
-                  <a:lnTo>
-                    <a:pt x="6804139" y="3412105"/>
-                  </a:lnTo>
-                  <a:lnTo>
-                    <a:pt x="6732517" y="3406134"/>
-                  </a:lnTo>
-                  <a:lnTo>
-                    <a:pt x="6660894" y="3400015"/>
-                  </a:lnTo>
-                  <a:lnTo>
-                    <a:pt x="6589272" y="3393744"/>
-                  </a:lnTo>
-                  <a:lnTo>
-                    <a:pt x="6517649" y="3387317"/>
-                  </a:lnTo>
-                  <a:lnTo>
-                    <a:pt x="6446027" y="3380730"/>
-                  </a:lnTo>
-                  <a:lnTo>
-                    <a:pt x="6374404" y="3373980"/>
-                  </a:lnTo>
-                  <a:lnTo>
-                    <a:pt x="6302782" y="3367063"/>
-                  </a:lnTo>
-                  <a:lnTo>
-                    <a:pt x="6231159" y="3359973"/>
-                  </a:lnTo>
-                  <a:lnTo>
-                    <a:pt x="6159537" y="3352708"/>
-                  </a:lnTo>
-                  <a:lnTo>
-                    <a:pt x="6087914" y="3345262"/>
-                  </a:lnTo>
-                  <a:lnTo>
-                    <a:pt x="6016292" y="3337632"/>
-                  </a:lnTo>
-                  <a:lnTo>
-                    <a:pt x="5944669" y="3329812"/>
-                  </a:lnTo>
-                  <a:lnTo>
-                    <a:pt x="5873047" y="3321798"/>
-                  </a:lnTo>
-                  <a:lnTo>
-                    <a:pt x="5801424" y="3313585"/>
-                  </a:lnTo>
-                  <a:lnTo>
-                    <a:pt x="5729802" y="3305168"/>
-                  </a:lnTo>
-                  <a:lnTo>
-                    <a:pt x="5658179" y="3296543"/>
-                  </a:lnTo>
-                  <a:lnTo>
-                    <a:pt x="5586557" y="3287703"/>
-                  </a:lnTo>
-                  <a:lnTo>
-                    <a:pt x="5514934" y="3278643"/>
-                  </a:lnTo>
-                  <a:lnTo>
-                    <a:pt x="5443311" y="3269359"/>
-                  </a:lnTo>
-                  <a:lnTo>
-                    <a:pt x="5371689" y="3259844"/>
-                  </a:lnTo>
-                  <a:lnTo>
-                    <a:pt x="5300066" y="3250094"/>
-                  </a:lnTo>
-                  <a:lnTo>
-                    <a:pt x="5228444" y="3240101"/>
-                  </a:lnTo>
-                  <a:lnTo>
-                    <a:pt x="5156821" y="3229860"/>
-                  </a:lnTo>
-                  <a:lnTo>
-                    <a:pt x="5085199" y="3219364"/>
-                  </a:lnTo>
-                  <a:lnTo>
-                    <a:pt x="5013576" y="3208609"/>
-                  </a:lnTo>
-                  <a:lnTo>
-                    <a:pt x="4941954" y="3197586"/>
-                  </a:lnTo>
-                  <a:lnTo>
-                    <a:pt x="4870331" y="3186289"/>
-                  </a:lnTo>
-                  <a:lnTo>
-                    <a:pt x="4798709" y="3174713"/>
-                  </a:lnTo>
-                  <a:lnTo>
-                    <a:pt x="4727086" y="3162848"/>
-                  </a:lnTo>
-                  <a:lnTo>
-                    <a:pt x="4655464" y="3150690"/>
-                  </a:lnTo>
-                  <a:lnTo>
-                    <a:pt x="4583841" y="3138229"/>
-                  </a:lnTo>
-                  <a:lnTo>
-                    <a:pt x="4512219" y="3125459"/>
-                  </a:lnTo>
-                  <a:lnTo>
-                    <a:pt x="4440596" y="3112372"/>
-                  </a:lnTo>
-                  <a:lnTo>
-                    <a:pt x="4368974" y="3098961"/>
-                  </a:lnTo>
-                  <a:lnTo>
-                    <a:pt x="4297351" y="3085216"/>
-                  </a:lnTo>
-                  <a:lnTo>
-                    <a:pt x="4225729" y="3071130"/>
-                  </a:lnTo>
-                  <a:lnTo>
-                    <a:pt x="4154106" y="3056695"/>
-                  </a:lnTo>
-                  <a:lnTo>
-                    <a:pt x="4082483" y="3041901"/>
-                  </a:lnTo>
-                  <a:lnTo>
-                    <a:pt x="4010861" y="3026740"/>
-                  </a:lnTo>
-                  <a:lnTo>
-                    <a:pt x="3939238" y="3011202"/>
-                  </a:lnTo>
-                  <a:lnTo>
-                    <a:pt x="3867616" y="2995279"/>
-                  </a:lnTo>
-                  <a:lnTo>
-                    <a:pt x="3795993" y="2978960"/>
-                  </a:lnTo>
-                  <a:lnTo>
-                    <a:pt x="3724371" y="2962237"/>
-                  </a:lnTo>
-                  <a:lnTo>
-                    <a:pt x="3652748" y="2945098"/>
-                  </a:lnTo>
-                  <a:lnTo>
-                    <a:pt x="3581126" y="2927534"/>
-                  </a:lnTo>
-                  <a:lnTo>
-                    <a:pt x="3509503" y="2909534"/>
-                  </a:lnTo>
-                  <a:lnTo>
-                    <a:pt x="3437881" y="2891087"/>
-                  </a:lnTo>
-                  <a:lnTo>
-                    <a:pt x="3366258" y="2872182"/>
-                  </a:lnTo>
-                  <a:lnTo>
-                    <a:pt x="3294636" y="2852807"/>
-                  </a:lnTo>
-                  <a:lnTo>
-                    <a:pt x="3223013" y="2832952"/>
-                  </a:lnTo>
-                  <a:lnTo>
-                    <a:pt x="3151391" y="2812604"/>
-                  </a:lnTo>
-                  <a:lnTo>
-                    <a:pt x="3079768" y="2791751"/>
-                  </a:lnTo>
-                  <a:lnTo>
-                    <a:pt x="3008146" y="2800432"/>
-                  </a:lnTo>
-                  <a:lnTo>
-                    <a:pt x="2936523" y="2829432"/>
-                  </a:lnTo>
-                  <a:lnTo>
-                    <a:pt x="2864901" y="2857446"/>
-                  </a:lnTo>
-                  <a:lnTo>
-                    <a:pt x="2793278" y="2884506"/>
-                  </a:lnTo>
-                  <a:lnTo>
-                    <a:pt x="2721655" y="2910646"/>
-                  </a:lnTo>
-                  <a:lnTo>
-                    <a:pt x="2650033" y="2935895"/>
-                  </a:lnTo>
-                  <a:lnTo>
-                    <a:pt x="2578410" y="2960286"/>
-                  </a:lnTo>
-                  <a:lnTo>
-                    <a:pt x="2506788" y="2983847"/>
-                  </a:lnTo>
-                  <a:lnTo>
-                    <a:pt x="2435165" y="3006606"/>
-                  </a:lnTo>
-                  <a:lnTo>
-                    <a:pt x="2363543" y="3028590"/>
-                  </a:lnTo>
-                  <a:lnTo>
-                    <a:pt x="2291920" y="3049826"/>
-                  </a:lnTo>
-                  <a:lnTo>
-                    <a:pt x="2220298" y="3070340"/>
-                  </a:lnTo>
-                  <a:lnTo>
-                    <a:pt x="2148675" y="3090156"/>
-                  </a:lnTo>
-                  <a:lnTo>
-                    <a:pt x="2077053" y="3109297"/>
-                  </a:lnTo>
-                  <a:lnTo>
-                    <a:pt x="2005430" y="3127787"/>
-                  </a:lnTo>
-                  <a:lnTo>
-                    <a:pt x="1933808" y="3145647"/>
-                  </a:lnTo>
-                  <a:lnTo>
-                    <a:pt x="1862185" y="3162900"/>
-                  </a:lnTo>
-                  <a:lnTo>
-                    <a:pt x="1790563" y="3179566"/>
-                  </a:lnTo>
-                  <a:lnTo>
-                    <a:pt x="1718940" y="3195665"/>
-                  </a:lnTo>
-                  <a:lnTo>
-                    <a:pt x="1647318" y="3211215"/>
-                  </a:lnTo>
-                  <a:lnTo>
-                    <a:pt x="1575695" y="3226237"/>
-                  </a:lnTo>
-                  <a:lnTo>
-                    <a:pt x="1504073" y="3240747"/>
-                  </a:lnTo>
-                  <a:lnTo>
-                    <a:pt x="1432450" y="3254764"/>
-                  </a:lnTo>
-                  <a:lnTo>
-                    <a:pt x="1360827" y="3268304"/>
-                  </a:lnTo>
-                  <a:lnTo>
-                    <a:pt x="1289205" y="3281383"/>
-                  </a:lnTo>
-                  <a:lnTo>
-                    <a:pt x="1217582" y="3294017"/>
-                  </a:lnTo>
-                  <a:lnTo>
-                    <a:pt x="1145960" y="3306221"/>
-                  </a:lnTo>
-                  <a:lnTo>
-                    <a:pt x="1074337" y="3318009"/>
-                  </a:lnTo>
-                  <a:lnTo>
-                    <a:pt x="1002715" y="3329397"/>
-                  </a:lnTo>
-                  <a:lnTo>
-                    <a:pt x="931092" y="3340397"/>
-                  </a:lnTo>
-                  <a:lnTo>
-                    <a:pt x="859470" y="3351022"/>
-                  </a:lnTo>
-                  <a:lnTo>
-                    <a:pt x="787847" y="3361286"/>
-                  </a:lnTo>
-                  <a:lnTo>
-                    <a:pt x="716225" y="3371201"/>
-                  </a:lnTo>
-                  <a:lnTo>
-                    <a:pt x="644602" y="3380778"/>
-                  </a:lnTo>
-                  <a:lnTo>
-                    <a:pt x="572980" y="3390030"/>
-                  </a:lnTo>
-                  <a:lnTo>
-                    <a:pt x="501357" y="3398966"/>
-                  </a:lnTo>
-                  <a:lnTo>
-                    <a:pt x="429735" y="3407599"/>
-                  </a:lnTo>
-                  <a:lnTo>
-                    <a:pt x="358112" y="3415938"/>
-                  </a:lnTo>
-                  <a:lnTo>
-                    <a:pt x="286490" y="3423993"/>
-                  </a:lnTo>
-                  <a:lnTo>
-                    <a:pt x="214867" y="3431774"/>
-                  </a:lnTo>
-                  <a:lnTo>
-                    <a:pt x="143245" y="3439290"/>
-                  </a:lnTo>
-                  <a:lnTo>
-                    <a:pt x="71622" y="3446550"/>
-                  </a:lnTo>
-                  <a:lnTo>
-                    <a:pt x="0" y="3453563"/>
+                    <a:pt x="7090630" y="3276734"/>
+                  </a:lnTo>
+                  <a:lnTo>
+                    <a:pt x="7019007" y="3271103"/>
+                  </a:lnTo>
+                  <a:lnTo>
+                    <a:pt x="6947385" y="3265388"/>
+                  </a:lnTo>
+                  <a:lnTo>
+                    <a:pt x="6875762" y="3259587"/>
+                  </a:lnTo>
+                  <a:lnTo>
+                    <a:pt x="6804139" y="3253699"/>
+                  </a:lnTo>
+                  <a:lnTo>
+                    <a:pt x="6732517" y="3247723"/>
+                  </a:lnTo>
+                  <a:lnTo>
+                    <a:pt x="6660894" y="3241658"/>
+                  </a:lnTo>
+                  <a:lnTo>
+                    <a:pt x="6589272" y="3235501"/>
+                  </a:lnTo>
+                  <a:lnTo>
+                    <a:pt x="6517649" y="3229253"/>
+                  </a:lnTo>
+                  <a:lnTo>
+                    <a:pt x="6446027" y="3222911"/>
+                  </a:lnTo>
+                  <a:lnTo>
+                    <a:pt x="6374404" y="3216474"/>
+                  </a:lnTo>
+                  <a:lnTo>
+                    <a:pt x="6302782" y="3209940"/>
+                  </a:lnTo>
+                  <a:lnTo>
+                    <a:pt x="6231159" y="3203309"/>
+                  </a:lnTo>
+                  <a:lnTo>
+                    <a:pt x="6159537" y="3196578"/>
+                  </a:lnTo>
+                  <a:lnTo>
+                    <a:pt x="6087914" y="3189747"/>
+                  </a:lnTo>
+                  <a:lnTo>
+                    <a:pt x="6016292" y="3182813"/>
+                  </a:lnTo>
+                  <a:lnTo>
+                    <a:pt x="5944669" y="3175775"/>
+                  </a:lnTo>
+                  <a:lnTo>
+                    <a:pt x="5873047" y="3168632"/>
+                  </a:lnTo>
+                  <a:lnTo>
+                    <a:pt x="5801424" y="3161382"/>
+                  </a:lnTo>
+                  <a:lnTo>
+                    <a:pt x="5729802" y="3154023"/>
+                  </a:lnTo>
+                  <a:lnTo>
+                    <a:pt x="5658179" y="3146554"/>
+                  </a:lnTo>
+                  <a:lnTo>
+                    <a:pt x="5586557" y="3138974"/>
+                  </a:lnTo>
+                  <a:lnTo>
+                    <a:pt x="5514934" y="3131279"/>
+                  </a:lnTo>
+                  <a:lnTo>
+                    <a:pt x="5443311" y="3123470"/>
+                  </a:lnTo>
+                  <a:lnTo>
+                    <a:pt x="5371689" y="3115543"/>
+                  </a:lnTo>
+                  <a:lnTo>
+                    <a:pt x="5300066" y="3107498"/>
+                  </a:lnTo>
+                  <a:lnTo>
+                    <a:pt x="5228444" y="3099332"/>
+                  </a:lnTo>
+                  <a:lnTo>
+                    <a:pt x="5156821" y="3091044"/>
+                  </a:lnTo>
+                  <a:lnTo>
+                    <a:pt x="5085199" y="3082631"/>
+                  </a:lnTo>
+                  <a:lnTo>
+                    <a:pt x="5013576" y="3074093"/>
+                  </a:lnTo>
+                  <a:lnTo>
+                    <a:pt x="4941954" y="3065427"/>
+                  </a:lnTo>
+                  <a:lnTo>
+                    <a:pt x="4870331" y="3056631"/>
+                  </a:lnTo>
+                  <a:lnTo>
+                    <a:pt x="4798709" y="3047703"/>
+                  </a:lnTo>
+                  <a:lnTo>
+                    <a:pt x="4727086" y="3038641"/>
+                  </a:lnTo>
+                  <a:lnTo>
+                    <a:pt x="4655464" y="3029444"/>
+                  </a:lnTo>
+                  <a:lnTo>
+                    <a:pt x="4583841" y="3020109"/>
+                  </a:lnTo>
+                  <a:lnTo>
+                    <a:pt x="4512219" y="3010634"/>
+                  </a:lnTo>
+                  <a:lnTo>
+                    <a:pt x="4440596" y="3001017"/>
+                  </a:lnTo>
+                  <a:lnTo>
+                    <a:pt x="4368974" y="2991256"/>
+                  </a:lnTo>
+                  <a:lnTo>
+                    <a:pt x="4297351" y="2981349"/>
+                  </a:lnTo>
+                  <a:lnTo>
+                    <a:pt x="4225729" y="2971294"/>
+                  </a:lnTo>
+                  <a:lnTo>
+                    <a:pt x="4154106" y="2961088"/>
+                  </a:lnTo>
+                  <a:lnTo>
+                    <a:pt x="4082483" y="2950729"/>
+                  </a:lnTo>
+                  <a:lnTo>
+                    <a:pt x="4010861" y="2940215"/>
+                  </a:lnTo>
+                  <a:lnTo>
+                    <a:pt x="3939238" y="2929543"/>
+                  </a:lnTo>
+                  <a:lnTo>
+                    <a:pt x="3867616" y="2918711"/>
+                  </a:lnTo>
+                  <a:lnTo>
+                    <a:pt x="3795993" y="2907718"/>
+                  </a:lnTo>
+                  <a:lnTo>
+                    <a:pt x="3724371" y="2896559"/>
+                  </a:lnTo>
+                  <a:lnTo>
+                    <a:pt x="3652748" y="2885234"/>
+                  </a:lnTo>
+                  <a:lnTo>
+                    <a:pt x="3581126" y="2873738"/>
+                  </a:lnTo>
+                  <a:lnTo>
+                    <a:pt x="3509503" y="2862071"/>
+                  </a:lnTo>
+                  <a:lnTo>
+                    <a:pt x="3437881" y="2850229"/>
+                  </a:lnTo>
+                  <a:lnTo>
+                    <a:pt x="3366258" y="2838209"/>
+                  </a:lnTo>
+                  <a:lnTo>
+                    <a:pt x="3294636" y="2826010"/>
+                  </a:lnTo>
+                  <a:lnTo>
+                    <a:pt x="3223013" y="2813627"/>
+                  </a:lnTo>
+                  <a:lnTo>
+                    <a:pt x="3151391" y="2801060"/>
+                  </a:lnTo>
+                  <a:lnTo>
+                    <a:pt x="3079768" y="2788303"/>
+                  </a:lnTo>
+                  <a:lnTo>
+                    <a:pt x="3008146" y="2801362"/>
+                  </a:lnTo>
+                  <a:lnTo>
+                    <a:pt x="2936523" y="2831861"/>
+                  </a:lnTo>
+                  <a:lnTo>
+                    <a:pt x="2864901" y="2861268"/>
+                  </a:lnTo>
+                  <a:lnTo>
+                    <a:pt x="2793278" y="2889621"/>
+                  </a:lnTo>
+                  <a:lnTo>
+                    <a:pt x="2721655" y="2916959"/>
+                  </a:lnTo>
+                  <a:lnTo>
+                    <a:pt x="2650033" y="2943317"/>
+                  </a:lnTo>
+                  <a:lnTo>
+                    <a:pt x="2578410" y="2968730"/>
+                  </a:lnTo>
+                  <a:lnTo>
+                    <a:pt x="2506788" y="2993233"/>
+                  </a:lnTo>
+                  <a:lnTo>
+                    <a:pt x="2435165" y="3016858"/>
+                  </a:lnTo>
+                  <a:lnTo>
+                    <a:pt x="2363543" y="3039637"/>
+                  </a:lnTo>
+                  <a:lnTo>
+                    <a:pt x="2291920" y="3061600"/>
+                  </a:lnTo>
+                  <a:lnTo>
+                    <a:pt x="2220298" y="3082775"/>
+                  </a:lnTo>
+                  <a:lnTo>
+                    <a:pt x="2148675" y="3103193"/>
+                  </a:lnTo>
+                  <a:lnTo>
+                    <a:pt x="2077053" y="3122878"/>
+                  </a:lnTo>
+                  <a:lnTo>
+                    <a:pt x="2005430" y="3141858"/>
+                  </a:lnTo>
+                  <a:lnTo>
+                    <a:pt x="1933808" y="3160159"/>
+                  </a:lnTo>
+                  <a:lnTo>
+                    <a:pt x="1862185" y="3177803"/>
+                  </a:lnTo>
+                  <a:lnTo>
+                    <a:pt x="1790563" y="3194816"/>
+                  </a:lnTo>
+                  <a:lnTo>
+                    <a:pt x="1718940" y="3211219"/>
+                  </a:lnTo>
+                  <a:lnTo>
+                    <a:pt x="1647318" y="3227034"/>
+                  </a:lnTo>
+                  <a:lnTo>
+                    <a:pt x="1575695" y="3242282"/>
+                  </a:lnTo>
+                  <a:lnTo>
+                    <a:pt x="1504073" y="3256985"/>
+                  </a:lnTo>
+                  <a:lnTo>
+                    <a:pt x="1432450" y="3271160"/>
+                  </a:lnTo>
+                  <a:lnTo>
+                    <a:pt x="1360827" y="3284828"/>
+                  </a:lnTo>
+                  <a:lnTo>
+                    <a:pt x="1289205" y="3298006"/>
+                  </a:lnTo>
+                  <a:lnTo>
+                    <a:pt x="1217582" y="3310712"/>
+                  </a:lnTo>
+                  <a:lnTo>
+                    <a:pt x="1145960" y="3322962"/>
+                  </a:lnTo>
+                  <a:lnTo>
+                    <a:pt x="1074337" y="3334774"/>
+                  </a:lnTo>
+                  <a:lnTo>
+                    <a:pt x="1002715" y="3346163"/>
+                  </a:lnTo>
+                  <a:lnTo>
+                    <a:pt x="931092" y="3357143"/>
+                  </a:lnTo>
+                  <a:lnTo>
+                    <a:pt x="859470" y="3367730"/>
+                  </a:lnTo>
+                  <a:lnTo>
+                    <a:pt x="787847" y="3377938"/>
+                  </a:lnTo>
+                  <a:lnTo>
+                    <a:pt x="716225" y="3387780"/>
+                  </a:lnTo>
+                  <a:lnTo>
+                    <a:pt x="644602" y="3397270"/>
+                  </a:lnTo>
+                  <a:lnTo>
+                    <a:pt x="572980" y="3406419"/>
+                  </a:lnTo>
+                  <a:lnTo>
+                    <a:pt x="501357" y="3415241"/>
+                  </a:lnTo>
+                  <a:lnTo>
+                    <a:pt x="429735" y="3423746"/>
+                  </a:lnTo>
+                  <a:lnTo>
+                    <a:pt x="358112" y="3431947"/>
+                  </a:lnTo>
+                  <a:lnTo>
+                    <a:pt x="286490" y="3439854"/>
+                  </a:lnTo>
+                  <a:lnTo>
+                    <a:pt x="214867" y="3447478"/>
+                  </a:lnTo>
+                  <a:lnTo>
+                    <a:pt x="143245" y="3454829"/>
+                  </a:lnTo>
+                  <a:lnTo>
+                    <a:pt x="71622" y="3461916"/>
+                  </a:lnTo>
+                  <a:lnTo>
+                    <a:pt x="0" y="3468749"/>
                   </a:lnTo>
                   <a:close/>
                 </a:path>
@@ -3724,269 +3715,260 @@
           <p:spPr>
             <a:xfrm>
               <a:off x="1172049" y="1896563"/>
-              <a:ext cx="6018822" cy="2770410"/>
+              <a:ext cx="5867161" cy="2775356"/>
             </a:xfrm>
             <a:custGeom>
               <a:avLst/>
               <a:pathLst>
-                <a:path w="6018822" h="2770410">
+                <a:path w="5867161" h="2775356">
                   <a:moveTo>
-                    <a:pt x="0" y="1181659"/>
+                    <a:pt x="0" y="2014536"/>
                   </a:moveTo>
                   <a:lnTo>
-                    <a:pt x="71622" y="1241513"/>
-                  </a:lnTo>
-                  <a:lnTo>
-                    <a:pt x="143245" y="1299917"/>
-                  </a:lnTo>
-                  <a:lnTo>
-                    <a:pt x="214867" y="1356907"/>
-                  </a:lnTo>
-                  <a:lnTo>
-                    <a:pt x="286490" y="1412516"/>
-                  </a:lnTo>
-                  <a:lnTo>
-                    <a:pt x="358112" y="1466778"/>
-                  </a:lnTo>
-                  <a:lnTo>
-                    <a:pt x="429735" y="1519726"/>
-                  </a:lnTo>
-                  <a:lnTo>
-                    <a:pt x="501357" y="1571391"/>
-                  </a:lnTo>
-                  <a:lnTo>
-                    <a:pt x="572980" y="1621805"/>
-                  </a:lnTo>
-                  <a:lnTo>
-                    <a:pt x="644602" y="1670997"/>
-                  </a:lnTo>
-                  <a:lnTo>
-                    <a:pt x="716225" y="1718998"/>
-                  </a:lnTo>
-                  <a:lnTo>
-                    <a:pt x="787847" y="1765837"/>
-                  </a:lnTo>
-                  <a:lnTo>
-                    <a:pt x="859470" y="1811540"/>
-                  </a:lnTo>
-                  <a:lnTo>
-                    <a:pt x="931092" y="1856137"/>
-                  </a:lnTo>
-                  <a:lnTo>
-                    <a:pt x="1002715" y="1899653"/>
-                  </a:lnTo>
-                  <a:lnTo>
-                    <a:pt x="1074337" y="1942116"/>
-                  </a:lnTo>
-                  <a:lnTo>
-                    <a:pt x="1145960" y="1983549"/>
-                  </a:lnTo>
-                  <a:lnTo>
-                    <a:pt x="1217582" y="2023980"/>
-                  </a:lnTo>
-                  <a:lnTo>
-                    <a:pt x="1289205" y="2063430"/>
-                  </a:lnTo>
-                  <a:lnTo>
-                    <a:pt x="1360827" y="2101925"/>
-                  </a:lnTo>
-                  <a:lnTo>
-                    <a:pt x="1432450" y="2139488"/>
-                  </a:lnTo>
-                  <a:lnTo>
-                    <a:pt x="1504073" y="2176141"/>
-                  </a:lnTo>
-                  <a:lnTo>
-                    <a:pt x="1575695" y="2211906"/>
-                  </a:lnTo>
-                  <a:lnTo>
-                    <a:pt x="1647318" y="2246805"/>
-                  </a:lnTo>
-                  <a:lnTo>
-                    <a:pt x="1718940" y="2280858"/>
-                  </a:lnTo>
-                  <a:lnTo>
-                    <a:pt x="1790563" y="2314087"/>
-                  </a:lnTo>
-                  <a:lnTo>
-                    <a:pt x="1862185" y="2346510"/>
-                  </a:lnTo>
-                  <a:lnTo>
-                    <a:pt x="1933808" y="2378148"/>
-                  </a:lnTo>
-                  <a:lnTo>
-                    <a:pt x="2005430" y="2409020"/>
-                  </a:lnTo>
-                  <a:lnTo>
-                    <a:pt x="2077053" y="2439144"/>
-                  </a:lnTo>
-                  <a:lnTo>
-                    <a:pt x="2148675" y="2468539"/>
-                  </a:lnTo>
-                  <a:lnTo>
-                    <a:pt x="2220298" y="2497221"/>
-                  </a:lnTo>
-                  <a:lnTo>
-                    <a:pt x="2291920" y="2525208"/>
-                  </a:lnTo>
-                  <a:lnTo>
-                    <a:pt x="2363543" y="2552518"/>
-                  </a:lnTo>
-                  <a:lnTo>
-                    <a:pt x="2435165" y="2579166"/>
-                  </a:lnTo>
-                  <a:lnTo>
-                    <a:pt x="2506788" y="2605169"/>
-                  </a:lnTo>
-                  <a:lnTo>
-                    <a:pt x="2578410" y="2630542"/>
-                  </a:lnTo>
-                  <a:lnTo>
-                    <a:pt x="2650033" y="2655300"/>
-                  </a:lnTo>
-                  <a:lnTo>
-                    <a:pt x="2721655" y="2679458"/>
-                  </a:lnTo>
-                  <a:lnTo>
-                    <a:pt x="2793278" y="2703031"/>
-                  </a:lnTo>
-                  <a:lnTo>
-                    <a:pt x="2864901" y="2726034"/>
-                  </a:lnTo>
-                  <a:lnTo>
-                    <a:pt x="2936523" y="2748479"/>
-                  </a:lnTo>
-                  <a:lnTo>
-                    <a:pt x="3008146" y="2770380"/>
-                  </a:lnTo>
-                  <a:lnTo>
-                    <a:pt x="3079768" y="2770410"/>
-                  </a:lnTo>
-                  <a:lnTo>
-                    <a:pt x="3151391" y="2739330"/>
-                  </a:lnTo>
-                  <a:lnTo>
-                    <a:pt x="3223013" y="2707156"/>
-                  </a:lnTo>
-                  <a:lnTo>
-                    <a:pt x="3294636" y="2673847"/>
-                  </a:lnTo>
-                  <a:lnTo>
-                    <a:pt x="3366258" y="2639366"/>
-                  </a:lnTo>
-                  <a:lnTo>
-                    <a:pt x="3437881" y="2603670"/>
-                  </a:lnTo>
-                  <a:lnTo>
-                    <a:pt x="3509503" y="2566716"/>
-                  </a:lnTo>
-                  <a:lnTo>
-                    <a:pt x="3581126" y="2528461"/>
-                  </a:lnTo>
-                  <a:lnTo>
-                    <a:pt x="3652748" y="2488858"/>
-                  </a:lnTo>
-                  <a:lnTo>
-                    <a:pt x="3724371" y="2447859"/>
-                  </a:lnTo>
-                  <a:lnTo>
-                    <a:pt x="3795993" y="2405417"/>
-                  </a:lnTo>
-                  <a:lnTo>
-                    <a:pt x="3867616" y="2361479"/>
-                  </a:lnTo>
-                  <a:lnTo>
-                    <a:pt x="3939238" y="2315993"/>
-                  </a:lnTo>
-                  <a:lnTo>
-                    <a:pt x="4010861" y="2268905"/>
-                  </a:lnTo>
-                  <a:lnTo>
-                    <a:pt x="4082483" y="2220158"/>
-                  </a:lnTo>
-                  <a:lnTo>
-                    <a:pt x="4154106" y="2169694"/>
-                  </a:lnTo>
-                  <a:lnTo>
-                    <a:pt x="4225729" y="2117452"/>
-                  </a:lnTo>
-                  <a:lnTo>
-                    <a:pt x="4297351" y="2063369"/>
-                  </a:lnTo>
-                  <a:lnTo>
-                    <a:pt x="4368974" y="2007382"/>
-                  </a:lnTo>
-                  <a:lnTo>
-                    <a:pt x="4440596" y="1949422"/>
-                  </a:lnTo>
-                  <a:lnTo>
-                    <a:pt x="4512219" y="1889420"/>
-                  </a:lnTo>
-                  <a:lnTo>
-                    <a:pt x="4583841" y="1827304"/>
-                  </a:lnTo>
-                  <a:lnTo>
-                    <a:pt x="4655464" y="1763001"/>
-                  </a:lnTo>
-                  <a:lnTo>
-                    <a:pt x="4727086" y="1696432"/>
-                  </a:lnTo>
-                  <a:lnTo>
-                    <a:pt x="4798709" y="1627517"/>
-                  </a:lnTo>
-                  <a:lnTo>
-                    <a:pt x="4870331" y="1556175"/>
-                  </a:lnTo>
-                  <a:lnTo>
-                    <a:pt x="4941954" y="1482320"/>
-                  </a:lnTo>
-                  <a:lnTo>
-                    <a:pt x="5013576" y="1405863"/>
-                  </a:lnTo>
-                  <a:lnTo>
-                    <a:pt x="5085199" y="1326712"/>
-                  </a:lnTo>
-                  <a:lnTo>
-                    <a:pt x="5156821" y="1244774"/>
-                  </a:lnTo>
-                  <a:lnTo>
-                    <a:pt x="5228444" y="1159948"/>
-                  </a:lnTo>
-                  <a:lnTo>
-                    <a:pt x="5300066" y="1072134"/>
-                  </a:lnTo>
-                  <a:lnTo>
-                    <a:pt x="5371689" y="981227"/>
-                  </a:lnTo>
-                  <a:lnTo>
-                    <a:pt x="5443311" y="887117"/>
-                  </a:lnTo>
-                  <a:lnTo>
-                    <a:pt x="5514934" y="789692"/>
-                  </a:lnTo>
-                  <a:lnTo>
-                    <a:pt x="5586557" y="688835"/>
-                  </a:lnTo>
-                  <a:lnTo>
-                    <a:pt x="5658179" y="584425"/>
-                  </a:lnTo>
-                  <a:lnTo>
-                    <a:pt x="5729802" y="476336"/>
-                  </a:lnTo>
-                  <a:lnTo>
-                    <a:pt x="5801424" y="364440"/>
-                  </a:lnTo>
-                  <a:lnTo>
-                    <a:pt x="5873047" y="248602"/>
-                  </a:lnTo>
-                  <a:lnTo>
-                    <a:pt x="5944669" y="128683"/>
-                  </a:lnTo>
-                  <a:lnTo>
-                    <a:pt x="6016292" y="4539"/>
-                  </a:lnTo>
-                  <a:lnTo>
-                    <a:pt x="6018822" y="0"/>
+                    <a:pt x="71622" y="2038711"/>
+                  </a:lnTo>
+                  <a:lnTo>
+                    <a:pt x="143245" y="2062530"/>
+                  </a:lnTo>
+                  <a:lnTo>
+                    <a:pt x="214867" y="2085997"/>
+                  </a:lnTo>
+                  <a:lnTo>
+                    <a:pt x="286490" y="2109118"/>
+                  </a:lnTo>
+                  <a:lnTo>
+                    <a:pt x="358112" y="2131898"/>
+                  </a:lnTo>
+                  <a:lnTo>
+                    <a:pt x="429735" y="2154341"/>
+                  </a:lnTo>
+                  <a:lnTo>
+                    <a:pt x="501357" y="2176453"/>
+                  </a:lnTo>
+                  <a:lnTo>
+                    <a:pt x="572980" y="2198239"/>
+                  </a:lnTo>
+                  <a:lnTo>
+                    <a:pt x="644602" y="2219703"/>
+                  </a:lnTo>
+                  <a:lnTo>
+                    <a:pt x="716225" y="2240851"/>
+                  </a:lnTo>
+                  <a:lnTo>
+                    <a:pt x="787847" y="2261686"/>
+                  </a:lnTo>
+                  <a:lnTo>
+                    <a:pt x="859470" y="2282214"/>
+                  </a:lnTo>
+                  <a:lnTo>
+                    <a:pt x="931092" y="2302439"/>
+                  </a:lnTo>
+                  <a:lnTo>
+                    <a:pt x="1002715" y="2322366"/>
+                  </a:lnTo>
+                  <a:lnTo>
+                    <a:pt x="1074337" y="2341998"/>
+                  </a:lnTo>
+                  <a:lnTo>
+                    <a:pt x="1145960" y="2361341"/>
+                  </a:lnTo>
+                  <a:lnTo>
+                    <a:pt x="1217582" y="2380398"/>
+                  </a:lnTo>
+                  <a:lnTo>
+                    <a:pt x="1289205" y="2399174"/>
+                  </a:lnTo>
+                  <a:lnTo>
+                    <a:pt x="1360827" y="2417673"/>
+                  </a:lnTo>
+                  <a:lnTo>
+                    <a:pt x="1432450" y="2435899"/>
+                  </a:lnTo>
+                  <a:lnTo>
+                    <a:pt x="1504073" y="2453856"/>
+                  </a:lnTo>
+                  <a:lnTo>
+                    <a:pt x="1575695" y="2471548"/>
+                  </a:lnTo>
+                  <a:lnTo>
+                    <a:pt x="1647318" y="2488979"/>
+                  </a:lnTo>
+                  <a:lnTo>
+                    <a:pt x="1718940" y="2506152"/>
+                  </a:lnTo>
+                  <a:lnTo>
+                    <a:pt x="1790563" y="2523073"/>
+                  </a:lnTo>
+                  <a:lnTo>
+                    <a:pt x="1862185" y="2539743"/>
+                  </a:lnTo>
+                  <a:lnTo>
+                    <a:pt x="1933808" y="2556167"/>
+                  </a:lnTo>
+                  <a:lnTo>
+                    <a:pt x="2005430" y="2572349"/>
+                  </a:lnTo>
+                  <a:lnTo>
+                    <a:pt x="2077053" y="2588293"/>
+                  </a:lnTo>
+                  <a:lnTo>
+                    <a:pt x="2148675" y="2604000"/>
+                  </a:lnTo>
+                  <a:lnTo>
+                    <a:pt x="2220298" y="2619476"/>
+                  </a:lnTo>
+                  <a:lnTo>
+                    <a:pt x="2291920" y="2634724"/>
+                  </a:lnTo>
+                  <a:lnTo>
+                    <a:pt x="2363543" y="2649747"/>
+                  </a:lnTo>
+                  <a:lnTo>
+                    <a:pt x="2435165" y="2664548"/>
+                  </a:lnTo>
+                  <a:lnTo>
+                    <a:pt x="2506788" y="2679130"/>
+                  </a:lnTo>
+                  <a:lnTo>
+                    <a:pt x="2578410" y="2693497"/>
+                  </a:lnTo>
+                  <a:lnTo>
+                    <a:pt x="2650033" y="2707653"/>
+                  </a:lnTo>
+                  <a:lnTo>
+                    <a:pt x="2721655" y="2721599"/>
+                  </a:lnTo>
+                  <a:lnTo>
+                    <a:pt x="2793278" y="2735340"/>
+                  </a:lnTo>
+                  <a:lnTo>
+                    <a:pt x="2864901" y="2748877"/>
+                  </a:lnTo>
+                  <a:lnTo>
+                    <a:pt x="2936523" y="2762215"/>
+                  </a:lnTo>
+                  <a:lnTo>
+                    <a:pt x="3008146" y="2775356"/>
+                  </a:lnTo>
+                  <a:lnTo>
+                    <a:pt x="3079768" y="2769729"/>
+                  </a:lnTo>
+                  <a:lnTo>
+                    <a:pt x="3151391" y="2736921"/>
+                  </a:lnTo>
+                  <a:lnTo>
+                    <a:pt x="3223013" y="2702893"/>
+                  </a:lnTo>
+                  <a:lnTo>
+                    <a:pt x="3294636" y="2667601"/>
+                  </a:lnTo>
+                  <a:lnTo>
+                    <a:pt x="3366258" y="2630998"/>
+                  </a:lnTo>
+                  <a:lnTo>
+                    <a:pt x="3437881" y="2593035"/>
+                  </a:lnTo>
+                  <a:lnTo>
+                    <a:pt x="3509503" y="2553661"/>
+                  </a:lnTo>
+                  <a:lnTo>
+                    <a:pt x="3581126" y="2512824"/>
+                  </a:lnTo>
+                  <a:lnTo>
+                    <a:pt x="3652748" y="2470469"/>
+                  </a:lnTo>
+                  <a:lnTo>
+                    <a:pt x="3724371" y="2426541"/>
+                  </a:lnTo>
+                  <a:lnTo>
+                    <a:pt x="3795993" y="2380980"/>
+                  </a:lnTo>
+                  <a:lnTo>
+                    <a:pt x="3867616" y="2333726"/>
+                  </a:lnTo>
+                  <a:lnTo>
+                    <a:pt x="3939238" y="2284716"/>
+                  </a:lnTo>
+                  <a:lnTo>
+                    <a:pt x="4010861" y="2233885"/>
+                  </a:lnTo>
+                  <a:lnTo>
+                    <a:pt x="4082483" y="2181166"/>
+                  </a:lnTo>
+                  <a:lnTo>
+                    <a:pt x="4154106" y="2126487"/>
+                  </a:lnTo>
+                  <a:lnTo>
+                    <a:pt x="4225729" y="2069776"/>
+                  </a:lnTo>
+                  <a:lnTo>
+                    <a:pt x="4297351" y="2010958"/>
+                  </a:lnTo>
+                  <a:lnTo>
+                    <a:pt x="4368974" y="1949955"/>
+                  </a:lnTo>
+                  <a:lnTo>
+                    <a:pt x="4440596" y="1886685"/>
+                  </a:lnTo>
+                  <a:lnTo>
+                    <a:pt x="4512219" y="1821063"/>
+                  </a:lnTo>
+                  <a:lnTo>
+                    <a:pt x="4583841" y="1753003"/>
+                  </a:lnTo>
+                  <a:lnTo>
+                    <a:pt x="4655464" y="1682415"/>
+                  </a:lnTo>
+                  <a:lnTo>
+                    <a:pt x="4727086" y="1609203"/>
+                  </a:lnTo>
+                  <a:lnTo>
+                    <a:pt x="4798709" y="1533270"/>
+                  </a:lnTo>
+                  <a:lnTo>
+                    <a:pt x="4870331" y="1454517"/>
+                  </a:lnTo>
+                  <a:lnTo>
+                    <a:pt x="4941954" y="1372836"/>
+                  </a:lnTo>
+                  <a:lnTo>
+                    <a:pt x="5013576" y="1288121"/>
+                  </a:lnTo>
+                  <a:lnTo>
+                    <a:pt x="5085199" y="1200257"/>
+                  </a:lnTo>
+                  <a:lnTo>
+                    <a:pt x="5156821" y="1109129"/>
+                  </a:lnTo>
+                  <a:lnTo>
+                    <a:pt x="5228444" y="1014614"/>
+                  </a:lnTo>
+                  <a:lnTo>
+                    <a:pt x="5300066" y="916588"/>
+                  </a:lnTo>
+                  <a:lnTo>
+                    <a:pt x="5371689" y="814918"/>
+                  </a:lnTo>
+                  <a:lnTo>
+                    <a:pt x="5443311" y="709471"/>
+                  </a:lnTo>
+                  <a:lnTo>
+                    <a:pt x="5514934" y="600106"/>
+                  </a:lnTo>
+                  <a:lnTo>
+                    <a:pt x="5586557" y="486676"/>
+                  </a:lnTo>
+                  <a:lnTo>
+                    <a:pt x="5658179" y="369032"/>
+                  </a:lnTo>
+                  <a:lnTo>
+                    <a:pt x="5729802" y="247016"/>
+                  </a:lnTo>
+                  <a:lnTo>
+                    <a:pt x="5801424" y="120466"/>
+                  </a:lnTo>
+                  <a:lnTo>
+                    <a:pt x="5867161" y="0"/>
                   </a:lnTo>
                 </a:path>
               </a:pathLst>
@@ -4006,312 +3988,312 @@
           </p:nvSpPr>
           <p:spPr>
             <a:xfrm>
-              <a:off x="1172049" y="4688314"/>
-              <a:ext cx="7090630" cy="661812"/>
+              <a:off x="1172049" y="4684867"/>
+              <a:ext cx="7090630" cy="680445"/>
             </a:xfrm>
             <a:custGeom>
               <a:avLst/>
               <a:pathLst>
-                <a:path w="7090630" h="661812">
+                <a:path w="7090630" h="680445">
                   <a:moveTo>
-                    <a:pt x="7090630" y="642827"/>
+                    <a:pt x="7090630" y="488430"/>
                   </a:moveTo>
                   <a:lnTo>
-                    <a:pt x="7019007" y="637413"/>
-                  </a:lnTo>
-                  <a:lnTo>
-                    <a:pt x="6947385" y="631866"/>
-                  </a:lnTo>
-                  <a:lnTo>
-                    <a:pt x="6875762" y="626180"/>
-                  </a:lnTo>
-                  <a:lnTo>
-                    <a:pt x="6804139" y="620354"/>
-                  </a:lnTo>
-                  <a:lnTo>
-                    <a:pt x="6732517" y="614383"/>
-                  </a:lnTo>
-                  <a:lnTo>
-                    <a:pt x="6660894" y="608263"/>
-                  </a:lnTo>
-                  <a:lnTo>
-                    <a:pt x="6589272" y="601992"/>
-                  </a:lnTo>
-                  <a:lnTo>
-                    <a:pt x="6517649" y="595565"/>
-                  </a:lnTo>
-                  <a:lnTo>
-                    <a:pt x="6446027" y="588979"/>
-                  </a:lnTo>
-                  <a:lnTo>
-                    <a:pt x="6374404" y="582229"/>
-                  </a:lnTo>
-                  <a:lnTo>
-                    <a:pt x="6302782" y="575311"/>
-                  </a:lnTo>
-                  <a:lnTo>
-                    <a:pt x="6231159" y="568222"/>
-                  </a:lnTo>
-                  <a:lnTo>
-                    <a:pt x="6159537" y="560957"/>
-                  </a:lnTo>
-                  <a:lnTo>
-                    <a:pt x="6087914" y="553511"/>
-                  </a:lnTo>
-                  <a:lnTo>
-                    <a:pt x="6016292" y="545880"/>
-                  </a:lnTo>
-                  <a:lnTo>
-                    <a:pt x="5944669" y="538061"/>
-                  </a:lnTo>
-                  <a:lnTo>
-                    <a:pt x="5873047" y="530047"/>
-                  </a:lnTo>
-                  <a:lnTo>
-                    <a:pt x="5801424" y="521834"/>
-                  </a:lnTo>
-                  <a:lnTo>
-                    <a:pt x="5729802" y="513417"/>
-                  </a:lnTo>
-                  <a:lnTo>
-                    <a:pt x="5658179" y="504791"/>
-                  </a:lnTo>
-                  <a:lnTo>
-                    <a:pt x="5586557" y="495951"/>
-                  </a:lnTo>
-                  <a:lnTo>
-                    <a:pt x="5514934" y="486892"/>
-                  </a:lnTo>
-                  <a:lnTo>
-                    <a:pt x="5443311" y="477608"/>
-                  </a:lnTo>
-                  <a:lnTo>
-                    <a:pt x="5371689" y="468093"/>
-                  </a:lnTo>
-                  <a:lnTo>
-                    <a:pt x="5300066" y="458342"/>
-                  </a:lnTo>
-                  <a:lnTo>
-                    <a:pt x="5228444" y="448349"/>
-                  </a:lnTo>
-                  <a:lnTo>
-                    <a:pt x="5156821" y="438108"/>
-                  </a:lnTo>
-                  <a:lnTo>
-                    <a:pt x="5085199" y="427613"/>
-                  </a:lnTo>
-                  <a:lnTo>
-                    <a:pt x="5013576" y="416857"/>
-                  </a:lnTo>
-                  <a:lnTo>
-                    <a:pt x="4941954" y="405834"/>
-                  </a:lnTo>
-                  <a:lnTo>
-                    <a:pt x="4870331" y="394538"/>
-                  </a:lnTo>
-                  <a:lnTo>
-                    <a:pt x="4798709" y="382961"/>
-                  </a:lnTo>
-                  <a:lnTo>
-                    <a:pt x="4727086" y="371097"/>
-                  </a:lnTo>
-                  <a:lnTo>
-                    <a:pt x="4655464" y="358938"/>
-                  </a:lnTo>
-                  <a:lnTo>
-                    <a:pt x="4583841" y="346478"/>
-                  </a:lnTo>
-                  <a:lnTo>
-                    <a:pt x="4512219" y="333708"/>
-                  </a:lnTo>
-                  <a:lnTo>
-                    <a:pt x="4440596" y="320621"/>
-                  </a:lnTo>
-                  <a:lnTo>
-                    <a:pt x="4368974" y="307209"/>
-                  </a:lnTo>
-                  <a:lnTo>
-                    <a:pt x="4297351" y="293465"/>
-                  </a:lnTo>
-                  <a:lnTo>
-                    <a:pt x="4225729" y="279379"/>
-                  </a:lnTo>
-                  <a:lnTo>
-                    <a:pt x="4154106" y="264943"/>
-                  </a:lnTo>
-                  <a:lnTo>
-                    <a:pt x="4082483" y="250149"/>
-                  </a:lnTo>
-                  <a:lnTo>
-                    <a:pt x="4010861" y="234988"/>
-                  </a:lnTo>
-                  <a:lnTo>
-                    <a:pt x="3939238" y="219451"/>
-                  </a:lnTo>
-                  <a:lnTo>
-                    <a:pt x="3867616" y="203527"/>
-                  </a:lnTo>
-                  <a:lnTo>
-                    <a:pt x="3795993" y="187209"/>
-                  </a:lnTo>
-                  <a:lnTo>
-                    <a:pt x="3724371" y="170485"/>
-                  </a:lnTo>
-                  <a:lnTo>
-                    <a:pt x="3652748" y="153347"/>
-                  </a:lnTo>
-                  <a:lnTo>
-                    <a:pt x="3581126" y="135782"/>
-                  </a:lnTo>
-                  <a:lnTo>
-                    <a:pt x="3509503" y="117782"/>
-                  </a:lnTo>
-                  <a:lnTo>
-                    <a:pt x="3437881" y="99335"/>
-                  </a:lnTo>
-                  <a:lnTo>
-                    <a:pt x="3366258" y="80430"/>
-                  </a:lnTo>
-                  <a:lnTo>
-                    <a:pt x="3294636" y="61056"/>
-                  </a:lnTo>
-                  <a:lnTo>
-                    <a:pt x="3223013" y="41201"/>
-                  </a:lnTo>
-                  <a:lnTo>
-                    <a:pt x="3151391" y="20853"/>
+                    <a:pt x="7019007" y="482799"/>
+                  </a:lnTo>
+                  <a:lnTo>
+                    <a:pt x="6947385" y="477084"/>
+                  </a:lnTo>
+                  <a:lnTo>
+                    <a:pt x="6875762" y="471283"/>
+                  </a:lnTo>
+                  <a:lnTo>
+                    <a:pt x="6804139" y="465395"/>
+                  </a:lnTo>
+                  <a:lnTo>
+                    <a:pt x="6732517" y="459419"/>
+                  </a:lnTo>
+                  <a:lnTo>
+                    <a:pt x="6660894" y="453354"/>
+                  </a:lnTo>
+                  <a:lnTo>
+                    <a:pt x="6589272" y="447198"/>
+                  </a:lnTo>
+                  <a:lnTo>
+                    <a:pt x="6517649" y="440949"/>
+                  </a:lnTo>
+                  <a:lnTo>
+                    <a:pt x="6446027" y="434607"/>
+                  </a:lnTo>
+                  <a:lnTo>
+                    <a:pt x="6374404" y="428170"/>
+                  </a:lnTo>
+                  <a:lnTo>
+                    <a:pt x="6302782" y="421636"/>
+                  </a:lnTo>
+                  <a:lnTo>
+                    <a:pt x="6231159" y="415005"/>
+                  </a:lnTo>
+                  <a:lnTo>
+                    <a:pt x="6159537" y="408274"/>
+                  </a:lnTo>
+                  <a:lnTo>
+                    <a:pt x="6087914" y="401443"/>
+                  </a:lnTo>
+                  <a:lnTo>
+                    <a:pt x="6016292" y="394509"/>
+                  </a:lnTo>
+                  <a:lnTo>
+                    <a:pt x="5944669" y="387471"/>
+                  </a:lnTo>
+                  <a:lnTo>
+                    <a:pt x="5873047" y="380328"/>
+                  </a:lnTo>
+                  <a:lnTo>
+                    <a:pt x="5801424" y="373078"/>
+                  </a:lnTo>
+                  <a:lnTo>
+                    <a:pt x="5729802" y="365719"/>
+                  </a:lnTo>
+                  <a:lnTo>
+                    <a:pt x="5658179" y="358250"/>
+                  </a:lnTo>
+                  <a:lnTo>
+                    <a:pt x="5586557" y="350670"/>
+                  </a:lnTo>
+                  <a:lnTo>
+                    <a:pt x="5514934" y="342975"/>
+                  </a:lnTo>
+                  <a:lnTo>
+                    <a:pt x="5443311" y="335166"/>
+                  </a:lnTo>
+                  <a:lnTo>
+                    <a:pt x="5371689" y="327239"/>
+                  </a:lnTo>
+                  <a:lnTo>
+                    <a:pt x="5300066" y="319194"/>
+                  </a:lnTo>
+                  <a:lnTo>
+                    <a:pt x="5228444" y="311028"/>
+                  </a:lnTo>
+                  <a:lnTo>
+                    <a:pt x="5156821" y="302740"/>
+                  </a:lnTo>
+                  <a:lnTo>
+                    <a:pt x="5085199" y="294327"/>
+                  </a:lnTo>
+                  <a:lnTo>
+                    <a:pt x="5013576" y="285789"/>
+                  </a:lnTo>
+                  <a:lnTo>
+                    <a:pt x="4941954" y="277123"/>
+                  </a:lnTo>
+                  <a:lnTo>
+                    <a:pt x="4870331" y="268327"/>
+                  </a:lnTo>
+                  <a:lnTo>
+                    <a:pt x="4798709" y="259399"/>
+                  </a:lnTo>
+                  <a:lnTo>
+                    <a:pt x="4727086" y="250337"/>
+                  </a:lnTo>
+                  <a:lnTo>
+                    <a:pt x="4655464" y="241140"/>
+                  </a:lnTo>
+                  <a:lnTo>
+                    <a:pt x="4583841" y="231805"/>
+                  </a:lnTo>
+                  <a:lnTo>
+                    <a:pt x="4512219" y="222330"/>
+                  </a:lnTo>
+                  <a:lnTo>
+                    <a:pt x="4440596" y="212713"/>
+                  </a:lnTo>
+                  <a:lnTo>
+                    <a:pt x="4368974" y="202952"/>
+                  </a:lnTo>
+                  <a:lnTo>
+                    <a:pt x="4297351" y="193045"/>
+                  </a:lnTo>
+                  <a:lnTo>
+                    <a:pt x="4225729" y="182990"/>
+                  </a:lnTo>
+                  <a:lnTo>
+                    <a:pt x="4154106" y="172784"/>
+                  </a:lnTo>
+                  <a:lnTo>
+                    <a:pt x="4082483" y="162425"/>
+                  </a:lnTo>
+                  <a:lnTo>
+                    <a:pt x="4010861" y="151911"/>
+                  </a:lnTo>
+                  <a:lnTo>
+                    <a:pt x="3939238" y="141239"/>
+                  </a:lnTo>
+                  <a:lnTo>
+                    <a:pt x="3867616" y="130407"/>
+                  </a:lnTo>
+                  <a:lnTo>
+                    <a:pt x="3795993" y="119414"/>
+                  </a:lnTo>
+                  <a:lnTo>
+                    <a:pt x="3724371" y="108255"/>
+                  </a:lnTo>
+                  <a:lnTo>
+                    <a:pt x="3652748" y="96930"/>
+                  </a:lnTo>
+                  <a:lnTo>
+                    <a:pt x="3581126" y="85434"/>
+                  </a:lnTo>
+                  <a:lnTo>
+                    <a:pt x="3509503" y="73767"/>
+                  </a:lnTo>
+                  <a:lnTo>
+                    <a:pt x="3437881" y="61925"/>
+                  </a:lnTo>
+                  <a:lnTo>
+                    <a:pt x="3366258" y="49905"/>
+                  </a:lnTo>
+                  <a:lnTo>
+                    <a:pt x="3294636" y="37706"/>
+                  </a:lnTo>
+                  <a:lnTo>
+                    <a:pt x="3223013" y="25323"/>
+                  </a:lnTo>
+                  <a:lnTo>
+                    <a:pt x="3151391" y="12756"/>
                   </a:lnTo>
                   <a:lnTo>
                     <a:pt x="3079768" y="0"/>
                   </a:lnTo>
                   <a:lnTo>
-                    <a:pt x="3008146" y="8680"/>
-                  </a:lnTo>
-                  <a:lnTo>
-                    <a:pt x="2936523" y="37681"/>
-                  </a:lnTo>
-                  <a:lnTo>
-                    <a:pt x="2864901" y="65694"/>
-                  </a:lnTo>
-                  <a:lnTo>
-                    <a:pt x="2793278" y="92755"/>
-                  </a:lnTo>
-                  <a:lnTo>
-                    <a:pt x="2721655" y="118894"/>
-                  </a:lnTo>
-                  <a:lnTo>
-                    <a:pt x="2650033" y="144144"/>
-                  </a:lnTo>
-                  <a:lnTo>
-                    <a:pt x="2578410" y="168535"/>
-                  </a:lnTo>
-                  <a:lnTo>
-                    <a:pt x="2506788" y="192095"/>
-                  </a:lnTo>
-                  <a:lnTo>
-                    <a:pt x="2435165" y="214854"/>
-                  </a:lnTo>
-                  <a:lnTo>
-                    <a:pt x="2363543" y="236839"/>
-                  </a:lnTo>
-                  <a:lnTo>
-                    <a:pt x="2291920" y="258075"/>
-                  </a:lnTo>
-                  <a:lnTo>
-                    <a:pt x="2220298" y="278588"/>
-                  </a:lnTo>
-                  <a:lnTo>
-                    <a:pt x="2148675" y="298404"/>
-                  </a:lnTo>
-                  <a:lnTo>
-                    <a:pt x="2077053" y="317545"/>
-                  </a:lnTo>
-                  <a:lnTo>
-                    <a:pt x="2005430" y="336035"/>
-                  </a:lnTo>
-                  <a:lnTo>
-                    <a:pt x="1933808" y="353896"/>
-                  </a:lnTo>
-                  <a:lnTo>
-                    <a:pt x="1862185" y="371149"/>
-                  </a:lnTo>
-                  <a:lnTo>
-                    <a:pt x="1790563" y="387814"/>
-                  </a:lnTo>
-                  <a:lnTo>
-                    <a:pt x="1718940" y="403913"/>
-                  </a:lnTo>
-                  <a:lnTo>
-                    <a:pt x="1647318" y="419464"/>
-                  </a:lnTo>
-                  <a:lnTo>
-                    <a:pt x="1575695" y="434486"/>
-                  </a:lnTo>
-                  <a:lnTo>
-                    <a:pt x="1504073" y="448996"/>
-                  </a:lnTo>
-                  <a:lnTo>
-                    <a:pt x="1432450" y="463013"/>
-                  </a:lnTo>
-                  <a:lnTo>
-                    <a:pt x="1360827" y="476552"/>
-                  </a:lnTo>
-                  <a:lnTo>
-                    <a:pt x="1289205" y="489631"/>
-                  </a:lnTo>
-                  <a:lnTo>
-                    <a:pt x="1217582" y="502265"/>
-                  </a:lnTo>
-                  <a:lnTo>
-                    <a:pt x="1145960" y="514469"/>
-                  </a:lnTo>
-                  <a:lnTo>
-                    <a:pt x="1074337" y="526258"/>
-                  </a:lnTo>
-                  <a:lnTo>
-                    <a:pt x="1002715" y="537645"/>
-                  </a:lnTo>
-                  <a:lnTo>
-                    <a:pt x="931092" y="548645"/>
-                  </a:lnTo>
-                  <a:lnTo>
-                    <a:pt x="859470" y="559271"/>
-                  </a:lnTo>
-                  <a:lnTo>
-                    <a:pt x="787847" y="569535"/>
-                  </a:lnTo>
-                  <a:lnTo>
-                    <a:pt x="716225" y="579450"/>
-                  </a:lnTo>
-                  <a:lnTo>
-                    <a:pt x="644602" y="589027"/>
-                  </a:lnTo>
-                  <a:lnTo>
-                    <a:pt x="572980" y="598278"/>
-                  </a:lnTo>
-                  <a:lnTo>
-                    <a:pt x="501357" y="607215"/>
-                  </a:lnTo>
-                  <a:lnTo>
-                    <a:pt x="429735" y="615848"/>
-                  </a:lnTo>
-                  <a:lnTo>
-                    <a:pt x="358112" y="624186"/>
-                  </a:lnTo>
-                  <a:lnTo>
-                    <a:pt x="286490" y="632241"/>
-                  </a:lnTo>
-                  <a:lnTo>
-                    <a:pt x="214867" y="640022"/>
-                  </a:lnTo>
-                  <a:lnTo>
-                    <a:pt x="143245" y="647538"/>
-                  </a:lnTo>
-                  <a:lnTo>
-                    <a:pt x="71622" y="654799"/>
-                  </a:lnTo>
-                  <a:lnTo>
-                    <a:pt x="0" y="661812"/>
+                    <a:pt x="3008146" y="13058"/>
+                  </a:lnTo>
+                  <a:lnTo>
+                    <a:pt x="2936523" y="43557"/>
+                  </a:lnTo>
+                  <a:lnTo>
+                    <a:pt x="2864901" y="72964"/>
+                  </a:lnTo>
+                  <a:lnTo>
+                    <a:pt x="2793278" y="101317"/>
+                  </a:lnTo>
+                  <a:lnTo>
+                    <a:pt x="2721655" y="128655"/>
+                  </a:lnTo>
+                  <a:lnTo>
+                    <a:pt x="2650033" y="155013"/>
+                  </a:lnTo>
+                  <a:lnTo>
+                    <a:pt x="2578410" y="180426"/>
+                  </a:lnTo>
+                  <a:lnTo>
+                    <a:pt x="2506788" y="204929"/>
+                  </a:lnTo>
+                  <a:lnTo>
+                    <a:pt x="2435165" y="228554"/>
+                  </a:lnTo>
+                  <a:lnTo>
+                    <a:pt x="2363543" y="251333"/>
+                  </a:lnTo>
+                  <a:lnTo>
+                    <a:pt x="2291920" y="273296"/>
+                  </a:lnTo>
+                  <a:lnTo>
+                    <a:pt x="2220298" y="294471"/>
+                  </a:lnTo>
+                  <a:lnTo>
+                    <a:pt x="2148675" y="314889"/>
+                  </a:lnTo>
+                  <a:lnTo>
+                    <a:pt x="2077053" y="334574"/>
+                  </a:lnTo>
+                  <a:lnTo>
+                    <a:pt x="2005430" y="353554"/>
+                  </a:lnTo>
+                  <a:lnTo>
+                    <a:pt x="1933808" y="371855"/>
+                  </a:lnTo>
+                  <a:lnTo>
+                    <a:pt x="1862185" y="389499"/>
+                  </a:lnTo>
+                  <a:lnTo>
+                    <a:pt x="1790563" y="406512"/>
+                  </a:lnTo>
+                  <a:lnTo>
+                    <a:pt x="1718940" y="422915"/>
+                  </a:lnTo>
+                  <a:lnTo>
+                    <a:pt x="1647318" y="438730"/>
+                  </a:lnTo>
+                  <a:lnTo>
+                    <a:pt x="1575695" y="453979"/>
+                  </a:lnTo>
+                  <a:lnTo>
+                    <a:pt x="1504073" y="468681"/>
+                  </a:lnTo>
+                  <a:lnTo>
+                    <a:pt x="1432450" y="482856"/>
+                  </a:lnTo>
+                  <a:lnTo>
+                    <a:pt x="1360827" y="496524"/>
+                  </a:lnTo>
+                  <a:lnTo>
+                    <a:pt x="1289205" y="509702"/>
+                  </a:lnTo>
+                  <a:lnTo>
+                    <a:pt x="1217582" y="522408"/>
+                  </a:lnTo>
+                  <a:lnTo>
+                    <a:pt x="1145960" y="534659"/>
+                  </a:lnTo>
+                  <a:lnTo>
+                    <a:pt x="1074337" y="546470"/>
+                  </a:lnTo>
+                  <a:lnTo>
+                    <a:pt x="1002715" y="557859"/>
+                  </a:lnTo>
+                  <a:lnTo>
+                    <a:pt x="931092" y="568839"/>
+                  </a:lnTo>
+                  <a:lnTo>
+                    <a:pt x="859470" y="579426"/>
+                  </a:lnTo>
+                  <a:lnTo>
+                    <a:pt x="787847" y="589634"/>
+                  </a:lnTo>
+                  <a:lnTo>
+                    <a:pt x="716225" y="599476"/>
+                  </a:lnTo>
+                  <a:lnTo>
+                    <a:pt x="644602" y="608966"/>
+                  </a:lnTo>
+                  <a:lnTo>
+                    <a:pt x="572980" y="618115"/>
+                  </a:lnTo>
+                  <a:lnTo>
+                    <a:pt x="501357" y="626937"/>
+                  </a:lnTo>
+                  <a:lnTo>
+                    <a:pt x="429735" y="635442"/>
+                  </a:lnTo>
+                  <a:lnTo>
+                    <a:pt x="358112" y="643643"/>
+                  </a:lnTo>
+                  <a:lnTo>
+                    <a:pt x="286490" y="651550"/>
+                  </a:lnTo>
+                  <a:lnTo>
+                    <a:pt x="214867" y="659174"/>
+                  </a:lnTo>
+                  <a:lnTo>
+                    <a:pt x="143245" y="666525"/>
+                  </a:lnTo>
+                  <a:lnTo>
+                    <a:pt x="71622" y="673612"/>
+                  </a:lnTo>
+                  <a:lnTo>
+                    <a:pt x="0" y="680445"/>
                   </a:lnTo>
                 </a:path>
               </a:pathLst>
@@ -4331,309 +4313,309 @@
           </p:nvSpPr>
           <p:spPr>
             <a:xfrm>
-              <a:off x="1172049" y="4392833"/>
-              <a:ext cx="7090630" cy="455001"/>
+              <a:off x="1172049" y="3949018"/>
+              <a:ext cx="7090630" cy="1051337"/>
             </a:xfrm>
             <a:custGeom>
               <a:avLst/>
               <a:pathLst>
-                <a:path w="7090630" h="455001">
+                <a:path w="7090630" h="1051337">
                   <a:moveTo>
-                    <a:pt x="0" y="455001"/>
+                    <a:pt x="0" y="1051337"/>
                   </a:moveTo>
                   <a:lnTo>
-                    <a:pt x="71622" y="451449"/>
-                  </a:lnTo>
-                  <a:lnTo>
-                    <a:pt x="143245" y="447880"/>
-                  </a:lnTo>
-                  <a:lnTo>
-                    <a:pt x="214867" y="444293"/>
-                  </a:lnTo>
-                  <a:lnTo>
-                    <a:pt x="286490" y="440687"/>
-                  </a:lnTo>
-                  <a:lnTo>
-                    <a:pt x="358112" y="437063"/>
-                  </a:lnTo>
-                  <a:lnTo>
-                    <a:pt x="429735" y="433421"/>
-                  </a:lnTo>
-                  <a:lnTo>
-                    <a:pt x="501357" y="429761"/>
-                  </a:lnTo>
-                  <a:lnTo>
-                    <a:pt x="572980" y="426082"/>
-                  </a:lnTo>
-                  <a:lnTo>
-                    <a:pt x="644602" y="422384"/>
-                  </a:lnTo>
-                  <a:lnTo>
-                    <a:pt x="716225" y="418668"/>
-                  </a:lnTo>
-                  <a:lnTo>
-                    <a:pt x="787847" y="414932"/>
-                  </a:lnTo>
-                  <a:lnTo>
-                    <a:pt x="859470" y="411178"/>
-                  </a:lnTo>
-                  <a:lnTo>
-                    <a:pt x="931092" y="407405"/>
-                  </a:lnTo>
-                  <a:lnTo>
-                    <a:pt x="1002715" y="403613"/>
-                  </a:lnTo>
-                  <a:lnTo>
-                    <a:pt x="1074337" y="399801"/>
-                  </a:lnTo>
-                  <a:lnTo>
-                    <a:pt x="1145960" y="395971"/>
-                  </a:lnTo>
-                  <a:lnTo>
-                    <a:pt x="1217582" y="392120"/>
-                  </a:lnTo>
-                  <a:lnTo>
-                    <a:pt x="1289205" y="388251"/>
-                  </a:lnTo>
-                  <a:lnTo>
-                    <a:pt x="1360827" y="384361"/>
-                  </a:lnTo>
-                  <a:lnTo>
-                    <a:pt x="1432450" y="380452"/>
-                  </a:lnTo>
-                  <a:lnTo>
-                    <a:pt x="1504073" y="376524"/>
-                  </a:lnTo>
-                  <a:lnTo>
-                    <a:pt x="1575695" y="372575"/>
-                  </a:lnTo>
-                  <a:lnTo>
-                    <a:pt x="1647318" y="368606"/>
-                  </a:lnTo>
-                  <a:lnTo>
-                    <a:pt x="1718940" y="364618"/>
-                  </a:lnTo>
-                  <a:lnTo>
-                    <a:pt x="1790563" y="360609"/>
-                  </a:lnTo>
-                  <a:lnTo>
-                    <a:pt x="1862185" y="356580"/>
-                  </a:lnTo>
-                  <a:lnTo>
-                    <a:pt x="1933808" y="352530"/>
-                  </a:lnTo>
-                  <a:lnTo>
-                    <a:pt x="2005430" y="348460"/>
-                  </a:lnTo>
-                  <a:lnTo>
-                    <a:pt x="2077053" y="344369"/>
-                  </a:lnTo>
-                  <a:lnTo>
-                    <a:pt x="2148675" y="340258"/>
-                  </a:lnTo>
-                  <a:lnTo>
-                    <a:pt x="2220298" y="336125"/>
-                  </a:lnTo>
-                  <a:lnTo>
-                    <a:pt x="2291920" y="331972"/>
-                  </a:lnTo>
-                  <a:lnTo>
-                    <a:pt x="2363543" y="327798"/>
-                  </a:lnTo>
-                  <a:lnTo>
-                    <a:pt x="2435165" y="323603"/>
-                  </a:lnTo>
-                  <a:lnTo>
-                    <a:pt x="2506788" y="319386"/>
-                  </a:lnTo>
-                  <a:lnTo>
-                    <a:pt x="2578410" y="315148"/>
-                  </a:lnTo>
-                  <a:lnTo>
-                    <a:pt x="2650033" y="310889"/>
-                  </a:lnTo>
-                  <a:lnTo>
-                    <a:pt x="2721655" y="306608"/>
-                  </a:lnTo>
-                  <a:lnTo>
-                    <a:pt x="2793278" y="302305"/>
-                  </a:lnTo>
-                  <a:lnTo>
-                    <a:pt x="2864901" y="297981"/>
-                  </a:lnTo>
-                  <a:lnTo>
-                    <a:pt x="2936523" y="293634"/>
-                  </a:lnTo>
-                  <a:lnTo>
-                    <a:pt x="3008146" y="289266"/>
-                  </a:lnTo>
-                  <a:lnTo>
-                    <a:pt x="3079768" y="284876"/>
-                  </a:lnTo>
-                  <a:lnTo>
-                    <a:pt x="3151391" y="280463"/>
-                  </a:lnTo>
-                  <a:lnTo>
-                    <a:pt x="3223013" y="276028"/>
-                  </a:lnTo>
-                  <a:lnTo>
-                    <a:pt x="3294636" y="271570"/>
-                  </a:lnTo>
-                  <a:lnTo>
-                    <a:pt x="3366258" y="267090"/>
-                  </a:lnTo>
-                  <a:lnTo>
-                    <a:pt x="3437881" y="262588"/>
-                  </a:lnTo>
-                  <a:lnTo>
-                    <a:pt x="3509503" y="258062"/>
-                  </a:lnTo>
-                  <a:lnTo>
-                    <a:pt x="3581126" y="253514"/>
-                  </a:lnTo>
-                  <a:lnTo>
-                    <a:pt x="3652748" y="248942"/>
-                  </a:lnTo>
-                  <a:lnTo>
-                    <a:pt x="3724371" y="244348"/>
-                  </a:lnTo>
-                  <a:lnTo>
-                    <a:pt x="3795993" y="239730"/>
-                  </a:lnTo>
-                  <a:lnTo>
-                    <a:pt x="3867616" y="235088"/>
-                  </a:lnTo>
-                  <a:lnTo>
-                    <a:pt x="3939238" y="230424"/>
-                  </a:lnTo>
-                  <a:lnTo>
-                    <a:pt x="4010861" y="225735"/>
-                  </a:lnTo>
-                  <a:lnTo>
-                    <a:pt x="4082483" y="221023"/>
-                  </a:lnTo>
-                  <a:lnTo>
-                    <a:pt x="4154106" y="216287"/>
-                  </a:lnTo>
-                  <a:lnTo>
-                    <a:pt x="4225729" y="211527"/>
-                  </a:lnTo>
-                  <a:lnTo>
-                    <a:pt x="4297351" y="206743"/>
-                  </a:lnTo>
-                  <a:lnTo>
-                    <a:pt x="4368974" y="201935"/>
-                  </a:lnTo>
-                  <a:lnTo>
-                    <a:pt x="4440596" y="197102"/>
-                  </a:lnTo>
-                  <a:lnTo>
-                    <a:pt x="4512219" y="192245"/>
-                  </a:lnTo>
-                  <a:lnTo>
-                    <a:pt x="4583841" y="187363"/>
-                  </a:lnTo>
-                  <a:lnTo>
-                    <a:pt x="4655464" y="182457"/>
-                  </a:lnTo>
-                  <a:lnTo>
-                    <a:pt x="4727086" y="177526"/>
-                  </a:lnTo>
-                  <a:lnTo>
-                    <a:pt x="4798709" y="172569"/>
-                  </a:lnTo>
-                  <a:lnTo>
-                    <a:pt x="4870331" y="167588"/>
-                  </a:lnTo>
-                  <a:lnTo>
-                    <a:pt x="4941954" y="162582"/>
-                  </a:lnTo>
-                  <a:lnTo>
-                    <a:pt x="5013576" y="157550"/>
-                  </a:lnTo>
-                  <a:lnTo>
-                    <a:pt x="5085199" y="152492"/>
-                  </a:lnTo>
-                  <a:lnTo>
-                    <a:pt x="5156821" y="147409"/>
-                  </a:lnTo>
-                  <a:lnTo>
-                    <a:pt x="5228444" y="142301"/>
-                  </a:lnTo>
-                  <a:lnTo>
-                    <a:pt x="5300066" y="137166"/>
-                  </a:lnTo>
-                  <a:lnTo>
-                    <a:pt x="5371689" y="132005"/>
-                  </a:lnTo>
-                  <a:lnTo>
-                    <a:pt x="5443311" y="126819"/>
-                  </a:lnTo>
-                  <a:lnTo>
-                    <a:pt x="5514934" y="121606"/>
-                  </a:lnTo>
-                  <a:lnTo>
-                    <a:pt x="5586557" y="116366"/>
-                  </a:lnTo>
-                  <a:lnTo>
-                    <a:pt x="5658179" y="111100"/>
-                  </a:lnTo>
-                  <a:lnTo>
-                    <a:pt x="5729802" y="105808"/>
-                  </a:lnTo>
-                  <a:lnTo>
-                    <a:pt x="5801424" y="100489"/>
-                  </a:lnTo>
-                  <a:lnTo>
-                    <a:pt x="5873047" y="95142"/>
-                  </a:lnTo>
-                  <a:lnTo>
-                    <a:pt x="5944669" y="89769"/>
-                  </a:lnTo>
-                  <a:lnTo>
-                    <a:pt x="6016292" y="84368"/>
-                  </a:lnTo>
-                  <a:lnTo>
-                    <a:pt x="6087914" y="78940"/>
-                  </a:lnTo>
-                  <a:lnTo>
-                    <a:pt x="6159537" y="73485"/>
-                  </a:lnTo>
-                  <a:lnTo>
-                    <a:pt x="6231159" y="68002"/>
-                  </a:lnTo>
-                  <a:lnTo>
-                    <a:pt x="6302782" y="62491"/>
-                  </a:lnTo>
-                  <a:lnTo>
-                    <a:pt x="6374404" y="56952"/>
-                  </a:lnTo>
-                  <a:lnTo>
-                    <a:pt x="6446027" y="51386"/>
-                  </a:lnTo>
-                  <a:lnTo>
-                    <a:pt x="6517649" y="45791"/>
-                  </a:lnTo>
-                  <a:lnTo>
-                    <a:pt x="6589272" y="40168"/>
-                  </a:lnTo>
-                  <a:lnTo>
-                    <a:pt x="6660894" y="34516"/>
-                  </a:lnTo>
-                  <a:lnTo>
-                    <a:pt x="6732517" y="28836"/>
-                  </a:lnTo>
-                  <a:lnTo>
-                    <a:pt x="6804139" y="23126"/>
-                  </a:lnTo>
-                  <a:lnTo>
-                    <a:pt x="6875762" y="17388"/>
-                  </a:lnTo>
-                  <a:lnTo>
-                    <a:pt x="6947385" y="11621"/>
-                  </a:lnTo>
-                  <a:lnTo>
-                    <a:pt x="7019007" y="5825"/>
+                    <a:pt x="71622" y="1045372"/>
+                  </a:lnTo>
+                  <a:lnTo>
+                    <a:pt x="143245" y="1039343"/>
+                  </a:lnTo>
+                  <a:lnTo>
+                    <a:pt x="214867" y="1033248"/>
+                  </a:lnTo>
+                  <a:lnTo>
+                    <a:pt x="286490" y="1027087"/>
+                  </a:lnTo>
+                  <a:lnTo>
+                    <a:pt x="358112" y="1020859"/>
+                  </a:lnTo>
+                  <a:lnTo>
+                    <a:pt x="429735" y="1014564"/>
+                  </a:lnTo>
+                  <a:lnTo>
+                    <a:pt x="501357" y="1008199"/>
+                  </a:lnTo>
+                  <a:lnTo>
+                    <a:pt x="572980" y="1001766"/>
+                  </a:lnTo>
+                  <a:lnTo>
+                    <a:pt x="644602" y="995263"/>
+                  </a:lnTo>
+                  <a:lnTo>
+                    <a:pt x="716225" y="988689"/>
+                  </a:lnTo>
+                  <a:lnTo>
+                    <a:pt x="787847" y="982044"/>
+                  </a:lnTo>
+                  <a:lnTo>
+                    <a:pt x="859470" y="975326"/>
+                  </a:lnTo>
+                  <a:lnTo>
+                    <a:pt x="931092" y="968536"/>
+                  </a:lnTo>
+                  <a:lnTo>
+                    <a:pt x="1002715" y="961672"/>
+                  </a:lnTo>
+                  <a:lnTo>
+                    <a:pt x="1074337" y="954733"/>
+                  </a:lnTo>
+                  <a:lnTo>
+                    <a:pt x="1145960" y="947718"/>
+                  </a:lnTo>
+                  <a:lnTo>
+                    <a:pt x="1217582" y="940628"/>
+                  </a:lnTo>
+                  <a:lnTo>
+                    <a:pt x="1289205" y="933460"/>
+                  </a:lnTo>
+                  <a:lnTo>
+                    <a:pt x="1360827" y="926215"/>
+                  </a:lnTo>
+                  <a:lnTo>
+                    <a:pt x="1432450" y="918891"/>
+                  </a:lnTo>
+                  <a:lnTo>
+                    <a:pt x="1504073" y="911487"/>
+                  </a:lnTo>
+                  <a:lnTo>
+                    <a:pt x="1575695" y="904003"/>
+                  </a:lnTo>
+                  <a:lnTo>
+                    <a:pt x="1647318" y="896437"/>
+                  </a:lnTo>
+                  <a:lnTo>
+                    <a:pt x="1718940" y="888789"/>
+                  </a:lnTo>
+                  <a:lnTo>
+                    <a:pt x="1790563" y="881058"/>
+                  </a:lnTo>
+                  <a:lnTo>
+                    <a:pt x="1862185" y="873243"/>
+                  </a:lnTo>
+                  <a:lnTo>
+                    <a:pt x="1933808" y="865343"/>
+                  </a:lnTo>
+                  <a:lnTo>
+                    <a:pt x="2005430" y="857358"/>
+                  </a:lnTo>
+                  <a:lnTo>
+                    <a:pt x="2077053" y="849285"/>
+                  </a:lnTo>
+                  <a:lnTo>
+                    <a:pt x="2148675" y="841125"/>
+                  </a:lnTo>
+                  <a:lnTo>
+                    <a:pt x="2220298" y="832876"/>
+                  </a:lnTo>
+                  <a:lnTo>
+                    <a:pt x="2291920" y="824538"/>
+                  </a:lnTo>
+                  <a:lnTo>
+                    <a:pt x="2363543" y="816108"/>
+                  </a:lnTo>
+                  <a:lnTo>
+                    <a:pt x="2435165" y="807588"/>
+                  </a:lnTo>
+                  <a:lnTo>
+                    <a:pt x="2506788" y="798974"/>
+                  </a:lnTo>
+                  <a:lnTo>
+                    <a:pt x="2578410" y="790267"/>
+                  </a:lnTo>
+                  <a:lnTo>
+                    <a:pt x="2650033" y="781466"/>
+                  </a:lnTo>
+                  <a:lnTo>
+                    <a:pt x="2721655" y="772569"/>
+                  </a:lnTo>
+                  <a:lnTo>
+                    <a:pt x="2793278" y="763575"/>
+                  </a:lnTo>
+                  <a:lnTo>
+                    <a:pt x="2864901" y="754483"/>
+                  </a:lnTo>
+                  <a:lnTo>
+                    <a:pt x="2936523" y="745293"/>
+                  </a:lnTo>
+                  <a:lnTo>
+                    <a:pt x="3008146" y="736002"/>
+                  </a:lnTo>
+                  <a:lnTo>
+                    <a:pt x="3079768" y="726611"/>
+                  </a:lnTo>
+                  <a:lnTo>
+                    <a:pt x="3151391" y="717118"/>
+                  </a:lnTo>
+                  <a:lnTo>
+                    <a:pt x="3223013" y="707521"/>
+                  </a:lnTo>
+                  <a:lnTo>
+                    <a:pt x="3294636" y="697820"/>
+                  </a:lnTo>
+                  <a:lnTo>
+                    <a:pt x="3366258" y="688014"/>
+                  </a:lnTo>
+                  <a:lnTo>
+                    <a:pt x="3437881" y="678101"/>
+                  </a:lnTo>
+                  <a:lnTo>
+                    <a:pt x="3509503" y="668081"/>
+                  </a:lnTo>
+                  <a:lnTo>
+                    <a:pt x="3581126" y="657951"/>
+                  </a:lnTo>
+                  <a:lnTo>
+                    <a:pt x="3652748" y="647712"/>
+                  </a:lnTo>
+                  <a:lnTo>
+                    <a:pt x="3724371" y="637361"/>
+                  </a:lnTo>
+                  <a:lnTo>
+                    <a:pt x="3795993" y="626898"/>
+                  </a:lnTo>
+                  <a:lnTo>
+                    <a:pt x="3867616" y="616321"/>
+                  </a:lnTo>
+                  <a:lnTo>
+                    <a:pt x="3939238" y="605629"/>
+                  </a:lnTo>
+                  <a:lnTo>
+                    <a:pt x="4010861" y="594821"/>
+                  </a:lnTo>
+                  <a:lnTo>
+                    <a:pt x="4082483" y="583896"/>
+                  </a:lnTo>
+                  <a:lnTo>
+                    <a:pt x="4154106" y="572851"/>
+                  </a:lnTo>
+                  <a:lnTo>
+                    <a:pt x="4225729" y="561687"/>
+                  </a:lnTo>
+                  <a:lnTo>
+                    <a:pt x="4297351" y="550401"/>
+                  </a:lnTo>
+                  <a:lnTo>
+                    <a:pt x="4368974" y="538993"/>
+                  </a:lnTo>
+                  <a:lnTo>
+                    <a:pt x="4440596" y="527461"/>
+                  </a:lnTo>
+                  <a:lnTo>
+                    <a:pt x="4512219" y="515803"/>
+                  </a:lnTo>
+                  <a:lnTo>
+                    <a:pt x="4583841" y="504019"/>
+                  </a:lnTo>
+                  <a:lnTo>
+                    <a:pt x="4655464" y="492107"/>
+                  </a:lnTo>
+                  <a:lnTo>
+                    <a:pt x="4727086" y="480065"/>
+                  </a:lnTo>
+                  <a:lnTo>
+                    <a:pt x="4798709" y="467893"/>
+                  </a:lnTo>
+                  <a:lnTo>
+                    <a:pt x="4870331" y="455588"/>
+                  </a:lnTo>
+                  <a:lnTo>
+                    <a:pt x="4941954" y="443149"/>
+                  </a:lnTo>
+                  <a:lnTo>
+                    <a:pt x="5013576" y="430575"/>
+                  </a:lnTo>
+                  <a:lnTo>
+                    <a:pt x="5085199" y="417865"/>
+                  </a:lnTo>
+                  <a:lnTo>
+                    <a:pt x="5156821" y="405016"/>
+                  </a:lnTo>
+                  <a:lnTo>
+                    <a:pt x="5228444" y="392028"/>
+                  </a:lnTo>
+                  <a:lnTo>
+                    <a:pt x="5300066" y="378899"/>
+                  </a:lnTo>
+                  <a:lnTo>
+                    <a:pt x="5371689" y="365627"/>
+                  </a:lnTo>
+                  <a:lnTo>
+                    <a:pt x="5443311" y="352211"/>
+                  </a:lnTo>
+                  <a:lnTo>
+                    <a:pt x="5514934" y="338649"/>
+                  </a:lnTo>
+                  <a:lnTo>
+                    <a:pt x="5586557" y="324939"/>
+                  </a:lnTo>
+                  <a:lnTo>
+                    <a:pt x="5658179" y="311081"/>
+                  </a:lnTo>
+                  <a:lnTo>
+                    <a:pt x="5729802" y="297072"/>
+                  </a:lnTo>
+                  <a:lnTo>
+                    <a:pt x="5801424" y="282911"/>
+                  </a:lnTo>
+                  <a:lnTo>
+                    <a:pt x="5873047" y="268595"/>
+                  </a:lnTo>
+                  <a:lnTo>
+                    <a:pt x="5944669" y="254125"/>
+                  </a:lnTo>
+                  <a:lnTo>
+                    <a:pt x="6016292" y="239497"/>
+                  </a:lnTo>
+                  <a:lnTo>
+                    <a:pt x="6087914" y="224710"/>
+                  </a:lnTo>
+                  <a:lnTo>
+                    <a:pt x="6159537" y="209762"/>
+                  </a:lnTo>
+                  <a:lnTo>
+                    <a:pt x="6231159" y="194652"/>
+                  </a:lnTo>
+                  <a:lnTo>
+                    <a:pt x="6302782" y="179378"/>
+                  </a:lnTo>
+                  <a:lnTo>
+                    <a:pt x="6374404" y="163938"/>
+                  </a:lnTo>
+                  <a:lnTo>
+                    <a:pt x="6446027" y="148330"/>
+                  </a:lnTo>
+                  <a:lnTo>
+                    <a:pt x="6517649" y="132552"/>
+                  </a:lnTo>
+                  <a:lnTo>
+                    <a:pt x="6589272" y="116603"/>
+                  </a:lnTo>
+                  <a:lnTo>
+                    <a:pt x="6660894" y="100481"/>
+                  </a:lnTo>
+                  <a:lnTo>
+                    <a:pt x="6732517" y="84183"/>
+                  </a:lnTo>
+                  <a:lnTo>
+                    <a:pt x="6804139" y="67708"/>
+                  </a:lnTo>
+                  <a:lnTo>
+                    <a:pt x="6875762" y="51055"/>
+                  </a:lnTo>
+                  <a:lnTo>
+                    <a:pt x="6947385" y="34220"/>
+                  </a:lnTo>
+                  <a:lnTo>
+                    <a:pt x="7019007" y="17202"/>
                   </a:lnTo>
                   <a:lnTo>
                     <a:pt x="7090630" y="0"/>

--- a/docs/plots/carbo/jx_carbo_linsubhr_dosedisc_aki2.pptx
+++ b/docs/plots/carbo/jx_carbo_linsubhr_dosedisc_aki2.pptx
@@ -3132,563 +3132,572 @@
           <p:spPr>
             <a:xfrm>
               <a:off x="1172049" y="1896563"/>
-              <a:ext cx="7090630" cy="3468749"/>
+              <a:ext cx="7090630" cy="3453563"/>
             </a:xfrm>
             <a:custGeom>
               <a:avLst/>
               <a:pathLst>
-                <a:path w="7090630" h="3468749">
+                <a:path w="7090630" h="3453563">
                   <a:moveTo>
-                    <a:pt x="0" y="2014536"/>
+                    <a:pt x="0" y="1181659"/>
                   </a:moveTo>
                   <a:lnTo>
-                    <a:pt x="71622" y="2038711"/>
-                  </a:lnTo>
-                  <a:lnTo>
-                    <a:pt x="143245" y="2062530"/>
-                  </a:lnTo>
-                  <a:lnTo>
-                    <a:pt x="214867" y="2085997"/>
-                  </a:lnTo>
-                  <a:lnTo>
-                    <a:pt x="286490" y="2109118"/>
-                  </a:lnTo>
-                  <a:lnTo>
-                    <a:pt x="358112" y="2131898"/>
-                  </a:lnTo>
-                  <a:lnTo>
-                    <a:pt x="429735" y="2154341"/>
-                  </a:lnTo>
-                  <a:lnTo>
-                    <a:pt x="501357" y="2176453"/>
-                  </a:lnTo>
-                  <a:lnTo>
-                    <a:pt x="572980" y="2198239"/>
-                  </a:lnTo>
-                  <a:lnTo>
-                    <a:pt x="644602" y="2219703"/>
-                  </a:lnTo>
-                  <a:lnTo>
-                    <a:pt x="716225" y="2240851"/>
-                  </a:lnTo>
-                  <a:lnTo>
-                    <a:pt x="787847" y="2261686"/>
-                  </a:lnTo>
-                  <a:lnTo>
-                    <a:pt x="859470" y="2282214"/>
-                  </a:lnTo>
-                  <a:lnTo>
-                    <a:pt x="931092" y="2302439"/>
-                  </a:lnTo>
-                  <a:lnTo>
-                    <a:pt x="1002715" y="2322366"/>
-                  </a:lnTo>
-                  <a:lnTo>
-                    <a:pt x="1074337" y="2341998"/>
-                  </a:lnTo>
-                  <a:lnTo>
-                    <a:pt x="1145960" y="2361341"/>
-                  </a:lnTo>
-                  <a:lnTo>
-                    <a:pt x="1217582" y="2380398"/>
-                  </a:lnTo>
-                  <a:lnTo>
-                    <a:pt x="1289205" y="2399174"/>
-                  </a:lnTo>
-                  <a:lnTo>
-                    <a:pt x="1360827" y="2417673"/>
-                  </a:lnTo>
-                  <a:lnTo>
-                    <a:pt x="1432450" y="2435899"/>
-                  </a:lnTo>
-                  <a:lnTo>
-                    <a:pt x="1504073" y="2453856"/>
-                  </a:lnTo>
-                  <a:lnTo>
-                    <a:pt x="1575695" y="2471548"/>
-                  </a:lnTo>
-                  <a:lnTo>
-                    <a:pt x="1647318" y="2488979"/>
-                  </a:lnTo>
-                  <a:lnTo>
-                    <a:pt x="1718940" y="2506152"/>
-                  </a:lnTo>
-                  <a:lnTo>
-                    <a:pt x="1790563" y="2523073"/>
-                  </a:lnTo>
-                  <a:lnTo>
-                    <a:pt x="1862185" y="2539743"/>
-                  </a:lnTo>
-                  <a:lnTo>
-                    <a:pt x="1933808" y="2556167"/>
-                  </a:lnTo>
-                  <a:lnTo>
-                    <a:pt x="2005430" y="2572349"/>
-                  </a:lnTo>
-                  <a:lnTo>
-                    <a:pt x="2077053" y="2588293"/>
-                  </a:lnTo>
-                  <a:lnTo>
-                    <a:pt x="2148675" y="2604000"/>
-                  </a:lnTo>
-                  <a:lnTo>
-                    <a:pt x="2220298" y="2619476"/>
-                  </a:lnTo>
-                  <a:lnTo>
-                    <a:pt x="2291920" y="2634724"/>
-                  </a:lnTo>
-                  <a:lnTo>
-                    <a:pt x="2363543" y="2649747"/>
-                  </a:lnTo>
-                  <a:lnTo>
-                    <a:pt x="2435165" y="2664548"/>
-                  </a:lnTo>
-                  <a:lnTo>
-                    <a:pt x="2506788" y="2679130"/>
-                  </a:lnTo>
-                  <a:lnTo>
-                    <a:pt x="2578410" y="2693497"/>
-                  </a:lnTo>
-                  <a:lnTo>
-                    <a:pt x="2650033" y="2707653"/>
-                  </a:lnTo>
-                  <a:lnTo>
-                    <a:pt x="2721655" y="2721599"/>
-                  </a:lnTo>
-                  <a:lnTo>
-                    <a:pt x="2793278" y="2735340"/>
-                  </a:lnTo>
-                  <a:lnTo>
-                    <a:pt x="2864901" y="2748877"/>
-                  </a:lnTo>
-                  <a:lnTo>
-                    <a:pt x="2936523" y="2762215"/>
-                  </a:lnTo>
-                  <a:lnTo>
-                    <a:pt x="3008146" y="2775356"/>
-                  </a:lnTo>
-                  <a:lnTo>
-                    <a:pt x="3079768" y="2769729"/>
-                  </a:lnTo>
-                  <a:lnTo>
-                    <a:pt x="3151391" y="2736921"/>
-                  </a:lnTo>
-                  <a:lnTo>
-                    <a:pt x="3223013" y="2702893"/>
-                  </a:lnTo>
-                  <a:lnTo>
-                    <a:pt x="3294636" y="2667601"/>
-                  </a:lnTo>
-                  <a:lnTo>
-                    <a:pt x="3366258" y="2630998"/>
-                  </a:lnTo>
-                  <a:lnTo>
-                    <a:pt x="3437881" y="2593035"/>
-                  </a:lnTo>
-                  <a:lnTo>
-                    <a:pt x="3509503" y="2553661"/>
-                  </a:lnTo>
-                  <a:lnTo>
-                    <a:pt x="3581126" y="2512824"/>
-                  </a:lnTo>
-                  <a:lnTo>
-                    <a:pt x="3652748" y="2470469"/>
-                  </a:lnTo>
-                  <a:lnTo>
-                    <a:pt x="3724371" y="2426541"/>
-                  </a:lnTo>
-                  <a:lnTo>
-                    <a:pt x="3795993" y="2380980"/>
-                  </a:lnTo>
-                  <a:lnTo>
-                    <a:pt x="3867616" y="2333726"/>
-                  </a:lnTo>
-                  <a:lnTo>
-                    <a:pt x="3939238" y="2284716"/>
-                  </a:lnTo>
-                  <a:lnTo>
-                    <a:pt x="4010861" y="2233885"/>
-                  </a:lnTo>
-                  <a:lnTo>
-                    <a:pt x="4082483" y="2181166"/>
-                  </a:lnTo>
-                  <a:lnTo>
-                    <a:pt x="4154106" y="2126487"/>
-                  </a:lnTo>
-                  <a:lnTo>
-                    <a:pt x="4225729" y="2069776"/>
-                  </a:lnTo>
-                  <a:lnTo>
-                    <a:pt x="4297351" y="2010958"/>
-                  </a:lnTo>
-                  <a:lnTo>
-                    <a:pt x="4368974" y="1949955"/>
-                  </a:lnTo>
-                  <a:lnTo>
-                    <a:pt x="4440596" y="1886685"/>
-                  </a:lnTo>
-                  <a:lnTo>
-                    <a:pt x="4512219" y="1821063"/>
-                  </a:lnTo>
-                  <a:lnTo>
-                    <a:pt x="4583841" y="1753003"/>
-                  </a:lnTo>
-                  <a:lnTo>
-                    <a:pt x="4655464" y="1682415"/>
-                  </a:lnTo>
-                  <a:lnTo>
-                    <a:pt x="4727086" y="1609203"/>
-                  </a:lnTo>
-                  <a:lnTo>
-                    <a:pt x="4798709" y="1533270"/>
-                  </a:lnTo>
-                  <a:lnTo>
-                    <a:pt x="4870331" y="1454517"/>
-                  </a:lnTo>
-                  <a:lnTo>
-                    <a:pt x="4941954" y="1372836"/>
-                  </a:lnTo>
-                  <a:lnTo>
-                    <a:pt x="5013576" y="1288121"/>
-                  </a:lnTo>
-                  <a:lnTo>
-                    <a:pt x="5085199" y="1200257"/>
-                  </a:lnTo>
-                  <a:lnTo>
-                    <a:pt x="5156821" y="1109129"/>
-                  </a:lnTo>
-                  <a:lnTo>
-                    <a:pt x="5228444" y="1014614"/>
-                  </a:lnTo>
-                  <a:lnTo>
-                    <a:pt x="5300066" y="916588"/>
-                  </a:lnTo>
-                  <a:lnTo>
-                    <a:pt x="5371689" y="814918"/>
-                  </a:lnTo>
-                  <a:lnTo>
-                    <a:pt x="5443311" y="709471"/>
-                  </a:lnTo>
-                  <a:lnTo>
-                    <a:pt x="5514934" y="600106"/>
-                  </a:lnTo>
-                  <a:lnTo>
-                    <a:pt x="5586557" y="486676"/>
-                  </a:lnTo>
-                  <a:lnTo>
-                    <a:pt x="5658179" y="369032"/>
-                  </a:lnTo>
-                  <a:lnTo>
-                    <a:pt x="5729802" y="247016"/>
-                  </a:lnTo>
-                  <a:lnTo>
-                    <a:pt x="5801424" y="120466"/>
-                  </a:lnTo>
-                  <a:lnTo>
-                    <a:pt x="5867161" y="0"/>
+                    <a:pt x="71622" y="1241513"/>
+                  </a:lnTo>
+                  <a:lnTo>
+                    <a:pt x="143245" y="1299917"/>
+                  </a:lnTo>
+                  <a:lnTo>
+                    <a:pt x="214867" y="1356907"/>
+                  </a:lnTo>
+                  <a:lnTo>
+                    <a:pt x="286490" y="1412516"/>
+                  </a:lnTo>
+                  <a:lnTo>
+                    <a:pt x="358112" y="1466778"/>
+                  </a:lnTo>
+                  <a:lnTo>
+                    <a:pt x="429735" y="1519726"/>
+                  </a:lnTo>
+                  <a:lnTo>
+                    <a:pt x="501357" y="1571391"/>
+                  </a:lnTo>
+                  <a:lnTo>
+                    <a:pt x="572980" y="1621805"/>
+                  </a:lnTo>
+                  <a:lnTo>
+                    <a:pt x="644602" y="1670997"/>
+                  </a:lnTo>
+                  <a:lnTo>
+                    <a:pt x="716225" y="1718998"/>
+                  </a:lnTo>
+                  <a:lnTo>
+                    <a:pt x="787847" y="1765837"/>
+                  </a:lnTo>
+                  <a:lnTo>
+                    <a:pt x="859470" y="1811540"/>
+                  </a:lnTo>
+                  <a:lnTo>
+                    <a:pt x="931092" y="1856137"/>
+                  </a:lnTo>
+                  <a:lnTo>
+                    <a:pt x="1002715" y="1899653"/>
+                  </a:lnTo>
+                  <a:lnTo>
+                    <a:pt x="1074337" y="1942116"/>
+                  </a:lnTo>
+                  <a:lnTo>
+                    <a:pt x="1145960" y="1983549"/>
+                  </a:lnTo>
+                  <a:lnTo>
+                    <a:pt x="1217582" y="2023980"/>
+                  </a:lnTo>
+                  <a:lnTo>
+                    <a:pt x="1289205" y="2063430"/>
+                  </a:lnTo>
+                  <a:lnTo>
+                    <a:pt x="1360827" y="2101925"/>
+                  </a:lnTo>
+                  <a:lnTo>
+                    <a:pt x="1432450" y="2139488"/>
+                  </a:lnTo>
+                  <a:lnTo>
+                    <a:pt x="1504073" y="2176141"/>
+                  </a:lnTo>
+                  <a:lnTo>
+                    <a:pt x="1575695" y="2211906"/>
+                  </a:lnTo>
+                  <a:lnTo>
+                    <a:pt x="1647318" y="2246805"/>
+                  </a:lnTo>
+                  <a:lnTo>
+                    <a:pt x="1718940" y="2280858"/>
+                  </a:lnTo>
+                  <a:lnTo>
+                    <a:pt x="1790563" y="2314087"/>
+                  </a:lnTo>
+                  <a:lnTo>
+                    <a:pt x="1862185" y="2346510"/>
+                  </a:lnTo>
+                  <a:lnTo>
+                    <a:pt x="1933808" y="2378148"/>
+                  </a:lnTo>
+                  <a:lnTo>
+                    <a:pt x="2005430" y="2409020"/>
+                  </a:lnTo>
+                  <a:lnTo>
+                    <a:pt x="2077053" y="2439144"/>
+                  </a:lnTo>
+                  <a:lnTo>
+                    <a:pt x="2148675" y="2468539"/>
+                  </a:lnTo>
+                  <a:lnTo>
+                    <a:pt x="2220298" y="2497221"/>
+                  </a:lnTo>
+                  <a:lnTo>
+                    <a:pt x="2291920" y="2525208"/>
+                  </a:lnTo>
+                  <a:lnTo>
+                    <a:pt x="2363543" y="2552518"/>
+                  </a:lnTo>
+                  <a:lnTo>
+                    <a:pt x="2435165" y="2579166"/>
+                  </a:lnTo>
+                  <a:lnTo>
+                    <a:pt x="2506788" y="2605169"/>
+                  </a:lnTo>
+                  <a:lnTo>
+                    <a:pt x="2578410" y="2630542"/>
+                  </a:lnTo>
+                  <a:lnTo>
+                    <a:pt x="2650033" y="2655300"/>
+                  </a:lnTo>
+                  <a:lnTo>
+                    <a:pt x="2721655" y="2679458"/>
+                  </a:lnTo>
+                  <a:lnTo>
+                    <a:pt x="2793278" y="2703031"/>
+                  </a:lnTo>
+                  <a:lnTo>
+                    <a:pt x="2864901" y="2726034"/>
+                  </a:lnTo>
+                  <a:lnTo>
+                    <a:pt x="2936523" y="2748479"/>
+                  </a:lnTo>
+                  <a:lnTo>
+                    <a:pt x="3008146" y="2770380"/>
+                  </a:lnTo>
+                  <a:lnTo>
+                    <a:pt x="3079768" y="2770410"/>
+                  </a:lnTo>
+                  <a:lnTo>
+                    <a:pt x="3151391" y="2739330"/>
+                  </a:lnTo>
+                  <a:lnTo>
+                    <a:pt x="3223013" y="2707156"/>
+                  </a:lnTo>
+                  <a:lnTo>
+                    <a:pt x="3294636" y="2673847"/>
+                  </a:lnTo>
+                  <a:lnTo>
+                    <a:pt x="3366258" y="2639366"/>
+                  </a:lnTo>
+                  <a:lnTo>
+                    <a:pt x="3437881" y="2603670"/>
+                  </a:lnTo>
+                  <a:lnTo>
+                    <a:pt x="3509503" y="2566716"/>
+                  </a:lnTo>
+                  <a:lnTo>
+                    <a:pt x="3581126" y="2528461"/>
+                  </a:lnTo>
+                  <a:lnTo>
+                    <a:pt x="3652748" y="2488858"/>
+                  </a:lnTo>
+                  <a:lnTo>
+                    <a:pt x="3724371" y="2447859"/>
+                  </a:lnTo>
+                  <a:lnTo>
+                    <a:pt x="3795993" y="2405417"/>
+                  </a:lnTo>
+                  <a:lnTo>
+                    <a:pt x="3867616" y="2361479"/>
+                  </a:lnTo>
+                  <a:lnTo>
+                    <a:pt x="3939238" y="2315993"/>
+                  </a:lnTo>
+                  <a:lnTo>
+                    <a:pt x="4010861" y="2268905"/>
+                  </a:lnTo>
+                  <a:lnTo>
+                    <a:pt x="4082483" y="2220158"/>
+                  </a:lnTo>
+                  <a:lnTo>
+                    <a:pt x="4154106" y="2169694"/>
+                  </a:lnTo>
+                  <a:lnTo>
+                    <a:pt x="4225729" y="2117452"/>
+                  </a:lnTo>
+                  <a:lnTo>
+                    <a:pt x="4297351" y="2063369"/>
+                  </a:lnTo>
+                  <a:lnTo>
+                    <a:pt x="4368974" y="2007382"/>
+                  </a:lnTo>
+                  <a:lnTo>
+                    <a:pt x="4440596" y="1949422"/>
+                  </a:lnTo>
+                  <a:lnTo>
+                    <a:pt x="4512219" y="1889420"/>
+                  </a:lnTo>
+                  <a:lnTo>
+                    <a:pt x="4583841" y="1827304"/>
+                  </a:lnTo>
+                  <a:lnTo>
+                    <a:pt x="4655464" y="1763001"/>
+                  </a:lnTo>
+                  <a:lnTo>
+                    <a:pt x="4727086" y="1696432"/>
+                  </a:lnTo>
+                  <a:lnTo>
+                    <a:pt x="4798709" y="1627517"/>
+                  </a:lnTo>
+                  <a:lnTo>
+                    <a:pt x="4870331" y="1556175"/>
+                  </a:lnTo>
+                  <a:lnTo>
+                    <a:pt x="4941954" y="1482320"/>
+                  </a:lnTo>
+                  <a:lnTo>
+                    <a:pt x="5013576" y="1405863"/>
+                  </a:lnTo>
+                  <a:lnTo>
+                    <a:pt x="5085199" y="1326712"/>
+                  </a:lnTo>
+                  <a:lnTo>
+                    <a:pt x="5156821" y="1244774"/>
+                  </a:lnTo>
+                  <a:lnTo>
+                    <a:pt x="5228444" y="1159948"/>
+                  </a:lnTo>
+                  <a:lnTo>
+                    <a:pt x="5300066" y="1072134"/>
+                  </a:lnTo>
+                  <a:lnTo>
+                    <a:pt x="5371689" y="981227"/>
+                  </a:lnTo>
+                  <a:lnTo>
+                    <a:pt x="5443311" y="887117"/>
+                  </a:lnTo>
+                  <a:lnTo>
+                    <a:pt x="5514934" y="789692"/>
+                  </a:lnTo>
+                  <a:lnTo>
+                    <a:pt x="5586557" y="688835"/>
+                  </a:lnTo>
+                  <a:lnTo>
+                    <a:pt x="5658179" y="584425"/>
+                  </a:lnTo>
+                  <a:lnTo>
+                    <a:pt x="5729802" y="476336"/>
+                  </a:lnTo>
+                  <a:lnTo>
+                    <a:pt x="5801424" y="364440"/>
+                  </a:lnTo>
+                  <a:lnTo>
+                    <a:pt x="5873047" y="248602"/>
+                  </a:lnTo>
+                  <a:lnTo>
+                    <a:pt x="5944669" y="128683"/>
+                  </a:lnTo>
+                  <a:lnTo>
+                    <a:pt x="6016292" y="4539"/>
+                  </a:lnTo>
+                  <a:lnTo>
+                    <a:pt x="6018822" y="0"/>
                   </a:lnTo>
                   <a:lnTo>
                     <a:pt x="7090630" y="0"/>
                   </a:lnTo>
                   <a:lnTo>
-                    <a:pt x="7090630" y="3276734"/>
-                  </a:lnTo>
-                  <a:lnTo>
-                    <a:pt x="7019007" y="3271103"/>
-                  </a:lnTo>
-                  <a:lnTo>
-                    <a:pt x="6947385" y="3265388"/>
-                  </a:lnTo>
-                  <a:lnTo>
-                    <a:pt x="6875762" y="3259587"/>
-                  </a:lnTo>
-                  <a:lnTo>
-                    <a:pt x="6804139" y="3253699"/>
-                  </a:lnTo>
-                  <a:lnTo>
-                    <a:pt x="6732517" y="3247723"/>
-                  </a:lnTo>
-                  <a:lnTo>
-                    <a:pt x="6660894" y="3241658"/>
-                  </a:lnTo>
-                  <a:lnTo>
-                    <a:pt x="6589272" y="3235501"/>
-                  </a:lnTo>
-                  <a:lnTo>
-                    <a:pt x="6517649" y="3229253"/>
-                  </a:lnTo>
-                  <a:lnTo>
-                    <a:pt x="6446027" y="3222911"/>
-                  </a:lnTo>
-                  <a:lnTo>
-                    <a:pt x="6374404" y="3216474"/>
-                  </a:lnTo>
-                  <a:lnTo>
-                    <a:pt x="6302782" y="3209940"/>
-                  </a:lnTo>
-                  <a:lnTo>
-                    <a:pt x="6231159" y="3203309"/>
-                  </a:lnTo>
-                  <a:lnTo>
-                    <a:pt x="6159537" y="3196578"/>
-                  </a:lnTo>
-                  <a:lnTo>
-                    <a:pt x="6087914" y="3189747"/>
-                  </a:lnTo>
-                  <a:lnTo>
-                    <a:pt x="6016292" y="3182813"/>
-                  </a:lnTo>
-                  <a:lnTo>
-                    <a:pt x="5944669" y="3175775"/>
-                  </a:lnTo>
-                  <a:lnTo>
-                    <a:pt x="5873047" y="3168632"/>
-                  </a:lnTo>
-                  <a:lnTo>
-                    <a:pt x="5801424" y="3161382"/>
-                  </a:lnTo>
-                  <a:lnTo>
-                    <a:pt x="5729802" y="3154023"/>
-                  </a:lnTo>
-                  <a:lnTo>
-                    <a:pt x="5658179" y="3146554"/>
-                  </a:lnTo>
-                  <a:lnTo>
-                    <a:pt x="5586557" y="3138974"/>
-                  </a:lnTo>
-                  <a:lnTo>
-                    <a:pt x="5514934" y="3131279"/>
-                  </a:lnTo>
-                  <a:lnTo>
-                    <a:pt x="5443311" y="3123470"/>
-                  </a:lnTo>
-                  <a:lnTo>
-                    <a:pt x="5371689" y="3115543"/>
-                  </a:lnTo>
-                  <a:lnTo>
-                    <a:pt x="5300066" y="3107498"/>
-                  </a:lnTo>
-                  <a:lnTo>
-                    <a:pt x="5228444" y="3099332"/>
-                  </a:lnTo>
-                  <a:lnTo>
-                    <a:pt x="5156821" y="3091044"/>
-                  </a:lnTo>
-                  <a:lnTo>
-                    <a:pt x="5085199" y="3082631"/>
-                  </a:lnTo>
-                  <a:lnTo>
-                    <a:pt x="5013576" y="3074093"/>
-                  </a:lnTo>
-                  <a:lnTo>
-                    <a:pt x="4941954" y="3065427"/>
-                  </a:lnTo>
-                  <a:lnTo>
-                    <a:pt x="4870331" y="3056631"/>
-                  </a:lnTo>
-                  <a:lnTo>
-                    <a:pt x="4798709" y="3047703"/>
-                  </a:lnTo>
-                  <a:lnTo>
-                    <a:pt x="4727086" y="3038641"/>
-                  </a:lnTo>
-                  <a:lnTo>
-                    <a:pt x="4655464" y="3029444"/>
-                  </a:lnTo>
-                  <a:lnTo>
-                    <a:pt x="4583841" y="3020109"/>
-                  </a:lnTo>
-                  <a:lnTo>
-                    <a:pt x="4512219" y="3010634"/>
-                  </a:lnTo>
-                  <a:lnTo>
-                    <a:pt x="4440596" y="3001017"/>
-                  </a:lnTo>
-                  <a:lnTo>
-                    <a:pt x="4368974" y="2991256"/>
-                  </a:lnTo>
-                  <a:lnTo>
-                    <a:pt x="4297351" y="2981349"/>
-                  </a:lnTo>
-                  <a:lnTo>
-                    <a:pt x="4225729" y="2971294"/>
-                  </a:lnTo>
-                  <a:lnTo>
-                    <a:pt x="4154106" y="2961088"/>
-                  </a:lnTo>
-                  <a:lnTo>
-                    <a:pt x="4082483" y="2950729"/>
-                  </a:lnTo>
-                  <a:lnTo>
-                    <a:pt x="4010861" y="2940215"/>
-                  </a:lnTo>
-                  <a:lnTo>
-                    <a:pt x="3939238" y="2929543"/>
-                  </a:lnTo>
-                  <a:lnTo>
-                    <a:pt x="3867616" y="2918711"/>
-                  </a:lnTo>
-                  <a:lnTo>
-                    <a:pt x="3795993" y="2907718"/>
-                  </a:lnTo>
-                  <a:lnTo>
-                    <a:pt x="3724371" y="2896559"/>
-                  </a:lnTo>
-                  <a:lnTo>
-                    <a:pt x="3652748" y="2885234"/>
-                  </a:lnTo>
-                  <a:lnTo>
-                    <a:pt x="3581126" y="2873738"/>
-                  </a:lnTo>
-                  <a:lnTo>
-                    <a:pt x="3509503" y="2862071"/>
-                  </a:lnTo>
-                  <a:lnTo>
-                    <a:pt x="3437881" y="2850229"/>
-                  </a:lnTo>
-                  <a:lnTo>
-                    <a:pt x="3366258" y="2838209"/>
-                  </a:lnTo>
-                  <a:lnTo>
-                    <a:pt x="3294636" y="2826010"/>
-                  </a:lnTo>
-                  <a:lnTo>
-                    <a:pt x="3223013" y="2813627"/>
-                  </a:lnTo>
-                  <a:lnTo>
-                    <a:pt x="3151391" y="2801060"/>
-                  </a:lnTo>
-                  <a:lnTo>
-                    <a:pt x="3079768" y="2788303"/>
-                  </a:lnTo>
-                  <a:lnTo>
-                    <a:pt x="3008146" y="2801362"/>
-                  </a:lnTo>
-                  <a:lnTo>
-                    <a:pt x="2936523" y="2831861"/>
-                  </a:lnTo>
-                  <a:lnTo>
-                    <a:pt x="2864901" y="2861268"/>
-                  </a:lnTo>
-                  <a:lnTo>
-                    <a:pt x="2793278" y="2889621"/>
-                  </a:lnTo>
-                  <a:lnTo>
-                    <a:pt x="2721655" y="2916959"/>
-                  </a:lnTo>
-                  <a:lnTo>
-                    <a:pt x="2650033" y="2943317"/>
-                  </a:lnTo>
-                  <a:lnTo>
-                    <a:pt x="2578410" y="2968730"/>
-                  </a:lnTo>
-                  <a:lnTo>
-                    <a:pt x="2506788" y="2993233"/>
-                  </a:lnTo>
-                  <a:lnTo>
-                    <a:pt x="2435165" y="3016858"/>
-                  </a:lnTo>
-                  <a:lnTo>
-                    <a:pt x="2363543" y="3039637"/>
-                  </a:lnTo>
-                  <a:lnTo>
-                    <a:pt x="2291920" y="3061600"/>
-                  </a:lnTo>
-                  <a:lnTo>
-                    <a:pt x="2220298" y="3082775"/>
-                  </a:lnTo>
-                  <a:lnTo>
-                    <a:pt x="2148675" y="3103193"/>
-                  </a:lnTo>
-                  <a:lnTo>
-                    <a:pt x="2077053" y="3122878"/>
-                  </a:lnTo>
-                  <a:lnTo>
-                    <a:pt x="2005430" y="3141858"/>
-                  </a:lnTo>
-                  <a:lnTo>
-                    <a:pt x="1933808" y="3160159"/>
-                  </a:lnTo>
-                  <a:lnTo>
-                    <a:pt x="1862185" y="3177803"/>
-                  </a:lnTo>
-                  <a:lnTo>
-                    <a:pt x="1790563" y="3194816"/>
-                  </a:lnTo>
-                  <a:lnTo>
-                    <a:pt x="1718940" y="3211219"/>
-                  </a:lnTo>
-                  <a:lnTo>
-                    <a:pt x="1647318" y="3227034"/>
-                  </a:lnTo>
-                  <a:lnTo>
-                    <a:pt x="1575695" y="3242282"/>
-                  </a:lnTo>
-                  <a:lnTo>
-                    <a:pt x="1504073" y="3256985"/>
-                  </a:lnTo>
-                  <a:lnTo>
-                    <a:pt x="1432450" y="3271160"/>
-                  </a:lnTo>
-                  <a:lnTo>
-                    <a:pt x="1360827" y="3284828"/>
-                  </a:lnTo>
-                  <a:lnTo>
-                    <a:pt x="1289205" y="3298006"/>
-                  </a:lnTo>
-                  <a:lnTo>
-                    <a:pt x="1217582" y="3310712"/>
-                  </a:lnTo>
-                  <a:lnTo>
-                    <a:pt x="1145960" y="3322962"/>
-                  </a:lnTo>
-                  <a:lnTo>
-                    <a:pt x="1074337" y="3334774"/>
-                  </a:lnTo>
-                  <a:lnTo>
-                    <a:pt x="1002715" y="3346163"/>
-                  </a:lnTo>
-                  <a:lnTo>
-                    <a:pt x="931092" y="3357143"/>
-                  </a:lnTo>
-                  <a:lnTo>
-                    <a:pt x="859470" y="3367730"/>
-                  </a:lnTo>
-                  <a:lnTo>
-                    <a:pt x="787847" y="3377938"/>
-                  </a:lnTo>
-                  <a:lnTo>
-                    <a:pt x="716225" y="3387780"/>
-                  </a:lnTo>
-                  <a:lnTo>
-                    <a:pt x="644602" y="3397270"/>
-                  </a:lnTo>
-                  <a:lnTo>
-                    <a:pt x="572980" y="3406419"/>
-                  </a:lnTo>
-                  <a:lnTo>
-                    <a:pt x="501357" y="3415241"/>
-                  </a:lnTo>
-                  <a:lnTo>
-                    <a:pt x="429735" y="3423746"/>
-                  </a:lnTo>
-                  <a:lnTo>
-                    <a:pt x="358112" y="3431947"/>
-                  </a:lnTo>
-                  <a:lnTo>
-                    <a:pt x="286490" y="3439854"/>
-                  </a:lnTo>
-                  <a:lnTo>
-                    <a:pt x="214867" y="3447478"/>
-                  </a:lnTo>
-                  <a:lnTo>
-                    <a:pt x="143245" y="3454829"/>
-                  </a:lnTo>
-                  <a:lnTo>
-                    <a:pt x="71622" y="3461916"/>
-                  </a:lnTo>
-                  <a:lnTo>
-                    <a:pt x="0" y="3468749"/>
+                    <a:pt x="7090630" y="3434578"/>
+                  </a:lnTo>
+                  <a:lnTo>
+                    <a:pt x="7019007" y="3429165"/>
+                  </a:lnTo>
+                  <a:lnTo>
+                    <a:pt x="6947385" y="3423617"/>
+                  </a:lnTo>
+                  <a:lnTo>
+                    <a:pt x="6875762" y="3417932"/>
+                  </a:lnTo>
+                  <a:lnTo>
+                    <a:pt x="6804139" y="3412105"/>
+                  </a:lnTo>
+                  <a:lnTo>
+                    <a:pt x="6732517" y="3406134"/>
+                  </a:lnTo>
+                  <a:lnTo>
+                    <a:pt x="6660894" y="3400015"/>
+                  </a:lnTo>
+                  <a:lnTo>
+                    <a:pt x="6589272" y="3393744"/>
+                  </a:lnTo>
+                  <a:lnTo>
+                    <a:pt x="6517649" y="3387317"/>
+                  </a:lnTo>
+                  <a:lnTo>
+                    <a:pt x="6446027" y="3380730"/>
+                  </a:lnTo>
+                  <a:lnTo>
+                    <a:pt x="6374404" y="3373980"/>
+                  </a:lnTo>
+                  <a:lnTo>
+                    <a:pt x="6302782" y="3367063"/>
+                  </a:lnTo>
+                  <a:lnTo>
+                    <a:pt x="6231159" y="3359973"/>
+                  </a:lnTo>
+                  <a:lnTo>
+                    <a:pt x="6159537" y="3352708"/>
+                  </a:lnTo>
+                  <a:lnTo>
+                    <a:pt x="6087914" y="3345262"/>
+                  </a:lnTo>
+                  <a:lnTo>
+                    <a:pt x="6016292" y="3337632"/>
+                  </a:lnTo>
+                  <a:lnTo>
+                    <a:pt x="5944669" y="3329812"/>
+                  </a:lnTo>
+                  <a:lnTo>
+                    <a:pt x="5873047" y="3321798"/>
+                  </a:lnTo>
+                  <a:lnTo>
+                    <a:pt x="5801424" y="3313585"/>
+                  </a:lnTo>
+                  <a:lnTo>
+                    <a:pt x="5729802" y="3305168"/>
+                  </a:lnTo>
+                  <a:lnTo>
+                    <a:pt x="5658179" y="3296543"/>
+                  </a:lnTo>
+                  <a:lnTo>
+                    <a:pt x="5586557" y="3287703"/>
+                  </a:lnTo>
+                  <a:lnTo>
+                    <a:pt x="5514934" y="3278643"/>
+                  </a:lnTo>
+                  <a:lnTo>
+                    <a:pt x="5443311" y="3269359"/>
+                  </a:lnTo>
+                  <a:lnTo>
+                    <a:pt x="5371689" y="3259844"/>
+                  </a:lnTo>
+                  <a:lnTo>
+                    <a:pt x="5300066" y="3250094"/>
+                  </a:lnTo>
+                  <a:lnTo>
+                    <a:pt x="5228444" y="3240101"/>
+                  </a:lnTo>
+                  <a:lnTo>
+                    <a:pt x="5156821" y="3229860"/>
+                  </a:lnTo>
+                  <a:lnTo>
+                    <a:pt x="5085199" y="3219364"/>
+                  </a:lnTo>
+                  <a:lnTo>
+                    <a:pt x="5013576" y="3208609"/>
+                  </a:lnTo>
+                  <a:lnTo>
+                    <a:pt x="4941954" y="3197586"/>
+                  </a:lnTo>
+                  <a:lnTo>
+                    <a:pt x="4870331" y="3186289"/>
+                  </a:lnTo>
+                  <a:lnTo>
+                    <a:pt x="4798709" y="3174713"/>
+                  </a:lnTo>
+                  <a:lnTo>
+                    <a:pt x="4727086" y="3162848"/>
+                  </a:lnTo>
+                  <a:lnTo>
+                    <a:pt x="4655464" y="3150690"/>
+                  </a:lnTo>
+                  <a:lnTo>
+                    <a:pt x="4583841" y="3138229"/>
+                  </a:lnTo>
+                  <a:lnTo>
+                    <a:pt x="4512219" y="3125459"/>
+                  </a:lnTo>
+                  <a:lnTo>
+                    <a:pt x="4440596" y="3112372"/>
+                  </a:lnTo>
+                  <a:lnTo>
+                    <a:pt x="4368974" y="3098961"/>
+                  </a:lnTo>
+                  <a:lnTo>
+                    <a:pt x="4297351" y="3085216"/>
+                  </a:lnTo>
+                  <a:lnTo>
+                    <a:pt x="4225729" y="3071130"/>
+                  </a:lnTo>
+                  <a:lnTo>
+                    <a:pt x="4154106" y="3056695"/>
+                  </a:lnTo>
+                  <a:lnTo>
+                    <a:pt x="4082483" y="3041901"/>
+                  </a:lnTo>
+                  <a:lnTo>
+                    <a:pt x="4010861" y="3026740"/>
+                  </a:lnTo>
+                  <a:lnTo>
+                    <a:pt x="3939238" y="3011202"/>
+                  </a:lnTo>
+                  <a:lnTo>
+                    <a:pt x="3867616" y="2995279"/>
+                  </a:lnTo>
+                  <a:lnTo>
+                    <a:pt x="3795993" y="2978960"/>
+                  </a:lnTo>
+                  <a:lnTo>
+                    <a:pt x="3724371" y="2962237"/>
+                  </a:lnTo>
+                  <a:lnTo>
+                    <a:pt x="3652748" y="2945098"/>
+                  </a:lnTo>
+                  <a:lnTo>
+                    <a:pt x="3581126" y="2927534"/>
+                  </a:lnTo>
+                  <a:lnTo>
+                    <a:pt x="3509503" y="2909534"/>
+                  </a:lnTo>
+                  <a:lnTo>
+                    <a:pt x="3437881" y="2891087"/>
+                  </a:lnTo>
+                  <a:lnTo>
+                    <a:pt x="3366258" y="2872182"/>
+                  </a:lnTo>
+                  <a:lnTo>
+                    <a:pt x="3294636" y="2852807"/>
+                  </a:lnTo>
+                  <a:lnTo>
+                    <a:pt x="3223013" y="2832952"/>
+                  </a:lnTo>
+                  <a:lnTo>
+                    <a:pt x="3151391" y="2812604"/>
+                  </a:lnTo>
+                  <a:lnTo>
+                    <a:pt x="3079768" y="2791751"/>
+                  </a:lnTo>
+                  <a:lnTo>
+                    <a:pt x="3008146" y="2800432"/>
+                  </a:lnTo>
+                  <a:lnTo>
+                    <a:pt x="2936523" y="2829432"/>
+                  </a:lnTo>
+                  <a:lnTo>
+                    <a:pt x="2864901" y="2857446"/>
+                  </a:lnTo>
+                  <a:lnTo>
+                    <a:pt x="2793278" y="2884506"/>
+                  </a:lnTo>
+                  <a:lnTo>
+                    <a:pt x="2721655" y="2910646"/>
+                  </a:lnTo>
+                  <a:lnTo>
+                    <a:pt x="2650033" y="2935895"/>
+                  </a:lnTo>
+                  <a:lnTo>
+                    <a:pt x="2578410" y="2960286"/>
+                  </a:lnTo>
+                  <a:lnTo>
+                    <a:pt x="2506788" y="2983847"/>
+                  </a:lnTo>
+                  <a:lnTo>
+                    <a:pt x="2435165" y="3006606"/>
+                  </a:lnTo>
+                  <a:lnTo>
+                    <a:pt x="2363543" y="3028590"/>
+                  </a:lnTo>
+                  <a:lnTo>
+                    <a:pt x="2291920" y="3049826"/>
+                  </a:lnTo>
+                  <a:lnTo>
+                    <a:pt x="2220298" y="3070340"/>
+                  </a:lnTo>
+                  <a:lnTo>
+                    <a:pt x="2148675" y="3090156"/>
+                  </a:lnTo>
+                  <a:lnTo>
+                    <a:pt x="2077053" y="3109297"/>
+                  </a:lnTo>
+                  <a:lnTo>
+                    <a:pt x="2005430" y="3127787"/>
+                  </a:lnTo>
+                  <a:lnTo>
+                    <a:pt x="1933808" y="3145647"/>
+                  </a:lnTo>
+                  <a:lnTo>
+                    <a:pt x="1862185" y="3162900"/>
+                  </a:lnTo>
+                  <a:lnTo>
+                    <a:pt x="1790563" y="3179566"/>
+                  </a:lnTo>
+                  <a:lnTo>
+                    <a:pt x="1718940" y="3195665"/>
+                  </a:lnTo>
+                  <a:lnTo>
+                    <a:pt x="1647318" y="3211215"/>
+                  </a:lnTo>
+                  <a:lnTo>
+                    <a:pt x="1575695" y="3226237"/>
+                  </a:lnTo>
+                  <a:lnTo>
+                    <a:pt x="1504073" y="3240747"/>
+                  </a:lnTo>
+                  <a:lnTo>
+                    <a:pt x="1432450" y="3254764"/>
+                  </a:lnTo>
+                  <a:lnTo>
+                    <a:pt x="1360827" y="3268304"/>
+                  </a:lnTo>
+                  <a:lnTo>
+                    <a:pt x="1289205" y="3281383"/>
+                  </a:lnTo>
+                  <a:lnTo>
+                    <a:pt x="1217582" y="3294017"/>
+                  </a:lnTo>
+                  <a:lnTo>
+                    <a:pt x="1145960" y="3306221"/>
+                  </a:lnTo>
+                  <a:lnTo>
+                    <a:pt x="1074337" y="3318009"/>
+                  </a:lnTo>
+                  <a:lnTo>
+                    <a:pt x="1002715" y="3329397"/>
+                  </a:lnTo>
+                  <a:lnTo>
+                    <a:pt x="931092" y="3340397"/>
+                  </a:lnTo>
+                  <a:lnTo>
+                    <a:pt x="859470" y="3351022"/>
+                  </a:lnTo>
+                  <a:lnTo>
+                    <a:pt x="787847" y="3361286"/>
+                  </a:lnTo>
+                  <a:lnTo>
+                    <a:pt x="716225" y="3371201"/>
+                  </a:lnTo>
+                  <a:lnTo>
+                    <a:pt x="644602" y="3380778"/>
+                  </a:lnTo>
+                  <a:lnTo>
+                    <a:pt x="572980" y="3390030"/>
+                  </a:lnTo>
+                  <a:lnTo>
+                    <a:pt x="501357" y="3398966"/>
+                  </a:lnTo>
+                  <a:lnTo>
+                    <a:pt x="429735" y="3407599"/>
+                  </a:lnTo>
+                  <a:lnTo>
+                    <a:pt x="358112" y="3415938"/>
+                  </a:lnTo>
+                  <a:lnTo>
+                    <a:pt x="286490" y="3423993"/>
+                  </a:lnTo>
+                  <a:lnTo>
+                    <a:pt x="214867" y="3431774"/>
+                  </a:lnTo>
+                  <a:lnTo>
+                    <a:pt x="143245" y="3439290"/>
+                  </a:lnTo>
+                  <a:lnTo>
+                    <a:pt x="71622" y="3446550"/>
+                  </a:lnTo>
+                  <a:lnTo>
+                    <a:pt x="0" y="3453563"/>
                   </a:lnTo>
                   <a:close/>
                 </a:path>
@@ -3715,260 +3724,269 @@
           <p:spPr>
             <a:xfrm>
               <a:off x="1172049" y="1896563"/>
-              <a:ext cx="5867161" cy="2775356"/>
+              <a:ext cx="6018822" cy="2770410"/>
             </a:xfrm>
             <a:custGeom>
               <a:avLst/>
               <a:pathLst>
-                <a:path w="5867161" h="2775356">
+                <a:path w="6018822" h="2770410">
                   <a:moveTo>
-                    <a:pt x="0" y="2014536"/>
+                    <a:pt x="0" y="1181659"/>
                   </a:moveTo>
                   <a:lnTo>
-                    <a:pt x="71622" y="2038711"/>
-                  </a:lnTo>
-                  <a:lnTo>
-                    <a:pt x="143245" y="2062530"/>
-                  </a:lnTo>
-                  <a:lnTo>
-                    <a:pt x="214867" y="2085997"/>
-                  </a:lnTo>
-                  <a:lnTo>
-                    <a:pt x="286490" y="2109118"/>
-                  </a:lnTo>
-                  <a:lnTo>
-                    <a:pt x="358112" y="2131898"/>
-                  </a:lnTo>
-                  <a:lnTo>
-                    <a:pt x="429735" y="2154341"/>
-                  </a:lnTo>
-                  <a:lnTo>
-                    <a:pt x="501357" y="2176453"/>
-                  </a:lnTo>
-                  <a:lnTo>
-                    <a:pt x="572980" y="2198239"/>
-                  </a:lnTo>
-                  <a:lnTo>
-                    <a:pt x="644602" y="2219703"/>
-                  </a:lnTo>
-                  <a:lnTo>
-                    <a:pt x="716225" y="2240851"/>
-                  </a:lnTo>
-                  <a:lnTo>
-                    <a:pt x="787847" y="2261686"/>
-                  </a:lnTo>
-                  <a:lnTo>
-                    <a:pt x="859470" y="2282214"/>
-                  </a:lnTo>
-                  <a:lnTo>
-                    <a:pt x="931092" y="2302439"/>
-                  </a:lnTo>
-                  <a:lnTo>
-                    <a:pt x="1002715" y="2322366"/>
-                  </a:lnTo>
-                  <a:lnTo>
-                    <a:pt x="1074337" y="2341998"/>
-                  </a:lnTo>
-                  <a:lnTo>
-                    <a:pt x="1145960" y="2361341"/>
-                  </a:lnTo>
-                  <a:lnTo>
-                    <a:pt x="1217582" y="2380398"/>
-                  </a:lnTo>
-                  <a:lnTo>
-                    <a:pt x="1289205" y="2399174"/>
-                  </a:lnTo>
-                  <a:lnTo>
-                    <a:pt x="1360827" y="2417673"/>
-                  </a:lnTo>
-                  <a:lnTo>
-                    <a:pt x="1432450" y="2435899"/>
-                  </a:lnTo>
-                  <a:lnTo>
-                    <a:pt x="1504073" y="2453856"/>
-                  </a:lnTo>
-                  <a:lnTo>
-                    <a:pt x="1575695" y="2471548"/>
-                  </a:lnTo>
-                  <a:lnTo>
-                    <a:pt x="1647318" y="2488979"/>
-                  </a:lnTo>
-                  <a:lnTo>
-                    <a:pt x="1718940" y="2506152"/>
-                  </a:lnTo>
-                  <a:lnTo>
-                    <a:pt x="1790563" y="2523073"/>
-                  </a:lnTo>
-                  <a:lnTo>
-                    <a:pt x="1862185" y="2539743"/>
-                  </a:lnTo>
-                  <a:lnTo>
-                    <a:pt x="1933808" y="2556167"/>
-                  </a:lnTo>
-                  <a:lnTo>
-                    <a:pt x="2005430" y="2572349"/>
-                  </a:lnTo>
-                  <a:lnTo>
-                    <a:pt x="2077053" y="2588293"/>
-                  </a:lnTo>
-                  <a:lnTo>
-                    <a:pt x="2148675" y="2604000"/>
-                  </a:lnTo>
-                  <a:lnTo>
-                    <a:pt x="2220298" y="2619476"/>
-                  </a:lnTo>
-                  <a:lnTo>
-                    <a:pt x="2291920" y="2634724"/>
-                  </a:lnTo>
-                  <a:lnTo>
-                    <a:pt x="2363543" y="2649747"/>
-                  </a:lnTo>
-                  <a:lnTo>
-                    <a:pt x="2435165" y="2664548"/>
-                  </a:lnTo>
-                  <a:lnTo>
-                    <a:pt x="2506788" y="2679130"/>
-                  </a:lnTo>
-                  <a:lnTo>
-                    <a:pt x="2578410" y="2693497"/>
-                  </a:lnTo>
-                  <a:lnTo>
-                    <a:pt x="2650033" y="2707653"/>
-                  </a:lnTo>
-                  <a:lnTo>
-                    <a:pt x="2721655" y="2721599"/>
-                  </a:lnTo>
-                  <a:lnTo>
-                    <a:pt x="2793278" y="2735340"/>
-                  </a:lnTo>
-                  <a:lnTo>
-                    <a:pt x="2864901" y="2748877"/>
-                  </a:lnTo>
-                  <a:lnTo>
-                    <a:pt x="2936523" y="2762215"/>
-                  </a:lnTo>
-                  <a:lnTo>
-                    <a:pt x="3008146" y="2775356"/>
-                  </a:lnTo>
-                  <a:lnTo>
-                    <a:pt x="3079768" y="2769729"/>
-                  </a:lnTo>
-                  <a:lnTo>
-                    <a:pt x="3151391" y="2736921"/>
-                  </a:lnTo>
-                  <a:lnTo>
-                    <a:pt x="3223013" y="2702893"/>
-                  </a:lnTo>
-                  <a:lnTo>
-                    <a:pt x="3294636" y="2667601"/>
-                  </a:lnTo>
-                  <a:lnTo>
-                    <a:pt x="3366258" y="2630998"/>
-                  </a:lnTo>
-                  <a:lnTo>
-                    <a:pt x="3437881" y="2593035"/>
-                  </a:lnTo>
-                  <a:lnTo>
-                    <a:pt x="3509503" y="2553661"/>
-                  </a:lnTo>
-                  <a:lnTo>
-                    <a:pt x="3581126" y="2512824"/>
-                  </a:lnTo>
-                  <a:lnTo>
-                    <a:pt x="3652748" y="2470469"/>
-                  </a:lnTo>
-                  <a:lnTo>
-                    <a:pt x="3724371" y="2426541"/>
-                  </a:lnTo>
-                  <a:lnTo>
-                    <a:pt x="3795993" y="2380980"/>
-                  </a:lnTo>
-                  <a:lnTo>
-                    <a:pt x="3867616" y="2333726"/>
-                  </a:lnTo>
-                  <a:lnTo>
-                    <a:pt x="3939238" y="2284716"/>
-                  </a:lnTo>
-                  <a:lnTo>
-                    <a:pt x="4010861" y="2233885"/>
-                  </a:lnTo>
-                  <a:lnTo>
-                    <a:pt x="4082483" y="2181166"/>
-                  </a:lnTo>
-                  <a:lnTo>
-                    <a:pt x="4154106" y="2126487"/>
-                  </a:lnTo>
-                  <a:lnTo>
-                    <a:pt x="4225729" y="2069776"/>
-                  </a:lnTo>
-                  <a:lnTo>
-                    <a:pt x="4297351" y="2010958"/>
-                  </a:lnTo>
-                  <a:lnTo>
-                    <a:pt x="4368974" y="1949955"/>
-                  </a:lnTo>
-                  <a:lnTo>
-                    <a:pt x="4440596" y="1886685"/>
-                  </a:lnTo>
-                  <a:lnTo>
-                    <a:pt x="4512219" y="1821063"/>
-                  </a:lnTo>
-                  <a:lnTo>
-                    <a:pt x="4583841" y="1753003"/>
-                  </a:lnTo>
-                  <a:lnTo>
-                    <a:pt x="4655464" y="1682415"/>
-                  </a:lnTo>
-                  <a:lnTo>
-                    <a:pt x="4727086" y="1609203"/>
-                  </a:lnTo>
-                  <a:lnTo>
-                    <a:pt x="4798709" y="1533270"/>
-                  </a:lnTo>
-                  <a:lnTo>
-                    <a:pt x="4870331" y="1454517"/>
-                  </a:lnTo>
-                  <a:lnTo>
-                    <a:pt x="4941954" y="1372836"/>
-                  </a:lnTo>
-                  <a:lnTo>
-                    <a:pt x="5013576" y="1288121"/>
-                  </a:lnTo>
-                  <a:lnTo>
-                    <a:pt x="5085199" y="1200257"/>
-                  </a:lnTo>
-                  <a:lnTo>
-                    <a:pt x="5156821" y="1109129"/>
-                  </a:lnTo>
-                  <a:lnTo>
-                    <a:pt x="5228444" y="1014614"/>
-                  </a:lnTo>
-                  <a:lnTo>
-                    <a:pt x="5300066" y="916588"/>
-                  </a:lnTo>
-                  <a:lnTo>
-                    <a:pt x="5371689" y="814918"/>
-                  </a:lnTo>
-                  <a:lnTo>
-                    <a:pt x="5443311" y="709471"/>
-                  </a:lnTo>
-                  <a:lnTo>
-                    <a:pt x="5514934" y="600106"/>
-                  </a:lnTo>
-                  <a:lnTo>
-                    <a:pt x="5586557" y="486676"/>
-                  </a:lnTo>
-                  <a:lnTo>
-                    <a:pt x="5658179" y="369032"/>
-                  </a:lnTo>
-                  <a:lnTo>
-                    <a:pt x="5729802" y="247016"/>
-                  </a:lnTo>
-                  <a:lnTo>
-                    <a:pt x="5801424" y="120466"/>
-                  </a:lnTo>
-                  <a:lnTo>
-                    <a:pt x="5867161" y="0"/>
+                    <a:pt x="71622" y="1241513"/>
+                  </a:lnTo>
+                  <a:lnTo>
+                    <a:pt x="143245" y="1299917"/>
+                  </a:lnTo>
+                  <a:lnTo>
+                    <a:pt x="214867" y="1356907"/>
+                  </a:lnTo>
+                  <a:lnTo>
+                    <a:pt x="286490" y="1412516"/>
+                  </a:lnTo>
+                  <a:lnTo>
+                    <a:pt x="358112" y="1466778"/>
+                  </a:lnTo>
+                  <a:lnTo>
+                    <a:pt x="429735" y="1519726"/>
+                  </a:lnTo>
+                  <a:lnTo>
+                    <a:pt x="501357" y="1571391"/>
+                  </a:lnTo>
+                  <a:lnTo>
+                    <a:pt x="572980" y="1621805"/>
+                  </a:lnTo>
+                  <a:lnTo>
+                    <a:pt x="644602" y="1670997"/>
+                  </a:lnTo>
+                  <a:lnTo>
+                    <a:pt x="716225" y="1718998"/>
+                  </a:lnTo>
+                  <a:lnTo>
+                    <a:pt x="787847" y="1765837"/>
+                  </a:lnTo>
+                  <a:lnTo>
+                    <a:pt x="859470" y="1811540"/>
+                  </a:lnTo>
+                  <a:lnTo>
+                    <a:pt x="931092" y="1856137"/>
+                  </a:lnTo>
+                  <a:lnTo>
+                    <a:pt x="1002715" y="1899653"/>
+                  </a:lnTo>
+                  <a:lnTo>
+                    <a:pt x="1074337" y="1942116"/>
+                  </a:lnTo>
+                  <a:lnTo>
+                    <a:pt x="1145960" y="1983549"/>
+                  </a:lnTo>
+                  <a:lnTo>
+                    <a:pt x="1217582" y="2023980"/>
+                  </a:lnTo>
+                  <a:lnTo>
+                    <a:pt x="1289205" y="2063430"/>
+                  </a:lnTo>
+                  <a:lnTo>
+                    <a:pt x="1360827" y="2101925"/>
+                  </a:lnTo>
+                  <a:lnTo>
+                    <a:pt x="1432450" y="2139488"/>
+                  </a:lnTo>
+                  <a:lnTo>
+                    <a:pt x="1504073" y="2176141"/>
+                  </a:lnTo>
+                  <a:lnTo>
+                    <a:pt x="1575695" y="2211906"/>
+                  </a:lnTo>
+                  <a:lnTo>
+                    <a:pt x="1647318" y="2246805"/>
+                  </a:lnTo>
+                  <a:lnTo>
+                    <a:pt x="1718940" y="2280858"/>
+                  </a:lnTo>
+                  <a:lnTo>
+                    <a:pt x="1790563" y="2314087"/>
+                  </a:lnTo>
+                  <a:lnTo>
+                    <a:pt x="1862185" y="2346510"/>
+                  </a:lnTo>
+                  <a:lnTo>
+                    <a:pt x="1933808" y="2378148"/>
+                  </a:lnTo>
+                  <a:lnTo>
+                    <a:pt x="2005430" y="2409020"/>
+                  </a:lnTo>
+                  <a:lnTo>
+                    <a:pt x="2077053" y="2439144"/>
+                  </a:lnTo>
+                  <a:lnTo>
+                    <a:pt x="2148675" y="2468539"/>
+                  </a:lnTo>
+                  <a:lnTo>
+                    <a:pt x="2220298" y="2497221"/>
+                  </a:lnTo>
+                  <a:lnTo>
+                    <a:pt x="2291920" y="2525208"/>
+                  </a:lnTo>
+                  <a:lnTo>
+                    <a:pt x="2363543" y="2552518"/>
+                  </a:lnTo>
+                  <a:lnTo>
+                    <a:pt x="2435165" y="2579166"/>
+                  </a:lnTo>
+                  <a:lnTo>
+                    <a:pt x="2506788" y="2605169"/>
+                  </a:lnTo>
+                  <a:lnTo>
+                    <a:pt x="2578410" y="2630542"/>
+                  </a:lnTo>
+                  <a:lnTo>
+                    <a:pt x="2650033" y="2655300"/>
+                  </a:lnTo>
+                  <a:lnTo>
+                    <a:pt x="2721655" y="2679458"/>
+                  </a:lnTo>
+                  <a:lnTo>
+                    <a:pt x="2793278" y="2703031"/>
+                  </a:lnTo>
+                  <a:lnTo>
+                    <a:pt x="2864901" y="2726034"/>
+                  </a:lnTo>
+                  <a:lnTo>
+                    <a:pt x="2936523" y="2748479"/>
+                  </a:lnTo>
+                  <a:lnTo>
+                    <a:pt x="3008146" y="2770380"/>
+                  </a:lnTo>
+                  <a:lnTo>
+                    <a:pt x="3079768" y="2770410"/>
+                  </a:lnTo>
+                  <a:lnTo>
+                    <a:pt x="3151391" y="2739330"/>
+                  </a:lnTo>
+                  <a:lnTo>
+                    <a:pt x="3223013" y="2707156"/>
+                  </a:lnTo>
+                  <a:lnTo>
+                    <a:pt x="3294636" y="2673847"/>
+                  </a:lnTo>
+                  <a:lnTo>
+                    <a:pt x="3366258" y="2639366"/>
+                  </a:lnTo>
+                  <a:lnTo>
+                    <a:pt x="3437881" y="2603670"/>
+                  </a:lnTo>
+                  <a:lnTo>
+                    <a:pt x="3509503" y="2566716"/>
+                  </a:lnTo>
+                  <a:lnTo>
+                    <a:pt x="3581126" y="2528461"/>
+                  </a:lnTo>
+                  <a:lnTo>
+                    <a:pt x="3652748" y="2488858"/>
+                  </a:lnTo>
+                  <a:lnTo>
+                    <a:pt x="3724371" y="2447859"/>
+                  </a:lnTo>
+                  <a:lnTo>
+                    <a:pt x="3795993" y="2405417"/>
+                  </a:lnTo>
+                  <a:lnTo>
+                    <a:pt x="3867616" y="2361479"/>
+                  </a:lnTo>
+                  <a:lnTo>
+                    <a:pt x="3939238" y="2315993"/>
+                  </a:lnTo>
+                  <a:lnTo>
+                    <a:pt x="4010861" y="2268905"/>
+                  </a:lnTo>
+                  <a:lnTo>
+                    <a:pt x="4082483" y="2220158"/>
+                  </a:lnTo>
+                  <a:lnTo>
+                    <a:pt x="4154106" y="2169694"/>
+                  </a:lnTo>
+                  <a:lnTo>
+                    <a:pt x="4225729" y="2117452"/>
+                  </a:lnTo>
+                  <a:lnTo>
+                    <a:pt x="4297351" y="2063369"/>
+                  </a:lnTo>
+                  <a:lnTo>
+                    <a:pt x="4368974" y="2007382"/>
+                  </a:lnTo>
+                  <a:lnTo>
+                    <a:pt x="4440596" y="1949422"/>
+                  </a:lnTo>
+                  <a:lnTo>
+                    <a:pt x="4512219" y="1889420"/>
+                  </a:lnTo>
+                  <a:lnTo>
+                    <a:pt x="4583841" y="1827304"/>
+                  </a:lnTo>
+                  <a:lnTo>
+                    <a:pt x="4655464" y="1763001"/>
+                  </a:lnTo>
+                  <a:lnTo>
+                    <a:pt x="4727086" y="1696432"/>
+                  </a:lnTo>
+                  <a:lnTo>
+                    <a:pt x="4798709" y="1627517"/>
+                  </a:lnTo>
+                  <a:lnTo>
+                    <a:pt x="4870331" y="1556175"/>
+                  </a:lnTo>
+                  <a:lnTo>
+                    <a:pt x="4941954" y="1482320"/>
+                  </a:lnTo>
+                  <a:lnTo>
+                    <a:pt x="5013576" y="1405863"/>
+                  </a:lnTo>
+                  <a:lnTo>
+                    <a:pt x="5085199" y="1326712"/>
+                  </a:lnTo>
+                  <a:lnTo>
+                    <a:pt x="5156821" y="1244774"/>
+                  </a:lnTo>
+                  <a:lnTo>
+                    <a:pt x="5228444" y="1159948"/>
+                  </a:lnTo>
+                  <a:lnTo>
+                    <a:pt x="5300066" y="1072134"/>
+                  </a:lnTo>
+                  <a:lnTo>
+                    <a:pt x="5371689" y="981227"/>
+                  </a:lnTo>
+                  <a:lnTo>
+                    <a:pt x="5443311" y="887117"/>
+                  </a:lnTo>
+                  <a:lnTo>
+                    <a:pt x="5514934" y="789692"/>
+                  </a:lnTo>
+                  <a:lnTo>
+                    <a:pt x="5586557" y="688835"/>
+                  </a:lnTo>
+                  <a:lnTo>
+                    <a:pt x="5658179" y="584425"/>
+                  </a:lnTo>
+                  <a:lnTo>
+                    <a:pt x="5729802" y="476336"/>
+                  </a:lnTo>
+                  <a:lnTo>
+                    <a:pt x="5801424" y="364440"/>
+                  </a:lnTo>
+                  <a:lnTo>
+                    <a:pt x="5873047" y="248602"/>
+                  </a:lnTo>
+                  <a:lnTo>
+                    <a:pt x="5944669" y="128683"/>
+                  </a:lnTo>
+                  <a:lnTo>
+                    <a:pt x="6016292" y="4539"/>
+                  </a:lnTo>
+                  <a:lnTo>
+                    <a:pt x="6018822" y="0"/>
                   </a:lnTo>
                 </a:path>
               </a:pathLst>
@@ -3988,312 +4006,312 @@
           </p:nvSpPr>
           <p:spPr>
             <a:xfrm>
-              <a:off x="1172049" y="4684867"/>
-              <a:ext cx="7090630" cy="680445"/>
+              <a:off x="1172049" y="4688314"/>
+              <a:ext cx="7090630" cy="661812"/>
             </a:xfrm>
             <a:custGeom>
               <a:avLst/>
               <a:pathLst>
-                <a:path w="7090630" h="680445">
+                <a:path w="7090630" h="661812">
                   <a:moveTo>
-                    <a:pt x="7090630" y="488430"/>
+                    <a:pt x="7090630" y="642827"/>
                   </a:moveTo>
                   <a:lnTo>
-                    <a:pt x="7019007" y="482799"/>
-                  </a:lnTo>
-                  <a:lnTo>
-                    <a:pt x="6947385" y="477084"/>
-                  </a:lnTo>
-                  <a:lnTo>
-                    <a:pt x="6875762" y="471283"/>
-                  </a:lnTo>
-                  <a:lnTo>
-                    <a:pt x="6804139" y="465395"/>
-                  </a:lnTo>
-                  <a:lnTo>
-                    <a:pt x="6732517" y="459419"/>
-                  </a:lnTo>
-                  <a:lnTo>
-                    <a:pt x="6660894" y="453354"/>
-                  </a:lnTo>
-                  <a:lnTo>
-                    <a:pt x="6589272" y="447198"/>
-                  </a:lnTo>
-                  <a:lnTo>
-                    <a:pt x="6517649" y="440949"/>
-                  </a:lnTo>
-                  <a:lnTo>
-                    <a:pt x="6446027" y="434607"/>
-                  </a:lnTo>
-                  <a:lnTo>
-                    <a:pt x="6374404" y="428170"/>
-                  </a:lnTo>
-                  <a:lnTo>
-                    <a:pt x="6302782" y="421636"/>
-                  </a:lnTo>
-                  <a:lnTo>
-                    <a:pt x="6231159" y="415005"/>
-                  </a:lnTo>
-                  <a:lnTo>
-                    <a:pt x="6159537" y="408274"/>
-                  </a:lnTo>
-                  <a:lnTo>
-                    <a:pt x="6087914" y="401443"/>
-                  </a:lnTo>
-                  <a:lnTo>
-                    <a:pt x="6016292" y="394509"/>
-                  </a:lnTo>
-                  <a:lnTo>
-                    <a:pt x="5944669" y="387471"/>
-                  </a:lnTo>
-                  <a:lnTo>
-                    <a:pt x="5873047" y="380328"/>
-                  </a:lnTo>
-                  <a:lnTo>
-                    <a:pt x="5801424" y="373078"/>
-                  </a:lnTo>
-                  <a:lnTo>
-                    <a:pt x="5729802" y="365719"/>
-                  </a:lnTo>
-                  <a:lnTo>
-                    <a:pt x="5658179" y="358250"/>
-                  </a:lnTo>
-                  <a:lnTo>
-                    <a:pt x="5586557" y="350670"/>
-                  </a:lnTo>
-                  <a:lnTo>
-                    <a:pt x="5514934" y="342975"/>
-                  </a:lnTo>
-                  <a:lnTo>
-                    <a:pt x="5443311" y="335166"/>
-                  </a:lnTo>
-                  <a:lnTo>
-                    <a:pt x="5371689" y="327239"/>
-                  </a:lnTo>
-                  <a:lnTo>
-                    <a:pt x="5300066" y="319194"/>
-                  </a:lnTo>
-                  <a:lnTo>
-                    <a:pt x="5228444" y="311028"/>
-                  </a:lnTo>
-                  <a:lnTo>
-                    <a:pt x="5156821" y="302740"/>
-                  </a:lnTo>
-                  <a:lnTo>
-                    <a:pt x="5085199" y="294327"/>
-                  </a:lnTo>
-                  <a:lnTo>
-                    <a:pt x="5013576" y="285789"/>
-                  </a:lnTo>
-                  <a:lnTo>
-                    <a:pt x="4941954" y="277123"/>
-                  </a:lnTo>
-                  <a:lnTo>
-                    <a:pt x="4870331" y="268327"/>
-                  </a:lnTo>
-                  <a:lnTo>
-                    <a:pt x="4798709" y="259399"/>
-                  </a:lnTo>
-                  <a:lnTo>
-                    <a:pt x="4727086" y="250337"/>
-                  </a:lnTo>
-                  <a:lnTo>
-                    <a:pt x="4655464" y="241140"/>
-                  </a:lnTo>
-                  <a:lnTo>
-                    <a:pt x="4583841" y="231805"/>
-                  </a:lnTo>
-                  <a:lnTo>
-                    <a:pt x="4512219" y="222330"/>
-                  </a:lnTo>
-                  <a:lnTo>
-                    <a:pt x="4440596" y="212713"/>
-                  </a:lnTo>
-                  <a:lnTo>
-                    <a:pt x="4368974" y="202952"/>
-                  </a:lnTo>
-                  <a:lnTo>
-                    <a:pt x="4297351" y="193045"/>
-                  </a:lnTo>
-                  <a:lnTo>
-                    <a:pt x="4225729" y="182990"/>
-                  </a:lnTo>
-                  <a:lnTo>
-                    <a:pt x="4154106" y="172784"/>
-                  </a:lnTo>
-                  <a:lnTo>
-                    <a:pt x="4082483" y="162425"/>
-                  </a:lnTo>
-                  <a:lnTo>
-                    <a:pt x="4010861" y="151911"/>
-                  </a:lnTo>
-                  <a:lnTo>
-                    <a:pt x="3939238" y="141239"/>
-                  </a:lnTo>
-                  <a:lnTo>
-                    <a:pt x="3867616" y="130407"/>
-                  </a:lnTo>
-                  <a:lnTo>
-                    <a:pt x="3795993" y="119414"/>
-                  </a:lnTo>
-                  <a:lnTo>
-                    <a:pt x="3724371" y="108255"/>
-                  </a:lnTo>
-                  <a:lnTo>
-                    <a:pt x="3652748" y="96930"/>
-                  </a:lnTo>
-                  <a:lnTo>
-                    <a:pt x="3581126" y="85434"/>
-                  </a:lnTo>
-                  <a:lnTo>
-                    <a:pt x="3509503" y="73767"/>
-                  </a:lnTo>
-                  <a:lnTo>
-                    <a:pt x="3437881" y="61925"/>
-                  </a:lnTo>
-                  <a:lnTo>
-                    <a:pt x="3366258" y="49905"/>
-                  </a:lnTo>
-                  <a:lnTo>
-                    <a:pt x="3294636" y="37706"/>
-                  </a:lnTo>
-                  <a:lnTo>
-                    <a:pt x="3223013" y="25323"/>
-                  </a:lnTo>
-                  <a:lnTo>
-                    <a:pt x="3151391" y="12756"/>
+                    <a:pt x="7019007" y="637413"/>
+                  </a:lnTo>
+                  <a:lnTo>
+                    <a:pt x="6947385" y="631866"/>
+                  </a:lnTo>
+                  <a:lnTo>
+                    <a:pt x="6875762" y="626180"/>
+                  </a:lnTo>
+                  <a:lnTo>
+                    <a:pt x="6804139" y="620354"/>
+                  </a:lnTo>
+                  <a:lnTo>
+                    <a:pt x="6732517" y="614383"/>
+                  </a:lnTo>
+                  <a:lnTo>
+                    <a:pt x="6660894" y="608263"/>
+                  </a:lnTo>
+                  <a:lnTo>
+                    <a:pt x="6589272" y="601992"/>
+                  </a:lnTo>
+                  <a:lnTo>
+                    <a:pt x="6517649" y="595565"/>
+                  </a:lnTo>
+                  <a:lnTo>
+                    <a:pt x="6446027" y="588979"/>
+                  </a:lnTo>
+                  <a:lnTo>
+                    <a:pt x="6374404" y="582229"/>
+                  </a:lnTo>
+                  <a:lnTo>
+                    <a:pt x="6302782" y="575311"/>
+                  </a:lnTo>
+                  <a:lnTo>
+                    <a:pt x="6231159" y="568222"/>
+                  </a:lnTo>
+                  <a:lnTo>
+                    <a:pt x="6159537" y="560957"/>
+                  </a:lnTo>
+                  <a:lnTo>
+                    <a:pt x="6087914" y="553511"/>
+                  </a:lnTo>
+                  <a:lnTo>
+                    <a:pt x="6016292" y="545880"/>
+                  </a:lnTo>
+                  <a:lnTo>
+                    <a:pt x="5944669" y="538061"/>
+                  </a:lnTo>
+                  <a:lnTo>
+                    <a:pt x="5873047" y="530047"/>
+                  </a:lnTo>
+                  <a:lnTo>
+                    <a:pt x="5801424" y="521834"/>
+                  </a:lnTo>
+                  <a:lnTo>
+                    <a:pt x="5729802" y="513417"/>
+                  </a:lnTo>
+                  <a:lnTo>
+                    <a:pt x="5658179" y="504791"/>
+                  </a:lnTo>
+                  <a:lnTo>
+                    <a:pt x="5586557" y="495951"/>
+                  </a:lnTo>
+                  <a:lnTo>
+                    <a:pt x="5514934" y="486892"/>
+                  </a:lnTo>
+                  <a:lnTo>
+                    <a:pt x="5443311" y="477608"/>
+                  </a:lnTo>
+                  <a:lnTo>
+                    <a:pt x="5371689" y="468093"/>
+                  </a:lnTo>
+                  <a:lnTo>
+                    <a:pt x="5300066" y="458342"/>
+                  </a:lnTo>
+                  <a:lnTo>
+                    <a:pt x="5228444" y="448349"/>
+                  </a:lnTo>
+                  <a:lnTo>
+                    <a:pt x="5156821" y="438108"/>
+                  </a:lnTo>
+                  <a:lnTo>
+                    <a:pt x="5085199" y="427613"/>
+                  </a:lnTo>
+                  <a:lnTo>
+                    <a:pt x="5013576" y="416857"/>
+                  </a:lnTo>
+                  <a:lnTo>
+                    <a:pt x="4941954" y="405834"/>
+                  </a:lnTo>
+                  <a:lnTo>
+                    <a:pt x="4870331" y="394538"/>
+                  </a:lnTo>
+                  <a:lnTo>
+                    <a:pt x="4798709" y="382961"/>
+                  </a:lnTo>
+                  <a:lnTo>
+                    <a:pt x="4727086" y="371097"/>
+                  </a:lnTo>
+                  <a:lnTo>
+                    <a:pt x="4655464" y="358938"/>
+                  </a:lnTo>
+                  <a:lnTo>
+                    <a:pt x="4583841" y="346478"/>
+                  </a:lnTo>
+                  <a:lnTo>
+                    <a:pt x="4512219" y="333708"/>
+                  </a:lnTo>
+                  <a:lnTo>
+                    <a:pt x="4440596" y="320621"/>
+                  </a:lnTo>
+                  <a:lnTo>
+                    <a:pt x="4368974" y="307209"/>
+                  </a:lnTo>
+                  <a:lnTo>
+                    <a:pt x="4297351" y="293465"/>
+                  </a:lnTo>
+                  <a:lnTo>
+                    <a:pt x="4225729" y="279379"/>
+                  </a:lnTo>
+                  <a:lnTo>
+                    <a:pt x="4154106" y="264943"/>
+                  </a:lnTo>
+                  <a:lnTo>
+                    <a:pt x="4082483" y="250149"/>
+                  </a:lnTo>
+                  <a:lnTo>
+                    <a:pt x="4010861" y="234988"/>
+                  </a:lnTo>
+                  <a:lnTo>
+                    <a:pt x="3939238" y="219451"/>
+                  </a:lnTo>
+                  <a:lnTo>
+                    <a:pt x="3867616" y="203527"/>
+                  </a:lnTo>
+                  <a:lnTo>
+                    <a:pt x="3795993" y="187209"/>
+                  </a:lnTo>
+                  <a:lnTo>
+                    <a:pt x="3724371" y="170485"/>
+                  </a:lnTo>
+                  <a:lnTo>
+                    <a:pt x="3652748" y="153347"/>
+                  </a:lnTo>
+                  <a:lnTo>
+                    <a:pt x="3581126" y="135782"/>
+                  </a:lnTo>
+                  <a:lnTo>
+                    <a:pt x="3509503" y="117782"/>
+                  </a:lnTo>
+                  <a:lnTo>
+                    <a:pt x="3437881" y="99335"/>
+                  </a:lnTo>
+                  <a:lnTo>
+                    <a:pt x="3366258" y="80430"/>
+                  </a:lnTo>
+                  <a:lnTo>
+                    <a:pt x="3294636" y="61056"/>
+                  </a:lnTo>
+                  <a:lnTo>
+                    <a:pt x="3223013" y="41201"/>
+                  </a:lnTo>
+                  <a:lnTo>
+                    <a:pt x="3151391" y="20853"/>
                   </a:lnTo>
                   <a:lnTo>
                     <a:pt x="3079768" y="0"/>
                   </a:lnTo>
                   <a:lnTo>
-                    <a:pt x="3008146" y="13058"/>
-                  </a:lnTo>
-                  <a:lnTo>
-                    <a:pt x="2936523" y="43557"/>
-                  </a:lnTo>
-                  <a:lnTo>
-                    <a:pt x="2864901" y="72964"/>
-                  </a:lnTo>
-                  <a:lnTo>
-                    <a:pt x="2793278" y="101317"/>
-                  </a:lnTo>
-                  <a:lnTo>
-                    <a:pt x="2721655" y="128655"/>
-                  </a:lnTo>
-                  <a:lnTo>
-                    <a:pt x="2650033" y="155013"/>
-                  </a:lnTo>
-                  <a:lnTo>
-                    <a:pt x="2578410" y="180426"/>
-                  </a:lnTo>
-                  <a:lnTo>
-                    <a:pt x="2506788" y="204929"/>
-                  </a:lnTo>
-                  <a:lnTo>
-                    <a:pt x="2435165" y="228554"/>
-                  </a:lnTo>
-                  <a:lnTo>
-                    <a:pt x="2363543" y="251333"/>
-                  </a:lnTo>
-                  <a:lnTo>
-                    <a:pt x="2291920" y="273296"/>
-                  </a:lnTo>
-                  <a:lnTo>
-                    <a:pt x="2220298" y="294471"/>
-                  </a:lnTo>
-                  <a:lnTo>
-                    <a:pt x="2148675" y="314889"/>
-                  </a:lnTo>
-                  <a:lnTo>
-                    <a:pt x="2077053" y="334574"/>
-                  </a:lnTo>
-                  <a:lnTo>
-                    <a:pt x="2005430" y="353554"/>
-                  </a:lnTo>
-                  <a:lnTo>
-                    <a:pt x="1933808" y="371855"/>
-                  </a:lnTo>
-                  <a:lnTo>
-                    <a:pt x="1862185" y="389499"/>
-                  </a:lnTo>
-                  <a:lnTo>
-                    <a:pt x="1790563" y="406512"/>
-                  </a:lnTo>
-                  <a:lnTo>
-                    <a:pt x="1718940" y="422915"/>
-                  </a:lnTo>
-                  <a:lnTo>
-                    <a:pt x="1647318" y="438730"/>
-                  </a:lnTo>
-                  <a:lnTo>
-                    <a:pt x="1575695" y="453979"/>
-                  </a:lnTo>
-                  <a:lnTo>
-                    <a:pt x="1504073" y="468681"/>
-                  </a:lnTo>
-                  <a:lnTo>
-                    <a:pt x="1432450" y="482856"/>
-                  </a:lnTo>
-                  <a:lnTo>
-                    <a:pt x="1360827" y="496524"/>
-                  </a:lnTo>
-                  <a:lnTo>
-                    <a:pt x="1289205" y="509702"/>
-                  </a:lnTo>
-                  <a:lnTo>
-                    <a:pt x="1217582" y="522408"/>
-                  </a:lnTo>
-                  <a:lnTo>
-                    <a:pt x="1145960" y="534659"/>
-                  </a:lnTo>
-                  <a:lnTo>
-                    <a:pt x="1074337" y="546470"/>
-                  </a:lnTo>
-                  <a:lnTo>
-                    <a:pt x="1002715" y="557859"/>
-                  </a:lnTo>
-                  <a:lnTo>
-                    <a:pt x="931092" y="568839"/>
-                  </a:lnTo>
-                  <a:lnTo>
-                    <a:pt x="859470" y="579426"/>
-                  </a:lnTo>
-                  <a:lnTo>
-                    <a:pt x="787847" y="589634"/>
-                  </a:lnTo>
-                  <a:lnTo>
-                    <a:pt x="716225" y="599476"/>
-                  </a:lnTo>
-                  <a:lnTo>
-                    <a:pt x="644602" y="608966"/>
-                  </a:lnTo>
-                  <a:lnTo>
-                    <a:pt x="572980" y="618115"/>
-                  </a:lnTo>
-                  <a:lnTo>
-                    <a:pt x="501357" y="626937"/>
-                  </a:lnTo>
-                  <a:lnTo>
-                    <a:pt x="429735" y="635442"/>
-                  </a:lnTo>
-                  <a:lnTo>
-                    <a:pt x="358112" y="643643"/>
-                  </a:lnTo>
-                  <a:lnTo>
-                    <a:pt x="286490" y="651550"/>
-                  </a:lnTo>
-                  <a:lnTo>
-                    <a:pt x="214867" y="659174"/>
-                  </a:lnTo>
-                  <a:lnTo>
-                    <a:pt x="143245" y="666525"/>
-                  </a:lnTo>
-                  <a:lnTo>
-                    <a:pt x="71622" y="673612"/>
-                  </a:lnTo>
-                  <a:lnTo>
-                    <a:pt x="0" y="680445"/>
+                    <a:pt x="3008146" y="8680"/>
+                  </a:lnTo>
+                  <a:lnTo>
+                    <a:pt x="2936523" y="37681"/>
+                  </a:lnTo>
+                  <a:lnTo>
+                    <a:pt x="2864901" y="65694"/>
+                  </a:lnTo>
+                  <a:lnTo>
+                    <a:pt x="2793278" y="92755"/>
+                  </a:lnTo>
+                  <a:lnTo>
+                    <a:pt x="2721655" y="118894"/>
+                  </a:lnTo>
+                  <a:lnTo>
+                    <a:pt x="2650033" y="144144"/>
+                  </a:lnTo>
+                  <a:lnTo>
+                    <a:pt x="2578410" y="168535"/>
+                  </a:lnTo>
+                  <a:lnTo>
+                    <a:pt x="2506788" y="192095"/>
+                  </a:lnTo>
+                  <a:lnTo>
+                    <a:pt x="2435165" y="214854"/>
+                  </a:lnTo>
+                  <a:lnTo>
+                    <a:pt x="2363543" y="236839"/>
+                  </a:lnTo>
+                  <a:lnTo>
+                    <a:pt x="2291920" y="258075"/>
+                  </a:lnTo>
+                  <a:lnTo>
+                    <a:pt x="2220298" y="278588"/>
+                  </a:lnTo>
+                  <a:lnTo>
+                    <a:pt x="2148675" y="298404"/>
+                  </a:lnTo>
+                  <a:lnTo>
+                    <a:pt x="2077053" y="317545"/>
+                  </a:lnTo>
+                  <a:lnTo>
+                    <a:pt x="2005430" y="336035"/>
+                  </a:lnTo>
+                  <a:lnTo>
+                    <a:pt x="1933808" y="353896"/>
+                  </a:lnTo>
+                  <a:lnTo>
+                    <a:pt x="1862185" y="371149"/>
+                  </a:lnTo>
+                  <a:lnTo>
+                    <a:pt x="1790563" y="387814"/>
+                  </a:lnTo>
+                  <a:lnTo>
+                    <a:pt x="1718940" y="403913"/>
+                  </a:lnTo>
+                  <a:lnTo>
+                    <a:pt x="1647318" y="419464"/>
+                  </a:lnTo>
+                  <a:lnTo>
+                    <a:pt x="1575695" y="434486"/>
+                  </a:lnTo>
+                  <a:lnTo>
+                    <a:pt x="1504073" y="448996"/>
+                  </a:lnTo>
+                  <a:lnTo>
+                    <a:pt x="1432450" y="463013"/>
+                  </a:lnTo>
+                  <a:lnTo>
+                    <a:pt x="1360827" y="476552"/>
+                  </a:lnTo>
+                  <a:lnTo>
+                    <a:pt x="1289205" y="489631"/>
+                  </a:lnTo>
+                  <a:lnTo>
+                    <a:pt x="1217582" y="502265"/>
+                  </a:lnTo>
+                  <a:lnTo>
+                    <a:pt x="1145960" y="514469"/>
+                  </a:lnTo>
+                  <a:lnTo>
+                    <a:pt x="1074337" y="526258"/>
+                  </a:lnTo>
+                  <a:lnTo>
+                    <a:pt x="1002715" y="537645"/>
+                  </a:lnTo>
+                  <a:lnTo>
+                    <a:pt x="931092" y="548645"/>
+                  </a:lnTo>
+                  <a:lnTo>
+                    <a:pt x="859470" y="559271"/>
+                  </a:lnTo>
+                  <a:lnTo>
+                    <a:pt x="787847" y="569535"/>
+                  </a:lnTo>
+                  <a:lnTo>
+                    <a:pt x="716225" y="579450"/>
+                  </a:lnTo>
+                  <a:lnTo>
+                    <a:pt x="644602" y="589027"/>
+                  </a:lnTo>
+                  <a:lnTo>
+                    <a:pt x="572980" y="598278"/>
+                  </a:lnTo>
+                  <a:lnTo>
+                    <a:pt x="501357" y="607215"/>
+                  </a:lnTo>
+                  <a:lnTo>
+                    <a:pt x="429735" y="615848"/>
+                  </a:lnTo>
+                  <a:lnTo>
+                    <a:pt x="358112" y="624186"/>
+                  </a:lnTo>
+                  <a:lnTo>
+                    <a:pt x="286490" y="632241"/>
+                  </a:lnTo>
+                  <a:lnTo>
+                    <a:pt x="214867" y="640022"/>
+                  </a:lnTo>
+                  <a:lnTo>
+                    <a:pt x="143245" y="647538"/>
+                  </a:lnTo>
+                  <a:lnTo>
+                    <a:pt x="71622" y="654799"/>
+                  </a:lnTo>
+                  <a:lnTo>
+                    <a:pt x="0" y="661812"/>
                   </a:lnTo>
                 </a:path>
               </a:pathLst>
@@ -4313,309 +4331,309 @@
           </p:nvSpPr>
           <p:spPr>
             <a:xfrm>
-              <a:off x="1172049" y="3949018"/>
-              <a:ext cx="7090630" cy="1051337"/>
+              <a:off x="1172049" y="4392833"/>
+              <a:ext cx="7090630" cy="455001"/>
             </a:xfrm>
             <a:custGeom>
               <a:avLst/>
               <a:pathLst>
-                <a:path w="7090630" h="1051337">
+                <a:path w="7090630" h="455001">
                   <a:moveTo>
-                    <a:pt x="0" y="1051337"/>
+                    <a:pt x="0" y="455001"/>
                   </a:moveTo>
                   <a:lnTo>
-                    <a:pt x="71622" y="1045372"/>
-                  </a:lnTo>
-                  <a:lnTo>
-                    <a:pt x="143245" y="1039343"/>
-                  </a:lnTo>
-                  <a:lnTo>
-                    <a:pt x="214867" y="1033248"/>
-                  </a:lnTo>
-                  <a:lnTo>
-                    <a:pt x="286490" y="1027087"/>
-                  </a:lnTo>
-                  <a:lnTo>
-                    <a:pt x="358112" y="1020859"/>
-                  </a:lnTo>
-                  <a:lnTo>
-                    <a:pt x="429735" y="1014564"/>
-                  </a:lnTo>
-                  <a:lnTo>
-                    <a:pt x="501357" y="1008199"/>
-                  </a:lnTo>
-                  <a:lnTo>
-                    <a:pt x="572980" y="1001766"/>
-                  </a:lnTo>
-                  <a:lnTo>
-                    <a:pt x="644602" y="995263"/>
-                  </a:lnTo>
-                  <a:lnTo>
-                    <a:pt x="716225" y="988689"/>
-                  </a:lnTo>
-                  <a:lnTo>
-                    <a:pt x="787847" y="982044"/>
-                  </a:lnTo>
-                  <a:lnTo>
-                    <a:pt x="859470" y="975326"/>
-                  </a:lnTo>
-                  <a:lnTo>
-                    <a:pt x="931092" y="968536"/>
-                  </a:lnTo>
-                  <a:lnTo>
-                    <a:pt x="1002715" y="961672"/>
-                  </a:lnTo>
-                  <a:lnTo>
-                    <a:pt x="1074337" y="954733"/>
-                  </a:lnTo>
-                  <a:lnTo>
-                    <a:pt x="1145960" y="947718"/>
-                  </a:lnTo>
-                  <a:lnTo>
-                    <a:pt x="1217582" y="940628"/>
-                  </a:lnTo>
-                  <a:lnTo>
-                    <a:pt x="1289205" y="933460"/>
-                  </a:lnTo>
-                  <a:lnTo>
-                    <a:pt x="1360827" y="926215"/>
-                  </a:lnTo>
-                  <a:lnTo>
-                    <a:pt x="1432450" y="918891"/>
-                  </a:lnTo>
-                  <a:lnTo>
-                    <a:pt x="1504073" y="911487"/>
-                  </a:lnTo>
-                  <a:lnTo>
-                    <a:pt x="1575695" y="904003"/>
-                  </a:lnTo>
-                  <a:lnTo>
-                    <a:pt x="1647318" y="896437"/>
-                  </a:lnTo>
-                  <a:lnTo>
-                    <a:pt x="1718940" y="888789"/>
-                  </a:lnTo>
-                  <a:lnTo>
-                    <a:pt x="1790563" y="881058"/>
-                  </a:lnTo>
-                  <a:lnTo>
-                    <a:pt x="1862185" y="873243"/>
-                  </a:lnTo>
-                  <a:lnTo>
-                    <a:pt x="1933808" y="865343"/>
-                  </a:lnTo>
-                  <a:lnTo>
-                    <a:pt x="2005430" y="857358"/>
-                  </a:lnTo>
-                  <a:lnTo>
-                    <a:pt x="2077053" y="849285"/>
-                  </a:lnTo>
-                  <a:lnTo>
-                    <a:pt x="2148675" y="841125"/>
-                  </a:lnTo>
-                  <a:lnTo>
-                    <a:pt x="2220298" y="832876"/>
-                  </a:lnTo>
-                  <a:lnTo>
-                    <a:pt x="2291920" y="824538"/>
-                  </a:lnTo>
-                  <a:lnTo>
-                    <a:pt x="2363543" y="816108"/>
-                  </a:lnTo>
-                  <a:lnTo>
-                    <a:pt x="2435165" y="807588"/>
-                  </a:lnTo>
-                  <a:lnTo>
-                    <a:pt x="2506788" y="798974"/>
-                  </a:lnTo>
-                  <a:lnTo>
-                    <a:pt x="2578410" y="790267"/>
-                  </a:lnTo>
-                  <a:lnTo>
-                    <a:pt x="2650033" y="781466"/>
-                  </a:lnTo>
-                  <a:lnTo>
-                    <a:pt x="2721655" y="772569"/>
-                  </a:lnTo>
-                  <a:lnTo>
-                    <a:pt x="2793278" y="763575"/>
-                  </a:lnTo>
-                  <a:lnTo>
-                    <a:pt x="2864901" y="754483"/>
-                  </a:lnTo>
-                  <a:lnTo>
-                    <a:pt x="2936523" y="745293"/>
-                  </a:lnTo>
-                  <a:lnTo>
-                    <a:pt x="3008146" y="736002"/>
-                  </a:lnTo>
-                  <a:lnTo>
-                    <a:pt x="3079768" y="726611"/>
-                  </a:lnTo>
-                  <a:lnTo>
-                    <a:pt x="3151391" y="717118"/>
-                  </a:lnTo>
-                  <a:lnTo>
-                    <a:pt x="3223013" y="707521"/>
-                  </a:lnTo>
-                  <a:lnTo>
-                    <a:pt x="3294636" y="697820"/>
-                  </a:lnTo>
-                  <a:lnTo>
-                    <a:pt x="3366258" y="688014"/>
-                  </a:lnTo>
-                  <a:lnTo>
-                    <a:pt x="3437881" y="678101"/>
-                  </a:lnTo>
-                  <a:lnTo>
-                    <a:pt x="3509503" y="668081"/>
-                  </a:lnTo>
-                  <a:lnTo>
-                    <a:pt x="3581126" y="657951"/>
-                  </a:lnTo>
-                  <a:lnTo>
-                    <a:pt x="3652748" y="647712"/>
-                  </a:lnTo>
-                  <a:lnTo>
-                    <a:pt x="3724371" y="637361"/>
-                  </a:lnTo>
-                  <a:lnTo>
-                    <a:pt x="3795993" y="626898"/>
-                  </a:lnTo>
-                  <a:lnTo>
-                    <a:pt x="3867616" y="616321"/>
-                  </a:lnTo>
-                  <a:lnTo>
-                    <a:pt x="3939238" y="605629"/>
-                  </a:lnTo>
-                  <a:lnTo>
-                    <a:pt x="4010861" y="594821"/>
-                  </a:lnTo>
-                  <a:lnTo>
-                    <a:pt x="4082483" y="583896"/>
-                  </a:lnTo>
-                  <a:lnTo>
-                    <a:pt x="4154106" y="572851"/>
-                  </a:lnTo>
-                  <a:lnTo>
-                    <a:pt x="4225729" y="561687"/>
-                  </a:lnTo>
-                  <a:lnTo>
-                    <a:pt x="4297351" y="550401"/>
-                  </a:lnTo>
-                  <a:lnTo>
-                    <a:pt x="4368974" y="538993"/>
-                  </a:lnTo>
-                  <a:lnTo>
-                    <a:pt x="4440596" y="527461"/>
-                  </a:lnTo>
-                  <a:lnTo>
-                    <a:pt x="4512219" y="515803"/>
-                  </a:lnTo>
-                  <a:lnTo>
-                    <a:pt x="4583841" y="504019"/>
-                  </a:lnTo>
-                  <a:lnTo>
-                    <a:pt x="4655464" y="492107"/>
-                  </a:lnTo>
-                  <a:lnTo>
-                    <a:pt x="4727086" y="480065"/>
-                  </a:lnTo>
-                  <a:lnTo>
-                    <a:pt x="4798709" y="467893"/>
-                  </a:lnTo>
-                  <a:lnTo>
-                    <a:pt x="4870331" y="455588"/>
-                  </a:lnTo>
-                  <a:lnTo>
-                    <a:pt x="4941954" y="443149"/>
-                  </a:lnTo>
-                  <a:lnTo>
-                    <a:pt x="5013576" y="430575"/>
-                  </a:lnTo>
-                  <a:lnTo>
-                    <a:pt x="5085199" y="417865"/>
-                  </a:lnTo>
-                  <a:lnTo>
-                    <a:pt x="5156821" y="405016"/>
-                  </a:lnTo>
-                  <a:lnTo>
-                    <a:pt x="5228444" y="392028"/>
-                  </a:lnTo>
-                  <a:lnTo>
-                    <a:pt x="5300066" y="378899"/>
-                  </a:lnTo>
-                  <a:lnTo>
-                    <a:pt x="5371689" y="365627"/>
-                  </a:lnTo>
-                  <a:lnTo>
-                    <a:pt x="5443311" y="352211"/>
-                  </a:lnTo>
-                  <a:lnTo>
-                    <a:pt x="5514934" y="338649"/>
-                  </a:lnTo>
-                  <a:lnTo>
-                    <a:pt x="5586557" y="324939"/>
-                  </a:lnTo>
-                  <a:lnTo>
-                    <a:pt x="5658179" y="311081"/>
-                  </a:lnTo>
-                  <a:lnTo>
-                    <a:pt x="5729802" y="297072"/>
-                  </a:lnTo>
-                  <a:lnTo>
-                    <a:pt x="5801424" y="282911"/>
-                  </a:lnTo>
-                  <a:lnTo>
-                    <a:pt x="5873047" y="268595"/>
-                  </a:lnTo>
-                  <a:lnTo>
-                    <a:pt x="5944669" y="254125"/>
-                  </a:lnTo>
-                  <a:lnTo>
-                    <a:pt x="6016292" y="239497"/>
-                  </a:lnTo>
-                  <a:lnTo>
-                    <a:pt x="6087914" y="224710"/>
-                  </a:lnTo>
-                  <a:lnTo>
-                    <a:pt x="6159537" y="209762"/>
-                  </a:lnTo>
-                  <a:lnTo>
-                    <a:pt x="6231159" y="194652"/>
-                  </a:lnTo>
-                  <a:lnTo>
-                    <a:pt x="6302782" y="179378"/>
-                  </a:lnTo>
-                  <a:lnTo>
-                    <a:pt x="6374404" y="163938"/>
-                  </a:lnTo>
-                  <a:lnTo>
-                    <a:pt x="6446027" y="148330"/>
-                  </a:lnTo>
-                  <a:lnTo>
-                    <a:pt x="6517649" y="132552"/>
-                  </a:lnTo>
-                  <a:lnTo>
-                    <a:pt x="6589272" y="116603"/>
-                  </a:lnTo>
-                  <a:lnTo>
-                    <a:pt x="6660894" y="100481"/>
-                  </a:lnTo>
-                  <a:lnTo>
-                    <a:pt x="6732517" y="84183"/>
-                  </a:lnTo>
-                  <a:lnTo>
-                    <a:pt x="6804139" y="67708"/>
-                  </a:lnTo>
-                  <a:lnTo>
-                    <a:pt x="6875762" y="51055"/>
-                  </a:lnTo>
-                  <a:lnTo>
-                    <a:pt x="6947385" y="34220"/>
-                  </a:lnTo>
-                  <a:lnTo>
-                    <a:pt x="7019007" y="17202"/>
+                    <a:pt x="71622" y="451449"/>
+                  </a:lnTo>
+                  <a:lnTo>
+                    <a:pt x="143245" y="447880"/>
+                  </a:lnTo>
+                  <a:lnTo>
+                    <a:pt x="214867" y="444293"/>
+                  </a:lnTo>
+                  <a:lnTo>
+                    <a:pt x="286490" y="440687"/>
+                  </a:lnTo>
+                  <a:lnTo>
+                    <a:pt x="358112" y="437063"/>
+                  </a:lnTo>
+                  <a:lnTo>
+                    <a:pt x="429735" y="433421"/>
+                  </a:lnTo>
+                  <a:lnTo>
+                    <a:pt x="501357" y="429761"/>
+                  </a:lnTo>
+                  <a:lnTo>
+                    <a:pt x="572980" y="426082"/>
+                  </a:lnTo>
+                  <a:lnTo>
+                    <a:pt x="644602" y="422384"/>
+                  </a:lnTo>
+                  <a:lnTo>
+                    <a:pt x="716225" y="418668"/>
+                  </a:lnTo>
+                  <a:lnTo>
+                    <a:pt x="787847" y="414932"/>
+                  </a:lnTo>
+                  <a:lnTo>
+                    <a:pt x="859470" y="411178"/>
+                  </a:lnTo>
+                  <a:lnTo>
+                    <a:pt x="931092" y="407405"/>
+                  </a:lnTo>
+                  <a:lnTo>
+                    <a:pt x="1002715" y="403613"/>
+                  </a:lnTo>
+                  <a:lnTo>
+                    <a:pt x="1074337" y="399801"/>
+                  </a:lnTo>
+                  <a:lnTo>
+                    <a:pt x="1145960" y="395971"/>
+                  </a:lnTo>
+                  <a:lnTo>
+                    <a:pt x="1217582" y="392120"/>
+                  </a:lnTo>
+                  <a:lnTo>
+                    <a:pt x="1289205" y="388251"/>
+                  </a:lnTo>
+                  <a:lnTo>
+                    <a:pt x="1360827" y="384361"/>
+                  </a:lnTo>
+                  <a:lnTo>
+                    <a:pt x="1432450" y="380452"/>
+                  </a:lnTo>
+                  <a:lnTo>
+                    <a:pt x="1504073" y="376524"/>
+                  </a:lnTo>
+                  <a:lnTo>
+                    <a:pt x="1575695" y="372575"/>
+                  </a:lnTo>
+                  <a:lnTo>
+                    <a:pt x="1647318" y="368606"/>
+                  </a:lnTo>
+                  <a:lnTo>
+                    <a:pt x="1718940" y="364618"/>
+                  </a:lnTo>
+                  <a:lnTo>
+                    <a:pt x="1790563" y="360609"/>
+                  </a:lnTo>
+                  <a:lnTo>
+                    <a:pt x="1862185" y="356580"/>
+                  </a:lnTo>
+                  <a:lnTo>
+                    <a:pt x="1933808" y="352530"/>
+                  </a:lnTo>
+                  <a:lnTo>
+                    <a:pt x="2005430" y="348460"/>
+                  </a:lnTo>
+                  <a:lnTo>
+                    <a:pt x="2077053" y="344369"/>
+                  </a:lnTo>
+                  <a:lnTo>
+                    <a:pt x="2148675" y="340258"/>
+                  </a:lnTo>
+                  <a:lnTo>
+                    <a:pt x="2220298" y="336125"/>
+                  </a:lnTo>
+                  <a:lnTo>
+                    <a:pt x="2291920" y="331972"/>
+                  </a:lnTo>
+                  <a:lnTo>
+                    <a:pt x="2363543" y="327798"/>
+                  </a:lnTo>
+                  <a:lnTo>
+                    <a:pt x="2435165" y="323603"/>
+                  </a:lnTo>
+                  <a:lnTo>
+                    <a:pt x="2506788" y="319386"/>
+                  </a:lnTo>
+                  <a:lnTo>
+                    <a:pt x="2578410" y="315148"/>
+                  </a:lnTo>
+                  <a:lnTo>
+                    <a:pt x="2650033" y="310889"/>
+                  </a:lnTo>
+                  <a:lnTo>
+                    <a:pt x="2721655" y="306608"/>
+                  </a:lnTo>
+                  <a:lnTo>
+                    <a:pt x="2793278" y="302305"/>
+                  </a:lnTo>
+                  <a:lnTo>
+                    <a:pt x="2864901" y="297981"/>
+                  </a:lnTo>
+                  <a:lnTo>
+                    <a:pt x="2936523" y="293634"/>
+                  </a:lnTo>
+                  <a:lnTo>
+                    <a:pt x="3008146" y="289266"/>
+                  </a:lnTo>
+                  <a:lnTo>
+                    <a:pt x="3079768" y="284876"/>
+                  </a:lnTo>
+                  <a:lnTo>
+                    <a:pt x="3151391" y="280463"/>
+                  </a:lnTo>
+                  <a:lnTo>
+                    <a:pt x="3223013" y="276028"/>
+                  </a:lnTo>
+                  <a:lnTo>
+                    <a:pt x="3294636" y="271570"/>
+                  </a:lnTo>
+                  <a:lnTo>
+                    <a:pt x="3366258" y="267090"/>
+                  </a:lnTo>
+                  <a:lnTo>
+                    <a:pt x="3437881" y="262588"/>
+                  </a:lnTo>
+                  <a:lnTo>
+                    <a:pt x="3509503" y="258062"/>
+                  </a:lnTo>
+                  <a:lnTo>
+                    <a:pt x="3581126" y="253514"/>
+                  </a:lnTo>
+                  <a:lnTo>
+                    <a:pt x="3652748" y="248942"/>
+                  </a:lnTo>
+                  <a:lnTo>
+                    <a:pt x="3724371" y="244348"/>
+                  </a:lnTo>
+                  <a:lnTo>
+                    <a:pt x="3795993" y="239730"/>
+                  </a:lnTo>
+                  <a:lnTo>
+                    <a:pt x="3867616" y="235088"/>
+                  </a:lnTo>
+                  <a:lnTo>
+                    <a:pt x="3939238" y="230424"/>
+                  </a:lnTo>
+                  <a:lnTo>
+                    <a:pt x="4010861" y="225735"/>
+                  </a:lnTo>
+                  <a:lnTo>
+                    <a:pt x="4082483" y="221023"/>
+                  </a:lnTo>
+                  <a:lnTo>
+                    <a:pt x="4154106" y="216287"/>
+                  </a:lnTo>
+                  <a:lnTo>
+                    <a:pt x="4225729" y="211527"/>
+                  </a:lnTo>
+                  <a:lnTo>
+                    <a:pt x="4297351" y="206743"/>
+                  </a:lnTo>
+                  <a:lnTo>
+                    <a:pt x="4368974" y="201935"/>
+                  </a:lnTo>
+                  <a:lnTo>
+                    <a:pt x="4440596" y="197102"/>
+                  </a:lnTo>
+                  <a:lnTo>
+                    <a:pt x="4512219" y="192245"/>
+                  </a:lnTo>
+                  <a:lnTo>
+                    <a:pt x="4583841" y="187363"/>
+                  </a:lnTo>
+                  <a:lnTo>
+                    <a:pt x="4655464" y="182457"/>
+                  </a:lnTo>
+                  <a:lnTo>
+                    <a:pt x="4727086" y="177526"/>
+                  </a:lnTo>
+                  <a:lnTo>
+                    <a:pt x="4798709" y="172569"/>
+                  </a:lnTo>
+                  <a:lnTo>
+                    <a:pt x="4870331" y="167588"/>
+                  </a:lnTo>
+                  <a:lnTo>
+                    <a:pt x="4941954" y="162582"/>
+                  </a:lnTo>
+                  <a:lnTo>
+                    <a:pt x="5013576" y="157550"/>
+                  </a:lnTo>
+                  <a:lnTo>
+                    <a:pt x="5085199" y="152492"/>
+                  </a:lnTo>
+                  <a:lnTo>
+                    <a:pt x="5156821" y="147409"/>
+                  </a:lnTo>
+                  <a:lnTo>
+                    <a:pt x="5228444" y="142301"/>
+                  </a:lnTo>
+                  <a:lnTo>
+                    <a:pt x="5300066" y="137166"/>
+                  </a:lnTo>
+                  <a:lnTo>
+                    <a:pt x="5371689" y="132005"/>
+                  </a:lnTo>
+                  <a:lnTo>
+                    <a:pt x="5443311" y="126819"/>
+                  </a:lnTo>
+                  <a:lnTo>
+                    <a:pt x="5514934" y="121606"/>
+                  </a:lnTo>
+                  <a:lnTo>
+                    <a:pt x="5586557" y="116366"/>
+                  </a:lnTo>
+                  <a:lnTo>
+                    <a:pt x="5658179" y="111100"/>
+                  </a:lnTo>
+                  <a:lnTo>
+                    <a:pt x="5729802" y="105808"/>
+                  </a:lnTo>
+                  <a:lnTo>
+                    <a:pt x="5801424" y="100489"/>
+                  </a:lnTo>
+                  <a:lnTo>
+                    <a:pt x="5873047" y="95142"/>
+                  </a:lnTo>
+                  <a:lnTo>
+                    <a:pt x="5944669" y="89769"/>
+                  </a:lnTo>
+                  <a:lnTo>
+                    <a:pt x="6016292" y="84368"/>
+                  </a:lnTo>
+                  <a:lnTo>
+                    <a:pt x="6087914" y="78940"/>
+                  </a:lnTo>
+                  <a:lnTo>
+                    <a:pt x="6159537" y="73485"/>
+                  </a:lnTo>
+                  <a:lnTo>
+                    <a:pt x="6231159" y="68002"/>
+                  </a:lnTo>
+                  <a:lnTo>
+                    <a:pt x="6302782" y="62491"/>
+                  </a:lnTo>
+                  <a:lnTo>
+                    <a:pt x="6374404" y="56952"/>
+                  </a:lnTo>
+                  <a:lnTo>
+                    <a:pt x="6446027" y="51386"/>
+                  </a:lnTo>
+                  <a:lnTo>
+                    <a:pt x="6517649" y="45791"/>
+                  </a:lnTo>
+                  <a:lnTo>
+                    <a:pt x="6589272" y="40168"/>
+                  </a:lnTo>
+                  <a:lnTo>
+                    <a:pt x="6660894" y="34516"/>
+                  </a:lnTo>
+                  <a:lnTo>
+                    <a:pt x="6732517" y="28836"/>
+                  </a:lnTo>
+                  <a:lnTo>
+                    <a:pt x="6804139" y="23126"/>
+                  </a:lnTo>
+                  <a:lnTo>
+                    <a:pt x="6875762" y="17388"/>
+                  </a:lnTo>
+                  <a:lnTo>
+                    <a:pt x="6947385" y="11621"/>
+                  </a:lnTo>
+                  <a:lnTo>
+                    <a:pt x="7019007" y="5825"/>
                   </a:lnTo>
                   <a:lnTo>
                     <a:pt x="7090630" y="0"/>

--- a/docs/plots/carbo/jx_carbo_linsubhr_dosedisc_aki2.pptx
+++ b/docs/plots/carbo/jx_carbo_linsubhr_dosedisc_aki2.pptx
@@ -3181,13 +3181,13 @@
                     <a:pt x="931092" y="1856137"/>
                   </a:lnTo>
                   <a:lnTo>
-                    <a:pt x="1002715" y="1899653"/>
+                    <a:pt x="1002715" y="1899654"/>
                   </a:lnTo>
                   <a:lnTo>
                     <a:pt x="1074337" y="1942116"/>
                   </a:lnTo>
                   <a:lnTo>
-                    <a:pt x="1145960" y="1983549"/>
+                    <a:pt x="1145960" y="1983550"/>
                   </a:lnTo>
                   <a:lnTo>
                     <a:pt x="1217582" y="2023980"/>
@@ -3196,7 +3196,7 @@
                     <a:pt x="1289205" y="2063430"/>
                   </a:lnTo>
                   <a:lnTo>
-                    <a:pt x="1360827" y="2101925"/>
+                    <a:pt x="1360827" y="2101926"/>
                   </a:lnTo>
                   <a:lnTo>
                     <a:pt x="1432450" y="2139488"/>
@@ -3277,7 +3277,7 @@
                     <a:pt x="3223013" y="2707156"/>
                   </a:lnTo>
                   <a:lnTo>
-                    <a:pt x="3294636" y="2673847"/>
+                    <a:pt x="3294636" y="2673848"/>
                   </a:lnTo>
                   <a:lnTo>
                     <a:pt x="3366258" y="2639366"/>
@@ -3319,7 +3319,7 @@
                     <a:pt x="4225729" y="2117452"/>
                   </a:lnTo>
                   <a:lnTo>
-                    <a:pt x="4297351" y="2063369"/>
+                    <a:pt x="4297351" y="2063370"/>
                   </a:lnTo>
                   <a:lnTo>
                     <a:pt x="4368974" y="2007382"/>
@@ -3331,7 +3331,7 @@
                     <a:pt x="4512219" y="1889420"/>
                   </a:lnTo>
                   <a:lnTo>
-                    <a:pt x="4583841" y="1827304"/>
+                    <a:pt x="4583841" y="1827305"/>
                   </a:lnTo>
                   <a:lnTo>
                     <a:pt x="4655464" y="1763001"/>
@@ -3340,58 +3340,58 @@
                     <a:pt x="4727086" y="1696432"/>
                   </a:lnTo>
                   <a:lnTo>
-                    <a:pt x="4798709" y="1627517"/>
-                  </a:lnTo>
-                  <a:lnTo>
-                    <a:pt x="4870331" y="1556175"/>
-                  </a:lnTo>
-                  <a:lnTo>
-                    <a:pt x="4941954" y="1482320"/>
-                  </a:lnTo>
-                  <a:lnTo>
-                    <a:pt x="5013576" y="1405863"/>
-                  </a:lnTo>
-                  <a:lnTo>
-                    <a:pt x="5085199" y="1326712"/>
+                    <a:pt x="4798709" y="1627518"/>
+                  </a:lnTo>
+                  <a:lnTo>
+                    <a:pt x="4870331" y="1556176"/>
+                  </a:lnTo>
+                  <a:lnTo>
+                    <a:pt x="4941954" y="1482321"/>
+                  </a:lnTo>
+                  <a:lnTo>
+                    <a:pt x="5013576" y="1405864"/>
+                  </a:lnTo>
+                  <a:lnTo>
+                    <a:pt x="5085199" y="1326713"/>
                   </a:lnTo>
                   <a:lnTo>
                     <a:pt x="5156821" y="1244774"/>
                   </a:lnTo>
                   <a:lnTo>
-                    <a:pt x="5228444" y="1159948"/>
-                  </a:lnTo>
-                  <a:lnTo>
-                    <a:pt x="5300066" y="1072134"/>
-                  </a:lnTo>
-                  <a:lnTo>
-                    <a:pt x="5371689" y="981227"/>
-                  </a:lnTo>
-                  <a:lnTo>
-                    <a:pt x="5443311" y="887117"/>
-                  </a:lnTo>
-                  <a:lnTo>
-                    <a:pt x="5514934" y="789692"/>
-                  </a:lnTo>
-                  <a:lnTo>
-                    <a:pt x="5586557" y="688835"/>
-                  </a:lnTo>
-                  <a:lnTo>
-                    <a:pt x="5658179" y="584425"/>
-                  </a:lnTo>
-                  <a:lnTo>
-                    <a:pt x="5729802" y="476336"/>
-                  </a:lnTo>
-                  <a:lnTo>
-                    <a:pt x="5801424" y="364440"/>
-                  </a:lnTo>
-                  <a:lnTo>
-                    <a:pt x="5873047" y="248602"/>
-                  </a:lnTo>
-                  <a:lnTo>
-                    <a:pt x="5944669" y="128683"/>
-                  </a:lnTo>
-                  <a:lnTo>
-                    <a:pt x="6016292" y="4539"/>
+                    <a:pt x="5228444" y="1159949"/>
+                  </a:lnTo>
+                  <a:lnTo>
+                    <a:pt x="5300066" y="1072135"/>
+                  </a:lnTo>
+                  <a:lnTo>
+                    <a:pt x="5371689" y="981228"/>
+                  </a:lnTo>
+                  <a:lnTo>
+                    <a:pt x="5443311" y="887118"/>
+                  </a:lnTo>
+                  <a:lnTo>
+                    <a:pt x="5514934" y="789693"/>
+                  </a:lnTo>
+                  <a:lnTo>
+                    <a:pt x="5586557" y="688836"/>
+                  </a:lnTo>
+                  <a:lnTo>
+                    <a:pt x="5658179" y="584426"/>
+                  </a:lnTo>
+                  <a:lnTo>
+                    <a:pt x="5729802" y="476337"/>
+                  </a:lnTo>
+                  <a:lnTo>
+                    <a:pt x="5801424" y="364441"/>
+                  </a:lnTo>
+                  <a:lnTo>
+                    <a:pt x="5873047" y="248603"/>
+                  </a:lnTo>
+                  <a:lnTo>
+                    <a:pt x="5944669" y="128684"/>
+                  </a:lnTo>
+                  <a:lnTo>
+                    <a:pt x="6016292" y="4540"/>
                   </a:lnTo>
                   <a:lnTo>
                     <a:pt x="6018822" y="0"/>
@@ -3433,7 +3433,7 @@
                     <a:pt x="6374404" y="3373980"/>
                   </a:lnTo>
                   <a:lnTo>
-                    <a:pt x="6302782" y="3367063"/>
+                    <a:pt x="6302782" y="3367062"/>
                   </a:lnTo>
                   <a:lnTo>
                     <a:pt x="6231159" y="3359973"/>
@@ -3460,7 +3460,7 @@
                     <a:pt x="5729802" y="3305168"/>
                   </a:lnTo>
                   <a:lnTo>
-                    <a:pt x="5658179" y="3296543"/>
+                    <a:pt x="5658179" y="3296542"/>
                   </a:lnTo>
                   <a:lnTo>
                     <a:pt x="5586557" y="3287703"/>
@@ -3475,7 +3475,7 @@
                     <a:pt x="5371689" y="3259844"/>
                   </a:lnTo>
                   <a:lnTo>
-                    <a:pt x="5300066" y="3250094"/>
+                    <a:pt x="5300066" y="3250093"/>
                   </a:lnTo>
                   <a:lnTo>
                     <a:pt x="5228444" y="3240101"/>
@@ -3607,7 +3607,7 @@
                     <a:pt x="2220298" y="3070340"/>
                   </a:lnTo>
                   <a:lnTo>
-                    <a:pt x="2148675" y="3090156"/>
+                    <a:pt x="2148675" y="3090155"/>
                   </a:lnTo>
                   <a:lnTo>
                     <a:pt x="2077053" y="3109297"/>
@@ -3646,10 +3646,10 @@
                     <a:pt x="1289205" y="3281383"/>
                   </a:lnTo>
                   <a:lnTo>
-                    <a:pt x="1217582" y="3294017"/>
-                  </a:lnTo>
-                  <a:lnTo>
-                    <a:pt x="1145960" y="3306221"/>
+                    <a:pt x="1217582" y="3294016"/>
+                  </a:lnTo>
+                  <a:lnTo>
+                    <a:pt x="1145960" y="3306220"/>
                   </a:lnTo>
                   <a:lnTo>
                     <a:pt x="1074337" y="3318009"/>
@@ -3658,7 +3658,7 @@
                     <a:pt x="1002715" y="3329397"/>
                   </a:lnTo>
                   <a:lnTo>
-                    <a:pt x="931092" y="3340397"/>
+                    <a:pt x="931092" y="3340396"/>
                   </a:lnTo>
                   <a:lnTo>
                     <a:pt x="859470" y="3351022"/>
@@ -3773,13 +3773,13 @@
                     <a:pt x="931092" y="1856137"/>
                   </a:lnTo>
                   <a:lnTo>
-                    <a:pt x="1002715" y="1899653"/>
+                    <a:pt x="1002715" y="1899654"/>
                   </a:lnTo>
                   <a:lnTo>
                     <a:pt x="1074337" y="1942116"/>
                   </a:lnTo>
                   <a:lnTo>
-                    <a:pt x="1145960" y="1983549"/>
+                    <a:pt x="1145960" y="1983550"/>
                   </a:lnTo>
                   <a:lnTo>
                     <a:pt x="1217582" y="2023980"/>
@@ -3788,7 +3788,7 @@
                     <a:pt x="1289205" y="2063430"/>
                   </a:lnTo>
                   <a:lnTo>
-                    <a:pt x="1360827" y="2101925"/>
+                    <a:pt x="1360827" y="2101926"/>
                   </a:lnTo>
                   <a:lnTo>
                     <a:pt x="1432450" y="2139488"/>
@@ -3869,7 +3869,7 @@
                     <a:pt x="3223013" y="2707156"/>
                   </a:lnTo>
                   <a:lnTo>
-                    <a:pt x="3294636" y="2673847"/>
+                    <a:pt x="3294636" y="2673848"/>
                   </a:lnTo>
                   <a:lnTo>
                     <a:pt x="3366258" y="2639366"/>
@@ -3911,7 +3911,7 @@
                     <a:pt x="4225729" y="2117452"/>
                   </a:lnTo>
                   <a:lnTo>
-                    <a:pt x="4297351" y="2063369"/>
+                    <a:pt x="4297351" y="2063370"/>
                   </a:lnTo>
                   <a:lnTo>
                     <a:pt x="4368974" y="2007382"/>
@@ -3923,7 +3923,7 @@
                     <a:pt x="4512219" y="1889420"/>
                   </a:lnTo>
                   <a:lnTo>
-                    <a:pt x="4583841" y="1827304"/>
+                    <a:pt x="4583841" y="1827305"/>
                   </a:lnTo>
                   <a:lnTo>
                     <a:pt x="4655464" y="1763001"/>
@@ -3932,58 +3932,58 @@
                     <a:pt x="4727086" y="1696432"/>
                   </a:lnTo>
                   <a:lnTo>
-                    <a:pt x="4798709" y="1627517"/>
-                  </a:lnTo>
-                  <a:lnTo>
-                    <a:pt x="4870331" y="1556175"/>
-                  </a:lnTo>
-                  <a:lnTo>
-                    <a:pt x="4941954" y="1482320"/>
-                  </a:lnTo>
-                  <a:lnTo>
-                    <a:pt x="5013576" y="1405863"/>
-                  </a:lnTo>
-                  <a:lnTo>
-                    <a:pt x="5085199" y="1326712"/>
+                    <a:pt x="4798709" y="1627518"/>
+                  </a:lnTo>
+                  <a:lnTo>
+                    <a:pt x="4870331" y="1556176"/>
+                  </a:lnTo>
+                  <a:lnTo>
+                    <a:pt x="4941954" y="1482321"/>
+                  </a:lnTo>
+                  <a:lnTo>
+                    <a:pt x="5013576" y="1405864"/>
+                  </a:lnTo>
+                  <a:lnTo>
+                    <a:pt x="5085199" y="1326713"/>
                   </a:lnTo>
                   <a:lnTo>
                     <a:pt x="5156821" y="1244774"/>
                   </a:lnTo>
                   <a:lnTo>
-                    <a:pt x="5228444" y="1159948"/>
-                  </a:lnTo>
-                  <a:lnTo>
-                    <a:pt x="5300066" y="1072134"/>
-                  </a:lnTo>
-                  <a:lnTo>
-                    <a:pt x="5371689" y="981227"/>
-                  </a:lnTo>
-                  <a:lnTo>
-                    <a:pt x="5443311" y="887117"/>
-                  </a:lnTo>
-                  <a:lnTo>
-                    <a:pt x="5514934" y="789692"/>
-                  </a:lnTo>
-                  <a:lnTo>
-                    <a:pt x="5586557" y="688835"/>
-                  </a:lnTo>
-                  <a:lnTo>
-                    <a:pt x="5658179" y="584425"/>
-                  </a:lnTo>
-                  <a:lnTo>
-                    <a:pt x="5729802" y="476336"/>
-                  </a:lnTo>
-                  <a:lnTo>
-                    <a:pt x="5801424" y="364440"/>
-                  </a:lnTo>
-                  <a:lnTo>
-                    <a:pt x="5873047" y="248602"/>
-                  </a:lnTo>
-                  <a:lnTo>
-                    <a:pt x="5944669" y="128683"/>
-                  </a:lnTo>
-                  <a:lnTo>
-                    <a:pt x="6016292" y="4539"/>
+                    <a:pt x="5228444" y="1159949"/>
+                  </a:lnTo>
+                  <a:lnTo>
+                    <a:pt x="5300066" y="1072135"/>
+                  </a:lnTo>
+                  <a:lnTo>
+                    <a:pt x="5371689" y="981228"/>
+                  </a:lnTo>
+                  <a:lnTo>
+                    <a:pt x="5443311" y="887118"/>
+                  </a:lnTo>
+                  <a:lnTo>
+                    <a:pt x="5514934" y="789693"/>
+                  </a:lnTo>
+                  <a:lnTo>
+                    <a:pt x="5586557" y="688836"/>
+                  </a:lnTo>
+                  <a:lnTo>
+                    <a:pt x="5658179" y="584426"/>
+                  </a:lnTo>
+                  <a:lnTo>
+                    <a:pt x="5729802" y="476337"/>
+                  </a:lnTo>
+                  <a:lnTo>
+                    <a:pt x="5801424" y="364441"/>
+                  </a:lnTo>
+                  <a:lnTo>
+                    <a:pt x="5873047" y="248603"/>
+                  </a:lnTo>
+                  <a:lnTo>
+                    <a:pt x="5944669" y="128684"/>
+                  </a:lnTo>
+                  <a:lnTo>
+                    <a:pt x="6016292" y="4540"/>
                   </a:lnTo>
                   <a:lnTo>
                     <a:pt x="6018822" y="0"/>
@@ -4053,7 +4053,7 @@
                     <a:pt x="6231159" y="568222"/>
                   </a:lnTo>
                   <a:lnTo>
-                    <a:pt x="6159537" y="560957"/>
+                    <a:pt x="6159537" y="560956"/>
                   </a:lnTo>
                   <a:lnTo>
                     <a:pt x="6087914" y="553511"/>
@@ -4245,7 +4245,7 @@
                     <a:pt x="1647318" y="419464"/>
                   </a:lnTo>
                   <a:lnTo>
-                    <a:pt x="1575695" y="434486"/>
+                    <a:pt x="1575695" y="434485"/>
                   </a:lnTo>
                   <a:lnTo>
                     <a:pt x="1504073" y="448996"/>
@@ -4281,7 +4281,7 @@
                     <a:pt x="787847" y="569535"/>
                   </a:lnTo>
                   <a:lnTo>
-                    <a:pt x="716225" y="579450"/>
+                    <a:pt x="716225" y="579449"/>
                   </a:lnTo>
                   <a:lnTo>
                     <a:pt x="644602" y="589027"/>
@@ -4293,7 +4293,7 @@
                     <a:pt x="501357" y="607215"/>
                   </a:lnTo>
                   <a:lnTo>
-                    <a:pt x="429735" y="615848"/>
+                    <a:pt x="429735" y="615847"/>
                   </a:lnTo>
                   <a:lnTo>
                     <a:pt x="358112" y="624186"/>
@@ -4332,14 +4332,14 @@
           <p:spPr>
             <a:xfrm>
               <a:off x="1172049" y="4392833"/>
-              <a:ext cx="7090630" cy="455001"/>
+              <a:ext cx="7090630" cy="455000"/>
             </a:xfrm>
             <a:custGeom>
               <a:avLst/>
               <a:pathLst>
-                <a:path w="7090630" h="455001">
+                <a:path w="7090630" h="455000">
                   <a:moveTo>
-                    <a:pt x="0" y="455001"/>
+                    <a:pt x="0" y="455000"/>
                   </a:moveTo>
                   <a:lnTo>
                     <a:pt x="71622" y="451449"/>
@@ -4348,7 +4348,7 @@
                     <a:pt x="143245" y="447880"/>
                   </a:lnTo>
                   <a:lnTo>
-                    <a:pt x="214867" y="444293"/>
+                    <a:pt x="214867" y="444292"/>
                   </a:lnTo>
                   <a:lnTo>
                     <a:pt x="286490" y="440687"/>
@@ -4363,13 +4363,13 @@
                     <a:pt x="501357" y="429761"/>
                   </a:lnTo>
                   <a:lnTo>
-                    <a:pt x="572980" y="426082"/>
+                    <a:pt x="572980" y="426081"/>
                   </a:lnTo>
                   <a:lnTo>
                     <a:pt x="644602" y="422384"/>
                   </a:lnTo>
                   <a:lnTo>
-                    <a:pt x="716225" y="418668"/>
+                    <a:pt x="716225" y="418667"/>
                   </a:lnTo>
                   <a:lnTo>
                     <a:pt x="787847" y="414932"/>
@@ -4387,13 +4387,13 @@
                     <a:pt x="1074337" y="399801"/>
                   </a:lnTo>
                   <a:lnTo>
-                    <a:pt x="1145960" y="395971"/>
+                    <a:pt x="1145960" y="395970"/>
                   </a:lnTo>
                   <a:lnTo>
                     <a:pt x="1217582" y="392120"/>
                   </a:lnTo>
                   <a:lnTo>
-                    <a:pt x="1289205" y="388251"/>
+                    <a:pt x="1289205" y="388250"/>
                   </a:lnTo>
                   <a:lnTo>
                     <a:pt x="1360827" y="384361"/>
@@ -4402,7 +4402,7 @@
                     <a:pt x="1432450" y="380452"/>
                   </a:lnTo>
                   <a:lnTo>
-                    <a:pt x="1504073" y="376524"/>
+                    <a:pt x="1504073" y="376523"/>
                   </a:lnTo>
                   <a:lnTo>
                     <a:pt x="1575695" y="372575"/>
@@ -4417,7 +4417,7 @@
                     <a:pt x="1790563" y="360609"/>
                   </a:lnTo>
                   <a:lnTo>
-                    <a:pt x="1862185" y="356580"/>
+                    <a:pt x="1862185" y="356579"/>
                   </a:lnTo>
                   <a:lnTo>
                     <a:pt x="1933808" y="352530"/>
@@ -4429,7 +4429,7 @@
                     <a:pt x="2077053" y="344369"/>
                   </a:lnTo>
                   <a:lnTo>
-                    <a:pt x="2148675" y="340258"/>
+                    <a:pt x="2148675" y="340257"/>
                   </a:lnTo>
                   <a:lnTo>
                     <a:pt x="2220298" y="336125"/>
@@ -4441,7 +4441,7 @@
                     <a:pt x="2363543" y="327798"/>
                   </a:lnTo>
                   <a:lnTo>
-                    <a:pt x="2435165" y="323603"/>
+                    <a:pt x="2435165" y="323602"/>
                   </a:lnTo>
                   <a:lnTo>
                     <a:pt x="2506788" y="319386"/>
@@ -4459,7 +4459,7 @@
                     <a:pt x="2793278" y="302305"/>
                   </a:lnTo>
                   <a:lnTo>
-                    <a:pt x="2864901" y="297981"/>
+                    <a:pt x="2864901" y="297980"/>
                   </a:lnTo>
                   <a:lnTo>
                     <a:pt x="2936523" y="293634"/>
@@ -4468,7 +4468,7 @@
                     <a:pt x="3008146" y="289266"/>
                   </a:lnTo>
                   <a:lnTo>
-                    <a:pt x="3079768" y="284876"/>
+                    <a:pt x="3079768" y="284875"/>
                   </a:lnTo>
                   <a:lnTo>
                     <a:pt x="3151391" y="280463"/>
@@ -4483,28 +4483,28 @@
                     <a:pt x="3366258" y="267090"/>
                   </a:lnTo>
                   <a:lnTo>
-                    <a:pt x="3437881" y="262588"/>
+                    <a:pt x="3437881" y="262587"/>
                   </a:lnTo>
                   <a:lnTo>
                     <a:pt x="3509503" y="258062"/>
                   </a:lnTo>
                   <a:lnTo>
-                    <a:pt x="3581126" y="253514"/>
+                    <a:pt x="3581126" y="253513"/>
                   </a:lnTo>
                   <a:lnTo>
                     <a:pt x="3652748" y="248942"/>
                   </a:lnTo>
                   <a:lnTo>
-                    <a:pt x="3724371" y="244348"/>
-                  </a:lnTo>
-                  <a:lnTo>
-                    <a:pt x="3795993" y="239730"/>
+                    <a:pt x="3724371" y="244347"/>
+                  </a:lnTo>
+                  <a:lnTo>
+                    <a:pt x="3795993" y="239729"/>
                   </a:lnTo>
                   <a:lnTo>
                     <a:pt x="3867616" y="235088"/>
                   </a:lnTo>
                   <a:lnTo>
-                    <a:pt x="3939238" y="230424"/>
+                    <a:pt x="3939238" y="230423"/>
                   </a:lnTo>
                   <a:lnTo>
                     <a:pt x="4010861" y="225735"/>
@@ -4546,7 +4546,7 @@
                     <a:pt x="4870331" y="167588"/>
                   </a:lnTo>
                   <a:lnTo>
-                    <a:pt x="4941954" y="162582"/>
+                    <a:pt x="4941954" y="162581"/>
                   </a:lnTo>
                   <a:lnTo>
                     <a:pt x="5013576" y="157550"/>
@@ -4558,7 +4558,7 @@
                     <a:pt x="5156821" y="147409"/>
                   </a:lnTo>
                   <a:lnTo>
-                    <a:pt x="5228444" y="142301"/>
+                    <a:pt x="5228444" y="142300"/>
                   </a:lnTo>
                   <a:lnTo>
                     <a:pt x="5300066" y="137166"/>
@@ -4582,7 +4582,7 @@
                     <a:pt x="5729802" y="105808"/>
                   </a:lnTo>
                   <a:lnTo>
-                    <a:pt x="5801424" y="100489"/>
+                    <a:pt x="5801424" y="100488"/>
                   </a:lnTo>
                   <a:lnTo>
                     <a:pt x="5873047" y="95142"/>

--- a/docs/plots/carbo/jx_carbo_linsubhr_dosedisc_aki2.pptx
+++ b/docs/plots/carbo/jx_carbo_linsubhr_dosedisc_aki2.pptx
@@ -2271,7 +2271,7 @@
           </p:nvSpPr>
           <p:spPr>
             <a:xfrm>
-              <a:off x="817517" y="5114368"/>
+              <a:off x="817517" y="5142518"/>
               <a:ext cx="7799693" cy="0"/>
             </a:xfrm>
             <a:custGeom>
@@ -2314,7 +2314,7 @@
           </p:nvSpPr>
           <p:spPr>
             <a:xfrm>
-              <a:off x="817517" y="4244691"/>
+              <a:off x="817517" y="4313054"/>
               <a:ext cx="7799693" cy="0"/>
             </a:xfrm>
             <a:custGeom>
@@ -2357,7 +2357,7 @@
           </p:nvSpPr>
           <p:spPr>
             <a:xfrm>
-              <a:off x="817517" y="3375014"/>
+              <a:off x="817517" y="3483591"/>
               <a:ext cx="7799693" cy="0"/>
             </a:xfrm>
             <a:custGeom>
@@ -2400,7 +2400,7 @@
           </p:nvSpPr>
           <p:spPr>
             <a:xfrm>
-              <a:off x="817517" y="2505337"/>
+              <a:off x="817517" y="2654127"/>
               <a:ext cx="7799693" cy="0"/>
             </a:xfrm>
             <a:custGeom>
@@ -2443,15 +2443,15 @@
           </p:nvSpPr>
           <p:spPr>
             <a:xfrm>
-              <a:off x="2122745" y="1896563"/>
-              <a:ext cx="0" cy="3826579"/>
+              <a:off x="2122745" y="2073503"/>
+              <a:ext cx="0" cy="3649639"/>
             </a:xfrm>
             <a:custGeom>
               <a:avLst/>
               <a:pathLst>
-                <a:path w="0" h="3826579">
+                <a:path w="0" h="3649639">
                   <a:moveTo>
-                    <a:pt x="0" y="3826579"/>
+                    <a:pt x="0" y="3649639"/>
                   </a:moveTo>
                   <a:lnTo>
                     <a:pt x="0" y="0"/>
@@ -2486,15 +2486,15 @@
           </p:nvSpPr>
           <p:spPr>
             <a:xfrm>
-              <a:off x="3487174" y="1896563"/>
-              <a:ext cx="0" cy="3826579"/>
+              <a:off x="3487174" y="2073503"/>
+              <a:ext cx="0" cy="3649639"/>
             </a:xfrm>
             <a:custGeom>
               <a:avLst/>
               <a:pathLst>
-                <a:path w="0" h="3826579">
+                <a:path w="0" h="3649639">
                   <a:moveTo>
-                    <a:pt x="0" y="3826579"/>
+                    <a:pt x="0" y="3649639"/>
                   </a:moveTo>
                   <a:lnTo>
                     <a:pt x="0" y="0"/>
@@ -2529,15 +2529,15 @@
           </p:nvSpPr>
           <p:spPr>
             <a:xfrm>
-              <a:off x="4851604" y="1896563"/>
-              <a:ext cx="0" cy="3826579"/>
+              <a:off x="4851604" y="2073503"/>
+              <a:ext cx="0" cy="3649639"/>
             </a:xfrm>
             <a:custGeom>
               <a:avLst/>
               <a:pathLst>
-                <a:path w="0" h="3826579">
+                <a:path w="0" h="3649639">
                   <a:moveTo>
-                    <a:pt x="0" y="3826579"/>
+                    <a:pt x="0" y="3649639"/>
                   </a:moveTo>
                   <a:lnTo>
                     <a:pt x="0" y="0"/>
@@ -2572,15 +2572,15 @@
           </p:nvSpPr>
           <p:spPr>
             <a:xfrm>
-              <a:off x="6216034" y="1896563"/>
-              <a:ext cx="0" cy="3826579"/>
+              <a:off x="6216034" y="2073503"/>
+              <a:ext cx="0" cy="3649639"/>
             </a:xfrm>
             <a:custGeom>
               <a:avLst/>
               <a:pathLst>
-                <a:path w="0" h="3826579">
+                <a:path w="0" h="3649639">
                   <a:moveTo>
-                    <a:pt x="0" y="3826579"/>
+                    <a:pt x="0" y="3649639"/>
                   </a:moveTo>
                   <a:lnTo>
                     <a:pt x="0" y="0"/>
@@ -2615,15 +2615,15 @@
           </p:nvSpPr>
           <p:spPr>
             <a:xfrm>
-              <a:off x="7580464" y="1896563"/>
-              <a:ext cx="0" cy="3826579"/>
+              <a:off x="7580464" y="2073503"/>
+              <a:ext cx="0" cy="3649639"/>
             </a:xfrm>
             <a:custGeom>
               <a:avLst/>
               <a:pathLst>
-                <a:path w="0" h="3826579">
+                <a:path w="0" h="3649639">
                   <a:moveTo>
-                    <a:pt x="0" y="3826579"/>
+                    <a:pt x="0" y="3649639"/>
                   </a:moveTo>
                   <a:lnTo>
                     <a:pt x="0" y="0"/>
@@ -2658,7 +2658,7 @@
           </p:nvSpPr>
           <p:spPr>
             <a:xfrm>
-              <a:off x="817517" y="5549207"/>
+              <a:off x="817517" y="5557249"/>
               <a:ext cx="7799693" cy="0"/>
             </a:xfrm>
             <a:custGeom>
@@ -2701,7 +2701,7 @@
           </p:nvSpPr>
           <p:spPr>
             <a:xfrm>
-              <a:off x="817517" y="4679530"/>
+              <a:off x="817517" y="4727786"/>
               <a:ext cx="7799693" cy="0"/>
             </a:xfrm>
             <a:custGeom>
@@ -2744,7 +2744,7 @@
           </p:nvSpPr>
           <p:spPr>
             <a:xfrm>
-              <a:off x="817517" y="3809853"/>
+              <a:off x="817517" y="3898322"/>
               <a:ext cx="7799693" cy="0"/>
             </a:xfrm>
             <a:custGeom>
@@ -2787,7 +2787,7 @@
           </p:nvSpPr>
           <p:spPr>
             <a:xfrm>
-              <a:off x="817517" y="2940175"/>
+              <a:off x="817517" y="3068859"/>
               <a:ext cx="7799693" cy="0"/>
             </a:xfrm>
             <a:custGeom>
@@ -2830,7 +2830,7 @@
           </p:nvSpPr>
           <p:spPr>
             <a:xfrm>
-              <a:off x="817517" y="2070498"/>
+              <a:off x="817517" y="2239395"/>
               <a:ext cx="7799693" cy="0"/>
             </a:xfrm>
             <a:custGeom>
@@ -2873,15 +2873,15 @@
           </p:nvSpPr>
           <p:spPr>
             <a:xfrm>
-              <a:off x="1440530" y="1896563"/>
-              <a:ext cx="0" cy="3826579"/>
+              <a:off x="1440530" y="2073503"/>
+              <a:ext cx="0" cy="3649639"/>
             </a:xfrm>
             <a:custGeom>
               <a:avLst/>
               <a:pathLst>
-                <a:path w="0" h="3826579">
+                <a:path w="0" h="3649639">
                   <a:moveTo>
-                    <a:pt x="0" y="3826579"/>
+                    <a:pt x="0" y="3649639"/>
                   </a:moveTo>
                   <a:lnTo>
                     <a:pt x="0" y="0"/>
@@ -2916,15 +2916,15 @@
           </p:nvSpPr>
           <p:spPr>
             <a:xfrm>
-              <a:off x="2804959" y="1896563"/>
-              <a:ext cx="0" cy="3826579"/>
+              <a:off x="2804959" y="2073503"/>
+              <a:ext cx="0" cy="3649639"/>
             </a:xfrm>
             <a:custGeom>
               <a:avLst/>
               <a:pathLst>
-                <a:path w="0" h="3826579">
+                <a:path w="0" h="3649639">
                   <a:moveTo>
-                    <a:pt x="0" y="3826579"/>
+                    <a:pt x="0" y="3649639"/>
                   </a:moveTo>
                   <a:lnTo>
                     <a:pt x="0" y="0"/>
@@ -2959,15 +2959,15 @@
           </p:nvSpPr>
           <p:spPr>
             <a:xfrm>
-              <a:off x="4169389" y="1896563"/>
-              <a:ext cx="0" cy="3826579"/>
+              <a:off x="4169389" y="2073503"/>
+              <a:ext cx="0" cy="3649639"/>
             </a:xfrm>
             <a:custGeom>
               <a:avLst/>
               <a:pathLst>
-                <a:path w="0" h="3826579">
+                <a:path w="0" h="3649639">
                   <a:moveTo>
-                    <a:pt x="0" y="3826579"/>
+                    <a:pt x="0" y="3649639"/>
                   </a:moveTo>
                   <a:lnTo>
                     <a:pt x="0" y="0"/>
@@ -3002,15 +3002,15 @@
           </p:nvSpPr>
           <p:spPr>
             <a:xfrm>
-              <a:off x="5533819" y="1896563"/>
-              <a:ext cx="0" cy="3826579"/>
+              <a:off x="5533819" y="2073503"/>
+              <a:ext cx="0" cy="3649639"/>
             </a:xfrm>
             <a:custGeom>
               <a:avLst/>
               <a:pathLst>
-                <a:path w="0" h="3826579">
+                <a:path w="0" h="3649639">
                   <a:moveTo>
-                    <a:pt x="0" y="3826579"/>
+                    <a:pt x="0" y="3649639"/>
                   </a:moveTo>
                   <a:lnTo>
                     <a:pt x="0" y="0"/>
@@ -3045,15 +3045,15 @@
           </p:nvSpPr>
           <p:spPr>
             <a:xfrm>
-              <a:off x="6898249" y="1896563"/>
-              <a:ext cx="0" cy="3826579"/>
+              <a:off x="6898249" y="2073503"/>
+              <a:ext cx="0" cy="3649639"/>
             </a:xfrm>
             <a:custGeom>
               <a:avLst/>
               <a:pathLst>
-                <a:path w="0" h="3826579">
+                <a:path w="0" h="3649639">
                   <a:moveTo>
-                    <a:pt x="0" y="3826579"/>
+                    <a:pt x="0" y="3649639"/>
                   </a:moveTo>
                   <a:lnTo>
                     <a:pt x="0" y="0"/>
@@ -3088,15 +3088,15 @@
           </p:nvSpPr>
           <p:spPr>
             <a:xfrm>
-              <a:off x="8262679" y="1896563"/>
-              <a:ext cx="0" cy="3826579"/>
+              <a:off x="8262679" y="2073503"/>
+              <a:ext cx="0" cy="3649639"/>
             </a:xfrm>
             <a:custGeom>
               <a:avLst/>
               <a:pathLst>
-                <a:path w="0" h="3826579">
+                <a:path w="0" h="3649639">
                   <a:moveTo>
-                    <a:pt x="0" y="3826579"/>
+                    <a:pt x="0" y="3649639"/>
                   </a:moveTo>
                   <a:lnTo>
                     <a:pt x="0" y="0"/>
@@ -3131,267 +3131,267 @@
           </p:nvSpPr>
           <p:spPr>
             <a:xfrm>
-              <a:off x="1172049" y="1896563"/>
-              <a:ext cx="7090630" cy="3453563"/>
+              <a:off x="1172049" y="2073503"/>
+              <a:ext cx="7090630" cy="3293872"/>
             </a:xfrm>
             <a:custGeom>
               <a:avLst/>
               <a:pathLst>
-                <a:path w="7090630" h="3453563">
+                <a:path w="7090630" h="3293872">
                   <a:moveTo>
-                    <a:pt x="0" y="1181659"/>
+                    <a:pt x="0" y="1127019"/>
                   </a:moveTo>
                   <a:lnTo>
-                    <a:pt x="71622" y="1241513"/>
-                  </a:lnTo>
-                  <a:lnTo>
-                    <a:pt x="143245" y="1299917"/>
-                  </a:lnTo>
-                  <a:lnTo>
-                    <a:pt x="214867" y="1356907"/>
-                  </a:lnTo>
-                  <a:lnTo>
-                    <a:pt x="286490" y="1412516"/>
-                  </a:lnTo>
-                  <a:lnTo>
-                    <a:pt x="358112" y="1466778"/>
-                  </a:lnTo>
-                  <a:lnTo>
-                    <a:pt x="429735" y="1519726"/>
-                  </a:lnTo>
-                  <a:lnTo>
-                    <a:pt x="501357" y="1571391"/>
-                  </a:lnTo>
-                  <a:lnTo>
-                    <a:pt x="572980" y="1621805"/>
-                  </a:lnTo>
-                  <a:lnTo>
-                    <a:pt x="644602" y="1670997"/>
-                  </a:lnTo>
-                  <a:lnTo>
-                    <a:pt x="716225" y="1718998"/>
-                  </a:lnTo>
-                  <a:lnTo>
-                    <a:pt x="787847" y="1765837"/>
-                  </a:lnTo>
-                  <a:lnTo>
-                    <a:pt x="859470" y="1811540"/>
-                  </a:lnTo>
-                  <a:lnTo>
-                    <a:pt x="931092" y="1856137"/>
-                  </a:lnTo>
-                  <a:lnTo>
-                    <a:pt x="1002715" y="1899654"/>
-                  </a:lnTo>
-                  <a:lnTo>
-                    <a:pt x="1074337" y="1942116"/>
-                  </a:lnTo>
-                  <a:lnTo>
-                    <a:pt x="1145960" y="1983550"/>
-                  </a:lnTo>
-                  <a:lnTo>
-                    <a:pt x="1217582" y="2023980"/>
-                  </a:lnTo>
-                  <a:lnTo>
-                    <a:pt x="1289205" y="2063430"/>
-                  </a:lnTo>
-                  <a:lnTo>
-                    <a:pt x="1360827" y="2101926"/>
-                  </a:lnTo>
-                  <a:lnTo>
-                    <a:pt x="1432450" y="2139488"/>
-                  </a:lnTo>
-                  <a:lnTo>
-                    <a:pt x="1504073" y="2176141"/>
-                  </a:lnTo>
-                  <a:lnTo>
-                    <a:pt x="1575695" y="2211906"/>
-                  </a:lnTo>
-                  <a:lnTo>
-                    <a:pt x="1647318" y="2246805"/>
-                  </a:lnTo>
-                  <a:lnTo>
-                    <a:pt x="1718940" y="2280858"/>
-                  </a:lnTo>
-                  <a:lnTo>
-                    <a:pt x="1790563" y="2314087"/>
-                  </a:lnTo>
-                  <a:lnTo>
-                    <a:pt x="1862185" y="2346510"/>
-                  </a:lnTo>
-                  <a:lnTo>
-                    <a:pt x="1933808" y="2378148"/>
-                  </a:lnTo>
-                  <a:lnTo>
-                    <a:pt x="2005430" y="2409020"/>
-                  </a:lnTo>
-                  <a:lnTo>
-                    <a:pt x="2077053" y="2439144"/>
-                  </a:lnTo>
-                  <a:lnTo>
-                    <a:pt x="2148675" y="2468539"/>
-                  </a:lnTo>
-                  <a:lnTo>
-                    <a:pt x="2220298" y="2497221"/>
-                  </a:lnTo>
-                  <a:lnTo>
-                    <a:pt x="2291920" y="2525208"/>
-                  </a:lnTo>
-                  <a:lnTo>
-                    <a:pt x="2363543" y="2552518"/>
-                  </a:lnTo>
-                  <a:lnTo>
-                    <a:pt x="2435165" y="2579166"/>
-                  </a:lnTo>
-                  <a:lnTo>
-                    <a:pt x="2506788" y="2605169"/>
-                  </a:lnTo>
-                  <a:lnTo>
-                    <a:pt x="2578410" y="2630542"/>
-                  </a:lnTo>
-                  <a:lnTo>
-                    <a:pt x="2650033" y="2655300"/>
-                  </a:lnTo>
-                  <a:lnTo>
-                    <a:pt x="2721655" y="2679458"/>
-                  </a:lnTo>
-                  <a:lnTo>
-                    <a:pt x="2793278" y="2703031"/>
-                  </a:lnTo>
-                  <a:lnTo>
-                    <a:pt x="2864901" y="2726034"/>
-                  </a:lnTo>
-                  <a:lnTo>
-                    <a:pt x="2936523" y="2748479"/>
-                  </a:lnTo>
-                  <a:lnTo>
-                    <a:pt x="3008146" y="2770380"/>
-                  </a:lnTo>
-                  <a:lnTo>
-                    <a:pt x="3079768" y="2770410"/>
-                  </a:lnTo>
-                  <a:lnTo>
-                    <a:pt x="3151391" y="2739330"/>
-                  </a:lnTo>
-                  <a:lnTo>
-                    <a:pt x="3223013" y="2707156"/>
-                  </a:lnTo>
-                  <a:lnTo>
-                    <a:pt x="3294636" y="2673848"/>
-                  </a:lnTo>
-                  <a:lnTo>
-                    <a:pt x="3366258" y="2639366"/>
-                  </a:lnTo>
-                  <a:lnTo>
-                    <a:pt x="3437881" y="2603670"/>
-                  </a:lnTo>
-                  <a:lnTo>
-                    <a:pt x="3509503" y="2566716"/>
-                  </a:lnTo>
-                  <a:lnTo>
-                    <a:pt x="3581126" y="2528461"/>
-                  </a:lnTo>
-                  <a:lnTo>
-                    <a:pt x="3652748" y="2488858"/>
-                  </a:lnTo>
-                  <a:lnTo>
-                    <a:pt x="3724371" y="2447859"/>
-                  </a:lnTo>
-                  <a:lnTo>
-                    <a:pt x="3795993" y="2405417"/>
-                  </a:lnTo>
-                  <a:lnTo>
-                    <a:pt x="3867616" y="2361479"/>
-                  </a:lnTo>
-                  <a:lnTo>
-                    <a:pt x="3939238" y="2315993"/>
-                  </a:lnTo>
-                  <a:lnTo>
-                    <a:pt x="4010861" y="2268905"/>
-                  </a:lnTo>
-                  <a:lnTo>
-                    <a:pt x="4082483" y="2220158"/>
-                  </a:lnTo>
-                  <a:lnTo>
-                    <a:pt x="4154106" y="2169694"/>
-                  </a:lnTo>
-                  <a:lnTo>
-                    <a:pt x="4225729" y="2117452"/>
-                  </a:lnTo>
-                  <a:lnTo>
-                    <a:pt x="4297351" y="2063370"/>
-                  </a:lnTo>
-                  <a:lnTo>
-                    <a:pt x="4368974" y="2007382"/>
-                  </a:lnTo>
-                  <a:lnTo>
-                    <a:pt x="4440596" y="1949422"/>
-                  </a:lnTo>
-                  <a:lnTo>
-                    <a:pt x="4512219" y="1889420"/>
-                  </a:lnTo>
-                  <a:lnTo>
-                    <a:pt x="4583841" y="1827305"/>
-                  </a:lnTo>
-                  <a:lnTo>
-                    <a:pt x="4655464" y="1763001"/>
-                  </a:lnTo>
-                  <a:lnTo>
-                    <a:pt x="4727086" y="1696432"/>
-                  </a:lnTo>
-                  <a:lnTo>
-                    <a:pt x="4798709" y="1627518"/>
-                  </a:lnTo>
-                  <a:lnTo>
-                    <a:pt x="4870331" y="1556176"/>
-                  </a:lnTo>
-                  <a:lnTo>
-                    <a:pt x="4941954" y="1482321"/>
-                  </a:lnTo>
-                  <a:lnTo>
-                    <a:pt x="5013576" y="1405864"/>
-                  </a:lnTo>
-                  <a:lnTo>
-                    <a:pt x="5085199" y="1326713"/>
-                  </a:lnTo>
-                  <a:lnTo>
-                    <a:pt x="5156821" y="1244774"/>
-                  </a:lnTo>
-                  <a:lnTo>
-                    <a:pt x="5228444" y="1159949"/>
-                  </a:lnTo>
-                  <a:lnTo>
-                    <a:pt x="5300066" y="1072135"/>
-                  </a:lnTo>
-                  <a:lnTo>
-                    <a:pt x="5371689" y="981228"/>
-                  </a:lnTo>
-                  <a:lnTo>
-                    <a:pt x="5443311" y="887118"/>
-                  </a:lnTo>
-                  <a:lnTo>
-                    <a:pt x="5514934" y="789693"/>
-                  </a:lnTo>
-                  <a:lnTo>
-                    <a:pt x="5586557" y="688836"/>
-                  </a:lnTo>
-                  <a:lnTo>
-                    <a:pt x="5658179" y="584426"/>
-                  </a:lnTo>
-                  <a:lnTo>
-                    <a:pt x="5729802" y="476337"/>
-                  </a:lnTo>
-                  <a:lnTo>
-                    <a:pt x="5801424" y="364441"/>
-                  </a:lnTo>
-                  <a:lnTo>
-                    <a:pt x="5873047" y="248603"/>
-                  </a:lnTo>
-                  <a:lnTo>
-                    <a:pt x="5944669" y="128684"/>
-                  </a:lnTo>
-                  <a:lnTo>
-                    <a:pt x="6016292" y="4540"/>
+                    <a:pt x="71622" y="1184106"/>
+                  </a:lnTo>
+                  <a:lnTo>
+                    <a:pt x="143245" y="1239810"/>
+                  </a:lnTo>
+                  <a:lnTo>
+                    <a:pt x="214867" y="1294164"/>
+                  </a:lnTo>
+                  <a:lnTo>
+                    <a:pt x="286490" y="1347202"/>
+                  </a:lnTo>
+                  <a:lnTo>
+                    <a:pt x="358112" y="1398955"/>
+                  </a:lnTo>
+                  <a:lnTo>
+                    <a:pt x="429735" y="1449454"/>
+                  </a:lnTo>
+                  <a:lnTo>
+                    <a:pt x="501357" y="1498731"/>
+                  </a:lnTo>
+                  <a:lnTo>
+                    <a:pt x="572980" y="1546813"/>
+                  </a:lnTo>
+                  <a:lnTo>
+                    <a:pt x="644602" y="1593731"/>
+                  </a:lnTo>
+                  <a:lnTo>
+                    <a:pt x="716225" y="1639513"/>
+                  </a:lnTo>
+                  <a:lnTo>
+                    <a:pt x="787847" y="1684185"/>
+                  </a:lnTo>
+                  <a:lnTo>
+                    <a:pt x="859470" y="1727775"/>
+                  </a:lnTo>
+                  <a:lnTo>
+                    <a:pt x="931092" y="1770310"/>
+                  </a:lnTo>
+                  <a:lnTo>
+                    <a:pt x="1002715" y="1811814"/>
+                  </a:lnTo>
+                  <a:lnTo>
+                    <a:pt x="1074337" y="1852313"/>
+                  </a:lnTo>
+                  <a:lnTo>
+                    <a:pt x="1145960" y="1891831"/>
+                  </a:lnTo>
+                  <a:lnTo>
+                    <a:pt x="1217582" y="1930392"/>
+                  </a:lnTo>
+                  <a:lnTo>
+                    <a:pt x="1289205" y="1968018"/>
+                  </a:lnTo>
+                  <a:lnTo>
+                    <a:pt x="1360827" y="2004733"/>
+                  </a:lnTo>
+                  <a:lnTo>
+                    <a:pt x="1432450" y="2040559"/>
+                  </a:lnTo>
+                  <a:lnTo>
+                    <a:pt x="1504073" y="2075517"/>
+                  </a:lnTo>
+                  <a:lnTo>
+                    <a:pt x="1575695" y="2109628"/>
+                  </a:lnTo>
+                  <a:lnTo>
+                    <a:pt x="1647318" y="2142913"/>
+                  </a:lnTo>
+                  <a:lnTo>
+                    <a:pt x="1718940" y="2175392"/>
+                  </a:lnTo>
+                  <a:lnTo>
+                    <a:pt x="1790563" y="2207084"/>
+                  </a:lnTo>
+                  <a:lnTo>
+                    <a:pt x="1862185" y="2238008"/>
+                  </a:lnTo>
+                  <a:lnTo>
+                    <a:pt x="1933808" y="2268184"/>
+                  </a:lnTo>
+                  <a:lnTo>
+                    <a:pt x="2005430" y="2297628"/>
+                  </a:lnTo>
+                  <a:lnTo>
+                    <a:pt x="2077053" y="2326359"/>
+                  </a:lnTo>
+                  <a:lnTo>
+                    <a:pt x="2148675" y="2354394"/>
+                  </a:lnTo>
+                  <a:lnTo>
+                    <a:pt x="2220298" y="2381750"/>
+                  </a:lnTo>
+                  <a:lnTo>
+                    <a:pt x="2291920" y="2408444"/>
+                  </a:lnTo>
+                  <a:lnTo>
+                    <a:pt x="2363543" y="2434491"/>
+                  </a:lnTo>
+                  <a:lnTo>
+                    <a:pt x="2435165" y="2459906"/>
+                  </a:lnTo>
+                  <a:lnTo>
+                    <a:pt x="2506788" y="2484707"/>
+                  </a:lnTo>
+                  <a:lnTo>
+                    <a:pt x="2578410" y="2508906"/>
+                  </a:lnTo>
+                  <a:lnTo>
+                    <a:pt x="2650033" y="2532520"/>
+                  </a:lnTo>
+                  <a:lnTo>
+                    <a:pt x="2721655" y="2555561"/>
+                  </a:lnTo>
+                  <a:lnTo>
+                    <a:pt x="2793278" y="2578044"/>
+                  </a:lnTo>
+                  <a:lnTo>
+                    <a:pt x="2864901" y="2599983"/>
+                  </a:lnTo>
+                  <a:lnTo>
+                    <a:pt x="2936523" y="2621390"/>
+                  </a:lnTo>
+                  <a:lnTo>
+                    <a:pt x="3008146" y="2642279"/>
+                  </a:lnTo>
+                  <a:lnTo>
+                    <a:pt x="3079768" y="2642307"/>
+                  </a:lnTo>
+                  <a:lnTo>
+                    <a:pt x="3151391" y="2612664"/>
+                  </a:lnTo>
+                  <a:lnTo>
+                    <a:pt x="3223013" y="2581978"/>
+                  </a:lnTo>
+                  <a:lnTo>
+                    <a:pt x="3294636" y="2550210"/>
+                  </a:lnTo>
+                  <a:lnTo>
+                    <a:pt x="3366258" y="2517323"/>
+                  </a:lnTo>
+                  <a:lnTo>
+                    <a:pt x="3437881" y="2483277"/>
+                  </a:lnTo>
+                  <a:lnTo>
+                    <a:pt x="3509503" y="2448032"/>
+                  </a:lnTo>
+                  <a:lnTo>
+                    <a:pt x="3581126" y="2411546"/>
+                  </a:lnTo>
+                  <a:lnTo>
+                    <a:pt x="3652748" y="2373774"/>
+                  </a:lnTo>
+                  <a:lnTo>
+                    <a:pt x="3724371" y="2334671"/>
+                  </a:lnTo>
+                  <a:lnTo>
+                    <a:pt x="3795993" y="2294191"/>
+                  </a:lnTo>
+                  <a:lnTo>
+                    <a:pt x="3867616" y="2252285"/>
+                  </a:lnTo>
+                  <a:lnTo>
+                    <a:pt x="3939238" y="2208902"/>
+                  </a:lnTo>
+                  <a:lnTo>
+                    <a:pt x="4010861" y="2163992"/>
+                  </a:lnTo>
+                  <a:lnTo>
+                    <a:pt x="4082483" y="2117499"/>
+                  </a:lnTo>
+                  <a:lnTo>
+                    <a:pt x="4154106" y="2069368"/>
+                  </a:lnTo>
+                  <a:lnTo>
+                    <a:pt x="4225729" y="2019542"/>
+                  </a:lnTo>
+                  <a:lnTo>
+                    <a:pt x="4297351" y="1967960"/>
+                  </a:lnTo>
+                  <a:lnTo>
+                    <a:pt x="4368974" y="1914562"/>
+                  </a:lnTo>
+                  <a:lnTo>
+                    <a:pt x="4440596" y="1859282"/>
+                  </a:lnTo>
+                  <a:lnTo>
+                    <a:pt x="4512219" y="1802054"/>
+                  </a:lnTo>
+                  <a:lnTo>
+                    <a:pt x="4583841" y="1742811"/>
+                  </a:lnTo>
+                  <a:lnTo>
+                    <a:pt x="4655464" y="1681481"/>
+                  </a:lnTo>
+                  <a:lnTo>
+                    <a:pt x="4727086" y="1617990"/>
+                  </a:lnTo>
+                  <a:lnTo>
+                    <a:pt x="4798709" y="1552262"/>
+                  </a:lnTo>
+                  <a:lnTo>
+                    <a:pt x="4870331" y="1484219"/>
+                  </a:lnTo>
+                  <a:lnTo>
+                    <a:pt x="4941954" y="1413779"/>
+                  </a:lnTo>
+                  <a:lnTo>
+                    <a:pt x="5013576" y="1340857"/>
+                  </a:lnTo>
+                  <a:lnTo>
+                    <a:pt x="5085199" y="1265366"/>
+                  </a:lnTo>
+                  <a:lnTo>
+                    <a:pt x="5156821" y="1187216"/>
+                  </a:lnTo>
+                  <a:lnTo>
+                    <a:pt x="5228444" y="1106313"/>
+                  </a:lnTo>
+                  <a:lnTo>
+                    <a:pt x="5300066" y="1022560"/>
+                  </a:lnTo>
+                  <a:lnTo>
+                    <a:pt x="5371689" y="935856"/>
+                  </a:lnTo>
+                  <a:lnTo>
+                    <a:pt x="5443311" y="846098"/>
+                  </a:lnTo>
+                  <a:lnTo>
+                    <a:pt x="5514934" y="753178"/>
+                  </a:lnTo>
+                  <a:lnTo>
+                    <a:pt x="5586557" y="656984"/>
+                  </a:lnTo>
+                  <a:lnTo>
+                    <a:pt x="5658179" y="557402"/>
+                  </a:lnTo>
+                  <a:lnTo>
+                    <a:pt x="5729802" y="454312"/>
+                  </a:lnTo>
+                  <a:lnTo>
+                    <a:pt x="5801424" y="347589"/>
+                  </a:lnTo>
+                  <a:lnTo>
+                    <a:pt x="5873047" y="237108"/>
+                  </a:lnTo>
+                  <a:lnTo>
+                    <a:pt x="5944669" y="122734"/>
+                  </a:lnTo>
+                  <a:lnTo>
+                    <a:pt x="6016292" y="4330"/>
                   </a:lnTo>
                   <a:lnTo>
                     <a:pt x="6018822" y="0"/>
@@ -3400,304 +3400,304 @@
                     <a:pt x="7090630" y="0"/>
                   </a:lnTo>
                   <a:lnTo>
-                    <a:pt x="7090630" y="3434578"/>
-                  </a:lnTo>
-                  <a:lnTo>
-                    <a:pt x="7019007" y="3429165"/>
-                  </a:lnTo>
-                  <a:lnTo>
-                    <a:pt x="6947385" y="3423617"/>
-                  </a:lnTo>
-                  <a:lnTo>
-                    <a:pt x="6875762" y="3417932"/>
-                  </a:lnTo>
-                  <a:lnTo>
-                    <a:pt x="6804139" y="3412105"/>
-                  </a:lnTo>
-                  <a:lnTo>
-                    <a:pt x="6732517" y="3406134"/>
-                  </a:lnTo>
-                  <a:lnTo>
-                    <a:pt x="6660894" y="3400015"/>
-                  </a:lnTo>
-                  <a:lnTo>
-                    <a:pt x="6589272" y="3393744"/>
-                  </a:lnTo>
-                  <a:lnTo>
-                    <a:pt x="6517649" y="3387317"/>
-                  </a:lnTo>
-                  <a:lnTo>
-                    <a:pt x="6446027" y="3380730"/>
-                  </a:lnTo>
-                  <a:lnTo>
-                    <a:pt x="6374404" y="3373980"/>
-                  </a:lnTo>
-                  <a:lnTo>
-                    <a:pt x="6302782" y="3367062"/>
-                  </a:lnTo>
-                  <a:lnTo>
-                    <a:pt x="6231159" y="3359973"/>
-                  </a:lnTo>
-                  <a:lnTo>
-                    <a:pt x="6159537" y="3352708"/>
-                  </a:lnTo>
-                  <a:lnTo>
-                    <a:pt x="6087914" y="3345262"/>
-                  </a:lnTo>
-                  <a:lnTo>
-                    <a:pt x="6016292" y="3337632"/>
-                  </a:lnTo>
-                  <a:lnTo>
-                    <a:pt x="5944669" y="3329812"/>
-                  </a:lnTo>
-                  <a:lnTo>
-                    <a:pt x="5873047" y="3321798"/>
-                  </a:lnTo>
-                  <a:lnTo>
-                    <a:pt x="5801424" y="3313585"/>
-                  </a:lnTo>
-                  <a:lnTo>
-                    <a:pt x="5729802" y="3305168"/>
-                  </a:lnTo>
-                  <a:lnTo>
-                    <a:pt x="5658179" y="3296542"/>
-                  </a:lnTo>
-                  <a:lnTo>
-                    <a:pt x="5586557" y="3287703"/>
-                  </a:lnTo>
-                  <a:lnTo>
-                    <a:pt x="5514934" y="3278643"/>
-                  </a:lnTo>
-                  <a:lnTo>
-                    <a:pt x="5443311" y="3269359"/>
-                  </a:lnTo>
-                  <a:lnTo>
-                    <a:pt x="5371689" y="3259844"/>
-                  </a:lnTo>
-                  <a:lnTo>
-                    <a:pt x="5300066" y="3250093"/>
-                  </a:lnTo>
-                  <a:lnTo>
-                    <a:pt x="5228444" y="3240101"/>
-                  </a:lnTo>
-                  <a:lnTo>
-                    <a:pt x="5156821" y="3229860"/>
-                  </a:lnTo>
-                  <a:lnTo>
-                    <a:pt x="5085199" y="3219364"/>
-                  </a:lnTo>
-                  <a:lnTo>
-                    <a:pt x="5013576" y="3208609"/>
-                  </a:lnTo>
-                  <a:lnTo>
-                    <a:pt x="4941954" y="3197586"/>
-                  </a:lnTo>
-                  <a:lnTo>
-                    <a:pt x="4870331" y="3186289"/>
-                  </a:lnTo>
-                  <a:lnTo>
-                    <a:pt x="4798709" y="3174713"/>
-                  </a:lnTo>
-                  <a:lnTo>
-                    <a:pt x="4727086" y="3162848"/>
-                  </a:lnTo>
-                  <a:lnTo>
-                    <a:pt x="4655464" y="3150690"/>
-                  </a:lnTo>
-                  <a:lnTo>
-                    <a:pt x="4583841" y="3138229"/>
-                  </a:lnTo>
-                  <a:lnTo>
-                    <a:pt x="4512219" y="3125459"/>
-                  </a:lnTo>
-                  <a:lnTo>
-                    <a:pt x="4440596" y="3112372"/>
-                  </a:lnTo>
-                  <a:lnTo>
-                    <a:pt x="4368974" y="3098961"/>
-                  </a:lnTo>
-                  <a:lnTo>
-                    <a:pt x="4297351" y="3085216"/>
-                  </a:lnTo>
-                  <a:lnTo>
-                    <a:pt x="4225729" y="3071130"/>
-                  </a:lnTo>
-                  <a:lnTo>
-                    <a:pt x="4154106" y="3056695"/>
-                  </a:lnTo>
-                  <a:lnTo>
-                    <a:pt x="4082483" y="3041901"/>
-                  </a:lnTo>
-                  <a:lnTo>
-                    <a:pt x="4010861" y="3026740"/>
-                  </a:lnTo>
-                  <a:lnTo>
-                    <a:pt x="3939238" y="3011202"/>
-                  </a:lnTo>
-                  <a:lnTo>
-                    <a:pt x="3867616" y="2995279"/>
-                  </a:lnTo>
-                  <a:lnTo>
-                    <a:pt x="3795993" y="2978960"/>
-                  </a:lnTo>
-                  <a:lnTo>
-                    <a:pt x="3724371" y="2962237"/>
-                  </a:lnTo>
-                  <a:lnTo>
-                    <a:pt x="3652748" y="2945098"/>
-                  </a:lnTo>
-                  <a:lnTo>
-                    <a:pt x="3581126" y="2927534"/>
-                  </a:lnTo>
-                  <a:lnTo>
-                    <a:pt x="3509503" y="2909534"/>
-                  </a:lnTo>
-                  <a:lnTo>
-                    <a:pt x="3437881" y="2891087"/>
-                  </a:lnTo>
-                  <a:lnTo>
-                    <a:pt x="3366258" y="2872182"/>
-                  </a:lnTo>
-                  <a:lnTo>
-                    <a:pt x="3294636" y="2852807"/>
-                  </a:lnTo>
-                  <a:lnTo>
-                    <a:pt x="3223013" y="2832952"/>
-                  </a:lnTo>
-                  <a:lnTo>
-                    <a:pt x="3151391" y="2812604"/>
-                  </a:lnTo>
-                  <a:lnTo>
-                    <a:pt x="3079768" y="2791751"/>
-                  </a:lnTo>
-                  <a:lnTo>
-                    <a:pt x="3008146" y="2800432"/>
-                  </a:lnTo>
-                  <a:lnTo>
-                    <a:pt x="2936523" y="2829432"/>
-                  </a:lnTo>
-                  <a:lnTo>
-                    <a:pt x="2864901" y="2857446"/>
-                  </a:lnTo>
-                  <a:lnTo>
-                    <a:pt x="2793278" y="2884506"/>
-                  </a:lnTo>
-                  <a:lnTo>
-                    <a:pt x="2721655" y="2910646"/>
-                  </a:lnTo>
-                  <a:lnTo>
-                    <a:pt x="2650033" y="2935895"/>
-                  </a:lnTo>
-                  <a:lnTo>
-                    <a:pt x="2578410" y="2960286"/>
-                  </a:lnTo>
-                  <a:lnTo>
-                    <a:pt x="2506788" y="2983847"/>
-                  </a:lnTo>
-                  <a:lnTo>
-                    <a:pt x="2435165" y="3006606"/>
-                  </a:lnTo>
-                  <a:lnTo>
-                    <a:pt x="2363543" y="3028590"/>
-                  </a:lnTo>
-                  <a:lnTo>
-                    <a:pt x="2291920" y="3049826"/>
-                  </a:lnTo>
-                  <a:lnTo>
-                    <a:pt x="2220298" y="3070340"/>
-                  </a:lnTo>
-                  <a:lnTo>
-                    <a:pt x="2148675" y="3090155"/>
-                  </a:lnTo>
-                  <a:lnTo>
-                    <a:pt x="2077053" y="3109297"/>
-                  </a:lnTo>
-                  <a:lnTo>
-                    <a:pt x="2005430" y="3127787"/>
-                  </a:lnTo>
-                  <a:lnTo>
-                    <a:pt x="1933808" y="3145647"/>
-                  </a:lnTo>
-                  <a:lnTo>
-                    <a:pt x="1862185" y="3162900"/>
-                  </a:lnTo>
-                  <a:lnTo>
-                    <a:pt x="1790563" y="3179566"/>
-                  </a:lnTo>
-                  <a:lnTo>
-                    <a:pt x="1718940" y="3195665"/>
-                  </a:lnTo>
-                  <a:lnTo>
-                    <a:pt x="1647318" y="3211215"/>
-                  </a:lnTo>
-                  <a:lnTo>
-                    <a:pt x="1575695" y="3226237"/>
-                  </a:lnTo>
-                  <a:lnTo>
-                    <a:pt x="1504073" y="3240747"/>
-                  </a:lnTo>
-                  <a:lnTo>
-                    <a:pt x="1432450" y="3254764"/>
-                  </a:lnTo>
-                  <a:lnTo>
-                    <a:pt x="1360827" y="3268304"/>
-                  </a:lnTo>
-                  <a:lnTo>
-                    <a:pt x="1289205" y="3281383"/>
-                  </a:lnTo>
-                  <a:lnTo>
-                    <a:pt x="1217582" y="3294016"/>
-                  </a:lnTo>
-                  <a:lnTo>
-                    <a:pt x="1145960" y="3306220"/>
-                  </a:lnTo>
-                  <a:lnTo>
-                    <a:pt x="1074337" y="3318009"/>
-                  </a:lnTo>
-                  <a:lnTo>
-                    <a:pt x="1002715" y="3329397"/>
-                  </a:lnTo>
-                  <a:lnTo>
-                    <a:pt x="931092" y="3340396"/>
-                  </a:lnTo>
-                  <a:lnTo>
-                    <a:pt x="859470" y="3351022"/>
-                  </a:lnTo>
-                  <a:lnTo>
-                    <a:pt x="787847" y="3361286"/>
-                  </a:lnTo>
-                  <a:lnTo>
-                    <a:pt x="716225" y="3371201"/>
-                  </a:lnTo>
-                  <a:lnTo>
-                    <a:pt x="644602" y="3380778"/>
-                  </a:lnTo>
-                  <a:lnTo>
-                    <a:pt x="572980" y="3390030"/>
-                  </a:lnTo>
-                  <a:lnTo>
-                    <a:pt x="501357" y="3398966"/>
-                  </a:lnTo>
-                  <a:lnTo>
-                    <a:pt x="429735" y="3407599"/>
-                  </a:lnTo>
-                  <a:lnTo>
-                    <a:pt x="358112" y="3415938"/>
-                  </a:lnTo>
-                  <a:lnTo>
-                    <a:pt x="286490" y="3423993"/>
-                  </a:lnTo>
-                  <a:lnTo>
-                    <a:pt x="214867" y="3431774"/>
-                  </a:lnTo>
-                  <a:lnTo>
-                    <a:pt x="143245" y="3439290"/>
-                  </a:lnTo>
-                  <a:lnTo>
-                    <a:pt x="71622" y="3446550"/>
-                  </a:lnTo>
-                  <a:lnTo>
-                    <a:pt x="0" y="3453563"/>
+                    <a:pt x="7090630" y="3275764"/>
+                  </a:lnTo>
+                  <a:lnTo>
+                    <a:pt x="7019007" y="3270601"/>
+                  </a:lnTo>
+                  <a:lnTo>
+                    <a:pt x="6947385" y="3265310"/>
+                  </a:lnTo>
+                  <a:lnTo>
+                    <a:pt x="6875762" y="3259888"/>
+                  </a:lnTo>
+                  <a:lnTo>
+                    <a:pt x="6804139" y="3254331"/>
+                  </a:lnTo>
+                  <a:lnTo>
+                    <a:pt x="6732517" y="3248636"/>
+                  </a:lnTo>
+                  <a:lnTo>
+                    <a:pt x="6660894" y="3242799"/>
+                  </a:lnTo>
+                  <a:lnTo>
+                    <a:pt x="6589272" y="3236818"/>
+                  </a:lnTo>
+                  <a:lnTo>
+                    <a:pt x="6517649" y="3230688"/>
+                  </a:lnTo>
+                  <a:lnTo>
+                    <a:pt x="6446027" y="3224406"/>
+                  </a:lnTo>
+                  <a:lnTo>
+                    <a:pt x="6374404" y="3217968"/>
+                  </a:lnTo>
+                  <a:lnTo>
+                    <a:pt x="6302782" y="3211371"/>
+                  </a:lnTo>
+                  <a:lnTo>
+                    <a:pt x="6231159" y="3204609"/>
+                  </a:lnTo>
+                  <a:lnTo>
+                    <a:pt x="6159537" y="3197680"/>
+                  </a:lnTo>
+                  <a:lnTo>
+                    <a:pt x="6087914" y="3190579"/>
+                  </a:lnTo>
+                  <a:lnTo>
+                    <a:pt x="6016292" y="3183301"/>
+                  </a:lnTo>
+                  <a:lnTo>
+                    <a:pt x="5944669" y="3175843"/>
+                  </a:lnTo>
+                  <a:lnTo>
+                    <a:pt x="5873047" y="3168199"/>
+                  </a:lnTo>
+                  <a:lnTo>
+                    <a:pt x="5801424" y="3160366"/>
+                  </a:lnTo>
+                  <a:lnTo>
+                    <a:pt x="5729802" y="3152338"/>
+                  </a:lnTo>
+                  <a:lnTo>
+                    <a:pt x="5658179" y="3144112"/>
+                  </a:lnTo>
+                  <a:lnTo>
+                    <a:pt x="5586557" y="3135680"/>
+                  </a:lnTo>
+                  <a:lnTo>
+                    <a:pt x="5514934" y="3127040"/>
+                  </a:lnTo>
+                  <a:lnTo>
+                    <a:pt x="5443311" y="3118185"/>
+                  </a:lnTo>
+                  <a:lnTo>
+                    <a:pt x="5371689" y="3109110"/>
+                  </a:lnTo>
+                  <a:lnTo>
+                    <a:pt x="5300066" y="3099810"/>
+                  </a:lnTo>
+                  <a:lnTo>
+                    <a:pt x="5228444" y="3090279"/>
+                  </a:lnTo>
+                  <a:lnTo>
+                    <a:pt x="5156821" y="3080512"/>
+                  </a:lnTo>
+                  <a:lnTo>
+                    <a:pt x="5085199" y="3070502"/>
+                  </a:lnTo>
+                  <a:lnTo>
+                    <a:pt x="5013576" y="3060244"/>
+                  </a:lnTo>
+                  <a:lnTo>
+                    <a:pt x="4941954" y="3049731"/>
+                  </a:lnTo>
+                  <a:lnTo>
+                    <a:pt x="4870331" y="3038957"/>
+                  </a:lnTo>
+                  <a:lnTo>
+                    <a:pt x="4798709" y="3027915"/>
+                  </a:lnTo>
+                  <a:lnTo>
+                    <a:pt x="4727086" y="3016599"/>
+                  </a:lnTo>
+                  <a:lnTo>
+                    <a:pt x="4655464" y="3005003"/>
+                  </a:lnTo>
+                  <a:lnTo>
+                    <a:pt x="4583841" y="2993119"/>
+                  </a:lnTo>
+                  <a:lnTo>
+                    <a:pt x="4512219" y="2980939"/>
+                  </a:lnTo>
+                  <a:lnTo>
+                    <a:pt x="4440596" y="2968457"/>
+                  </a:lnTo>
+                  <a:lnTo>
+                    <a:pt x="4368974" y="2955666"/>
+                  </a:lnTo>
+                  <a:lnTo>
+                    <a:pt x="4297351" y="2942557"/>
+                  </a:lnTo>
+                  <a:lnTo>
+                    <a:pt x="4225729" y="2929122"/>
+                  </a:lnTo>
+                  <a:lnTo>
+                    <a:pt x="4154106" y="2915354"/>
+                  </a:lnTo>
+                  <a:lnTo>
+                    <a:pt x="4082483" y="2901244"/>
+                  </a:lnTo>
+                  <a:lnTo>
+                    <a:pt x="4010861" y="2886784"/>
+                  </a:lnTo>
+                  <a:lnTo>
+                    <a:pt x="3939238" y="2871965"/>
+                  </a:lnTo>
+                  <a:lnTo>
+                    <a:pt x="3867616" y="2856778"/>
+                  </a:lnTo>
+                  <a:lnTo>
+                    <a:pt x="3795993" y="2841214"/>
+                  </a:lnTo>
+                  <a:lnTo>
+                    <a:pt x="3724371" y="2825264"/>
+                  </a:lnTo>
+                  <a:lnTo>
+                    <a:pt x="3652748" y="2808918"/>
+                  </a:lnTo>
+                  <a:lnTo>
+                    <a:pt x="3581126" y="2792166"/>
+                  </a:lnTo>
+                  <a:lnTo>
+                    <a:pt x="3509503" y="2774998"/>
+                  </a:lnTo>
+                  <a:lnTo>
+                    <a:pt x="3437881" y="2757404"/>
+                  </a:lnTo>
+                  <a:lnTo>
+                    <a:pt x="3366258" y="2739373"/>
+                  </a:lnTo>
+                  <a:lnTo>
+                    <a:pt x="3294636" y="2720895"/>
+                  </a:lnTo>
+                  <a:lnTo>
+                    <a:pt x="3223013" y="2701958"/>
+                  </a:lnTo>
+                  <a:lnTo>
+                    <a:pt x="3151391" y="2682550"/>
+                  </a:lnTo>
+                  <a:lnTo>
+                    <a:pt x="3079768" y="2662661"/>
+                  </a:lnTo>
+                  <a:lnTo>
+                    <a:pt x="3008146" y="2670941"/>
+                  </a:lnTo>
+                  <a:lnTo>
+                    <a:pt x="2936523" y="2698600"/>
+                  </a:lnTo>
+                  <a:lnTo>
+                    <a:pt x="2864901" y="2725319"/>
+                  </a:lnTo>
+                  <a:lnTo>
+                    <a:pt x="2793278" y="2751128"/>
+                  </a:lnTo>
+                  <a:lnTo>
+                    <a:pt x="2721655" y="2776058"/>
+                  </a:lnTo>
+                  <a:lnTo>
+                    <a:pt x="2650033" y="2800141"/>
+                  </a:lnTo>
+                  <a:lnTo>
+                    <a:pt x="2578410" y="2823403"/>
+                  </a:lnTo>
+                  <a:lnTo>
+                    <a:pt x="2506788" y="2845875"/>
+                  </a:lnTo>
+                  <a:lnTo>
+                    <a:pt x="2435165" y="2867581"/>
+                  </a:lnTo>
+                  <a:lnTo>
+                    <a:pt x="2363543" y="2888549"/>
+                  </a:lnTo>
+                  <a:lnTo>
+                    <a:pt x="2291920" y="2908803"/>
+                  </a:lnTo>
+                  <a:lnTo>
+                    <a:pt x="2220298" y="2928368"/>
+                  </a:lnTo>
+                  <a:lnTo>
+                    <a:pt x="2148675" y="2947268"/>
+                  </a:lnTo>
+                  <a:lnTo>
+                    <a:pt x="2077053" y="2965524"/>
+                  </a:lnTo>
+                  <a:lnTo>
+                    <a:pt x="2005430" y="2983159"/>
+                  </a:lnTo>
+                  <a:lnTo>
+                    <a:pt x="1933808" y="3000194"/>
+                  </a:lnTo>
+                  <a:lnTo>
+                    <a:pt x="1862185" y="3016649"/>
+                  </a:lnTo>
+                  <a:lnTo>
+                    <a:pt x="1790563" y="3032544"/>
+                  </a:lnTo>
+                  <a:lnTo>
+                    <a:pt x="1718940" y="3047898"/>
+                  </a:lnTo>
+                  <a:lnTo>
+                    <a:pt x="1647318" y="3062730"/>
+                  </a:lnTo>
+                  <a:lnTo>
+                    <a:pt x="1575695" y="3077057"/>
+                  </a:lnTo>
+                  <a:lnTo>
+                    <a:pt x="1504073" y="3090896"/>
+                  </a:lnTo>
+                  <a:lnTo>
+                    <a:pt x="1432450" y="3104265"/>
+                  </a:lnTo>
+                  <a:lnTo>
+                    <a:pt x="1360827" y="3117179"/>
+                  </a:lnTo>
+                  <a:lnTo>
+                    <a:pt x="1289205" y="3129653"/>
+                  </a:lnTo>
+                  <a:lnTo>
+                    <a:pt x="1217582" y="3141702"/>
+                  </a:lnTo>
+                  <a:lnTo>
+                    <a:pt x="1145960" y="3153342"/>
+                  </a:lnTo>
+                  <a:lnTo>
+                    <a:pt x="1074337" y="3164586"/>
+                  </a:lnTo>
+                  <a:lnTo>
+                    <a:pt x="1002715" y="3175446"/>
+                  </a:lnTo>
+                  <a:lnTo>
+                    <a:pt x="931092" y="3185938"/>
+                  </a:lnTo>
+                  <a:lnTo>
+                    <a:pt x="859470" y="3196072"/>
+                  </a:lnTo>
+                  <a:lnTo>
+                    <a:pt x="787847" y="3205862"/>
+                  </a:lnTo>
+                  <a:lnTo>
+                    <a:pt x="716225" y="3215318"/>
+                  </a:lnTo>
+                  <a:lnTo>
+                    <a:pt x="644602" y="3224452"/>
+                  </a:lnTo>
+                  <a:lnTo>
+                    <a:pt x="572980" y="3233276"/>
+                  </a:lnTo>
+                  <a:lnTo>
+                    <a:pt x="501357" y="3241799"/>
+                  </a:lnTo>
+                  <a:lnTo>
+                    <a:pt x="429735" y="3250033"/>
+                  </a:lnTo>
+                  <a:lnTo>
+                    <a:pt x="358112" y="3257986"/>
+                  </a:lnTo>
+                  <a:lnTo>
+                    <a:pt x="286490" y="3265669"/>
+                  </a:lnTo>
+                  <a:lnTo>
+                    <a:pt x="214867" y="3273090"/>
+                  </a:lnTo>
+                  <a:lnTo>
+                    <a:pt x="143245" y="3280258"/>
+                  </a:lnTo>
+                  <a:lnTo>
+                    <a:pt x="71622" y="3287183"/>
+                  </a:lnTo>
+                  <a:lnTo>
+                    <a:pt x="0" y="3293872"/>
                   </a:lnTo>
                   <a:close/>
                 </a:path>
@@ -3723,267 +3723,267 @@
           </p:nvSpPr>
           <p:spPr>
             <a:xfrm>
-              <a:off x="1172049" y="1896563"/>
-              <a:ext cx="6018822" cy="2770410"/>
+              <a:off x="1172049" y="2073503"/>
+              <a:ext cx="6018822" cy="2642307"/>
             </a:xfrm>
             <a:custGeom>
               <a:avLst/>
               <a:pathLst>
-                <a:path w="6018822" h="2770410">
+                <a:path w="6018822" h="2642307">
                   <a:moveTo>
-                    <a:pt x="0" y="1181659"/>
+                    <a:pt x="0" y="1127019"/>
                   </a:moveTo>
                   <a:lnTo>
-                    <a:pt x="71622" y="1241513"/>
-                  </a:lnTo>
-                  <a:lnTo>
-                    <a:pt x="143245" y="1299917"/>
-                  </a:lnTo>
-                  <a:lnTo>
-                    <a:pt x="214867" y="1356907"/>
-                  </a:lnTo>
-                  <a:lnTo>
-                    <a:pt x="286490" y="1412516"/>
-                  </a:lnTo>
-                  <a:lnTo>
-                    <a:pt x="358112" y="1466778"/>
-                  </a:lnTo>
-                  <a:lnTo>
-                    <a:pt x="429735" y="1519726"/>
-                  </a:lnTo>
-                  <a:lnTo>
-                    <a:pt x="501357" y="1571391"/>
-                  </a:lnTo>
-                  <a:lnTo>
-                    <a:pt x="572980" y="1621805"/>
-                  </a:lnTo>
-                  <a:lnTo>
-                    <a:pt x="644602" y="1670997"/>
-                  </a:lnTo>
-                  <a:lnTo>
-                    <a:pt x="716225" y="1718998"/>
-                  </a:lnTo>
-                  <a:lnTo>
-                    <a:pt x="787847" y="1765837"/>
-                  </a:lnTo>
-                  <a:lnTo>
-                    <a:pt x="859470" y="1811540"/>
-                  </a:lnTo>
-                  <a:lnTo>
-                    <a:pt x="931092" y="1856137"/>
-                  </a:lnTo>
-                  <a:lnTo>
-                    <a:pt x="1002715" y="1899654"/>
-                  </a:lnTo>
-                  <a:lnTo>
-                    <a:pt x="1074337" y="1942116"/>
-                  </a:lnTo>
-                  <a:lnTo>
-                    <a:pt x="1145960" y="1983550"/>
-                  </a:lnTo>
-                  <a:lnTo>
-                    <a:pt x="1217582" y="2023980"/>
-                  </a:lnTo>
-                  <a:lnTo>
-                    <a:pt x="1289205" y="2063430"/>
-                  </a:lnTo>
-                  <a:lnTo>
-                    <a:pt x="1360827" y="2101926"/>
-                  </a:lnTo>
-                  <a:lnTo>
-                    <a:pt x="1432450" y="2139488"/>
-                  </a:lnTo>
-                  <a:lnTo>
-                    <a:pt x="1504073" y="2176141"/>
-                  </a:lnTo>
-                  <a:lnTo>
-                    <a:pt x="1575695" y="2211906"/>
-                  </a:lnTo>
-                  <a:lnTo>
-                    <a:pt x="1647318" y="2246805"/>
-                  </a:lnTo>
-                  <a:lnTo>
-                    <a:pt x="1718940" y="2280858"/>
-                  </a:lnTo>
-                  <a:lnTo>
-                    <a:pt x="1790563" y="2314087"/>
-                  </a:lnTo>
-                  <a:lnTo>
-                    <a:pt x="1862185" y="2346510"/>
-                  </a:lnTo>
-                  <a:lnTo>
-                    <a:pt x="1933808" y="2378148"/>
-                  </a:lnTo>
-                  <a:lnTo>
-                    <a:pt x="2005430" y="2409020"/>
-                  </a:lnTo>
-                  <a:lnTo>
-                    <a:pt x="2077053" y="2439144"/>
-                  </a:lnTo>
-                  <a:lnTo>
-                    <a:pt x="2148675" y="2468539"/>
-                  </a:lnTo>
-                  <a:lnTo>
-                    <a:pt x="2220298" y="2497221"/>
-                  </a:lnTo>
-                  <a:lnTo>
-                    <a:pt x="2291920" y="2525208"/>
-                  </a:lnTo>
-                  <a:lnTo>
-                    <a:pt x="2363543" y="2552518"/>
-                  </a:lnTo>
-                  <a:lnTo>
-                    <a:pt x="2435165" y="2579166"/>
-                  </a:lnTo>
-                  <a:lnTo>
-                    <a:pt x="2506788" y="2605169"/>
-                  </a:lnTo>
-                  <a:lnTo>
-                    <a:pt x="2578410" y="2630542"/>
-                  </a:lnTo>
-                  <a:lnTo>
-                    <a:pt x="2650033" y="2655300"/>
-                  </a:lnTo>
-                  <a:lnTo>
-                    <a:pt x="2721655" y="2679458"/>
-                  </a:lnTo>
-                  <a:lnTo>
-                    <a:pt x="2793278" y="2703031"/>
-                  </a:lnTo>
-                  <a:lnTo>
-                    <a:pt x="2864901" y="2726034"/>
-                  </a:lnTo>
-                  <a:lnTo>
-                    <a:pt x="2936523" y="2748479"/>
-                  </a:lnTo>
-                  <a:lnTo>
-                    <a:pt x="3008146" y="2770380"/>
-                  </a:lnTo>
-                  <a:lnTo>
-                    <a:pt x="3079768" y="2770410"/>
-                  </a:lnTo>
-                  <a:lnTo>
-                    <a:pt x="3151391" y="2739330"/>
-                  </a:lnTo>
-                  <a:lnTo>
-                    <a:pt x="3223013" y="2707156"/>
-                  </a:lnTo>
-                  <a:lnTo>
-                    <a:pt x="3294636" y="2673848"/>
-                  </a:lnTo>
-                  <a:lnTo>
-                    <a:pt x="3366258" y="2639366"/>
-                  </a:lnTo>
-                  <a:lnTo>
-                    <a:pt x="3437881" y="2603670"/>
-                  </a:lnTo>
-                  <a:lnTo>
-                    <a:pt x="3509503" y="2566716"/>
-                  </a:lnTo>
-                  <a:lnTo>
-                    <a:pt x="3581126" y="2528461"/>
-                  </a:lnTo>
-                  <a:lnTo>
-                    <a:pt x="3652748" y="2488858"/>
-                  </a:lnTo>
-                  <a:lnTo>
-                    <a:pt x="3724371" y="2447859"/>
-                  </a:lnTo>
-                  <a:lnTo>
-                    <a:pt x="3795993" y="2405417"/>
-                  </a:lnTo>
-                  <a:lnTo>
-                    <a:pt x="3867616" y="2361479"/>
-                  </a:lnTo>
-                  <a:lnTo>
-                    <a:pt x="3939238" y="2315993"/>
-                  </a:lnTo>
-                  <a:lnTo>
-                    <a:pt x="4010861" y="2268905"/>
-                  </a:lnTo>
-                  <a:lnTo>
-                    <a:pt x="4082483" y="2220158"/>
-                  </a:lnTo>
-                  <a:lnTo>
-                    <a:pt x="4154106" y="2169694"/>
-                  </a:lnTo>
-                  <a:lnTo>
-                    <a:pt x="4225729" y="2117452"/>
-                  </a:lnTo>
-                  <a:lnTo>
-                    <a:pt x="4297351" y="2063370"/>
-                  </a:lnTo>
-                  <a:lnTo>
-                    <a:pt x="4368974" y="2007382"/>
-                  </a:lnTo>
-                  <a:lnTo>
-                    <a:pt x="4440596" y="1949422"/>
-                  </a:lnTo>
-                  <a:lnTo>
-                    <a:pt x="4512219" y="1889420"/>
-                  </a:lnTo>
-                  <a:lnTo>
-                    <a:pt x="4583841" y="1827305"/>
-                  </a:lnTo>
-                  <a:lnTo>
-                    <a:pt x="4655464" y="1763001"/>
-                  </a:lnTo>
-                  <a:lnTo>
-                    <a:pt x="4727086" y="1696432"/>
-                  </a:lnTo>
-                  <a:lnTo>
-                    <a:pt x="4798709" y="1627518"/>
-                  </a:lnTo>
-                  <a:lnTo>
-                    <a:pt x="4870331" y="1556176"/>
-                  </a:lnTo>
-                  <a:lnTo>
-                    <a:pt x="4941954" y="1482321"/>
-                  </a:lnTo>
-                  <a:lnTo>
-                    <a:pt x="5013576" y="1405864"/>
-                  </a:lnTo>
-                  <a:lnTo>
-                    <a:pt x="5085199" y="1326713"/>
-                  </a:lnTo>
-                  <a:lnTo>
-                    <a:pt x="5156821" y="1244774"/>
-                  </a:lnTo>
-                  <a:lnTo>
-                    <a:pt x="5228444" y="1159949"/>
-                  </a:lnTo>
-                  <a:lnTo>
-                    <a:pt x="5300066" y="1072135"/>
-                  </a:lnTo>
-                  <a:lnTo>
-                    <a:pt x="5371689" y="981228"/>
-                  </a:lnTo>
-                  <a:lnTo>
-                    <a:pt x="5443311" y="887118"/>
-                  </a:lnTo>
-                  <a:lnTo>
-                    <a:pt x="5514934" y="789693"/>
-                  </a:lnTo>
-                  <a:lnTo>
-                    <a:pt x="5586557" y="688836"/>
-                  </a:lnTo>
-                  <a:lnTo>
-                    <a:pt x="5658179" y="584426"/>
-                  </a:lnTo>
-                  <a:lnTo>
-                    <a:pt x="5729802" y="476337"/>
-                  </a:lnTo>
-                  <a:lnTo>
-                    <a:pt x="5801424" y="364441"/>
-                  </a:lnTo>
-                  <a:lnTo>
-                    <a:pt x="5873047" y="248603"/>
-                  </a:lnTo>
-                  <a:lnTo>
-                    <a:pt x="5944669" y="128684"/>
-                  </a:lnTo>
-                  <a:lnTo>
-                    <a:pt x="6016292" y="4540"/>
+                    <a:pt x="71622" y="1184106"/>
+                  </a:lnTo>
+                  <a:lnTo>
+                    <a:pt x="143245" y="1239810"/>
+                  </a:lnTo>
+                  <a:lnTo>
+                    <a:pt x="214867" y="1294164"/>
+                  </a:lnTo>
+                  <a:lnTo>
+                    <a:pt x="286490" y="1347202"/>
+                  </a:lnTo>
+                  <a:lnTo>
+                    <a:pt x="358112" y="1398955"/>
+                  </a:lnTo>
+                  <a:lnTo>
+                    <a:pt x="429735" y="1449454"/>
+                  </a:lnTo>
+                  <a:lnTo>
+                    <a:pt x="501357" y="1498731"/>
+                  </a:lnTo>
+                  <a:lnTo>
+                    <a:pt x="572980" y="1546813"/>
+                  </a:lnTo>
+                  <a:lnTo>
+                    <a:pt x="644602" y="1593731"/>
+                  </a:lnTo>
+                  <a:lnTo>
+                    <a:pt x="716225" y="1639513"/>
+                  </a:lnTo>
+                  <a:lnTo>
+                    <a:pt x="787847" y="1684185"/>
+                  </a:lnTo>
+                  <a:lnTo>
+                    <a:pt x="859470" y="1727775"/>
+                  </a:lnTo>
+                  <a:lnTo>
+                    <a:pt x="931092" y="1770310"/>
+                  </a:lnTo>
+                  <a:lnTo>
+                    <a:pt x="1002715" y="1811814"/>
+                  </a:lnTo>
+                  <a:lnTo>
+                    <a:pt x="1074337" y="1852313"/>
+                  </a:lnTo>
+                  <a:lnTo>
+                    <a:pt x="1145960" y="1891831"/>
+                  </a:lnTo>
+                  <a:lnTo>
+                    <a:pt x="1217582" y="1930392"/>
+                  </a:lnTo>
+                  <a:lnTo>
+                    <a:pt x="1289205" y="1968018"/>
+                  </a:lnTo>
+                  <a:lnTo>
+                    <a:pt x="1360827" y="2004733"/>
+                  </a:lnTo>
+                  <a:lnTo>
+                    <a:pt x="1432450" y="2040559"/>
+                  </a:lnTo>
+                  <a:lnTo>
+                    <a:pt x="1504073" y="2075517"/>
+                  </a:lnTo>
+                  <a:lnTo>
+                    <a:pt x="1575695" y="2109628"/>
+                  </a:lnTo>
+                  <a:lnTo>
+                    <a:pt x="1647318" y="2142913"/>
+                  </a:lnTo>
+                  <a:lnTo>
+                    <a:pt x="1718940" y="2175392"/>
+                  </a:lnTo>
+                  <a:lnTo>
+                    <a:pt x="1790563" y="2207084"/>
+                  </a:lnTo>
+                  <a:lnTo>
+                    <a:pt x="1862185" y="2238008"/>
+                  </a:lnTo>
+                  <a:lnTo>
+                    <a:pt x="1933808" y="2268184"/>
+                  </a:lnTo>
+                  <a:lnTo>
+                    <a:pt x="2005430" y="2297628"/>
+                  </a:lnTo>
+                  <a:lnTo>
+                    <a:pt x="2077053" y="2326359"/>
+                  </a:lnTo>
+                  <a:lnTo>
+                    <a:pt x="2148675" y="2354394"/>
+                  </a:lnTo>
+                  <a:lnTo>
+                    <a:pt x="2220298" y="2381750"/>
+                  </a:lnTo>
+                  <a:lnTo>
+                    <a:pt x="2291920" y="2408444"/>
+                  </a:lnTo>
+                  <a:lnTo>
+                    <a:pt x="2363543" y="2434491"/>
+                  </a:lnTo>
+                  <a:lnTo>
+                    <a:pt x="2435165" y="2459906"/>
+                  </a:lnTo>
+                  <a:lnTo>
+                    <a:pt x="2506788" y="2484707"/>
+                  </a:lnTo>
+                  <a:lnTo>
+                    <a:pt x="2578410" y="2508906"/>
+                  </a:lnTo>
+                  <a:lnTo>
+                    <a:pt x="2650033" y="2532520"/>
+                  </a:lnTo>
+                  <a:lnTo>
+                    <a:pt x="2721655" y="2555561"/>
+                  </a:lnTo>
+                  <a:lnTo>
+                    <a:pt x="2793278" y="2578044"/>
+                  </a:lnTo>
+                  <a:lnTo>
+                    <a:pt x="2864901" y="2599983"/>
+                  </a:lnTo>
+                  <a:lnTo>
+                    <a:pt x="2936523" y="2621390"/>
+                  </a:lnTo>
+                  <a:lnTo>
+                    <a:pt x="3008146" y="2642279"/>
+                  </a:lnTo>
+                  <a:lnTo>
+                    <a:pt x="3079768" y="2642307"/>
+                  </a:lnTo>
+                  <a:lnTo>
+                    <a:pt x="3151391" y="2612664"/>
+                  </a:lnTo>
+                  <a:lnTo>
+                    <a:pt x="3223013" y="2581978"/>
+                  </a:lnTo>
+                  <a:lnTo>
+                    <a:pt x="3294636" y="2550210"/>
+                  </a:lnTo>
+                  <a:lnTo>
+                    <a:pt x="3366258" y="2517323"/>
+                  </a:lnTo>
+                  <a:lnTo>
+                    <a:pt x="3437881" y="2483277"/>
+                  </a:lnTo>
+                  <a:lnTo>
+                    <a:pt x="3509503" y="2448032"/>
+                  </a:lnTo>
+                  <a:lnTo>
+                    <a:pt x="3581126" y="2411546"/>
+                  </a:lnTo>
+                  <a:lnTo>
+                    <a:pt x="3652748" y="2373774"/>
+                  </a:lnTo>
+                  <a:lnTo>
+                    <a:pt x="3724371" y="2334671"/>
+                  </a:lnTo>
+                  <a:lnTo>
+                    <a:pt x="3795993" y="2294191"/>
+                  </a:lnTo>
+                  <a:lnTo>
+                    <a:pt x="3867616" y="2252285"/>
+                  </a:lnTo>
+                  <a:lnTo>
+                    <a:pt x="3939238" y="2208902"/>
+                  </a:lnTo>
+                  <a:lnTo>
+                    <a:pt x="4010861" y="2163992"/>
+                  </a:lnTo>
+                  <a:lnTo>
+                    <a:pt x="4082483" y="2117499"/>
+                  </a:lnTo>
+                  <a:lnTo>
+                    <a:pt x="4154106" y="2069368"/>
+                  </a:lnTo>
+                  <a:lnTo>
+                    <a:pt x="4225729" y="2019542"/>
+                  </a:lnTo>
+                  <a:lnTo>
+                    <a:pt x="4297351" y="1967960"/>
+                  </a:lnTo>
+                  <a:lnTo>
+                    <a:pt x="4368974" y="1914562"/>
+                  </a:lnTo>
+                  <a:lnTo>
+                    <a:pt x="4440596" y="1859282"/>
+                  </a:lnTo>
+                  <a:lnTo>
+                    <a:pt x="4512219" y="1802054"/>
+                  </a:lnTo>
+                  <a:lnTo>
+                    <a:pt x="4583841" y="1742811"/>
+                  </a:lnTo>
+                  <a:lnTo>
+                    <a:pt x="4655464" y="1681481"/>
+                  </a:lnTo>
+                  <a:lnTo>
+                    <a:pt x="4727086" y="1617990"/>
+                  </a:lnTo>
+                  <a:lnTo>
+                    <a:pt x="4798709" y="1552262"/>
+                  </a:lnTo>
+                  <a:lnTo>
+                    <a:pt x="4870331" y="1484219"/>
+                  </a:lnTo>
+                  <a:lnTo>
+                    <a:pt x="4941954" y="1413779"/>
+                  </a:lnTo>
+                  <a:lnTo>
+                    <a:pt x="5013576" y="1340857"/>
+                  </a:lnTo>
+                  <a:lnTo>
+                    <a:pt x="5085199" y="1265366"/>
+                  </a:lnTo>
+                  <a:lnTo>
+                    <a:pt x="5156821" y="1187216"/>
+                  </a:lnTo>
+                  <a:lnTo>
+                    <a:pt x="5228444" y="1106313"/>
+                  </a:lnTo>
+                  <a:lnTo>
+                    <a:pt x="5300066" y="1022560"/>
+                  </a:lnTo>
+                  <a:lnTo>
+                    <a:pt x="5371689" y="935856"/>
+                  </a:lnTo>
+                  <a:lnTo>
+                    <a:pt x="5443311" y="846098"/>
+                  </a:lnTo>
+                  <a:lnTo>
+                    <a:pt x="5514934" y="753178"/>
+                  </a:lnTo>
+                  <a:lnTo>
+                    <a:pt x="5586557" y="656984"/>
+                  </a:lnTo>
+                  <a:lnTo>
+                    <a:pt x="5658179" y="557402"/>
+                  </a:lnTo>
+                  <a:lnTo>
+                    <a:pt x="5729802" y="454312"/>
+                  </a:lnTo>
+                  <a:lnTo>
+                    <a:pt x="5801424" y="347589"/>
+                  </a:lnTo>
+                  <a:lnTo>
+                    <a:pt x="5873047" y="237108"/>
+                  </a:lnTo>
+                  <a:lnTo>
+                    <a:pt x="5944669" y="122734"/>
+                  </a:lnTo>
+                  <a:lnTo>
+                    <a:pt x="6016292" y="4330"/>
                   </a:lnTo>
                   <a:lnTo>
                     <a:pt x="6018822" y="0"/>
@@ -4006,312 +4006,312 @@
           </p:nvSpPr>
           <p:spPr>
             <a:xfrm>
-              <a:off x="1172049" y="4688314"/>
-              <a:ext cx="7090630" cy="661812"/>
+              <a:off x="1172049" y="4736164"/>
+              <a:ext cx="7090630" cy="631210"/>
             </a:xfrm>
             <a:custGeom>
               <a:avLst/>
               <a:pathLst>
-                <a:path w="7090630" h="661812">
+                <a:path w="7090630" h="631210">
                   <a:moveTo>
-                    <a:pt x="7090630" y="642827"/>
+                    <a:pt x="7090630" y="613103"/>
                   </a:moveTo>
                   <a:lnTo>
-                    <a:pt x="7019007" y="637413"/>
-                  </a:lnTo>
-                  <a:lnTo>
-                    <a:pt x="6947385" y="631866"/>
-                  </a:lnTo>
-                  <a:lnTo>
-                    <a:pt x="6875762" y="626180"/>
-                  </a:lnTo>
-                  <a:lnTo>
-                    <a:pt x="6804139" y="620354"/>
-                  </a:lnTo>
-                  <a:lnTo>
-                    <a:pt x="6732517" y="614383"/>
-                  </a:lnTo>
-                  <a:lnTo>
-                    <a:pt x="6660894" y="608263"/>
-                  </a:lnTo>
-                  <a:lnTo>
-                    <a:pt x="6589272" y="601992"/>
-                  </a:lnTo>
-                  <a:lnTo>
-                    <a:pt x="6517649" y="595565"/>
-                  </a:lnTo>
-                  <a:lnTo>
-                    <a:pt x="6446027" y="588979"/>
-                  </a:lnTo>
-                  <a:lnTo>
-                    <a:pt x="6374404" y="582229"/>
-                  </a:lnTo>
-                  <a:lnTo>
-                    <a:pt x="6302782" y="575311"/>
-                  </a:lnTo>
-                  <a:lnTo>
-                    <a:pt x="6231159" y="568222"/>
-                  </a:lnTo>
-                  <a:lnTo>
-                    <a:pt x="6159537" y="560956"/>
-                  </a:lnTo>
-                  <a:lnTo>
-                    <a:pt x="6087914" y="553511"/>
-                  </a:lnTo>
-                  <a:lnTo>
-                    <a:pt x="6016292" y="545880"/>
-                  </a:lnTo>
-                  <a:lnTo>
-                    <a:pt x="5944669" y="538061"/>
-                  </a:lnTo>
-                  <a:lnTo>
-                    <a:pt x="5873047" y="530047"/>
-                  </a:lnTo>
-                  <a:lnTo>
-                    <a:pt x="5801424" y="521834"/>
-                  </a:lnTo>
-                  <a:lnTo>
-                    <a:pt x="5729802" y="513417"/>
-                  </a:lnTo>
-                  <a:lnTo>
-                    <a:pt x="5658179" y="504791"/>
-                  </a:lnTo>
-                  <a:lnTo>
-                    <a:pt x="5586557" y="495951"/>
-                  </a:lnTo>
-                  <a:lnTo>
-                    <a:pt x="5514934" y="486892"/>
-                  </a:lnTo>
-                  <a:lnTo>
-                    <a:pt x="5443311" y="477608"/>
-                  </a:lnTo>
-                  <a:lnTo>
-                    <a:pt x="5371689" y="468093"/>
-                  </a:lnTo>
-                  <a:lnTo>
-                    <a:pt x="5300066" y="458342"/>
-                  </a:lnTo>
-                  <a:lnTo>
-                    <a:pt x="5228444" y="448349"/>
-                  </a:lnTo>
-                  <a:lnTo>
-                    <a:pt x="5156821" y="438108"/>
-                  </a:lnTo>
-                  <a:lnTo>
-                    <a:pt x="5085199" y="427613"/>
-                  </a:lnTo>
-                  <a:lnTo>
-                    <a:pt x="5013576" y="416857"/>
-                  </a:lnTo>
-                  <a:lnTo>
-                    <a:pt x="4941954" y="405834"/>
-                  </a:lnTo>
-                  <a:lnTo>
-                    <a:pt x="4870331" y="394538"/>
-                  </a:lnTo>
-                  <a:lnTo>
-                    <a:pt x="4798709" y="382961"/>
-                  </a:lnTo>
-                  <a:lnTo>
-                    <a:pt x="4727086" y="371097"/>
-                  </a:lnTo>
-                  <a:lnTo>
-                    <a:pt x="4655464" y="358938"/>
-                  </a:lnTo>
-                  <a:lnTo>
-                    <a:pt x="4583841" y="346478"/>
-                  </a:lnTo>
-                  <a:lnTo>
-                    <a:pt x="4512219" y="333708"/>
-                  </a:lnTo>
-                  <a:lnTo>
-                    <a:pt x="4440596" y="320621"/>
-                  </a:lnTo>
-                  <a:lnTo>
-                    <a:pt x="4368974" y="307209"/>
-                  </a:lnTo>
-                  <a:lnTo>
-                    <a:pt x="4297351" y="293465"/>
-                  </a:lnTo>
-                  <a:lnTo>
-                    <a:pt x="4225729" y="279379"/>
-                  </a:lnTo>
-                  <a:lnTo>
-                    <a:pt x="4154106" y="264943"/>
-                  </a:lnTo>
-                  <a:lnTo>
-                    <a:pt x="4082483" y="250149"/>
-                  </a:lnTo>
-                  <a:lnTo>
-                    <a:pt x="4010861" y="234988"/>
-                  </a:lnTo>
-                  <a:lnTo>
-                    <a:pt x="3939238" y="219451"/>
-                  </a:lnTo>
-                  <a:lnTo>
-                    <a:pt x="3867616" y="203527"/>
-                  </a:lnTo>
-                  <a:lnTo>
-                    <a:pt x="3795993" y="187209"/>
-                  </a:lnTo>
-                  <a:lnTo>
-                    <a:pt x="3724371" y="170485"/>
-                  </a:lnTo>
-                  <a:lnTo>
-                    <a:pt x="3652748" y="153347"/>
-                  </a:lnTo>
-                  <a:lnTo>
-                    <a:pt x="3581126" y="135782"/>
-                  </a:lnTo>
-                  <a:lnTo>
-                    <a:pt x="3509503" y="117782"/>
-                  </a:lnTo>
-                  <a:lnTo>
-                    <a:pt x="3437881" y="99335"/>
-                  </a:lnTo>
-                  <a:lnTo>
-                    <a:pt x="3366258" y="80430"/>
-                  </a:lnTo>
-                  <a:lnTo>
-                    <a:pt x="3294636" y="61056"/>
-                  </a:lnTo>
-                  <a:lnTo>
-                    <a:pt x="3223013" y="41201"/>
-                  </a:lnTo>
-                  <a:lnTo>
-                    <a:pt x="3151391" y="20853"/>
+                    <a:pt x="7019007" y="607940"/>
+                  </a:lnTo>
+                  <a:lnTo>
+                    <a:pt x="6947385" y="602648"/>
+                  </a:lnTo>
+                  <a:lnTo>
+                    <a:pt x="6875762" y="597226"/>
+                  </a:lnTo>
+                  <a:lnTo>
+                    <a:pt x="6804139" y="591669"/>
+                  </a:lnTo>
+                  <a:lnTo>
+                    <a:pt x="6732517" y="585974"/>
+                  </a:lnTo>
+                  <a:lnTo>
+                    <a:pt x="6660894" y="580137"/>
+                  </a:lnTo>
+                  <a:lnTo>
+                    <a:pt x="6589272" y="574156"/>
+                  </a:lnTo>
+                  <a:lnTo>
+                    <a:pt x="6517649" y="568026"/>
+                  </a:lnTo>
+                  <a:lnTo>
+                    <a:pt x="6446027" y="561744"/>
+                  </a:lnTo>
+                  <a:lnTo>
+                    <a:pt x="6374404" y="555307"/>
+                  </a:lnTo>
+                  <a:lnTo>
+                    <a:pt x="6302782" y="548709"/>
+                  </a:lnTo>
+                  <a:lnTo>
+                    <a:pt x="6231159" y="541947"/>
+                  </a:lnTo>
+                  <a:lnTo>
+                    <a:pt x="6159537" y="535018"/>
+                  </a:lnTo>
+                  <a:lnTo>
+                    <a:pt x="6087914" y="527917"/>
+                  </a:lnTo>
+                  <a:lnTo>
+                    <a:pt x="6016292" y="520639"/>
+                  </a:lnTo>
+                  <a:lnTo>
+                    <a:pt x="5944669" y="513181"/>
+                  </a:lnTo>
+                  <a:lnTo>
+                    <a:pt x="5873047" y="505537"/>
+                  </a:lnTo>
+                  <a:lnTo>
+                    <a:pt x="5801424" y="497704"/>
+                  </a:lnTo>
+                  <a:lnTo>
+                    <a:pt x="5729802" y="489677"/>
+                  </a:lnTo>
+                  <a:lnTo>
+                    <a:pt x="5658179" y="481450"/>
+                  </a:lnTo>
+                  <a:lnTo>
+                    <a:pt x="5586557" y="473018"/>
+                  </a:lnTo>
+                  <a:lnTo>
+                    <a:pt x="5514934" y="464378"/>
+                  </a:lnTo>
+                  <a:lnTo>
+                    <a:pt x="5443311" y="455523"/>
+                  </a:lnTo>
+                  <a:lnTo>
+                    <a:pt x="5371689" y="446448"/>
+                  </a:lnTo>
+                  <a:lnTo>
+                    <a:pt x="5300066" y="437148"/>
+                  </a:lnTo>
+                  <a:lnTo>
+                    <a:pt x="5228444" y="427618"/>
+                  </a:lnTo>
+                  <a:lnTo>
+                    <a:pt x="5156821" y="417850"/>
+                  </a:lnTo>
+                  <a:lnTo>
+                    <a:pt x="5085199" y="407840"/>
+                  </a:lnTo>
+                  <a:lnTo>
+                    <a:pt x="5013576" y="397582"/>
+                  </a:lnTo>
+                  <a:lnTo>
+                    <a:pt x="4941954" y="387069"/>
+                  </a:lnTo>
+                  <a:lnTo>
+                    <a:pt x="4870331" y="376295"/>
+                  </a:lnTo>
+                  <a:lnTo>
+                    <a:pt x="4798709" y="365253"/>
+                  </a:lnTo>
+                  <a:lnTo>
+                    <a:pt x="4727086" y="353938"/>
+                  </a:lnTo>
+                  <a:lnTo>
+                    <a:pt x="4655464" y="342341"/>
+                  </a:lnTo>
+                  <a:lnTo>
+                    <a:pt x="4583841" y="330457"/>
+                  </a:lnTo>
+                  <a:lnTo>
+                    <a:pt x="4512219" y="318277"/>
+                  </a:lnTo>
+                  <a:lnTo>
+                    <a:pt x="4440596" y="305796"/>
+                  </a:lnTo>
+                  <a:lnTo>
+                    <a:pt x="4368974" y="293004"/>
+                  </a:lnTo>
+                  <a:lnTo>
+                    <a:pt x="4297351" y="279895"/>
+                  </a:lnTo>
+                  <a:lnTo>
+                    <a:pt x="4225729" y="266460"/>
+                  </a:lnTo>
+                  <a:lnTo>
+                    <a:pt x="4154106" y="252692"/>
+                  </a:lnTo>
+                  <a:lnTo>
+                    <a:pt x="4082483" y="238582"/>
+                  </a:lnTo>
+                  <a:lnTo>
+                    <a:pt x="4010861" y="224122"/>
+                  </a:lnTo>
+                  <a:lnTo>
+                    <a:pt x="3939238" y="209303"/>
+                  </a:lnTo>
+                  <a:lnTo>
+                    <a:pt x="3867616" y="194116"/>
+                  </a:lnTo>
+                  <a:lnTo>
+                    <a:pt x="3795993" y="178552"/>
+                  </a:lnTo>
+                  <a:lnTo>
+                    <a:pt x="3724371" y="162602"/>
+                  </a:lnTo>
+                  <a:lnTo>
+                    <a:pt x="3652748" y="146256"/>
+                  </a:lnTo>
+                  <a:lnTo>
+                    <a:pt x="3581126" y="129504"/>
+                  </a:lnTo>
+                  <a:lnTo>
+                    <a:pt x="3509503" y="112336"/>
+                  </a:lnTo>
+                  <a:lnTo>
+                    <a:pt x="3437881" y="94742"/>
+                  </a:lnTo>
+                  <a:lnTo>
+                    <a:pt x="3366258" y="76711"/>
+                  </a:lnTo>
+                  <a:lnTo>
+                    <a:pt x="3294636" y="58233"/>
+                  </a:lnTo>
+                  <a:lnTo>
+                    <a:pt x="3223013" y="39296"/>
+                  </a:lnTo>
+                  <a:lnTo>
+                    <a:pt x="3151391" y="19888"/>
                   </a:lnTo>
                   <a:lnTo>
                     <a:pt x="3079768" y="0"/>
                   </a:lnTo>
                   <a:lnTo>
-                    <a:pt x="3008146" y="8680"/>
-                  </a:lnTo>
-                  <a:lnTo>
-                    <a:pt x="2936523" y="37681"/>
-                  </a:lnTo>
-                  <a:lnTo>
-                    <a:pt x="2864901" y="65694"/>
-                  </a:lnTo>
-                  <a:lnTo>
-                    <a:pt x="2793278" y="92755"/>
-                  </a:lnTo>
-                  <a:lnTo>
-                    <a:pt x="2721655" y="118894"/>
-                  </a:lnTo>
-                  <a:lnTo>
-                    <a:pt x="2650033" y="144144"/>
-                  </a:lnTo>
-                  <a:lnTo>
-                    <a:pt x="2578410" y="168535"/>
-                  </a:lnTo>
-                  <a:lnTo>
-                    <a:pt x="2506788" y="192095"/>
-                  </a:lnTo>
-                  <a:lnTo>
-                    <a:pt x="2435165" y="214854"/>
-                  </a:lnTo>
-                  <a:lnTo>
-                    <a:pt x="2363543" y="236839"/>
-                  </a:lnTo>
-                  <a:lnTo>
-                    <a:pt x="2291920" y="258075"/>
-                  </a:lnTo>
-                  <a:lnTo>
-                    <a:pt x="2220298" y="278588"/>
-                  </a:lnTo>
-                  <a:lnTo>
-                    <a:pt x="2148675" y="298404"/>
-                  </a:lnTo>
-                  <a:lnTo>
-                    <a:pt x="2077053" y="317545"/>
-                  </a:lnTo>
-                  <a:lnTo>
-                    <a:pt x="2005430" y="336035"/>
-                  </a:lnTo>
-                  <a:lnTo>
-                    <a:pt x="1933808" y="353896"/>
-                  </a:lnTo>
-                  <a:lnTo>
-                    <a:pt x="1862185" y="371149"/>
-                  </a:lnTo>
-                  <a:lnTo>
-                    <a:pt x="1790563" y="387814"/>
-                  </a:lnTo>
-                  <a:lnTo>
-                    <a:pt x="1718940" y="403913"/>
-                  </a:lnTo>
-                  <a:lnTo>
-                    <a:pt x="1647318" y="419464"/>
-                  </a:lnTo>
-                  <a:lnTo>
-                    <a:pt x="1575695" y="434485"/>
-                  </a:lnTo>
-                  <a:lnTo>
-                    <a:pt x="1504073" y="448996"/>
-                  </a:lnTo>
-                  <a:lnTo>
-                    <a:pt x="1432450" y="463013"/>
-                  </a:lnTo>
-                  <a:lnTo>
-                    <a:pt x="1360827" y="476552"/>
-                  </a:lnTo>
-                  <a:lnTo>
-                    <a:pt x="1289205" y="489631"/>
-                  </a:lnTo>
-                  <a:lnTo>
-                    <a:pt x="1217582" y="502265"/>
-                  </a:lnTo>
-                  <a:lnTo>
-                    <a:pt x="1145960" y="514469"/>
-                  </a:lnTo>
-                  <a:lnTo>
-                    <a:pt x="1074337" y="526258"/>
-                  </a:lnTo>
-                  <a:lnTo>
-                    <a:pt x="1002715" y="537645"/>
-                  </a:lnTo>
-                  <a:lnTo>
-                    <a:pt x="931092" y="548645"/>
-                  </a:lnTo>
-                  <a:lnTo>
-                    <a:pt x="859470" y="559271"/>
-                  </a:lnTo>
-                  <a:lnTo>
-                    <a:pt x="787847" y="569535"/>
-                  </a:lnTo>
-                  <a:lnTo>
-                    <a:pt x="716225" y="579449"/>
-                  </a:lnTo>
-                  <a:lnTo>
-                    <a:pt x="644602" y="589027"/>
-                  </a:lnTo>
-                  <a:lnTo>
-                    <a:pt x="572980" y="598278"/>
-                  </a:lnTo>
-                  <a:lnTo>
-                    <a:pt x="501357" y="607215"/>
-                  </a:lnTo>
-                  <a:lnTo>
-                    <a:pt x="429735" y="615847"/>
-                  </a:lnTo>
-                  <a:lnTo>
-                    <a:pt x="358112" y="624186"/>
-                  </a:lnTo>
-                  <a:lnTo>
-                    <a:pt x="286490" y="632241"/>
-                  </a:lnTo>
-                  <a:lnTo>
-                    <a:pt x="214867" y="640022"/>
-                  </a:lnTo>
-                  <a:lnTo>
-                    <a:pt x="143245" y="647538"/>
-                  </a:lnTo>
-                  <a:lnTo>
-                    <a:pt x="71622" y="654799"/>
-                  </a:lnTo>
-                  <a:lnTo>
-                    <a:pt x="0" y="661812"/>
+                    <a:pt x="3008146" y="8279"/>
+                  </a:lnTo>
+                  <a:lnTo>
+                    <a:pt x="2936523" y="35938"/>
+                  </a:lnTo>
+                  <a:lnTo>
+                    <a:pt x="2864901" y="62657"/>
+                  </a:lnTo>
+                  <a:lnTo>
+                    <a:pt x="2793278" y="88466"/>
+                  </a:lnTo>
+                  <a:lnTo>
+                    <a:pt x="2721655" y="113396"/>
+                  </a:lnTo>
+                  <a:lnTo>
+                    <a:pt x="2650033" y="137479"/>
+                  </a:lnTo>
+                  <a:lnTo>
+                    <a:pt x="2578410" y="160742"/>
+                  </a:lnTo>
+                  <a:lnTo>
+                    <a:pt x="2506788" y="183213"/>
+                  </a:lnTo>
+                  <a:lnTo>
+                    <a:pt x="2435165" y="204919"/>
+                  </a:lnTo>
+                  <a:lnTo>
+                    <a:pt x="2363543" y="225887"/>
+                  </a:lnTo>
+                  <a:lnTo>
+                    <a:pt x="2291920" y="246141"/>
+                  </a:lnTo>
+                  <a:lnTo>
+                    <a:pt x="2220298" y="265707"/>
+                  </a:lnTo>
+                  <a:lnTo>
+                    <a:pt x="2148675" y="284606"/>
+                  </a:lnTo>
+                  <a:lnTo>
+                    <a:pt x="2077053" y="302862"/>
+                  </a:lnTo>
+                  <a:lnTo>
+                    <a:pt x="2005430" y="320497"/>
+                  </a:lnTo>
+                  <a:lnTo>
+                    <a:pt x="1933808" y="337532"/>
+                  </a:lnTo>
+                  <a:lnTo>
+                    <a:pt x="1862185" y="353987"/>
+                  </a:lnTo>
+                  <a:lnTo>
+                    <a:pt x="1790563" y="369882"/>
+                  </a:lnTo>
+                  <a:lnTo>
+                    <a:pt x="1718940" y="385236"/>
+                  </a:lnTo>
+                  <a:lnTo>
+                    <a:pt x="1647318" y="400068"/>
+                  </a:lnTo>
+                  <a:lnTo>
+                    <a:pt x="1575695" y="414395"/>
+                  </a:lnTo>
+                  <a:lnTo>
+                    <a:pt x="1504073" y="428234"/>
+                  </a:lnTo>
+                  <a:lnTo>
+                    <a:pt x="1432450" y="441603"/>
+                  </a:lnTo>
+                  <a:lnTo>
+                    <a:pt x="1360827" y="454517"/>
+                  </a:lnTo>
+                  <a:lnTo>
+                    <a:pt x="1289205" y="466991"/>
+                  </a:lnTo>
+                  <a:lnTo>
+                    <a:pt x="1217582" y="479040"/>
+                  </a:lnTo>
+                  <a:lnTo>
+                    <a:pt x="1145960" y="490680"/>
+                  </a:lnTo>
+                  <a:lnTo>
+                    <a:pt x="1074337" y="501924"/>
+                  </a:lnTo>
+                  <a:lnTo>
+                    <a:pt x="1002715" y="512785"/>
+                  </a:lnTo>
+                  <a:lnTo>
+                    <a:pt x="931092" y="523276"/>
+                  </a:lnTo>
+                  <a:lnTo>
+                    <a:pt x="859470" y="533410"/>
+                  </a:lnTo>
+                  <a:lnTo>
+                    <a:pt x="787847" y="543200"/>
+                  </a:lnTo>
+                  <a:lnTo>
+                    <a:pt x="716225" y="552656"/>
+                  </a:lnTo>
+                  <a:lnTo>
+                    <a:pt x="644602" y="561790"/>
+                  </a:lnTo>
+                  <a:lnTo>
+                    <a:pt x="572980" y="570614"/>
+                  </a:lnTo>
+                  <a:lnTo>
+                    <a:pt x="501357" y="579138"/>
+                  </a:lnTo>
+                  <a:lnTo>
+                    <a:pt x="429735" y="587371"/>
+                  </a:lnTo>
+                  <a:lnTo>
+                    <a:pt x="358112" y="595324"/>
+                  </a:lnTo>
+                  <a:lnTo>
+                    <a:pt x="286490" y="603007"/>
+                  </a:lnTo>
+                  <a:lnTo>
+                    <a:pt x="214867" y="610428"/>
+                  </a:lnTo>
+                  <a:lnTo>
+                    <a:pt x="143245" y="617596"/>
+                  </a:lnTo>
+                  <a:lnTo>
+                    <a:pt x="71622" y="624521"/>
+                  </a:lnTo>
+                  <a:lnTo>
+                    <a:pt x="0" y="631210"/>
                   </a:lnTo>
                 </a:path>
               </a:pathLst>
@@ -4331,309 +4331,309 @@
           </p:nvSpPr>
           <p:spPr>
             <a:xfrm>
-              <a:off x="1172049" y="4392833"/>
-              <a:ext cx="7090630" cy="455000"/>
+              <a:off x="1172049" y="4454346"/>
+              <a:ext cx="7090630" cy="433961"/>
             </a:xfrm>
             <a:custGeom>
               <a:avLst/>
               <a:pathLst>
-                <a:path w="7090630" h="455000">
+                <a:path w="7090630" h="433961">
                   <a:moveTo>
-                    <a:pt x="0" y="455000"/>
+                    <a:pt x="0" y="433961"/>
                   </a:moveTo>
                   <a:lnTo>
-                    <a:pt x="71622" y="451449"/>
-                  </a:lnTo>
-                  <a:lnTo>
-                    <a:pt x="143245" y="447880"/>
-                  </a:lnTo>
-                  <a:lnTo>
-                    <a:pt x="214867" y="444292"/>
-                  </a:lnTo>
-                  <a:lnTo>
-                    <a:pt x="286490" y="440687"/>
-                  </a:lnTo>
-                  <a:lnTo>
-                    <a:pt x="358112" y="437063"/>
-                  </a:lnTo>
-                  <a:lnTo>
-                    <a:pt x="429735" y="433421"/>
-                  </a:lnTo>
-                  <a:lnTo>
-                    <a:pt x="501357" y="429761"/>
-                  </a:lnTo>
-                  <a:lnTo>
-                    <a:pt x="572980" y="426081"/>
-                  </a:lnTo>
-                  <a:lnTo>
-                    <a:pt x="644602" y="422384"/>
-                  </a:lnTo>
-                  <a:lnTo>
-                    <a:pt x="716225" y="418667"/>
-                  </a:lnTo>
-                  <a:lnTo>
-                    <a:pt x="787847" y="414932"/>
-                  </a:lnTo>
-                  <a:lnTo>
-                    <a:pt x="859470" y="411178"/>
-                  </a:lnTo>
-                  <a:lnTo>
-                    <a:pt x="931092" y="407405"/>
-                  </a:lnTo>
-                  <a:lnTo>
-                    <a:pt x="1002715" y="403613"/>
-                  </a:lnTo>
-                  <a:lnTo>
-                    <a:pt x="1074337" y="399801"/>
-                  </a:lnTo>
-                  <a:lnTo>
-                    <a:pt x="1145960" y="395970"/>
-                  </a:lnTo>
-                  <a:lnTo>
-                    <a:pt x="1217582" y="392120"/>
-                  </a:lnTo>
-                  <a:lnTo>
-                    <a:pt x="1289205" y="388250"/>
-                  </a:lnTo>
-                  <a:lnTo>
-                    <a:pt x="1360827" y="384361"/>
-                  </a:lnTo>
-                  <a:lnTo>
-                    <a:pt x="1432450" y="380452"/>
-                  </a:lnTo>
-                  <a:lnTo>
-                    <a:pt x="1504073" y="376523"/>
-                  </a:lnTo>
-                  <a:lnTo>
-                    <a:pt x="1575695" y="372575"/>
-                  </a:lnTo>
-                  <a:lnTo>
-                    <a:pt x="1647318" y="368606"/>
-                  </a:lnTo>
-                  <a:lnTo>
-                    <a:pt x="1718940" y="364618"/>
-                  </a:lnTo>
-                  <a:lnTo>
-                    <a:pt x="1790563" y="360609"/>
-                  </a:lnTo>
-                  <a:lnTo>
-                    <a:pt x="1862185" y="356579"/>
-                  </a:lnTo>
-                  <a:lnTo>
-                    <a:pt x="1933808" y="352530"/>
-                  </a:lnTo>
-                  <a:lnTo>
-                    <a:pt x="2005430" y="348460"/>
-                  </a:lnTo>
-                  <a:lnTo>
-                    <a:pt x="2077053" y="344369"/>
-                  </a:lnTo>
-                  <a:lnTo>
-                    <a:pt x="2148675" y="340257"/>
-                  </a:lnTo>
-                  <a:lnTo>
-                    <a:pt x="2220298" y="336125"/>
-                  </a:lnTo>
-                  <a:lnTo>
-                    <a:pt x="2291920" y="331972"/>
-                  </a:lnTo>
-                  <a:lnTo>
-                    <a:pt x="2363543" y="327798"/>
-                  </a:lnTo>
-                  <a:lnTo>
-                    <a:pt x="2435165" y="323602"/>
-                  </a:lnTo>
-                  <a:lnTo>
-                    <a:pt x="2506788" y="319386"/>
-                  </a:lnTo>
-                  <a:lnTo>
-                    <a:pt x="2578410" y="315148"/>
-                  </a:lnTo>
-                  <a:lnTo>
-                    <a:pt x="2650033" y="310889"/>
-                  </a:lnTo>
-                  <a:lnTo>
-                    <a:pt x="2721655" y="306608"/>
-                  </a:lnTo>
-                  <a:lnTo>
-                    <a:pt x="2793278" y="302305"/>
-                  </a:lnTo>
-                  <a:lnTo>
-                    <a:pt x="2864901" y="297980"/>
-                  </a:lnTo>
-                  <a:lnTo>
-                    <a:pt x="2936523" y="293634"/>
-                  </a:lnTo>
-                  <a:lnTo>
-                    <a:pt x="3008146" y="289266"/>
-                  </a:lnTo>
-                  <a:lnTo>
-                    <a:pt x="3079768" y="284875"/>
-                  </a:lnTo>
-                  <a:lnTo>
-                    <a:pt x="3151391" y="280463"/>
-                  </a:lnTo>
-                  <a:lnTo>
-                    <a:pt x="3223013" y="276028"/>
-                  </a:lnTo>
-                  <a:lnTo>
-                    <a:pt x="3294636" y="271570"/>
-                  </a:lnTo>
-                  <a:lnTo>
-                    <a:pt x="3366258" y="267090"/>
-                  </a:lnTo>
-                  <a:lnTo>
-                    <a:pt x="3437881" y="262587"/>
-                  </a:lnTo>
-                  <a:lnTo>
-                    <a:pt x="3509503" y="258062"/>
-                  </a:lnTo>
-                  <a:lnTo>
-                    <a:pt x="3581126" y="253513"/>
-                  </a:lnTo>
-                  <a:lnTo>
-                    <a:pt x="3652748" y="248942"/>
-                  </a:lnTo>
-                  <a:lnTo>
-                    <a:pt x="3724371" y="244347"/>
-                  </a:lnTo>
-                  <a:lnTo>
-                    <a:pt x="3795993" y="239729"/>
-                  </a:lnTo>
-                  <a:lnTo>
-                    <a:pt x="3867616" y="235088"/>
-                  </a:lnTo>
-                  <a:lnTo>
-                    <a:pt x="3939238" y="230423"/>
-                  </a:lnTo>
-                  <a:lnTo>
-                    <a:pt x="4010861" y="225735"/>
-                  </a:lnTo>
-                  <a:lnTo>
-                    <a:pt x="4082483" y="221023"/>
-                  </a:lnTo>
-                  <a:lnTo>
-                    <a:pt x="4154106" y="216287"/>
-                  </a:lnTo>
-                  <a:lnTo>
-                    <a:pt x="4225729" y="211527"/>
-                  </a:lnTo>
-                  <a:lnTo>
-                    <a:pt x="4297351" y="206743"/>
-                  </a:lnTo>
-                  <a:lnTo>
-                    <a:pt x="4368974" y="201935"/>
-                  </a:lnTo>
-                  <a:lnTo>
-                    <a:pt x="4440596" y="197102"/>
-                  </a:lnTo>
-                  <a:lnTo>
-                    <a:pt x="4512219" y="192245"/>
-                  </a:lnTo>
-                  <a:lnTo>
-                    <a:pt x="4583841" y="187363"/>
-                  </a:lnTo>
-                  <a:lnTo>
-                    <a:pt x="4655464" y="182457"/>
-                  </a:lnTo>
-                  <a:lnTo>
-                    <a:pt x="4727086" y="177526"/>
-                  </a:lnTo>
-                  <a:lnTo>
-                    <a:pt x="4798709" y="172569"/>
-                  </a:lnTo>
-                  <a:lnTo>
-                    <a:pt x="4870331" y="167588"/>
-                  </a:lnTo>
-                  <a:lnTo>
-                    <a:pt x="4941954" y="162581"/>
-                  </a:lnTo>
-                  <a:lnTo>
-                    <a:pt x="5013576" y="157550"/>
-                  </a:lnTo>
-                  <a:lnTo>
-                    <a:pt x="5085199" y="152492"/>
-                  </a:lnTo>
-                  <a:lnTo>
-                    <a:pt x="5156821" y="147409"/>
-                  </a:lnTo>
-                  <a:lnTo>
-                    <a:pt x="5228444" y="142300"/>
-                  </a:lnTo>
-                  <a:lnTo>
-                    <a:pt x="5300066" y="137166"/>
-                  </a:lnTo>
-                  <a:lnTo>
-                    <a:pt x="5371689" y="132005"/>
-                  </a:lnTo>
-                  <a:lnTo>
-                    <a:pt x="5443311" y="126819"/>
-                  </a:lnTo>
-                  <a:lnTo>
-                    <a:pt x="5514934" y="121606"/>
-                  </a:lnTo>
-                  <a:lnTo>
-                    <a:pt x="5586557" y="116366"/>
-                  </a:lnTo>
-                  <a:lnTo>
-                    <a:pt x="5658179" y="111100"/>
-                  </a:lnTo>
-                  <a:lnTo>
-                    <a:pt x="5729802" y="105808"/>
-                  </a:lnTo>
-                  <a:lnTo>
-                    <a:pt x="5801424" y="100488"/>
-                  </a:lnTo>
-                  <a:lnTo>
-                    <a:pt x="5873047" y="95142"/>
-                  </a:lnTo>
-                  <a:lnTo>
-                    <a:pt x="5944669" y="89769"/>
-                  </a:lnTo>
-                  <a:lnTo>
-                    <a:pt x="6016292" y="84368"/>
-                  </a:lnTo>
-                  <a:lnTo>
-                    <a:pt x="6087914" y="78940"/>
-                  </a:lnTo>
-                  <a:lnTo>
-                    <a:pt x="6159537" y="73485"/>
-                  </a:lnTo>
-                  <a:lnTo>
-                    <a:pt x="6231159" y="68002"/>
-                  </a:lnTo>
-                  <a:lnTo>
-                    <a:pt x="6302782" y="62491"/>
-                  </a:lnTo>
-                  <a:lnTo>
-                    <a:pt x="6374404" y="56952"/>
-                  </a:lnTo>
-                  <a:lnTo>
-                    <a:pt x="6446027" y="51386"/>
-                  </a:lnTo>
-                  <a:lnTo>
-                    <a:pt x="6517649" y="45791"/>
-                  </a:lnTo>
-                  <a:lnTo>
-                    <a:pt x="6589272" y="40168"/>
-                  </a:lnTo>
-                  <a:lnTo>
-                    <a:pt x="6660894" y="34516"/>
-                  </a:lnTo>
-                  <a:lnTo>
-                    <a:pt x="6732517" y="28836"/>
-                  </a:lnTo>
-                  <a:lnTo>
-                    <a:pt x="6804139" y="23126"/>
-                  </a:lnTo>
-                  <a:lnTo>
-                    <a:pt x="6875762" y="17388"/>
-                  </a:lnTo>
-                  <a:lnTo>
-                    <a:pt x="6947385" y="11621"/>
-                  </a:lnTo>
-                  <a:lnTo>
-                    <a:pt x="7019007" y="5825"/>
+                    <a:pt x="71622" y="430574"/>
+                  </a:lnTo>
+                  <a:lnTo>
+                    <a:pt x="143245" y="427170"/>
+                  </a:lnTo>
+                  <a:lnTo>
+                    <a:pt x="214867" y="423749"/>
+                  </a:lnTo>
+                  <a:lnTo>
+                    <a:pt x="286490" y="420310"/>
+                  </a:lnTo>
+                  <a:lnTo>
+                    <a:pt x="358112" y="416854"/>
+                  </a:lnTo>
+                  <a:lnTo>
+                    <a:pt x="429735" y="413380"/>
+                  </a:lnTo>
+                  <a:lnTo>
+                    <a:pt x="501357" y="409889"/>
+                  </a:lnTo>
+                  <a:lnTo>
+                    <a:pt x="572980" y="406380"/>
+                  </a:lnTo>
+                  <a:lnTo>
+                    <a:pt x="644602" y="402853"/>
+                  </a:lnTo>
+                  <a:lnTo>
+                    <a:pt x="716225" y="399308"/>
+                  </a:lnTo>
+                  <a:lnTo>
+                    <a:pt x="787847" y="395746"/>
+                  </a:lnTo>
+                  <a:lnTo>
+                    <a:pt x="859470" y="392165"/>
+                  </a:lnTo>
+                  <a:lnTo>
+                    <a:pt x="931092" y="388567"/>
+                  </a:lnTo>
+                  <a:lnTo>
+                    <a:pt x="1002715" y="384950"/>
+                  </a:lnTo>
+                  <a:lnTo>
+                    <a:pt x="1074337" y="381314"/>
+                  </a:lnTo>
+                  <a:lnTo>
+                    <a:pt x="1145960" y="377661"/>
+                  </a:lnTo>
+                  <a:lnTo>
+                    <a:pt x="1217582" y="373989"/>
+                  </a:lnTo>
+                  <a:lnTo>
+                    <a:pt x="1289205" y="370298"/>
+                  </a:lnTo>
+                  <a:lnTo>
+                    <a:pt x="1360827" y="366588"/>
+                  </a:lnTo>
+                  <a:lnTo>
+                    <a:pt x="1432450" y="362860"/>
+                  </a:lnTo>
+                  <a:lnTo>
+                    <a:pt x="1504073" y="359113"/>
+                  </a:lnTo>
+                  <a:lnTo>
+                    <a:pt x="1575695" y="355347"/>
+                  </a:lnTo>
+                  <a:lnTo>
+                    <a:pt x="1647318" y="351562"/>
+                  </a:lnTo>
+                  <a:lnTo>
+                    <a:pt x="1718940" y="347758"/>
+                  </a:lnTo>
+                  <a:lnTo>
+                    <a:pt x="1790563" y="343934"/>
+                  </a:lnTo>
+                  <a:lnTo>
+                    <a:pt x="1862185" y="340091"/>
+                  </a:lnTo>
+                  <a:lnTo>
+                    <a:pt x="1933808" y="336229"/>
+                  </a:lnTo>
+                  <a:lnTo>
+                    <a:pt x="2005430" y="332347"/>
+                  </a:lnTo>
+                  <a:lnTo>
+                    <a:pt x="2077053" y="328445"/>
+                  </a:lnTo>
+                  <a:lnTo>
+                    <a:pt x="2148675" y="324524"/>
+                  </a:lnTo>
+                  <a:lnTo>
+                    <a:pt x="2220298" y="320583"/>
+                  </a:lnTo>
+                  <a:lnTo>
+                    <a:pt x="2291920" y="316622"/>
+                  </a:lnTo>
+                  <a:lnTo>
+                    <a:pt x="2363543" y="312641"/>
+                  </a:lnTo>
+                  <a:lnTo>
+                    <a:pt x="2435165" y="308639"/>
+                  </a:lnTo>
+                  <a:lnTo>
+                    <a:pt x="2506788" y="304618"/>
+                  </a:lnTo>
+                  <a:lnTo>
+                    <a:pt x="2578410" y="300576"/>
+                  </a:lnTo>
+                  <a:lnTo>
+                    <a:pt x="2650033" y="296513"/>
+                  </a:lnTo>
+                  <a:lnTo>
+                    <a:pt x="2721655" y="292430"/>
+                  </a:lnTo>
+                  <a:lnTo>
+                    <a:pt x="2793278" y="288326"/>
+                  </a:lnTo>
+                  <a:lnTo>
+                    <a:pt x="2864901" y="284202"/>
+                  </a:lnTo>
+                  <a:lnTo>
+                    <a:pt x="2936523" y="280057"/>
+                  </a:lnTo>
+                  <a:lnTo>
+                    <a:pt x="3008146" y="275890"/>
+                  </a:lnTo>
+                  <a:lnTo>
+                    <a:pt x="3079768" y="271703"/>
+                  </a:lnTo>
+                  <a:lnTo>
+                    <a:pt x="3151391" y="267494"/>
+                  </a:lnTo>
+                  <a:lnTo>
+                    <a:pt x="3223013" y="263264"/>
+                  </a:lnTo>
+                  <a:lnTo>
+                    <a:pt x="3294636" y="259013"/>
+                  </a:lnTo>
+                  <a:lnTo>
+                    <a:pt x="3366258" y="254740"/>
+                  </a:lnTo>
+                  <a:lnTo>
+                    <a:pt x="3437881" y="250445"/>
+                  </a:lnTo>
+                  <a:lnTo>
+                    <a:pt x="3509503" y="246129"/>
+                  </a:lnTo>
+                  <a:lnTo>
+                    <a:pt x="3581126" y="241791"/>
+                  </a:lnTo>
+                  <a:lnTo>
+                    <a:pt x="3652748" y="237431"/>
+                  </a:lnTo>
+                  <a:lnTo>
+                    <a:pt x="3724371" y="233049"/>
+                  </a:lnTo>
+                  <a:lnTo>
+                    <a:pt x="3795993" y="228644"/>
+                  </a:lnTo>
+                  <a:lnTo>
+                    <a:pt x="3867616" y="224218"/>
+                  </a:lnTo>
+                  <a:lnTo>
+                    <a:pt x="3939238" y="219769"/>
+                  </a:lnTo>
+                  <a:lnTo>
+                    <a:pt x="4010861" y="215297"/>
+                  </a:lnTo>
+                  <a:lnTo>
+                    <a:pt x="4082483" y="210803"/>
+                  </a:lnTo>
+                  <a:lnTo>
+                    <a:pt x="4154106" y="206286"/>
+                  </a:lnTo>
+                  <a:lnTo>
+                    <a:pt x="4225729" y="201746"/>
+                  </a:lnTo>
+                  <a:lnTo>
+                    <a:pt x="4297351" y="197183"/>
+                  </a:lnTo>
+                  <a:lnTo>
+                    <a:pt x="4368974" y="192597"/>
+                  </a:lnTo>
+                  <a:lnTo>
+                    <a:pt x="4440596" y="187988"/>
+                  </a:lnTo>
+                  <a:lnTo>
+                    <a:pt x="4512219" y="183356"/>
+                  </a:lnTo>
+                  <a:lnTo>
+                    <a:pt x="4583841" y="178700"/>
+                  </a:lnTo>
+                  <a:lnTo>
+                    <a:pt x="4655464" y="174020"/>
+                  </a:lnTo>
+                  <a:lnTo>
+                    <a:pt x="4727086" y="169317"/>
+                  </a:lnTo>
+                  <a:lnTo>
+                    <a:pt x="4798709" y="164590"/>
+                  </a:lnTo>
+                  <a:lnTo>
+                    <a:pt x="4870331" y="159839"/>
+                  </a:lnTo>
+                  <a:lnTo>
+                    <a:pt x="4941954" y="155064"/>
+                  </a:lnTo>
+                  <a:lnTo>
+                    <a:pt x="5013576" y="150264"/>
+                  </a:lnTo>
+                  <a:lnTo>
+                    <a:pt x="5085199" y="145441"/>
+                  </a:lnTo>
+                  <a:lnTo>
+                    <a:pt x="5156821" y="140593"/>
+                  </a:lnTo>
+                  <a:lnTo>
+                    <a:pt x="5228444" y="135721"/>
+                  </a:lnTo>
+                  <a:lnTo>
+                    <a:pt x="5300066" y="130823"/>
+                  </a:lnTo>
+                  <a:lnTo>
+                    <a:pt x="5371689" y="125901"/>
+                  </a:lnTo>
+                  <a:lnTo>
+                    <a:pt x="5443311" y="120955"/>
+                  </a:lnTo>
+                  <a:lnTo>
+                    <a:pt x="5514934" y="115983"/>
+                  </a:lnTo>
+                  <a:lnTo>
+                    <a:pt x="5586557" y="110985"/>
+                  </a:lnTo>
+                  <a:lnTo>
+                    <a:pt x="5658179" y="105963"/>
+                  </a:lnTo>
+                  <a:lnTo>
+                    <a:pt x="5729802" y="100915"/>
+                  </a:lnTo>
+                  <a:lnTo>
+                    <a:pt x="5801424" y="95842"/>
+                  </a:lnTo>
+                  <a:lnTo>
+                    <a:pt x="5873047" y="90743"/>
+                  </a:lnTo>
+                  <a:lnTo>
+                    <a:pt x="5944669" y="85618"/>
+                  </a:lnTo>
+                  <a:lnTo>
+                    <a:pt x="6016292" y="80467"/>
+                  </a:lnTo>
+                  <a:lnTo>
+                    <a:pt x="6087914" y="75290"/>
+                  </a:lnTo>
+                  <a:lnTo>
+                    <a:pt x="6159537" y="70087"/>
+                  </a:lnTo>
+                  <a:lnTo>
+                    <a:pt x="6231159" y="64857"/>
+                  </a:lnTo>
+                  <a:lnTo>
+                    <a:pt x="6302782" y="59602"/>
+                  </a:lnTo>
+                  <a:lnTo>
+                    <a:pt x="6374404" y="54319"/>
+                  </a:lnTo>
+                  <a:lnTo>
+                    <a:pt x="6446027" y="49010"/>
+                  </a:lnTo>
+                  <a:lnTo>
+                    <a:pt x="6517649" y="43673"/>
+                  </a:lnTo>
+                  <a:lnTo>
+                    <a:pt x="6589272" y="38310"/>
+                  </a:lnTo>
+                  <a:lnTo>
+                    <a:pt x="6660894" y="32920"/>
+                  </a:lnTo>
+                  <a:lnTo>
+                    <a:pt x="6732517" y="27502"/>
+                  </a:lnTo>
+                  <a:lnTo>
+                    <a:pt x="6804139" y="22057"/>
+                  </a:lnTo>
+                  <a:lnTo>
+                    <a:pt x="6875762" y="16584"/>
+                  </a:lnTo>
+                  <a:lnTo>
+                    <a:pt x="6947385" y="11084"/>
+                  </a:lnTo>
+                  <a:lnTo>
+                    <a:pt x="7019007" y="5556"/>
                   </a:lnTo>
                   <a:lnTo>
                     <a:pt x="7090630" y="0"/>
@@ -4665,7 +4665,7 @@
           </p:nvSpPr>
           <p:spPr>
             <a:xfrm>
-              <a:off x="817517" y="4679530"/>
+              <a:off x="817517" y="4727786"/>
               <a:ext cx="7799693" cy="0"/>
             </a:xfrm>
             <a:custGeom>
@@ -4708,15 +4708,15 @@
           </p:nvSpPr>
           <p:spPr>
             <a:xfrm>
-              <a:off x="4222163" y="1896563"/>
-              <a:ext cx="0" cy="3826579"/>
+              <a:off x="4222163" y="2073503"/>
+              <a:ext cx="0" cy="3649639"/>
             </a:xfrm>
             <a:custGeom>
               <a:avLst/>
               <a:pathLst>
-                <a:path w="0" h="3826579">
+                <a:path w="0" h="3649639">
                   <a:moveTo>
-                    <a:pt x="0" y="3826579"/>
+                    <a:pt x="0" y="3649639"/>
                   </a:moveTo>
                   <a:lnTo>
                     <a:pt x="0" y="0"/>
@@ -4751,7 +4751,7 @@
           </p:nvSpPr>
           <p:spPr>
             <a:xfrm>
-              <a:off x="692708" y="5509156"/>
+              <a:off x="692708" y="5517199"/>
               <a:ext cx="62179" cy="80101"/>
             </a:xfrm>
             <a:prstGeom prst="rect">
@@ -4797,7 +4797,7 @@
           </p:nvSpPr>
           <p:spPr>
             <a:xfrm>
-              <a:off x="692708" y="4639479"/>
+              <a:off x="692708" y="4687735"/>
               <a:ext cx="62179" cy="80101"/>
             </a:xfrm>
             <a:prstGeom prst="rect">
@@ -4843,7 +4843,7 @@
           </p:nvSpPr>
           <p:spPr>
             <a:xfrm>
-              <a:off x="692708" y="3769802"/>
+              <a:off x="692708" y="3858272"/>
               <a:ext cx="62179" cy="80101"/>
             </a:xfrm>
             <a:prstGeom prst="rect">
@@ -4889,7 +4889,7 @@
           </p:nvSpPr>
           <p:spPr>
             <a:xfrm>
-              <a:off x="692708" y="2900125"/>
+              <a:off x="692708" y="3028808"/>
               <a:ext cx="62179" cy="80101"/>
             </a:xfrm>
             <a:prstGeom prst="rect">
@@ -4935,7 +4935,7 @@
           </p:nvSpPr>
           <p:spPr>
             <a:xfrm>
-              <a:off x="692708" y="2030448"/>
+              <a:off x="692708" y="2199345"/>
               <a:ext cx="62179" cy="80101"/>
             </a:xfrm>
             <a:prstGeom prst="rect">
@@ -5303,7 +5303,7 @@
           </p:nvSpPr>
           <p:spPr>
             <a:xfrm rot="-5400000">
-              <a:off x="68446" y="3759743"/>
+              <a:off x="68446" y="3848213"/>
               <a:ext cx="1016904" cy="100218"/>
             </a:xfrm>
             <a:prstGeom prst="rect">
@@ -5344,6 +5344,52 @@
         <p:sp>
           <p:nvSpPr>
             <p:cNvPr id="43" name="tx43"/>
+            <p:cNvSpPr/>
+            <p:nvPr/>
+          </p:nvSpPr>
+          <p:spPr>
+            <a:xfrm>
+              <a:off x="817517" y="1896563"/>
+              <a:ext cx="4433376" cy="82021"/>
+            </a:xfrm>
+            <a:prstGeom prst="rect">
+              <a:avLst/>
+            </a:prstGeom>
+            <a:noFill/>
+          </p:spPr>
+          <p:txBody>
+            <a:bodyPr lIns="0" rIns="0" tIns="0" bIns="0" anchorCtr="1" anchor="ctr" wrap="none"/>
+            <a:lstStyle/>
+            <a:p>
+              <a:pPr algn="l" marL="0" marR="0" indent="0">
+                <a:lnSpc>
+                  <a:spcPts val="900"/>
+                </a:lnSpc>
+                <a:spcBef>
+                  <a:spcPts val="0"/>
+                </a:spcBef>
+                <a:spcAft>
+                  <a:spcPts val="0"/>
+                </a:spcAft>
+              </a:pPr>
+              <a:r>
+                <a:rPr sz="900">
+                  <a:solidFill>
+                    <a:srgbClr val="404040">
+                      <a:alpha val="100000"/>
+                    </a:srgbClr>
+                  </a:solidFill>
+                  <a:latin typeface="Helvetica"/>
+                  <a:cs typeface="Helvetica"/>
+                </a:rPr>
+                <a:t>subHR = 1.05 (95% CI 0.79-1.39), p = 0.738   (per 25 mg increase in dose discrepancy)</a:t>
+              </a:r>
+            </a:p>
+          </p:txBody>
+        </p:sp>
+        <p:sp>
+          <p:nvSpPr>
+            <p:cNvPr id="44" name="tx44"/>
             <p:cNvSpPr/>
             <p:nvPr/>
           </p:nvSpPr>

--- a/docs/plots/carbo/jx_carbo_linsubhr_dosedisc_aki2.pptx
+++ b/docs/plots/carbo/jx_carbo_linsubhr_dosedisc_aki2.pptx
@@ -2271,26 +2271,26 @@
           </p:nvSpPr>
           <p:spPr>
             <a:xfrm>
-              <a:off x="817517" y="5142518"/>
-              <a:ext cx="7799693" cy="0"/>
+              <a:off x="915645" y="5071743"/>
+              <a:ext cx="7682587" cy="0"/>
             </a:xfrm>
             <a:custGeom>
               <a:avLst/>
               <a:pathLst>
-                <a:path w="7799693" h="0">
+                <a:path w="7682587" h="0">
                   <a:moveTo>
                     <a:pt x="0" y="0"/>
                   </a:moveTo>
                   <a:lnTo>
-                    <a:pt x="7799693" y="0"/>
-                  </a:lnTo>
-                  <a:lnTo>
-                    <a:pt x="7799693" y="0"/>
+                    <a:pt x="7682587" y="0"/>
+                  </a:lnTo>
+                  <a:lnTo>
+                    <a:pt x="7682587" y="0"/>
                   </a:lnTo>
                 </a:path>
               </a:pathLst>
             </a:custGeom>
-            <a:ln w="6775" cap="flat">
+            <a:ln w="8623" cap="flat">
               <a:solidFill>
                 <a:srgbClr val="EBEBEB">
                   <a:alpha val="100000"/>
@@ -2314,26 +2314,26 @@
           </p:nvSpPr>
           <p:spPr>
             <a:xfrm>
-              <a:off x="817517" y="4313054"/>
-              <a:ext cx="7799693" cy="0"/>
+              <a:off x="915645" y="4298074"/>
+              <a:ext cx="7682587" cy="0"/>
             </a:xfrm>
             <a:custGeom>
               <a:avLst/>
               <a:pathLst>
-                <a:path w="7799693" h="0">
+                <a:path w="7682587" h="0">
                   <a:moveTo>
                     <a:pt x="0" y="0"/>
                   </a:moveTo>
                   <a:lnTo>
-                    <a:pt x="7799693" y="0"/>
-                  </a:lnTo>
-                  <a:lnTo>
-                    <a:pt x="7799693" y="0"/>
+                    <a:pt x="7682587" y="0"/>
+                  </a:lnTo>
+                  <a:lnTo>
+                    <a:pt x="7682587" y="0"/>
                   </a:lnTo>
                 </a:path>
               </a:pathLst>
             </a:custGeom>
-            <a:ln w="6775" cap="flat">
+            <a:ln w="8623" cap="flat">
               <a:solidFill>
                 <a:srgbClr val="EBEBEB">
                   <a:alpha val="100000"/>
@@ -2357,26 +2357,26 @@
           </p:nvSpPr>
           <p:spPr>
             <a:xfrm>
-              <a:off x="817517" y="3483591"/>
-              <a:ext cx="7799693" cy="0"/>
+              <a:off x="915645" y="3524405"/>
+              <a:ext cx="7682587" cy="0"/>
             </a:xfrm>
             <a:custGeom>
               <a:avLst/>
               <a:pathLst>
-                <a:path w="7799693" h="0">
+                <a:path w="7682587" h="0">
                   <a:moveTo>
                     <a:pt x="0" y="0"/>
                   </a:moveTo>
                   <a:lnTo>
-                    <a:pt x="7799693" y="0"/>
-                  </a:lnTo>
-                  <a:lnTo>
-                    <a:pt x="7799693" y="0"/>
+                    <a:pt x="7682587" y="0"/>
+                  </a:lnTo>
+                  <a:lnTo>
+                    <a:pt x="7682587" y="0"/>
                   </a:lnTo>
                 </a:path>
               </a:pathLst>
             </a:custGeom>
-            <a:ln w="6775" cap="flat">
+            <a:ln w="8623" cap="flat">
               <a:solidFill>
                 <a:srgbClr val="EBEBEB">
                   <a:alpha val="100000"/>
@@ -2400,26 +2400,26 @@
           </p:nvSpPr>
           <p:spPr>
             <a:xfrm>
-              <a:off x="817517" y="2654127"/>
-              <a:ext cx="7799693" cy="0"/>
+              <a:off x="915645" y="2750737"/>
+              <a:ext cx="7682587" cy="0"/>
             </a:xfrm>
             <a:custGeom>
               <a:avLst/>
               <a:pathLst>
-                <a:path w="7799693" h="0">
+                <a:path w="7682587" h="0">
                   <a:moveTo>
                     <a:pt x="0" y="0"/>
                   </a:moveTo>
                   <a:lnTo>
-                    <a:pt x="7799693" y="0"/>
-                  </a:lnTo>
-                  <a:lnTo>
-                    <a:pt x="7799693" y="0"/>
+                    <a:pt x="7682587" y="0"/>
+                  </a:lnTo>
+                  <a:lnTo>
+                    <a:pt x="7682587" y="0"/>
                   </a:lnTo>
                 </a:path>
               </a:pathLst>
             </a:custGeom>
-            <a:ln w="6775" cap="flat">
+            <a:ln w="8623" cap="flat">
               <a:solidFill>
                 <a:srgbClr val="EBEBEB">
                   <a:alpha val="100000"/>
@@ -2443,15 +2443,15 @@
           </p:nvSpPr>
           <p:spPr>
             <a:xfrm>
-              <a:off x="2122745" y="2073503"/>
-              <a:ext cx="0" cy="3649639"/>
+              <a:off x="2201275" y="2209169"/>
+              <a:ext cx="0" cy="3404141"/>
             </a:xfrm>
             <a:custGeom>
               <a:avLst/>
               <a:pathLst>
-                <a:path w="0" h="3649639">
+                <a:path w="0" h="3404141">
                   <a:moveTo>
-                    <a:pt x="0" y="3649639"/>
+                    <a:pt x="0" y="3404141"/>
                   </a:moveTo>
                   <a:lnTo>
                     <a:pt x="0" y="0"/>
@@ -2462,7 +2462,7 @@
                 </a:path>
               </a:pathLst>
             </a:custGeom>
-            <a:ln w="6775" cap="flat">
+            <a:ln w="8623" cap="flat">
               <a:solidFill>
                 <a:srgbClr val="EBEBEB">
                   <a:alpha val="100000"/>
@@ -2486,15 +2486,15 @@
           </p:nvSpPr>
           <p:spPr>
             <a:xfrm>
-              <a:off x="3487174" y="2073503"/>
-              <a:ext cx="0" cy="3649639"/>
+              <a:off x="3545219" y="2209169"/>
+              <a:ext cx="0" cy="3404141"/>
             </a:xfrm>
             <a:custGeom>
               <a:avLst/>
               <a:pathLst>
-                <a:path w="0" h="3649639">
+                <a:path w="0" h="3404141">
                   <a:moveTo>
-                    <a:pt x="0" y="3649639"/>
+                    <a:pt x="0" y="3404141"/>
                   </a:moveTo>
                   <a:lnTo>
                     <a:pt x="0" y="0"/>
@@ -2505,7 +2505,7 @@
                 </a:path>
               </a:pathLst>
             </a:custGeom>
-            <a:ln w="6775" cap="flat">
+            <a:ln w="8623" cap="flat">
               <a:solidFill>
                 <a:srgbClr val="EBEBEB">
                   <a:alpha val="100000"/>
@@ -2529,15 +2529,15 @@
           </p:nvSpPr>
           <p:spPr>
             <a:xfrm>
-              <a:off x="4851604" y="2073503"/>
-              <a:ext cx="0" cy="3649639"/>
+              <a:off x="4889163" y="2209169"/>
+              <a:ext cx="0" cy="3404141"/>
             </a:xfrm>
             <a:custGeom>
               <a:avLst/>
               <a:pathLst>
-                <a:path w="0" h="3649639">
+                <a:path w="0" h="3404141">
                   <a:moveTo>
-                    <a:pt x="0" y="3649639"/>
+                    <a:pt x="0" y="3404141"/>
                   </a:moveTo>
                   <a:lnTo>
                     <a:pt x="0" y="0"/>
@@ -2548,7 +2548,7 @@
                 </a:path>
               </a:pathLst>
             </a:custGeom>
-            <a:ln w="6775" cap="flat">
+            <a:ln w="8623" cap="flat">
               <a:solidFill>
                 <a:srgbClr val="EBEBEB">
                   <a:alpha val="100000"/>
@@ -2572,15 +2572,15 @@
           </p:nvSpPr>
           <p:spPr>
             <a:xfrm>
-              <a:off x="6216034" y="2073503"/>
-              <a:ext cx="0" cy="3649639"/>
+              <a:off x="6233107" y="2209169"/>
+              <a:ext cx="0" cy="3404141"/>
             </a:xfrm>
             <a:custGeom>
               <a:avLst/>
               <a:pathLst>
-                <a:path w="0" h="3649639">
+                <a:path w="0" h="3404141">
                   <a:moveTo>
-                    <a:pt x="0" y="3649639"/>
+                    <a:pt x="0" y="3404141"/>
                   </a:moveTo>
                   <a:lnTo>
                     <a:pt x="0" y="0"/>
@@ -2591,7 +2591,7 @@
                 </a:path>
               </a:pathLst>
             </a:custGeom>
-            <a:ln w="6775" cap="flat">
+            <a:ln w="8623" cap="flat">
               <a:solidFill>
                 <a:srgbClr val="EBEBEB">
                   <a:alpha val="100000"/>
@@ -2615,15 +2615,15 @@
           </p:nvSpPr>
           <p:spPr>
             <a:xfrm>
-              <a:off x="7580464" y="2073503"/>
-              <a:ext cx="0" cy="3649639"/>
+              <a:off x="7577051" y="2209169"/>
+              <a:ext cx="0" cy="3404141"/>
             </a:xfrm>
             <a:custGeom>
               <a:avLst/>
               <a:pathLst>
-                <a:path w="0" h="3649639">
+                <a:path w="0" h="3404141">
                   <a:moveTo>
-                    <a:pt x="0" y="3649639"/>
+                    <a:pt x="0" y="3404141"/>
                   </a:moveTo>
                   <a:lnTo>
                     <a:pt x="0" y="0"/>
@@ -2634,7 +2634,7 @@
                 </a:path>
               </a:pathLst>
             </a:custGeom>
-            <a:ln w="6775" cap="flat">
+            <a:ln w="8623" cap="flat">
               <a:solidFill>
                 <a:srgbClr val="EBEBEB">
                   <a:alpha val="100000"/>
@@ -2658,26 +2658,26 @@
           </p:nvSpPr>
           <p:spPr>
             <a:xfrm>
-              <a:off x="817517" y="5557249"/>
-              <a:ext cx="7799693" cy="0"/>
+              <a:off x="915645" y="5458577"/>
+              <a:ext cx="7682587" cy="0"/>
             </a:xfrm>
             <a:custGeom>
               <a:avLst/>
               <a:pathLst>
-                <a:path w="7799693" h="0">
+                <a:path w="7682587" h="0">
                   <a:moveTo>
                     <a:pt x="0" y="0"/>
                   </a:moveTo>
                   <a:lnTo>
-                    <a:pt x="7799693" y="0"/>
-                  </a:lnTo>
-                  <a:lnTo>
-                    <a:pt x="7799693" y="0"/>
+                    <a:pt x="7682587" y="0"/>
+                  </a:lnTo>
+                  <a:lnTo>
+                    <a:pt x="7682587" y="0"/>
                   </a:lnTo>
                 </a:path>
               </a:pathLst>
             </a:custGeom>
-            <a:ln w="13550" cap="flat">
+            <a:ln w="17246" cap="flat">
               <a:solidFill>
                 <a:srgbClr val="EBEBEB">
                   <a:alpha val="100000"/>
@@ -2701,26 +2701,26 @@
           </p:nvSpPr>
           <p:spPr>
             <a:xfrm>
-              <a:off x="817517" y="4727786"/>
-              <a:ext cx="7799693" cy="0"/>
+              <a:off x="915645" y="4684908"/>
+              <a:ext cx="7682587" cy="0"/>
             </a:xfrm>
             <a:custGeom>
               <a:avLst/>
               <a:pathLst>
-                <a:path w="7799693" h="0">
+                <a:path w="7682587" h="0">
                   <a:moveTo>
                     <a:pt x="0" y="0"/>
                   </a:moveTo>
                   <a:lnTo>
-                    <a:pt x="7799693" y="0"/>
-                  </a:lnTo>
-                  <a:lnTo>
-                    <a:pt x="7799693" y="0"/>
+                    <a:pt x="7682587" y="0"/>
+                  </a:lnTo>
+                  <a:lnTo>
+                    <a:pt x="7682587" y="0"/>
                   </a:lnTo>
                 </a:path>
               </a:pathLst>
             </a:custGeom>
-            <a:ln w="13550" cap="flat">
+            <a:ln w="17246" cap="flat">
               <a:solidFill>
                 <a:srgbClr val="EBEBEB">
                   <a:alpha val="100000"/>
@@ -2744,26 +2744,26 @@
           </p:nvSpPr>
           <p:spPr>
             <a:xfrm>
-              <a:off x="817517" y="3898322"/>
-              <a:ext cx="7799693" cy="0"/>
+              <a:off x="915645" y="3911240"/>
+              <a:ext cx="7682587" cy="0"/>
             </a:xfrm>
             <a:custGeom>
               <a:avLst/>
               <a:pathLst>
-                <a:path w="7799693" h="0">
+                <a:path w="7682587" h="0">
                   <a:moveTo>
                     <a:pt x="0" y="0"/>
                   </a:moveTo>
                   <a:lnTo>
-                    <a:pt x="7799693" y="0"/>
-                  </a:lnTo>
-                  <a:lnTo>
-                    <a:pt x="7799693" y="0"/>
+                    <a:pt x="7682587" y="0"/>
+                  </a:lnTo>
+                  <a:lnTo>
+                    <a:pt x="7682587" y="0"/>
                   </a:lnTo>
                 </a:path>
               </a:pathLst>
             </a:custGeom>
-            <a:ln w="13550" cap="flat">
+            <a:ln w="17246" cap="flat">
               <a:solidFill>
                 <a:srgbClr val="EBEBEB">
                   <a:alpha val="100000"/>
@@ -2787,26 +2787,26 @@
           </p:nvSpPr>
           <p:spPr>
             <a:xfrm>
-              <a:off x="817517" y="3068859"/>
-              <a:ext cx="7799693" cy="0"/>
+              <a:off x="915645" y="3137571"/>
+              <a:ext cx="7682587" cy="0"/>
             </a:xfrm>
             <a:custGeom>
               <a:avLst/>
               <a:pathLst>
-                <a:path w="7799693" h="0">
+                <a:path w="7682587" h="0">
                   <a:moveTo>
                     <a:pt x="0" y="0"/>
                   </a:moveTo>
                   <a:lnTo>
-                    <a:pt x="7799693" y="0"/>
-                  </a:lnTo>
-                  <a:lnTo>
-                    <a:pt x="7799693" y="0"/>
+                    <a:pt x="7682587" y="0"/>
+                  </a:lnTo>
+                  <a:lnTo>
+                    <a:pt x="7682587" y="0"/>
                   </a:lnTo>
                 </a:path>
               </a:pathLst>
             </a:custGeom>
-            <a:ln w="13550" cap="flat">
+            <a:ln w="17246" cap="flat">
               <a:solidFill>
                 <a:srgbClr val="EBEBEB">
                   <a:alpha val="100000"/>
@@ -2830,26 +2830,26 @@
           </p:nvSpPr>
           <p:spPr>
             <a:xfrm>
-              <a:off x="817517" y="2239395"/>
-              <a:ext cx="7799693" cy="0"/>
+              <a:off x="915645" y="2363903"/>
+              <a:ext cx="7682587" cy="0"/>
             </a:xfrm>
             <a:custGeom>
               <a:avLst/>
               <a:pathLst>
-                <a:path w="7799693" h="0">
+                <a:path w="7682587" h="0">
                   <a:moveTo>
                     <a:pt x="0" y="0"/>
                   </a:moveTo>
                   <a:lnTo>
-                    <a:pt x="7799693" y="0"/>
-                  </a:lnTo>
-                  <a:lnTo>
-                    <a:pt x="7799693" y="0"/>
+                    <a:pt x="7682587" y="0"/>
+                  </a:lnTo>
+                  <a:lnTo>
+                    <a:pt x="7682587" y="0"/>
                   </a:lnTo>
                 </a:path>
               </a:pathLst>
             </a:custGeom>
-            <a:ln w="13550" cap="flat">
+            <a:ln w="17246" cap="flat">
               <a:solidFill>
                 <a:srgbClr val="EBEBEB">
                   <a:alpha val="100000"/>
@@ -2873,15 +2873,15 @@
           </p:nvSpPr>
           <p:spPr>
             <a:xfrm>
-              <a:off x="1440530" y="2073503"/>
-              <a:ext cx="0" cy="3649639"/>
+              <a:off x="1529303" y="2209169"/>
+              <a:ext cx="0" cy="3404141"/>
             </a:xfrm>
             <a:custGeom>
               <a:avLst/>
               <a:pathLst>
-                <a:path w="0" h="3649639">
+                <a:path w="0" h="3404141">
                   <a:moveTo>
-                    <a:pt x="0" y="3649639"/>
+                    <a:pt x="0" y="3404141"/>
                   </a:moveTo>
                   <a:lnTo>
                     <a:pt x="0" y="0"/>
@@ -2892,7 +2892,7 @@
                 </a:path>
               </a:pathLst>
             </a:custGeom>
-            <a:ln w="13550" cap="flat">
+            <a:ln w="17246" cap="flat">
               <a:solidFill>
                 <a:srgbClr val="EBEBEB">
                   <a:alpha val="100000"/>
@@ -2916,15 +2916,15 @@
           </p:nvSpPr>
           <p:spPr>
             <a:xfrm>
-              <a:off x="2804959" y="2073503"/>
-              <a:ext cx="0" cy="3649639"/>
+              <a:off x="2873247" y="2209169"/>
+              <a:ext cx="0" cy="3404141"/>
             </a:xfrm>
             <a:custGeom>
               <a:avLst/>
               <a:pathLst>
-                <a:path w="0" h="3649639">
+                <a:path w="0" h="3404141">
                   <a:moveTo>
-                    <a:pt x="0" y="3649639"/>
+                    <a:pt x="0" y="3404141"/>
                   </a:moveTo>
                   <a:lnTo>
                     <a:pt x="0" y="0"/>
@@ -2935,7 +2935,7 @@
                 </a:path>
               </a:pathLst>
             </a:custGeom>
-            <a:ln w="13550" cap="flat">
+            <a:ln w="17246" cap="flat">
               <a:solidFill>
                 <a:srgbClr val="EBEBEB">
                   <a:alpha val="100000"/>
@@ -2959,15 +2959,15 @@
           </p:nvSpPr>
           <p:spPr>
             <a:xfrm>
-              <a:off x="4169389" y="2073503"/>
-              <a:ext cx="0" cy="3649639"/>
+              <a:off x="4217191" y="2209169"/>
+              <a:ext cx="0" cy="3404141"/>
             </a:xfrm>
             <a:custGeom>
               <a:avLst/>
               <a:pathLst>
-                <a:path w="0" h="3649639">
+                <a:path w="0" h="3404141">
                   <a:moveTo>
-                    <a:pt x="0" y="3649639"/>
+                    <a:pt x="0" y="3404141"/>
                   </a:moveTo>
                   <a:lnTo>
                     <a:pt x="0" y="0"/>
@@ -2978,7 +2978,7 @@
                 </a:path>
               </a:pathLst>
             </a:custGeom>
-            <a:ln w="13550" cap="flat">
+            <a:ln w="17246" cap="flat">
               <a:solidFill>
                 <a:srgbClr val="EBEBEB">
                   <a:alpha val="100000"/>
@@ -3002,15 +3002,15 @@
           </p:nvSpPr>
           <p:spPr>
             <a:xfrm>
-              <a:off x="5533819" y="2073503"/>
-              <a:ext cx="0" cy="3649639"/>
+              <a:off x="5561135" y="2209169"/>
+              <a:ext cx="0" cy="3404141"/>
             </a:xfrm>
             <a:custGeom>
               <a:avLst/>
               <a:pathLst>
-                <a:path w="0" h="3649639">
+                <a:path w="0" h="3404141">
                   <a:moveTo>
-                    <a:pt x="0" y="3649639"/>
+                    <a:pt x="0" y="3404141"/>
                   </a:moveTo>
                   <a:lnTo>
                     <a:pt x="0" y="0"/>
@@ -3021,7 +3021,7 @@
                 </a:path>
               </a:pathLst>
             </a:custGeom>
-            <a:ln w="13550" cap="flat">
+            <a:ln w="17246" cap="flat">
               <a:solidFill>
                 <a:srgbClr val="EBEBEB">
                   <a:alpha val="100000"/>
@@ -3045,15 +3045,15 @@
           </p:nvSpPr>
           <p:spPr>
             <a:xfrm>
-              <a:off x="6898249" y="2073503"/>
-              <a:ext cx="0" cy="3649639"/>
+              <a:off x="6905079" y="2209169"/>
+              <a:ext cx="0" cy="3404141"/>
             </a:xfrm>
             <a:custGeom>
               <a:avLst/>
               <a:pathLst>
-                <a:path w="0" h="3649639">
+                <a:path w="0" h="3404141">
                   <a:moveTo>
-                    <a:pt x="0" y="3649639"/>
+                    <a:pt x="0" y="3404141"/>
                   </a:moveTo>
                   <a:lnTo>
                     <a:pt x="0" y="0"/>
@@ -3064,7 +3064,7 @@
                 </a:path>
               </a:pathLst>
             </a:custGeom>
-            <a:ln w="13550" cap="flat">
+            <a:ln w="17246" cap="flat">
               <a:solidFill>
                 <a:srgbClr val="EBEBEB">
                   <a:alpha val="100000"/>
@@ -3088,15 +3088,15 @@
           </p:nvSpPr>
           <p:spPr>
             <a:xfrm>
-              <a:off x="8262679" y="2073503"/>
-              <a:ext cx="0" cy="3649639"/>
+              <a:off x="8249023" y="2209169"/>
+              <a:ext cx="0" cy="3404141"/>
             </a:xfrm>
             <a:custGeom>
               <a:avLst/>
               <a:pathLst>
-                <a:path w="0" h="3649639">
+                <a:path w="0" h="3404141">
                   <a:moveTo>
-                    <a:pt x="0" y="3649639"/>
+                    <a:pt x="0" y="3404141"/>
                   </a:moveTo>
                   <a:lnTo>
                     <a:pt x="0" y="0"/>
@@ -3107,7 +3107,7 @@
                 </a:path>
               </a:pathLst>
             </a:custGeom>
-            <a:ln w="13550" cap="flat">
+            <a:ln w="17246" cap="flat">
               <a:solidFill>
                 <a:srgbClr val="EBEBEB">
                   <a:alpha val="100000"/>
@@ -3131,573 +3131,573 @@
           </p:nvSpPr>
           <p:spPr>
             <a:xfrm>
-              <a:off x="1172049" y="2073503"/>
-              <a:ext cx="7090630" cy="3293872"/>
+              <a:off x="1264853" y="2209169"/>
+              <a:ext cx="6984170" cy="3072305"/>
             </a:xfrm>
             <a:custGeom>
               <a:avLst/>
               <a:pathLst>
-                <a:path w="7090630" h="3293872">
+                <a:path w="6984170" h="3072305">
                   <a:moveTo>
-                    <a:pt x="0" y="1127019"/>
+                    <a:pt x="0" y="1051209"/>
                   </a:moveTo>
                   <a:lnTo>
-                    <a:pt x="71622" y="1184106"/>
-                  </a:lnTo>
-                  <a:lnTo>
-                    <a:pt x="143245" y="1239810"/>
-                  </a:lnTo>
-                  <a:lnTo>
-                    <a:pt x="214867" y="1294164"/>
-                  </a:lnTo>
-                  <a:lnTo>
-                    <a:pt x="286490" y="1347202"/>
-                  </a:lnTo>
-                  <a:lnTo>
-                    <a:pt x="358112" y="1398955"/>
-                  </a:lnTo>
-                  <a:lnTo>
-                    <a:pt x="429735" y="1449454"/>
-                  </a:lnTo>
-                  <a:lnTo>
-                    <a:pt x="501357" y="1498731"/>
-                  </a:lnTo>
-                  <a:lnTo>
-                    <a:pt x="572980" y="1546813"/>
-                  </a:lnTo>
-                  <a:lnTo>
-                    <a:pt x="644602" y="1593731"/>
-                  </a:lnTo>
-                  <a:lnTo>
-                    <a:pt x="716225" y="1639513"/>
-                  </a:lnTo>
-                  <a:lnTo>
-                    <a:pt x="787847" y="1684185"/>
-                  </a:lnTo>
-                  <a:lnTo>
-                    <a:pt x="859470" y="1727775"/>
-                  </a:lnTo>
-                  <a:lnTo>
-                    <a:pt x="931092" y="1770310"/>
-                  </a:lnTo>
-                  <a:lnTo>
-                    <a:pt x="1002715" y="1811814"/>
-                  </a:lnTo>
-                  <a:lnTo>
-                    <a:pt x="1074337" y="1852313"/>
-                  </a:lnTo>
-                  <a:lnTo>
-                    <a:pt x="1145960" y="1891831"/>
-                  </a:lnTo>
-                  <a:lnTo>
-                    <a:pt x="1217582" y="1930392"/>
-                  </a:lnTo>
-                  <a:lnTo>
-                    <a:pt x="1289205" y="1968018"/>
-                  </a:lnTo>
-                  <a:lnTo>
-                    <a:pt x="1360827" y="2004733"/>
-                  </a:lnTo>
-                  <a:lnTo>
-                    <a:pt x="1432450" y="2040559"/>
-                  </a:lnTo>
-                  <a:lnTo>
-                    <a:pt x="1504073" y="2075517"/>
-                  </a:lnTo>
-                  <a:lnTo>
-                    <a:pt x="1575695" y="2109628"/>
-                  </a:lnTo>
-                  <a:lnTo>
-                    <a:pt x="1647318" y="2142913"/>
-                  </a:lnTo>
-                  <a:lnTo>
-                    <a:pt x="1718940" y="2175392"/>
-                  </a:lnTo>
-                  <a:lnTo>
-                    <a:pt x="1790563" y="2207084"/>
-                  </a:lnTo>
-                  <a:lnTo>
-                    <a:pt x="1862185" y="2238008"/>
-                  </a:lnTo>
-                  <a:lnTo>
-                    <a:pt x="1933808" y="2268184"/>
-                  </a:lnTo>
-                  <a:lnTo>
-                    <a:pt x="2005430" y="2297628"/>
-                  </a:lnTo>
-                  <a:lnTo>
-                    <a:pt x="2077053" y="2326359"/>
-                  </a:lnTo>
-                  <a:lnTo>
-                    <a:pt x="2148675" y="2354394"/>
-                  </a:lnTo>
-                  <a:lnTo>
-                    <a:pt x="2220298" y="2381750"/>
-                  </a:lnTo>
-                  <a:lnTo>
-                    <a:pt x="2291920" y="2408444"/>
-                  </a:lnTo>
-                  <a:lnTo>
-                    <a:pt x="2363543" y="2434491"/>
-                  </a:lnTo>
-                  <a:lnTo>
-                    <a:pt x="2435165" y="2459906"/>
-                  </a:lnTo>
-                  <a:lnTo>
-                    <a:pt x="2506788" y="2484707"/>
-                  </a:lnTo>
-                  <a:lnTo>
-                    <a:pt x="2578410" y="2508906"/>
-                  </a:lnTo>
-                  <a:lnTo>
-                    <a:pt x="2650033" y="2532520"/>
-                  </a:lnTo>
-                  <a:lnTo>
-                    <a:pt x="2721655" y="2555561"/>
-                  </a:lnTo>
-                  <a:lnTo>
-                    <a:pt x="2793278" y="2578044"/>
-                  </a:lnTo>
-                  <a:lnTo>
-                    <a:pt x="2864901" y="2599983"/>
-                  </a:lnTo>
-                  <a:lnTo>
-                    <a:pt x="2936523" y="2621390"/>
-                  </a:lnTo>
-                  <a:lnTo>
-                    <a:pt x="3008146" y="2642279"/>
-                  </a:lnTo>
-                  <a:lnTo>
-                    <a:pt x="3079768" y="2642307"/>
-                  </a:lnTo>
-                  <a:lnTo>
-                    <a:pt x="3151391" y="2612664"/>
-                  </a:lnTo>
-                  <a:lnTo>
-                    <a:pt x="3223013" y="2581978"/>
-                  </a:lnTo>
-                  <a:lnTo>
-                    <a:pt x="3294636" y="2550210"/>
-                  </a:lnTo>
-                  <a:lnTo>
-                    <a:pt x="3366258" y="2517323"/>
-                  </a:lnTo>
-                  <a:lnTo>
-                    <a:pt x="3437881" y="2483277"/>
-                  </a:lnTo>
-                  <a:lnTo>
-                    <a:pt x="3509503" y="2448032"/>
-                  </a:lnTo>
-                  <a:lnTo>
-                    <a:pt x="3581126" y="2411546"/>
-                  </a:lnTo>
-                  <a:lnTo>
-                    <a:pt x="3652748" y="2373774"/>
-                  </a:lnTo>
-                  <a:lnTo>
-                    <a:pt x="3724371" y="2334671"/>
-                  </a:lnTo>
-                  <a:lnTo>
-                    <a:pt x="3795993" y="2294191"/>
-                  </a:lnTo>
-                  <a:lnTo>
-                    <a:pt x="3867616" y="2252285"/>
-                  </a:lnTo>
-                  <a:lnTo>
-                    <a:pt x="3939238" y="2208902"/>
-                  </a:lnTo>
-                  <a:lnTo>
-                    <a:pt x="4010861" y="2163992"/>
-                  </a:lnTo>
-                  <a:lnTo>
-                    <a:pt x="4082483" y="2117499"/>
-                  </a:lnTo>
-                  <a:lnTo>
-                    <a:pt x="4154106" y="2069368"/>
-                  </a:lnTo>
-                  <a:lnTo>
-                    <a:pt x="4225729" y="2019542"/>
-                  </a:lnTo>
-                  <a:lnTo>
-                    <a:pt x="4297351" y="1967960"/>
-                  </a:lnTo>
-                  <a:lnTo>
-                    <a:pt x="4368974" y="1914562"/>
-                  </a:lnTo>
-                  <a:lnTo>
-                    <a:pt x="4440596" y="1859282"/>
-                  </a:lnTo>
-                  <a:lnTo>
-                    <a:pt x="4512219" y="1802054"/>
-                  </a:lnTo>
-                  <a:lnTo>
-                    <a:pt x="4583841" y="1742811"/>
-                  </a:lnTo>
-                  <a:lnTo>
-                    <a:pt x="4655464" y="1681481"/>
-                  </a:lnTo>
-                  <a:lnTo>
-                    <a:pt x="4727086" y="1617990"/>
-                  </a:lnTo>
-                  <a:lnTo>
-                    <a:pt x="4798709" y="1552262"/>
-                  </a:lnTo>
-                  <a:lnTo>
-                    <a:pt x="4870331" y="1484219"/>
-                  </a:lnTo>
-                  <a:lnTo>
-                    <a:pt x="4941954" y="1413779"/>
-                  </a:lnTo>
-                  <a:lnTo>
-                    <a:pt x="5013576" y="1340857"/>
-                  </a:lnTo>
-                  <a:lnTo>
-                    <a:pt x="5085199" y="1265366"/>
-                  </a:lnTo>
-                  <a:lnTo>
-                    <a:pt x="5156821" y="1187216"/>
-                  </a:lnTo>
-                  <a:lnTo>
-                    <a:pt x="5228444" y="1106313"/>
-                  </a:lnTo>
-                  <a:lnTo>
-                    <a:pt x="5300066" y="1022560"/>
-                  </a:lnTo>
-                  <a:lnTo>
-                    <a:pt x="5371689" y="935856"/>
-                  </a:lnTo>
-                  <a:lnTo>
-                    <a:pt x="5443311" y="846098"/>
-                  </a:lnTo>
-                  <a:lnTo>
-                    <a:pt x="5514934" y="753178"/>
-                  </a:lnTo>
-                  <a:lnTo>
-                    <a:pt x="5586557" y="656984"/>
-                  </a:lnTo>
-                  <a:lnTo>
-                    <a:pt x="5658179" y="557402"/>
-                  </a:lnTo>
-                  <a:lnTo>
-                    <a:pt x="5729802" y="454312"/>
-                  </a:lnTo>
-                  <a:lnTo>
-                    <a:pt x="5801424" y="347589"/>
-                  </a:lnTo>
-                  <a:lnTo>
-                    <a:pt x="5873047" y="237108"/>
-                  </a:lnTo>
-                  <a:lnTo>
-                    <a:pt x="5944669" y="122734"/>
-                  </a:lnTo>
-                  <a:lnTo>
-                    <a:pt x="6016292" y="4330"/>
-                  </a:lnTo>
-                  <a:lnTo>
-                    <a:pt x="6018822" y="0"/>
-                  </a:lnTo>
-                  <a:lnTo>
-                    <a:pt x="7090630" y="0"/>
-                  </a:lnTo>
-                  <a:lnTo>
-                    <a:pt x="7090630" y="3275764"/>
-                  </a:lnTo>
-                  <a:lnTo>
-                    <a:pt x="7019007" y="3270601"/>
-                  </a:lnTo>
-                  <a:lnTo>
-                    <a:pt x="6947385" y="3265310"/>
-                  </a:lnTo>
-                  <a:lnTo>
-                    <a:pt x="6875762" y="3259888"/>
-                  </a:lnTo>
-                  <a:lnTo>
-                    <a:pt x="6804139" y="3254331"/>
-                  </a:lnTo>
-                  <a:lnTo>
-                    <a:pt x="6732517" y="3248636"/>
-                  </a:lnTo>
-                  <a:lnTo>
-                    <a:pt x="6660894" y="3242799"/>
-                  </a:lnTo>
-                  <a:lnTo>
-                    <a:pt x="6589272" y="3236818"/>
-                  </a:lnTo>
-                  <a:lnTo>
-                    <a:pt x="6517649" y="3230688"/>
-                  </a:lnTo>
-                  <a:lnTo>
-                    <a:pt x="6446027" y="3224406"/>
-                  </a:lnTo>
-                  <a:lnTo>
-                    <a:pt x="6374404" y="3217968"/>
-                  </a:lnTo>
-                  <a:lnTo>
-                    <a:pt x="6302782" y="3211371"/>
-                  </a:lnTo>
-                  <a:lnTo>
-                    <a:pt x="6231159" y="3204609"/>
-                  </a:lnTo>
-                  <a:lnTo>
-                    <a:pt x="6159537" y="3197680"/>
-                  </a:lnTo>
-                  <a:lnTo>
-                    <a:pt x="6087914" y="3190579"/>
-                  </a:lnTo>
-                  <a:lnTo>
-                    <a:pt x="6016292" y="3183301"/>
-                  </a:lnTo>
-                  <a:lnTo>
-                    <a:pt x="5944669" y="3175843"/>
-                  </a:lnTo>
-                  <a:lnTo>
-                    <a:pt x="5873047" y="3168199"/>
-                  </a:lnTo>
-                  <a:lnTo>
-                    <a:pt x="5801424" y="3160366"/>
-                  </a:lnTo>
-                  <a:lnTo>
-                    <a:pt x="5729802" y="3152338"/>
-                  </a:lnTo>
-                  <a:lnTo>
-                    <a:pt x="5658179" y="3144112"/>
-                  </a:lnTo>
-                  <a:lnTo>
-                    <a:pt x="5586557" y="3135680"/>
-                  </a:lnTo>
-                  <a:lnTo>
-                    <a:pt x="5514934" y="3127040"/>
-                  </a:lnTo>
-                  <a:lnTo>
-                    <a:pt x="5443311" y="3118185"/>
-                  </a:lnTo>
-                  <a:lnTo>
-                    <a:pt x="5371689" y="3109110"/>
-                  </a:lnTo>
-                  <a:lnTo>
-                    <a:pt x="5300066" y="3099810"/>
-                  </a:lnTo>
-                  <a:lnTo>
-                    <a:pt x="5228444" y="3090279"/>
-                  </a:lnTo>
-                  <a:lnTo>
-                    <a:pt x="5156821" y="3080512"/>
-                  </a:lnTo>
-                  <a:lnTo>
-                    <a:pt x="5085199" y="3070502"/>
-                  </a:lnTo>
-                  <a:lnTo>
-                    <a:pt x="5013576" y="3060244"/>
-                  </a:lnTo>
-                  <a:lnTo>
-                    <a:pt x="4941954" y="3049731"/>
-                  </a:lnTo>
-                  <a:lnTo>
-                    <a:pt x="4870331" y="3038957"/>
-                  </a:lnTo>
-                  <a:lnTo>
-                    <a:pt x="4798709" y="3027915"/>
-                  </a:lnTo>
-                  <a:lnTo>
-                    <a:pt x="4727086" y="3016599"/>
-                  </a:lnTo>
-                  <a:lnTo>
-                    <a:pt x="4655464" y="3005003"/>
-                  </a:lnTo>
-                  <a:lnTo>
-                    <a:pt x="4583841" y="2993119"/>
-                  </a:lnTo>
-                  <a:lnTo>
-                    <a:pt x="4512219" y="2980939"/>
-                  </a:lnTo>
-                  <a:lnTo>
-                    <a:pt x="4440596" y="2968457"/>
-                  </a:lnTo>
-                  <a:lnTo>
-                    <a:pt x="4368974" y="2955666"/>
-                  </a:lnTo>
-                  <a:lnTo>
-                    <a:pt x="4297351" y="2942557"/>
-                  </a:lnTo>
-                  <a:lnTo>
-                    <a:pt x="4225729" y="2929122"/>
-                  </a:lnTo>
-                  <a:lnTo>
-                    <a:pt x="4154106" y="2915354"/>
-                  </a:lnTo>
-                  <a:lnTo>
-                    <a:pt x="4082483" y="2901244"/>
-                  </a:lnTo>
-                  <a:lnTo>
-                    <a:pt x="4010861" y="2886784"/>
-                  </a:lnTo>
-                  <a:lnTo>
-                    <a:pt x="3939238" y="2871965"/>
-                  </a:lnTo>
-                  <a:lnTo>
-                    <a:pt x="3867616" y="2856778"/>
-                  </a:lnTo>
-                  <a:lnTo>
-                    <a:pt x="3795993" y="2841214"/>
-                  </a:lnTo>
-                  <a:lnTo>
-                    <a:pt x="3724371" y="2825264"/>
-                  </a:lnTo>
-                  <a:lnTo>
-                    <a:pt x="3652748" y="2808918"/>
-                  </a:lnTo>
-                  <a:lnTo>
-                    <a:pt x="3581126" y="2792166"/>
-                  </a:lnTo>
-                  <a:lnTo>
-                    <a:pt x="3509503" y="2774998"/>
-                  </a:lnTo>
-                  <a:lnTo>
-                    <a:pt x="3437881" y="2757404"/>
-                  </a:lnTo>
-                  <a:lnTo>
-                    <a:pt x="3366258" y="2739373"/>
-                  </a:lnTo>
-                  <a:lnTo>
-                    <a:pt x="3294636" y="2720895"/>
-                  </a:lnTo>
-                  <a:lnTo>
-                    <a:pt x="3223013" y="2701958"/>
-                  </a:lnTo>
-                  <a:lnTo>
-                    <a:pt x="3151391" y="2682550"/>
-                  </a:lnTo>
-                  <a:lnTo>
-                    <a:pt x="3079768" y="2662661"/>
-                  </a:lnTo>
-                  <a:lnTo>
-                    <a:pt x="3008146" y="2670941"/>
-                  </a:lnTo>
-                  <a:lnTo>
-                    <a:pt x="2936523" y="2698600"/>
-                  </a:lnTo>
-                  <a:lnTo>
-                    <a:pt x="2864901" y="2725319"/>
-                  </a:lnTo>
-                  <a:lnTo>
-                    <a:pt x="2793278" y="2751128"/>
-                  </a:lnTo>
-                  <a:lnTo>
-                    <a:pt x="2721655" y="2776058"/>
-                  </a:lnTo>
-                  <a:lnTo>
-                    <a:pt x="2650033" y="2800141"/>
-                  </a:lnTo>
-                  <a:lnTo>
-                    <a:pt x="2578410" y="2823403"/>
-                  </a:lnTo>
-                  <a:lnTo>
-                    <a:pt x="2506788" y="2845875"/>
-                  </a:lnTo>
-                  <a:lnTo>
-                    <a:pt x="2435165" y="2867581"/>
-                  </a:lnTo>
-                  <a:lnTo>
-                    <a:pt x="2363543" y="2888549"/>
-                  </a:lnTo>
-                  <a:lnTo>
-                    <a:pt x="2291920" y="2908803"/>
-                  </a:lnTo>
-                  <a:lnTo>
-                    <a:pt x="2220298" y="2928368"/>
-                  </a:lnTo>
-                  <a:lnTo>
-                    <a:pt x="2148675" y="2947268"/>
-                  </a:lnTo>
-                  <a:lnTo>
-                    <a:pt x="2077053" y="2965524"/>
-                  </a:lnTo>
-                  <a:lnTo>
-                    <a:pt x="2005430" y="2983159"/>
-                  </a:lnTo>
-                  <a:lnTo>
-                    <a:pt x="1933808" y="3000194"/>
-                  </a:lnTo>
-                  <a:lnTo>
-                    <a:pt x="1862185" y="3016649"/>
-                  </a:lnTo>
-                  <a:lnTo>
-                    <a:pt x="1790563" y="3032544"/>
-                  </a:lnTo>
-                  <a:lnTo>
-                    <a:pt x="1718940" y="3047898"/>
-                  </a:lnTo>
-                  <a:lnTo>
-                    <a:pt x="1647318" y="3062730"/>
-                  </a:lnTo>
-                  <a:lnTo>
-                    <a:pt x="1575695" y="3077057"/>
-                  </a:lnTo>
-                  <a:lnTo>
-                    <a:pt x="1504073" y="3090896"/>
-                  </a:lnTo>
-                  <a:lnTo>
-                    <a:pt x="1432450" y="3104265"/>
-                  </a:lnTo>
-                  <a:lnTo>
-                    <a:pt x="1360827" y="3117179"/>
-                  </a:lnTo>
-                  <a:lnTo>
-                    <a:pt x="1289205" y="3129653"/>
-                  </a:lnTo>
-                  <a:lnTo>
-                    <a:pt x="1217582" y="3141702"/>
-                  </a:lnTo>
-                  <a:lnTo>
-                    <a:pt x="1145960" y="3153342"/>
-                  </a:lnTo>
-                  <a:lnTo>
-                    <a:pt x="1074337" y="3164586"/>
-                  </a:lnTo>
-                  <a:lnTo>
-                    <a:pt x="1002715" y="3175446"/>
-                  </a:lnTo>
-                  <a:lnTo>
-                    <a:pt x="931092" y="3185938"/>
-                  </a:lnTo>
-                  <a:lnTo>
-                    <a:pt x="859470" y="3196072"/>
-                  </a:lnTo>
-                  <a:lnTo>
-                    <a:pt x="787847" y="3205862"/>
-                  </a:lnTo>
-                  <a:lnTo>
-                    <a:pt x="716225" y="3215318"/>
-                  </a:lnTo>
-                  <a:lnTo>
-                    <a:pt x="644602" y="3224452"/>
-                  </a:lnTo>
-                  <a:lnTo>
-                    <a:pt x="572980" y="3233276"/>
-                  </a:lnTo>
-                  <a:lnTo>
-                    <a:pt x="501357" y="3241799"/>
-                  </a:lnTo>
-                  <a:lnTo>
-                    <a:pt x="429735" y="3250033"/>
-                  </a:lnTo>
-                  <a:lnTo>
-                    <a:pt x="358112" y="3257986"/>
-                  </a:lnTo>
-                  <a:lnTo>
-                    <a:pt x="286490" y="3265669"/>
-                  </a:lnTo>
-                  <a:lnTo>
-                    <a:pt x="214867" y="3273090"/>
-                  </a:lnTo>
-                  <a:lnTo>
-                    <a:pt x="143245" y="3280258"/>
-                  </a:lnTo>
-                  <a:lnTo>
-                    <a:pt x="71622" y="3287183"/>
-                  </a:lnTo>
-                  <a:lnTo>
-                    <a:pt x="0" y="3293872"/>
+                    <a:pt x="70547" y="1104455"/>
+                  </a:lnTo>
+                  <a:lnTo>
+                    <a:pt x="141094" y="1156412"/>
+                  </a:lnTo>
+                  <a:lnTo>
+                    <a:pt x="211641" y="1207110"/>
+                  </a:lnTo>
+                  <a:lnTo>
+                    <a:pt x="282188" y="1256581"/>
+                  </a:lnTo>
+                  <a:lnTo>
+                    <a:pt x="352735" y="1304852"/>
+                  </a:lnTo>
+                  <a:lnTo>
+                    <a:pt x="423283" y="1351955"/>
+                  </a:lnTo>
+                  <a:lnTo>
+                    <a:pt x="493830" y="1397916"/>
+                  </a:lnTo>
+                  <a:lnTo>
+                    <a:pt x="564377" y="1442765"/>
+                  </a:lnTo>
+                  <a:lnTo>
+                    <a:pt x="634924" y="1486527"/>
+                  </a:lnTo>
+                  <a:lnTo>
+                    <a:pt x="705471" y="1529229"/>
+                  </a:lnTo>
+                  <a:lnTo>
+                    <a:pt x="776018" y="1570896"/>
+                  </a:lnTo>
+                  <a:lnTo>
+                    <a:pt x="846566" y="1611554"/>
+                  </a:lnTo>
+                  <a:lnTo>
+                    <a:pt x="917113" y="1651228"/>
+                  </a:lnTo>
+                  <a:lnTo>
+                    <a:pt x="987660" y="1689940"/>
+                  </a:lnTo>
+                  <a:lnTo>
+                    <a:pt x="1058207" y="1727715"/>
+                  </a:lnTo>
+                  <a:lnTo>
+                    <a:pt x="1128754" y="1764574"/>
+                  </a:lnTo>
+                  <a:lnTo>
+                    <a:pt x="1199301" y="1800541"/>
+                  </a:lnTo>
+                  <a:lnTo>
+                    <a:pt x="1269849" y="1835637"/>
+                  </a:lnTo>
+                  <a:lnTo>
+                    <a:pt x="1340396" y="1869882"/>
+                  </a:lnTo>
+                  <a:lnTo>
+                    <a:pt x="1410943" y="1903298"/>
+                  </a:lnTo>
+                  <a:lnTo>
+                    <a:pt x="1481490" y="1935905"/>
+                  </a:lnTo>
+                  <a:lnTo>
+                    <a:pt x="1552037" y="1967721"/>
+                  </a:lnTo>
+                  <a:lnTo>
+                    <a:pt x="1622584" y="1998767"/>
+                  </a:lnTo>
+                  <a:lnTo>
+                    <a:pt x="1693132" y="2029061"/>
+                  </a:lnTo>
+                  <a:lnTo>
+                    <a:pt x="1763679" y="2058622"/>
+                  </a:lnTo>
+                  <a:lnTo>
+                    <a:pt x="1834226" y="2087466"/>
+                  </a:lnTo>
+                  <a:lnTo>
+                    <a:pt x="1904773" y="2115611"/>
+                  </a:lnTo>
+                  <a:lnTo>
+                    <a:pt x="1975320" y="2143075"/>
+                  </a:lnTo>
+                  <a:lnTo>
+                    <a:pt x="2045868" y="2169873"/>
+                  </a:lnTo>
+                  <a:lnTo>
+                    <a:pt x="2116415" y="2196023"/>
+                  </a:lnTo>
+                  <a:lnTo>
+                    <a:pt x="2186962" y="2221539"/>
+                  </a:lnTo>
+                  <a:lnTo>
+                    <a:pt x="2257509" y="2246437"/>
+                  </a:lnTo>
+                  <a:lnTo>
+                    <a:pt x="2328056" y="2270731"/>
+                  </a:lnTo>
+                  <a:lnTo>
+                    <a:pt x="2398603" y="2294438"/>
+                  </a:lnTo>
+                  <a:lnTo>
+                    <a:pt x="2469151" y="2317570"/>
+                  </a:lnTo>
+                  <a:lnTo>
+                    <a:pt x="2539698" y="2340141"/>
+                  </a:lnTo>
+                  <a:lnTo>
+                    <a:pt x="2610245" y="2362166"/>
+                  </a:lnTo>
+                  <a:lnTo>
+                    <a:pt x="2680792" y="2383658"/>
+                  </a:lnTo>
+                  <a:lnTo>
+                    <a:pt x="2751339" y="2404629"/>
+                  </a:lnTo>
+                  <a:lnTo>
+                    <a:pt x="2821886" y="2425092"/>
+                  </a:lnTo>
+                  <a:lnTo>
+                    <a:pt x="2892434" y="2445059"/>
+                  </a:lnTo>
+                  <a:lnTo>
+                    <a:pt x="2962981" y="2464542"/>
+                  </a:lnTo>
+                  <a:lnTo>
+                    <a:pt x="3033528" y="2464569"/>
+                  </a:lnTo>
+                  <a:lnTo>
+                    <a:pt x="3104075" y="2436920"/>
+                  </a:lnTo>
+                  <a:lnTo>
+                    <a:pt x="3174622" y="2408297"/>
+                  </a:lnTo>
+                  <a:lnTo>
+                    <a:pt x="3245169" y="2378667"/>
+                  </a:lnTo>
+                  <a:lnTo>
+                    <a:pt x="3315717" y="2347992"/>
+                  </a:lnTo>
+                  <a:lnTo>
+                    <a:pt x="3386264" y="2316236"/>
+                  </a:lnTo>
+                  <a:lnTo>
+                    <a:pt x="3456811" y="2283362"/>
+                  </a:lnTo>
+                  <a:lnTo>
+                    <a:pt x="3527358" y="2249330"/>
+                  </a:lnTo>
+                  <a:lnTo>
+                    <a:pt x="3597905" y="2214099"/>
+                  </a:lnTo>
+                  <a:lnTo>
+                    <a:pt x="3668452" y="2177626"/>
+                  </a:lnTo>
+                  <a:lnTo>
+                    <a:pt x="3739000" y="2139869"/>
+                  </a:lnTo>
+                  <a:lnTo>
+                    <a:pt x="3809547" y="2100782"/>
+                  </a:lnTo>
+                  <a:lnTo>
+                    <a:pt x="3880094" y="2060318"/>
+                  </a:lnTo>
+                  <a:lnTo>
+                    <a:pt x="3950641" y="2018428"/>
+                  </a:lnTo>
+                  <a:lnTo>
+                    <a:pt x="4021188" y="1975062"/>
+                  </a:lnTo>
+                  <a:lnTo>
+                    <a:pt x="4091736" y="1930169"/>
+                  </a:lnTo>
+                  <a:lnTo>
+                    <a:pt x="4162283" y="1883695"/>
+                  </a:lnTo>
+                  <a:lnTo>
+                    <a:pt x="4232830" y="1835583"/>
+                  </a:lnTo>
+                  <a:lnTo>
+                    <a:pt x="4303377" y="1785776"/>
+                  </a:lnTo>
+                  <a:lnTo>
+                    <a:pt x="4373924" y="1734215"/>
+                  </a:lnTo>
+                  <a:lnTo>
+                    <a:pt x="4444471" y="1680837"/>
+                  </a:lnTo>
+                  <a:lnTo>
+                    <a:pt x="4515019" y="1625578"/>
+                  </a:lnTo>
+                  <a:lnTo>
+                    <a:pt x="4585566" y="1568373"/>
+                  </a:lnTo>
+                  <a:lnTo>
+                    <a:pt x="4656113" y="1509153"/>
+                  </a:lnTo>
+                  <a:lnTo>
+                    <a:pt x="4726660" y="1447847"/>
+                  </a:lnTo>
+                  <a:lnTo>
+                    <a:pt x="4797207" y="1384381"/>
+                  </a:lnTo>
+                  <a:lnTo>
+                    <a:pt x="4867754" y="1318679"/>
+                  </a:lnTo>
+                  <a:lnTo>
+                    <a:pt x="4938302" y="1250662"/>
+                  </a:lnTo>
+                  <a:lnTo>
+                    <a:pt x="5008849" y="1180250"/>
+                  </a:lnTo>
+                  <a:lnTo>
+                    <a:pt x="5079396" y="1107357"/>
+                  </a:lnTo>
+                  <a:lnTo>
+                    <a:pt x="5149943" y="1031896"/>
+                  </a:lnTo>
+                  <a:lnTo>
+                    <a:pt x="5220490" y="953776"/>
+                  </a:lnTo>
+                  <a:lnTo>
+                    <a:pt x="5291037" y="872905"/>
+                  </a:lnTo>
+                  <a:lnTo>
+                    <a:pt x="5361585" y="789184"/>
+                  </a:lnTo>
+                  <a:lnTo>
+                    <a:pt x="5432132" y="702514"/>
+                  </a:lnTo>
+                  <a:lnTo>
+                    <a:pt x="5502679" y="612791"/>
+                  </a:lnTo>
+                  <a:lnTo>
+                    <a:pt x="5573226" y="519908"/>
+                  </a:lnTo>
+                  <a:lnTo>
+                    <a:pt x="5643773" y="423752"/>
+                  </a:lnTo>
+                  <a:lnTo>
+                    <a:pt x="5714320" y="324208"/>
+                  </a:lnTo>
+                  <a:lnTo>
+                    <a:pt x="5784868" y="221158"/>
+                  </a:lnTo>
+                  <a:lnTo>
+                    <a:pt x="5855415" y="114478"/>
+                  </a:lnTo>
+                  <a:lnTo>
+                    <a:pt x="5925962" y="4039"/>
+                  </a:lnTo>
+                  <a:lnTo>
+                    <a:pt x="5928455" y="0"/>
+                  </a:lnTo>
+                  <a:lnTo>
+                    <a:pt x="6984170" y="0"/>
+                  </a:lnTo>
+                  <a:lnTo>
+                    <a:pt x="6984170" y="3055416"/>
+                  </a:lnTo>
+                  <a:lnTo>
+                    <a:pt x="6913622" y="3050600"/>
+                  </a:lnTo>
+                  <a:lnTo>
+                    <a:pt x="6843075" y="3045665"/>
+                  </a:lnTo>
+                  <a:lnTo>
+                    <a:pt x="6772528" y="3040607"/>
+                  </a:lnTo>
+                  <a:lnTo>
+                    <a:pt x="6701981" y="3035424"/>
+                  </a:lnTo>
+                  <a:lnTo>
+                    <a:pt x="6631434" y="3030112"/>
+                  </a:lnTo>
+                  <a:lnTo>
+                    <a:pt x="6560887" y="3024668"/>
+                  </a:lnTo>
+                  <a:lnTo>
+                    <a:pt x="6490339" y="3019089"/>
+                  </a:lnTo>
+                  <a:lnTo>
+                    <a:pt x="6419792" y="3013372"/>
+                  </a:lnTo>
+                  <a:lnTo>
+                    <a:pt x="6349245" y="3007512"/>
+                  </a:lnTo>
+                  <a:lnTo>
+                    <a:pt x="6278698" y="3001508"/>
+                  </a:lnTo>
+                  <a:lnTo>
+                    <a:pt x="6208151" y="2995354"/>
+                  </a:lnTo>
+                  <a:lnTo>
+                    <a:pt x="6137604" y="2989047"/>
+                  </a:lnTo>
+                  <a:lnTo>
+                    <a:pt x="6067056" y="2982584"/>
+                  </a:lnTo>
+                  <a:lnTo>
+                    <a:pt x="5996509" y="2975960"/>
+                  </a:lnTo>
+                  <a:lnTo>
+                    <a:pt x="5925962" y="2969172"/>
+                  </a:lnTo>
+                  <a:lnTo>
+                    <a:pt x="5855415" y="2962215"/>
+                  </a:lnTo>
+                  <a:lnTo>
+                    <a:pt x="5784868" y="2955086"/>
+                  </a:lnTo>
+                  <a:lnTo>
+                    <a:pt x="5714320" y="2947780"/>
+                  </a:lnTo>
+                  <a:lnTo>
+                    <a:pt x="5643773" y="2940292"/>
+                  </a:lnTo>
+                  <a:lnTo>
+                    <a:pt x="5573226" y="2932619"/>
+                  </a:lnTo>
+                  <a:lnTo>
+                    <a:pt x="5502679" y="2924755"/>
+                  </a:lnTo>
+                  <a:lnTo>
+                    <a:pt x="5432132" y="2916695"/>
+                  </a:lnTo>
+                  <a:lnTo>
+                    <a:pt x="5361585" y="2908436"/>
+                  </a:lnTo>
+                  <a:lnTo>
+                    <a:pt x="5291037" y="2899972"/>
+                  </a:lnTo>
+                  <a:lnTo>
+                    <a:pt x="5220490" y="2891297"/>
+                  </a:lnTo>
+                  <a:lnTo>
+                    <a:pt x="5149943" y="2882408"/>
+                  </a:lnTo>
+                  <a:lnTo>
+                    <a:pt x="5079396" y="2873297"/>
+                  </a:lnTo>
+                  <a:lnTo>
+                    <a:pt x="5008849" y="2863961"/>
+                  </a:lnTo>
+                  <a:lnTo>
+                    <a:pt x="4938302" y="2854392"/>
+                  </a:lnTo>
+                  <a:lnTo>
+                    <a:pt x="4867754" y="2844586"/>
+                  </a:lnTo>
+                  <a:lnTo>
+                    <a:pt x="4797207" y="2834537"/>
+                  </a:lnTo>
+                  <a:lnTo>
+                    <a:pt x="4726660" y="2824238"/>
+                  </a:lnTo>
+                  <a:lnTo>
+                    <a:pt x="4656113" y="2813684"/>
+                  </a:lnTo>
+                  <a:lnTo>
+                    <a:pt x="4585566" y="2802867"/>
+                  </a:lnTo>
+                  <a:lnTo>
+                    <a:pt x="4515019" y="2791782"/>
+                  </a:lnTo>
+                  <a:lnTo>
+                    <a:pt x="4444471" y="2780422"/>
+                  </a:lnTo>
+                  <a:lnTo>
+                    <a:pt x="4373924" y="2768780"/>
+                  </a:lnTo>
+                  <a:lnTo>
+                    <a:pt x="4303377" y="2756849"/>
+                  </a:lnTo>
+                  <a:lnTo>
+                    <a:pt x="4232830" y="2744622"/>
+                  </a:lnTo>
+                  <a:lnTo>
+                    <a:pt x="4162283" y="2732091"/>
+                  </a:lnTo>
+                  <a:lnTo>
+                    <a:pt x="4091736" y="2719249"/>
+                  </a:lnTo>
+                  <a:lnTo>
+                    <a:pt x="4021188" y="2706088"/>
+                  </a:lnTo>
+                  <a:lnTo>
+                    <a:pt x="3950641" y="2692601"/>
+                  </a:lnTo>
+                  <a:lnTo>
+                    <a:pt x="3880094" y="2678779"/>
+                  </a:lnTo>
+                  <a:lnTo>
+                    <a:pt x="3809547" y="2664613"/>
+                  </a:lnTo>
+                  <a:lnTo>
+                    <a:pt x="3739000" y="2650096"/>
+                  </a:lnTo>
+                  <a:lnTo>
+                    <a:pt x="3668452" y="2635219"/>
+                  </a:lnTo>
+                  <a:lnTo>
+                    <a:pt x="3597905" y="2619972"/>
+                  </a:lnTo>
+                  <a:lnTo>
+                    <a:pt x="3527358" y="2604347"/>
+                  </a:lnTo>
+                  <a:lnTo>
+                    <a:pt x="3456811" y="2588334"/>
+                  </a:lnTo>
+                  <a:lnTo>
+                    <a:pt x="3386264" y="2571923"/>
+                  </a:lnTo>
+                  <a:lnTo>
+                    <a:pt x="3315717" y="2555106"/>
+                  </a:lnTo>
+                  <a:lnTo>
+                    <a:pt x="3245169" y="2537870"/>
+                  </a:lnTo>
+                  <a:lnTo>
+                    <a:pt x="3174622" y="2520207"/>
+                  </a:lnTo>
+                  <a:lnTo>
+                    <a:pt x="3104075" y="2502105"/>
+                  </a:lnTo>
+                  <a:lnTo>
+                    <a:pt x="3033528" y="2483554"/>
+                  </a:lnTo>
+                  <a:lnTo>
+                    <a:pt x="2962981" y="2491277"/>
+                  </a:lnTo>
+                  <a:lnTo>
+                    <a:pt x="2892434" y="2517075"/>
+                  </a:lnTo>
+                  <a:lnTo>
+                    <a:pt x="2821886" y="2541996"/>
+                  </a:lnTo>
+                  <a:lnTo>
+                    <a:pt x="2751339" y="2566069"/>
+                  </a:lnTo>
+                  <a:lnTo>
+                    <a:pt x="2680792" y="2589323"/>
+                  </a:lnTo>
+                  <a:lnTo>
+                    <a:pt x="2610245" y="2611785"/>
+                  </a:lnTo>
+                  <a:lnTo>
+                    <a:pt x="2539698" y="2633483"/>
+                  </a:lnTo>
+                  <a:lnTo>
+                    <a:pt x="2469151" y="2654443"/>
+                  </a:lnTo>
+                  <a:lnTo>
+                    <a:pt x="2398603" y="2674690"/>
+                  </a:lnTo>
+                  <a:lnTo>
+                    <a:pt x="2328056" y="2694247"/>
+                  </a:lnTo>
+                  <a:lnTo>
+                    <a:pt x="2257509" y="2713139"/>
+                  </a:lnTo>
+                  <a:lnTo>
+                    <a:pt x="2186962" y="2731388"/>
+                  </a:lnTo>
+                  <a:lnTo>
+                    <a:pt x="2116415" y="2749016"/>
+                  </a:lnTo>
+                  <a:lnTo>
+                    <a:pt x="2045868" y="2766044"/>
+                  </a:lnTo>
+                  <a:lnTo>
+                    <a:pt x="1975320" y="2782493"/>
+                  </a:lnTo>
+                  <a:lnTo>
+                    <a:pt x="1904773" y="2798382"/>
+                  </a:lnTo>
+                  <a:lnTo>
+                    <a:pt x="1834226" y="2813730"/>
+                  </a:lnTo>
+                  <a:lnTo>
+                    <a:pt x="1763679" y="2828556"/>
+                  </a:lnTo>
+                  <a:lnTo>
+                    <a:pt x="1693132" y="2842877"/>
+                  </a:lnTo>
+                  <a:lnTo>
+                    <a:pt x="1622584" y="2856711"/>
+                  </a:lnTo>
+                  <a:lnTo>
+                    <a:pt x="1552037" y="2870075"/>
+                  </a:lnTo>
+                  <a:lnTo>
+                    <a:pt x="1481490" y="2882983"/>
+                  </a:lnTo>
+                  <a:lnTo>
+                    <a:pt x="1410943" y="2895452"/>
+                  </a:lnTo>
+                  <a:lnTo>
+                    <a:pt x="1340396" y="2907497"/>
+                  </a:lnTo>
+                  <a:lnTo>
+                    <a:pt x="1269849" y="2919132"/>
+                  </a:lnTo>
+                  <a:lnTo>
+                    <a:pt x="1199301" y="2930372"/>
+                  </a:lnTo>
+                  <a:lnTo>
+                    <a:pt x="1128754" y="2941228"/>
+                  </a:lnTo>
+                  <a:lnTo>
+                    <a:pt x="1058207" y="2951715"/>
+                  </a:lnTo>
+                  <a:lnTo>
+                    <a:pt x="987660" y="2961846"/>
+                  </a:lnTo>
+                  <a:lnTo>
+                    <a:pt x="917113" y="2971631"/>
+                  </a:lnTo>
+                  <a:lnTo>
+                    <a:pt x="846566" y="2981084"/>
+                  </a:lnTo>
+                  <a:lnTo>
+                    <a:pt x="776018" y="2990215"/>
+                  </a:lnTo>
+                  <a:lnTo>
+                    <a:pt x="705471" y="2999035"/>
+                  </a:lnTo>
+                  <a:lnTo>
+                    <a:pt x="634924" y="3007555"/>
+                  </a:lnTo>
+                  <a:lnTo>
+                    <a:pt x="564377" y="3015785"/>
+                  </a:lnTo>
+                  <a:lnTo>
+                    <a:pt x="493830" y="3023735"/>
+                  </a:lnTo>
+                  <a:lnTo>
+                    <a:pt x="423283" y="3031415"/>
+                  </a:lnTo>
+                  <a:lnTo>
+                    <a:pt x="352735" y="3038833"/>
+                  </a:lnTo>
+                  <a:lnTo>
+                    <a:pt x="282188" y="3045999"/>
+                  </a:lnTo>
+                  <a:lnTo>
+                    <a:pt x="211641" y="3052921"/>
+                  </a:lnTo>
+                  <a:lnTo>
+                    <a:pt x="141094" y="3059607"/>
+                  </a:lnTo>
+                  <a:lnTo>
+                    <a:pt x="70547" y="3066066"/>
+                  </a:lnTo>
+                  <a:lnTo>
+                    <a:pt x="0" y="3072305"/>
                   </a:lnTo>
                   <a:close/>
                 </a:path>
@@ -3723,270 +3723,270 @@
           </p:nvSpPr>
           <p:spPr>
             <a:xfrm>
-              <a:off x="1172049" y="2073503"/>
-              <a:ext cx="6018822" cy="2642307"/>
+              <a:off x="1264853" y="2209169"/>
+              <a:ext cx="5928455" cy="2464569"/>
             </a:xfrm>
             <a:custGeom>
               <a:avLst/>
               <a:pathLst>
-                <a:path w="6018822" h="2642307">
+                <a:path w="5928455" h="2464569">
                   <a:moveTo>
-                    <a:pt x="0" y="1127019"/>
+                    <a:pt x="0" y="1051209"/>
                   </a:moveTo>
                   <a:lnTo>
-                    <a:pt x="71622" y="1184106"/>
-                  </a:lnTo>
-                  <a:lnTo>
-                    <a:pt x="143245" y="1239810"/>
-                  </a:lnTo>
-                  <a:lnTo>
-                    <a:pt x="214867" y="1294164"/>
-                  </a:lnTo>
-                  <a:lnTo>
-                    <a:pt x="286490" y="1347202"/>
-                  </a:lnTo>
-                  <a:lnTo>
-                    <a:pt x="358112" y="1398955"/>
-                  </a:lnTo>
-                  <a:lnTo>
-                    <a:pt x="429735" y="1449454"/>
-                  </a:lnTo>
-                  <a:lnTo>
-                    <a:pt x="501357" y="1498731"/>
-                  </a:lnTo>
-                  <a:lnTo>
-                    <a:pt x="572980" y="1546813"/>
-                  </a:lnTo>
-                  <a:lnTo>
-                    <a:pt x="644602" y="1593731"/>
-                  </a:lnTo>
-                  <a:lnTo>
-                    <a:pt x="716225" y="1639513"/>
-                  </a:lnTo>
-                  <a:lnTo>
-                    <a:pt x="787847" y="1684185"/>
-                  </a:lnTo>
-                  <a:lnTo>
-                    <a:pt x="859470" y="1727775"/>
-                  </a:lnTo>
-                  <a:lnTo>
-                    <a:pt x="931092" y="1770310"/>
-                  </a:lnTo>
-                  <a:lnTo>
-                    <a:pt x="1002715" y="1811814"/>
-                  </a:lnTo>
-                  <a:lnTo>
-                    <a:pt x="1074337" y="1852313"/>
-                  </a:lnTo>
-                  <a:lnTo>
-                    <a:pt x="1145960" y="1891831"/>
-                  </a:lnTo>
-                  <a:lnTo>
-                    <a:pt x="1217582" y="1930392"/>
-                  </a:lnTo>
-                  <a:lnTo>
-                    <a:pt x="1289205" y="1968018"/>
-                  </a:lnTo>
-                  <a:lnTo>
-                    <a:pt x="1360827" y="2004733"/>
-                  </a:lnTo>
-                  <a:lnTo>
-                    <a:pt x="1432450" y="2040559"/>
-                  </a:lnTo>
-                  <a:lnTo>
-                    <a:pt x="1504073" y="2075517"/>
-                  </a:lnTo>
-                  <a:lnTo>
-                    <a:pt x="1575695" y="2109628"/>
-                  </a:lnTo>
-                  <a:lnTo>
-                    <a:pt x="1647318" y="2142913"/>
-                  </a:lnTo>
-                  <a:lnTo>
-                    <a:pt x="1718940" y="2175392"/>
-                  </a:lnTo>
-                  <a:lnTo>
-                    <a:pt x="1790563" y="2207084"/>
-                  </a:lnTo>
-                  <a:lnTo>
-                    <a:pt x="1862185" y="2238008"/>
-                  </a:lnTo>
-                  <a:lnTo>
-                    <a:pt x="1933808" y="2268184"/>
-                  </a:lnTo>
-                  <a:lnTo>
-                    <a:pt x="2005430" y="2297628"/>
-                  </a:lnTo>
-                  <a:lnTo>
-                    <a:pt x="2077053" y="2326359"/>
-                  </a:lnTo>
-                  <a:lnTo>
-                    <a:pt x="2148675" y="2354394"/>
-                  </a:lnTo>
-                  <a:lnTo>
-                    <a:pt x="2220298" y="2381750"/>
-                  </a:lnTo>
-                  <a:lnTo>
-                    <a:pt x="2291920" y="2408444"/>
-                  </a:lnTo>
-                  <a:lnTo>
-                    <a:pt x="2363543" y="2434491"/>
-                  </a:lnTo>
-                  <a:lnTo>
-                    <a:pt x="2435165" y="2459906"/>
-                  </a:lnTo>
-                  <a:lnTo>
-                    <a:pt x="2506788" y="2484707"/>
-                  </a:lnTo>
-                  <a:lnTo>
-                    <a:pt x="2578410" y="2508906"/>
-                  </a:lnTo>
-                  <a:lnTo>
-                    <a:pt x="2650033" y="2532520"/>
-                  </a:lnTo>
-                  <a:lnTo>
-                    <a:pt x="2721655" y="2555561"/>
-                  </a:lnTo>
-                  <a:lnTo>
-                    <a:pt x="2793278" y="2578044"/>
-                  </a:lnTo>
-                  <a:lnTo>
-                    <a:pt x="2864901" y="2599983"/>
-                  </a:lnTo>
-                  <a:lnTo>
-                    <a:pt x="2936523" y="2621390"/>
-                  </a:lnTo>
-                  <a:lnTo>
-                    <a:pt x="3008146" y="2642279"/>
-                  </a:lnTo>
-                  <a:lnTo>
-                    <a:pt x="3079768" y="2642307"/>
-                  </a:lnTo>
-                  <a:lnTo>
-                    <a:pt x="3151391" y="2612664"/>
-                  </a:lnTo>
-                  <a:lnTo>
-                    <a:pt x="3223013" y="2581978"/>
-                  </a:lnTo>
-                  <a:lnTo>
-                    <a:pt x="3294636" y="2550210"/>
-                  </a:lnTo>
-                  <a:lnTo>
-                    <a:pt x="3366258" y="2517323"/>
-                  </a:lnTo>
-                  <a:lnTo>
-                    <a:pt x="3437881" y="2483277"/>
-                  </a:lnTo>
-                  <a:lnTo>
-                    <a:pt x="3509503" y="2448032"/>
-                  </a:lnTo>
-                  <a:lnTo>
-                    <a:pt x="3581126" y="2411546"/>
-                  </a:lnTo>
-                  <a:lnTo>
-                    <a:pt x="3652748" y="2373774"/>
-                  </a:lnTo>
-                  <a:lnTo>
-                    <a:pt x="3724371" y="2334671"/>
-                  </a:lnTo>
-                  <a:lnTo>
-                    <a:pt x="3795993" y="2294191"/>
-                  </a:lnTo>
-                  <a:lnTo>
-                    <a:pt x="3867616" y="2252285"/>
-                  </a:lnTo>
-                  <a:lnTo>
-                    <a:pt x="3939238" y="2208902"/>
-                  </a:lnTo>
-                  <a:lnTo>
-                    <a:pt x="4010861" y="2163992"/>
-                  </a:lnTo>
-                  <a:lnTo>
-                    <a:pt x="4082483" y="2117499"/>
-                  </a:lnTo>
-                  <a:lnTo>
-                    <a:pt x="4154106" y="2069368"/>
-                  </a:lnTo>
-                  <a:lnTo>
-                    <a:pt x="4225729" y="2019542"/>
-                  </a:lnTo>
-                  <a:lnTo>
-                    <a:pt x="4297351" y="1967960"/>
-                  </a:lnTo>
-                  <a:lnTo>
-                    <a:pt x="4368974" y="1914562"/>
-                  </a:lnTo>
-                  <a:lnTo>
-                    <a:pt x="4440596" y="1859282"/>
-                  </a:lnTo>
-                  <a:lnTo>
-                    <a:pt x="4512219" y="1802054"/>
-                  </a:lnTo>
-                  <a:lnTo>
-                    <a:pt x="4583841" y="1742811"/>
-                  </a:lnTo>
-                  <a:lnTo>
-                    <a:pt x="4655464" y="1681481"/>
-                  </a:lnTo>
-                  <a:lnTo>
-                    <a:pt x="4727086" y="1617990"/>
-                  </a:lnTo>
-                  <a:lnTo>
-                    <a:pt x="4798709" y="1552262"/>
-                  </a:lnTo>
-                  <a:lnTo>
-                    <a:pt x="4870331" y="1484219"/>
-                  </a:lnTo>
-                  <a:lnTo>
-                    <a:pt x="4941954" y="1413779"/>
-                  </a:lnTo>
-                  <a:lnTo>
-                    <a:pt x="5013576" y="1340857"/>
-                  </a:lnTo>
-                  <a:lnTo>
-                    <a:pt x="5085199" y="1265366"/>
-                  </a:lnTo>
-                  <a:lnTo>
-                    <a:pt x="5156821" y="1187216"/>
-                  </a:lnTo>
-                  <a:lnTo>
-                    <a:pt x="5228444" y="1106313"/>
-                  </a:lnTo>
-                  <a:lnTo>
-                    <a:pt x="5300066" y="1022560"/>
-                  </a:lnTo>
-                  <a:lnTo>
-                    <a:pt x="5371689" y="935856"/>
-                  </a:lnTo>
-                  <a:lnTo>
-                    <a:pt x="5443311" y="846098"/>
-                  </a:lnTo>
-                  <a:lnTo>
-                    <a:pt x="5514934" y="753178"/>
-                  </a:lnTo>
-                  <a:lnTo>
-                    <a:pt x="5586557" y="656984"/>
-                  </a:lnTo>
-                  <a:lnTo>
-                    <a:pt x="5658179" y="557402"/>
-                  </a:lnTo>
-                  <a:lnTo>
-                    <a:pt x="5729802" y="454312"/>
-                  </a:lnTo>
-                  <a:lnTo>
-                    <a:pt x="5801424" y="347589"/>
-                  </a:lnTo>
-                  <a:lnTo>
-                    <a:pt x="5873047" y="237108"/>
-                  </a:lnTo>
-                  <a:lnTo>
-                    <a:pt x="5944669" y="122734"/>
-                  </a:lnTo>
-                  <a:lnTo>
-                    <a:pt x="6016292" y="4330"/>
-                  </a:lnTo>
-                  <a:lnTo>
-                    <a:pt x="6018822" y="0"/>
+                    <a:pt x="70547" y="1104455"/>
+                  </a:lnTo>
+                  <a:lnTo>
+                    <a:pt x="141094" y="1156412"/>
+                  </a:lnTo>
+                  <a:lnTo>
+                    <a:pt x="211641" y="1207110"/>
+                  </a:lnTo>
+                  <a:lnTo>
+                    <a:pt x="282188" y="1256581"/>
+                  </a:lnTo>
+                  <a:lnTo>
+                    <a:pt x="352735" y="1304852"/>
+                  </a:lnTo>
+                  <a:lnTo>
+                    <a:pt x="423283" y="1351955"/>
+                  </a:lnTo>
+                  <a:lnTo>
+                    <a:pt x="493830" y="1397916"/>
+                  </a:lnTo>
+                  <a:lnTo>
+                    <a:pt x="564377" y="1442765"/>
+                  </a:lnTo>
+                  <a:lnTo>
+                    <a:pt x="634924" y="1486527"/>
+                  </a:lnTo>
+                  <a:lnTo>
+                    <a:pt x="705471" y="1529229"/>
+                  </a:lnTo>
+                  <a:lnTo>
+                    <a:pt x="776018" y="1570896"/>
+                  </a:lnTo>
+                  <a:lnTo>
+                    <a:pt x="846566" y="1611554"/>
+                  </a:lnTo>
+                  <a:lnTo>
+                    <a:pt x="917113" y="1651228"/>
+                  </a:lnTo>
+                  <a:lnTo>
+                    <a:pt x="987660" y="1689940"/>
+                  </a:lnTo>
+                  <a:lnTo>
+                    <a:pt x="1058207" y="1727715"/>
+                  </a:lnTo>
+                  <a:lnTo>
+                    <a:pt x="1128754" y="1764574"/>
+                  </a:lnTo>
+                  <a:lnTo>
+                    <a:pt x="1199301" y="1800541"/>
+                  </a:lnTo>
+                  <a:lnTo>
+                    <a:pt x="1269849" y="1835637"/>
+                  </a:lnTo>
+                  <a:lnTo>
+                    <a:pt x="1340396" y="1869882"/>
+                  </a:lnTo>
+                  <a:lnTo>
+                    <a:pt x="1410943" y="1903298"/>
+                  </a:lnTo>
+                  <a:lnTo>
+                    <a:pt x="1481490" y="1935905"/>
+                  </a:lnTo>
+                  <a:lnTo>
+                    <a:pt x="1552037" y="1967721"/>
+                  </a:lnTo>
+                  <a:lnTo>
+                    <a:pt x="1622584" y="1998767"/>
+                  </a:lnTo>
+                  <a:lnTo>
+                    <a:pt x="1693132" y="2029061"/>
+                  </a:lnTo>
+                  <a:lnTo>
+                    <a:pt x="1763679" y="2058622"/>
+                  </a:lnTo>
+                  <a:lnTo>
+                    <a:pt x="1834226" y="2087466"/>
+                  </a:lnTo>
+                  <a:lnTo>
+                    <a:pt x="1904773" y="2115611"/>
+                  </a:lnTo>
+                  <a:lnTo>
+                    <a:pt x="1975320" y="2143075"/>
+                  </a:lnTo>
+                  <a:lnTo>
+                    <a:pt x="2045868" y="2169873"/>
+                  </a:lnTo>
+                  <a:lnTo>
+                    <a:pt x="2116415" y="2196023"/>
+                  </a:lnTo>
+                  <a:lnTo>
+                    <a:pt x="2186962" y="2221539"/>
+                  </a:lnTo>
+                  <a:lnTo>
+                    <a:pt x="2257509" y="2246437"/>
+                  </a:lnTo>
+                  <a:lnTo>
+                    <a:pt x="2328056" y="2270731"/>
+                  </a:lnTo>
+                  <a:lnTo>
+                    <a:pt x="2398603" y="2294438"/>
+                  </a:lnTo>
+                  <a:lnTo>
+                    <a:pt x="2469151" y="2317570"/>
+                  </a:lnTo>
+                  <a:lnTo>
+                    <a:pt x="2539698" y="2340141"/>
+                  </a:lnTo>
+                  <a:lnTo>
+                    <a:pt x="2610245" y="2362166"/>
+                  </a:lnTo>
+                  <a:lnTo>
+                    <a:pt x="2680792" y="2383658"/>
+                  </a:lnTo>
+                  <a:lnTo>
+                    <a:pt x="2751339" y="2404629"/>
+                  </a:lnTo>
+                  <a:lnTo>
+                    <a:pt x="2821886" y="2425092"/>
+                  </a:lnTo>
+                  <a:lnTo>
+                    <a:pt x="2892434" y="2445059"/>
+                  </a:lnTo>
+                  <a:lnTo>
+                    <a:pt x="2962981" y="2464542"/>
+                  </a:lnTo>
+                  <a:lnTo>
+                    <a:pt x="3033528" y="2464569"/>
+                  </a:lnTo>
+                  <a:lnTo>
+                    <a:pt x="3104075" y="2436920"/>
+                  </a:lnTo>
+                  <a:lnTo>
+                    <a:pt x="3174622" y="2408297"/>
+                  </a:lnTo>
+                  <a:lnTo>
+                    <a:pt x="3245169" y="2378667"/>
+                  </a:lnTo>
+                  <a:lnTo>
+                    <a:pt x="3315717" y="2347992"/>
+                  </a:lnTo>
+                  <a:lnTo>
+                    <a:pt x="3386264" y="2316236"/>
+                  </a:lnTo>
+                  <a:lnTo>
+                    <a:pt x="3456811" y="2283362"/>
+                  </a:lnTo>
+                  <a:lnTo>
+                    <a:pt x="3527358" y="2249330"/>
+                  </a:lnTo>
+                  <a:lnTo>
+                    <a:pt x="3597905" y="2214099"/>
+                  </a:lnTo>
+                  <a:lnTo>
+                    <a:pt x="3668452" y="2177626"/>
+                  </a:lnTo>
+                  <a:lnTo>
+                    <a:pt x="3739000" y="2139869"/>
+                  </a:lnTo>
+                  <a:lnTo>
+                    <a:pt x="3809547" y="2100782"/>
+                  </a:lnTo>
+                  <a:lnTo>
+                    <a:pt x="3880094" y="2060318"/>
+                  </a:lnTo>
+                  <a:lnTo>
+                    <a:pt x="3950641" y="2018428"/>
+                  </a:lnTo>
+                  <a:lnTo>
+                    <a:pt x="4021188" y="1975062"/>
+                  </a:lnTo>
+                  <a:lnTo>
+                    <a:pt x="4091736" y="1930169"/>
+                  </a:lnTo>
+                  <a:lnTo>
+                    <a:pt x="4162283" y="1883695"/>
+                  </a:lnTo>
+                  <a:lnTo>
+                    <a:pt x="4232830" y="1835583"/>
+                  </a:lnTo>
+                  <a:lnTo>
+                    <a:pt x="4303377" y="1785776"/>
+                  </a:lnTo>
+                  <a:lnTo>
+                    <a:pt x="4373924" y="1734215"/>
+                  </a:lnTo>
+                  <a:lnTo>
+                    <a:pt x="4444471" y="1680837"/>
+                  </a:lnTo>
+                  <a:lnTo>
+                    <a:pt x="4515019" y="1625578"/>
+                  </a:lnTo>
+                  <a:lnTo>
+                    <a:pt x="4585566" y="1568373"/>
+                  </a:lnTo>
+                  <a:lnTo>
+                    <a:pt x="4656113" y="1509153"/>
+                  </a:lnTo>
+                  <a:lnTo>
+                    <a:pt x="4726660" y="1447847"/>
+                  </a:lnTo>
+                  <a:lnTo>
+                    <a:pt x="4797207" y="1384381"/>
+                  </a:lnTo>
+                  <a:lnTo>
+                    <a:pt x="4867754" y="1318679"/>
+                  </a:lnTo>
+                  <a:lnTo>
+                    <a:pt x="4938302" y="1250662"/>
+                  </a:lnTo>
+                  <a:lnTo>
+                    <a:pt x="5008849" y="1180250"/>
+                  </a:lnTo>
+                  <a:lnTo>
+                    <a:pt x="5079396" y="1107357"/>
+                  </a:lnTo>
+                  <a:lnTo>
+                    <a:pt x="5149943" y="1031896"/>
+                  </a:lnTo>
+                  <a:lnTo>
+                    <a:pt x="5220490" y="953776"/>
+                  </a:lnTo>
+                  <a:lnTo>
+                    <a:pt x="5291037" y="872905"/>
+                  </a:lnTo>
+                  <a:lnTo>
+                    <a:pt x="5361585" y="789184"/>
+                  </a:lnTo>
+                  <a:lnTo>
+                    <a:pt x="5432132" y="702514"/>
+                  </a:lnTo>
+                  <a:lnTo>
+                    <a:pt x="5502679" y="612791"/>
+                  </a:lnTo>
+                  <a:lnTo>
+                    <a:pt x="5573226" y="519908"/>
+                  </a:lnTo>
+                  <a:lnTo>
+                    <a:pt x="5643773" y="423752"/>
+                  </a:lnTo>
+                  <a:lnTo>
+                    <a:pt x="5714320" y="324208"/>
+                  </a:lnTo>
+                  <a:lnTo>
+                    <a:pt x="5784868" y="221158"/>
+                  </a:lnTo>
+                  <a:lnTo>
+                    <a:pt x="5855415" y="114478"/>
+                  </a:lnTo>
+                  <a:lnTo>
+                    <a:pt x="5925962" y="4039"/>
+                  </a:lnTo>
+                  <a:lnTo>
+                    <a:pt x="5928455" y="0"/>
                   </a:lnTo>
                 </a:path>
               </a:pathLst>
@@ -4006,312 +4006,312 @@
           </p:nvSpPr>
           <p:spPr>
             <a:xfrm>
-              <a:off x="1172049" y="4736164"/>
-              <a:ext cx="7090630" cy="631210"/>
+              <a:off x="1264853" y="4692723"/>
+              <a:ext cx="6984170" cy="588751"/>
             </a:xfrm>
             <a:custGeom>
               <a:avLst/>
               <a:pathLst>
-                <a:path w="7090630" h="631210">
+                <a:path w="6984170" h="588751">
                   <a:moveTo>
-                    <a:pt x="7090630" y="613103"/>
+                    <a:pt x="6984170" y="571861"/>
                   </a:moveTo>
                   <a:lnTo>
-                    <a:pt x="7019007" y="607940"/>
-                  </a:lnTo>
-                  <a:lnTo>
-                    <a:pt x="6947385" y="602648"/>
-                  </a:lnTo>
-                  <a:lnTo>
-                    <a:pt x="6875762" y="597226"/>
-                  </a:lnTo>
-                  <a:lnTo>
-                    <a:pt x="6804139" y="591669"/>
-                  </a:lnTo>
-                  <a:lnTo>
-                    <a:pt x="6732517" y="585974"/>
-                  </a:lnTo>
-                  <a:lnTo>
-                    <a:pt x="6660894" y="580137"/>
-                  </a:lnTo>
-                  <a:lnTo>
-                    <a:pt x="6589272" y="574156"/>
-                  </a:lnTo>
-                  <a:lnTo>
-                    <a:pt x="6517649" y="568026"/>
-                  </a:lnTo>
-                  <a:lnTo>
-                    <a:pt x="6446027" y="561744"/>
-                  </a:lnTo>
-                  <a:lnTo>
-                    <a:pt x="6374404" y="555307"/>
-                  </a:lnTo>
-                  <a:lnTo>
-                    <a:pt x="6302782" y="548709"/>
-                  </a:lnTo>
-                  <a:lnTo>
-                    <a:pt x="6231159" y="541947"/>
-                  </a:lnTo>
-                  <a:lnTo>
-                    <a:pt x="6159537" y="535018"/>
-                  </a:lnTo>
-                  <a:lnTo>
-                    <a:pt x="6087914" y="527917"/>
-                  </a:lnTo>
-                  <a:lnTo>
-                    <a:pt x="6016292" y="520639"/>
-                  </a:lnTo>
-                  <a:lnTo>
-                    <a:pt x="5944669" y="513181"/>
-                  </a:lnTo>
-                  <a:lnTo>
-                    <a:pt x="5873047" y="505537"/>
-                  </a:lnTo>
-                  <a:lnTo>
-                    <a:pt x="5801424" y="497704"/>
-                  </a:lnTo>
-                  <a:lnTo>
-                    <a:pt x="5729802" y="489677"/>
-                  </a:lnTo>
-                  <a:lnTo>
-                    <a:pt x="5658179" y="481450"/>
-                  </a:lnTo>
-                  <a:lnTo>
-                    <a:pt x="5586557" y="473018"/>
-                  </a:lnTo>
-                  <a:lnTo>
-                    <a:pt x="5514934" y="464378"/>
-                  </a:lnTo>
-                  <a:lnTo>
-                    <a:pt x="5443311" y="455523"/>
-                  </a:lnTo>
-                  <a:lnTo>
-                    <a:pt x="5371689" y="446448"/>
-                  </a:lnTo>
-                  <a:lnTo>
-                    <a:pt x="5300066" y="437148"/>
-                  </a:lnTo>
-                  <a:lnTo>
-                    <a:pt x="5228444" y="427618"/>
-                  </a:lnTo>
-                  <a:lnTo>
-                    <a:pt x="5156821" y="417850"/>
-                  </a:lnTo>
-                  <a:lnTo>
-                    <a:pt x="5085199" y="407840"/>
-                  </a:lnTo>
-                  <a:lnTo>
-                    <a:pt x="5013576" y="397582"/>
-                  </a:lnTo>
-                  <a:lnTo>
-                    <a:pt x="4941954" y="387069"/>
-                  </a:lnTo>
-                  <a:lnTo>
-                    <a:pt x="4870331" y="376295"/>
-                  </a:lnTo>
-                  <a:lnTo>
-                    <a:pt x="4798709" y="365253"/>
-                  </a:lnTo>
-                  <a:lnTo>
-                    <a:pt x="4727086" y="353938"/>
-                  </a:lnTo>
-                  <a:lnTo>
-                    <a:pt x="4655464" y="342341"/>
-                  </a:lnTo>
-                  <a:lnTo>
-                    <a:pt x="4583841" y="330457"/>
-                  </a:lnTo>
-                  <a:lnTo>
-                    <a:pt x="4512219" y="318277"/>
-                  </a:lnTo>
-                  <a:lnTo>
-                    <a:pt x="4440596" y="305796"/>
-                  </a:lnTo>
-                  <a:lnTo>
-                    <a:pt x="4368974" y="293004"/>
-                  </a:lnTo>
-                  <a:lnTo>
-                    <a:pt x="4297351" y="279895"/>
-                  </a:lnTo>
-                  <a:lnTo>
-                    <a:pt x="4225729" y="266460"/>
-                  </a:lnTo>
-                  <a:lnTo>
-                    <a:pt x="4154106" y="252692"/>
-                  </a:lnTo>
-                  <a:lnTo>
-                    <a:pt x="4082483" y="238582"/>
-                  </a:lnTo>
-                  <a:lnTo>
-                    <a:pt x="4010861" y="224122"/>
-                  </a:lnTo>
-                  <a:lnTo>
-                    <a:pt x="3939238" y="209303"/>
-                  </a:lnTo>
-                  <a:lnTo>
-                    <a:pt x="3867616" y="194116"/>
-                  </a:lnTo>
-                  <a:lnTo>
-                    <a:pt x="3795993" y="178552"/>
-                  </a:lnTo>
-                  <a:lnTo>
-                    <a:pt x="3724371" y="162602"/>
-                  </a:lnTo>
-                  <a:lnTo>
-                    <a:pt x="3652748" y="146256"/>
-                  </a:lnTo>
-                  <a:lnTo>
-                    <a:pt x="3581126" y="129504"/>
-                  </a:lnTo>
-                  <a:lnTo>
-                    <a:pt x="3509503" y="112336"/>
-                  </a:lnTo>
-                  <a:lnTo>
-                    <a:pt x="3437881" y="94742"/>
-                  </a:lnTo>
-                  <a:lnTo>
-                    <a:pt x="3366258" y="76711"/>
-                  </a:lnTo>
-                  <a:lnTo>
-                    <a:pt x="3294636" y="58233"/>
-                  </a:lnTo>
-                  <a:lnTo>
-                    <a:pt x="3223013" y="39296"/>
-                  </a:lnTo>
-                  <a:lnTo>
-                    <a:pt x="3151391" y="19888"/>
-                  </a:lnTo>
-                  <a:lnTo>
-                    <a:pt x="3079768" y="0"/>
-                  </a:lnTo>
-                  <a:lnTo>
-                    <a:pt x="3008146" y="8279"/>
-                  </a:lnTo>
-                  <a:lnTo>
-                    <a:pt x="2936523" y="35938"/>
-                  </a:lnTo>
-                  <a:lnTo>
-                    <a:pt x="2864901" y="62657"/>
-                  </a:lnTo>
-                  <a:lnTo>
-                    <a:pt x="2793278" y="88466"/>
-                  </a:lnTo>
-                  <a:lnTo>
-                    <a:pt x="2721655" y="113396"/>
-                  </a:lnTo>
-                  <a:lnTo>
-                    <a:pt x="2650033" y="137479"/>
-                  </a:lnTo>
-                  <a:lnTo>
-                    <a:pt x="2578410" y="160742"/>
-                  </a:lnTo>
-                  <a:lnTo>
-                    <a:pt x="2506788" y="183213"/>
-                  </a:lnTo>
-                  <a:lnTo>
-                    <a:pt x="2435165" y="204919"/>
-                  </a:lnTo>
-                  <a:lnTo>
-                    <a:pt x="2363543" y="225887"/>
-                  </a:lnTo>
-                  <a:lnTo>
-                    <a:pt x="2291920" y="246141"/>
-                  </a:lnTo>
-                  <a:lnTo>
-                    <a:pt x="2220298" y="265707"/>
-                  </a:lnTo>
-                  <a:lnTo>
-                    <a:pt x="2148675" y="284606"/>
-                  </a:lnTo>
-                  <a:lnTo>
-                    <a:pt x="2077053" y="302862"/>
-                  </a:lnTo>
-                  <a:lnTo>
-                    <a:pt x="2005430" y="320497"/>
-                  </a:lnTo>
-                  <a:lnTo>
-                    <a:pt x="1933808" y="337532"/>
-                  </a:lnTo>
-                  <a:lnTo>
-                    <a:pt x="1862185" y="353987"/>
-                  </a:lnTo>
-                  <a:lnTo>
-                    <a:pt x="1790563" y="369882"/>
-                  </a:lnTo>
-                  <a:lnTo>
-                    <a:pt x="1718940" y="385236"/>
-                  </a:lnTo>
-                  <a:lnTo>
-                    <a:pt x="1647318" y="400068"/>
-                  </a:lnTo>
-                  <a:lnTo>
-                    <a:pt x="1575695" y="414395"/>
-                  </a:lnTo>
-                  <a:lnTo>
-                    <a:pt x="1504073" y="428234"/>
-                  </a:lnTo>
-                  <a:lnTo>
-                    <a:pt x="1432450" y="441603"/>
-                  </a:lnTo>
-                  <a:lnTo>
-                    <a:pt x="1360827" y="454517"/>
-                  </a:lnTo>
-                  <a:lnTo>
-                    <a:pt x="1289205" y="466991"/>
-                  </a:lnTo>
-                  <a:lnTo>
-                    <a:pt x="1217582" y="479040"/>
-                  </a:lnTo>
-                  <a:lnTo>
-                    <a:pt x="1145960" y="490680"/>
-                  </a:lnTo>
-                  <a:lnTo>
-                    <a:pt x="1074337" y="501924"/>
-                  </a:lnTo>
-                  <a:lnTo>
-                    <a:pt x="1002715" y="512785"/>
-                  </a:lnTo>
-                  <a:lnTo>
-                    <a:pt x="931092" y="523276"/>
-                  </a:lnTo>
-                  <a:lnTo>
-                    <a:pt x="859470" y="533410"/>
-                  </a:lnTo>
-                  <a:lnTo>
-                    <a:pt x="787847" y="543200"/>
-                  </a:lnTo>
-                  <a:lnTo>
-                    <a:pt x="716225" y="552656"/>
-                  </a:lnTo>
-                  <a:lnTo>
-                    <a:pt x="644602" y="561790"/>
-                  </a:lnTo>
-                  <a:lnTo>
-                    <a:pt x="572980" y="570614"/>
-                  </a:lnTo>
-                  <a:lnTo>
-                    <a:pt x="501357" y="579138"/>
-                  </a:lnTo>
-                  <a:lnTo>
-                    <a:pt x="429735" y="587371"/>
-                  </a:lnTo>
-                  <a:lnTo>
-                    <a:pt x="358112" y="595324"/>
-                  </a:lnTo>
-                  <a:lnTo>
-                    <a:pt x="286490" y="603007"/>
-                  </a:lnTo>
-                  <a:lnTo>
-                    <a:pt x="214867" y="610428"/>
-                  </a:lnTo>
-                  <a:lnTo>
-                    <a:pt x="143245" y="617596"/>
-                  </a:lnTo>
-                  <a:lnTo>
-                    <a:pt x="71622" y="624521"/>
-                  </a:lnTo>
-                  <a:lnTo>
-                    <a:pt x="0" y="631210"/>
+                    <a:pt x="6913622" y="567046"/>
+                  </a:lnTo>
+                  <a:lnTo>
+                    <a:pt x="6843075" y="562110"/>
+                  </a:lnTo>
+                  <a:lnTo>
+                    <a:pt x="6772528" y="557053"/>
+                  </a:lnTo>
+                  <a:lnTo>
+                    <a:pt x="6701981" y="551869"/>
+                  </a:lnTo>
+                  <a:lnTo>
+                    <a:pt x="6631434" y="546557"/>
+                  </a:lnTo>
+                  <a:lnTo>
+                    <a:pt x="6560887" y="541114"/>
+                  </a:lnTo>
+                  <a:lnTo>
+                    <a:pt x="6490339" y="535535"/>
+                  </a:lnTo>
+                  <a:lnTo>
+                    <a:pt x="6419792" y="529817"/>
+                  </a:lnTo>
+                  <a:lnTo>
+                    <a:pt x="6349245" y="523958"/>
+                  </a:lnTo>
+                  <a:lnTo>
+                    <a:pt x="6278698" y="517953"/>
+                  </a:lnTo>
+                  <a:lnTo>
+                    <a:pt x="6208151" y="511799"/>
+                  </a:lnTo>
+                  <a:lnTo>
+                    <a:pt x="6137604" y="505493"/>
+                  </a:lnTo>
+                  <a:lnTo>
+                    <a:pt x="6067056" y="499029"/>
+                  </a:lnTo>
+                  <a:lnTo>
+                    <a:pt x="5996509" y="492406"/>
+                  </a:lnTo>
+                  <a:lnTo>
+                    <a:pt x="5925962" y="485618"/>
+                  </a:lnTo>
+                  <a:lnTo>
+                    <a:pt x="5855415" y="478661"/>
+                  </a:lnTo>
+                  <a:lnTo>
+                    <a:pt x="5784868" y="471532"/>
+                  </a:lnTo>
+                  <a:lnTo>
+                    <a:pt x="5714320" y="464225"/>
+                  </a:lnTo>
+                  <a:lnTo>
+                    <a:pt x="5643773" y="456738"/>
+                  </a:lnTo>
+                  <a:lnTo>
+                    <a:pt x="5573226" y="449064"/>
+                  </a:lnTo>
+                  <a:lnTo>
+                    <a:pt x="5502679" y="441200"/>
+                  </a:lnTo>
+                  <a:lnTo>
+                    <a:pt x="5432132" y="433141"/>
+                  </a:lnTo>
+                  <a:lnTo>
+                    <a:pt x="5361585" y="424882"/>
+                  </a:lnTo>
+                  <a:lnTo>
+                    <a:pt x="5291037" y="416417"/>
+                  </a:lnTo>
+                  <a:lnTo>
+                    <a:pt x="5220490" y="407743"/>
+                  </a:lnTo>
+                  <a:lnTo>
+                    <a:pt x="5149943" y="398853"/>
+                  </a:lnTo>
+                  <a:lnTo>
+                    <a:pt x="5079396" y="389743"/>
+                  </a:lnTo>
+                  <a:lnTo>
+                    <a:pt x="5008849" y="380406"/>
+                  </a:lnTo>
+                  <a:lnTo>
+                    <a:pt x="4938302" y="370838"/>
+                  </a:lnTo>
+                  <a:lnTo>
+                    <a:pt x="4867754" y="361032"/>
+                  </a:lnTo>
+                  <a:lnTo>
+                    <a:pt x="4797207" y="350983"/>
+                  </a:lnTo>
+                  <a:lnTo>
+                    <a:pt x="4726660" y="340684"/>
+                  </a:lnTo>
+                  <a:lnTo>
+                    <a:pt x="4656113" y="330129"/>
+                  </a:lnTo>
+                  <a:lnTo>
+                    <a:pt x="4585566" y="319313"/>
+                  </a:lnTo>
+                  <a:lnTo>
+                    <a:pt x="4515019" y="308228"/>
+                  </a:lnTo>
+                  <a:lnTo>
+                    <a:pt x="4444471" y="296868"/>
+                  </a:lnTo>
+                  <a:lnTo>
+                    <a:pt x="4373924" y="285226"/>
+                  </a:lnTo>
+                  <a:lnTo>
+                    <a:pt x="4303377" y="273295"/>
+                  </a:lnTo>
+                  <a:lnTo>
+                    <a:pt x="4232830" y="261067"/>
+                  </a:lnTo>
+                  <a:lnTo>
+                    <a:pt x="4162283" y="248536"/>
+                  </a:lnTo>
+                  <a:lnTo>
+                    <a:pt x="4091736" y="235694"/>
+                  </a:lnTo>
+                  <a:lnTo>
+                    <a:pt x="4021188" y="222534"/>
+                  </a:lnTo>
+                  <a:lnTo>
+                    <a:pt x="3950641" y="209046"/>
+                  </a:lnTo>
+                  <a:lnTo>
+                    <a:pt x="3880094" y="195224"/>
+                  </a:lnTo>
+                  <a:lnTo>
+                    <a:pt x="3809547" y="181059"/>
+                  </a:lnTo>
+                  <a:lnTo>
+                    <a:pt x="3739000" y="166542"/>
+                  </a:lnTo>
+                  <a:lnTo>
+                    <a:pt x="3668452" y="151664"/>
+                  </a:lnTo>
+                  <a:lnTo>
+                    <a:pt x="3597905" y="136418"/>
+                  </a:lnTo>
+                  <a:lnTo>
+                    <a:pt x="3527358" y="120793"/>
+                  </a:lnTo>
+                  <a:lnTo>
+                    <a:pt x="3456811" y="104780"/>
+                  </a:lnTo>
+                  <a:lnTo>
+                    <a:pt x="3386264" y="88369"/>
+                  </a:lnTo>
+                  <a:lnTo>
+                    <a:pt x="3315717" y="71551"/>
+                  </a:lnTo>
+                  <a:lnTo>
+                    <a:pt x="3245169" y="54316"/>
+                  </a:lnTo>
+                  <a:lnTo>
+                    <a:pt x="3174622" y="36652"/>
+                  </a:lnTo>
+                  <a:lnTo>
+                    <a:pt x="3104075" y="18551"/>
+                  </a:lnTo>
+                  <a:lnTo>
+                    <a:pt x="3033528" y="0"/>
+                  </a:lnTo>
+                  <a:lnTo>
+                    <a:pt x="2962981" y="7722"/>
+                  </a:lnTo>
+                  <a:lnTo>
+                    <a:pt x="2892434" y="33521"/>
+                  </a:lnTo>
+                  <a:lnTo>
+                    <a:pt x="2821886" y="58442"/>
+                  </a:lnTo>
+                  <a:lnTo>
+                    <a:pt x="2751339" y="82515"/>
+                  </a:lnTo>
+                  <a:lnTo>
+                    <a:pt x="2680792" y="105769"/>
+                  </a:lnTo>
+                  <a:lnTo>
+                    <a:pt x="2610245" y="128231"/>
+                  </a:lnTo>
+                  <a:lnTo>
+                    <a:pt x="2539698" y="149929"/>
+                  </a:lnTo>
+                  <a:lnTo>
+                    <a:pt x="2469151" y="170889"/>
+                  </a:lnTo>
+                  <a:lnTo>
+                    <a:pt x="2398603" y="191135"/>
+                  </a:lnTo>
+                  <a:lnTo>
+                    <a:pt x="2328056" y="210693"/>
+                  </a:lnTo>
+                  <a:lnTo>
+                    <a:pt x="2257509" y="229584"/>
+                  </a:lnTo>
+                  <a:lnTo>
+                    <a:pt x="2186962" y="247833"/>
+                  </a:lnTo>
+                  <a:lnTo>
+                    <a:pt x="2116415" y="265461"/>
+                  </a:lnTo>
+                  <a:lnTo>
+                    <a:pt x="2045868" y="282490"/>
+                  </a:lnTo>
+                  <a:lnTo>
+                    <a:pt x="1975320" y="298938"/>
+                  </a:lnTo>
+                  <a:lnTo>
+                    <a:pt x="1904773" y="314827"/>
+                  </a:lnTo>
+                  <a:lnTo>
+                    <a:pt x="1834226" y="330175"/>
+                  </a:lnTo>
+                  <a:lnTo>
+                    <a:pt x="1763679" y="345001"/>
+                  </a:lnTo>
+                  <a:lnTo>
+                    <a:pt x="1693132" y="359323"/>
+                  </a:lnTo>
+                  <a:lnTo>
+                    <a:pt x="1622584" y="373157"/>
+                  </a:lnTo>
+                  <a:lnTo>
+                    <a:pt x="1552037" y="386520"/>
+                  </a:lnTo>
+                  <a:lnTo>
+                    <a:pt x="1481490" y="399429"/>
+                  </a:lnTo>
+                  <a:lnTo>
+                    <a:pt x="1410943" y="411898"/>
+                  </a:lnTo>
+                  <a:lnTo>
+                    <a:pt x="1340396" y="423943"/>
+                  </a:lnTo>
+                  <a:lnTo>
+                    <a:pt x="1269849" y="435578"/>
+                  </a:lnTo>
+                  <a:lnTo>
+                    <a:pt x="1199301" y="446817"/>
+                  </a:lnTo>
+                  <a:lnTo>
+                    <a:pt x="1128754" y="457674"/>
+                  </a:lnTo>
+                  <a:lnTo>
+                    <a:pt x="1058207" y="468161"/>
+                  </a:lnTo>
+                  <a:lnTo>
+                    <a:pt x="987660" y="478291"/>
+                  </a:lnTo>
+                  <a:lnTo>
+                    <a:pt x="917113" y="488077"/>
+                  </a:lnTo>
+                  <a:lnTo>
+                    <a:pt x="846566" y="497530"/>
+                  </a:lnTo>
+                  <a:lnTo>
+                    <a:pt x="776018" y="506661"/>
+                  </a:lnTo>
+                  <a:lnTo>
+                    <a:pt x="705471" y="515481"/>
+                  </a:lnTo>
+                  <a:lnTo>
+                    <a:pt x="634924" y="524001"/>
+                  </a:lnTo>
+                  <a:lnTo>
+                    <a:pt x="564377" y="532231"/>
+                  </a:lnTo>
+                  <a:lnTo>
+                    <a:pt x="493830" y="540181"/>
+                  </a:lnTo>
+                  <a:lnTo>
+                    <a:pt x="423283" y="547861"/>
+                  </a:lnTo>
+                  <a:lnTo>
+                    <a:pt x="352735" y="555279"/>
+                  </a:lnTo>
+                  <a:lnTo>
+                    <a:pt x="282188" y="562445"/>
+                  </a:lnTo>
+                  <a:lnTo>
+                    <a:pt x="211641" y="569366"/>
+                  </a:lnTo>
+                  <a:lnTo>
+                    <a:pt x="141094" y="576053"/>
+                  </a:lnTo>
+                  <a:lnTo>
+                    <a:pt x="70547" y="582512"/>
+                  </a:lnTo>
+                  <a:lnTo>
+                    <a:pt x="0" y="588751"/>
                   </a:lnTo>
                 </a:path>
               </a:pathLst>
@@ -4331,312 +4331,312 @@
           </p:nvSpPr>
           <p:spPr>
             <a:xfrm>
-              <a:off x="1172049" y="4454346"/>
-              <a:ext cx="7090630" cy="433961"/>
+              <a:off x="1264853" y="4429862"/>
+              <a:ext cx="6984170" cy="404770"/>
             </a:xfrm>
             <a:custGeom>
               <a:avLst/>
               <a:pathLst>
-                <a:path w="7090630" h="433961">
+                <a:path w="6984170" h="404770">
                   <a:moveTo>
-                    <a:pt x="0" y="433961"/>
+                    <a:pt x="0" y="404770"/>
                   </a:moveTo>
                   <a:lnTo>
-                    <a:pt x="71622" y="430574"/>
-                  </a:lnTo>
-                  <a:lnTo>
-                    <a:pt x="143245" y="427170"/>
-                  </a:lnTo>
-                  <a:lnTo>
-                    <a:pt x="214867" y="423749"/>
-                  </a:lnTo>
-                  <a:lnTo>
-                    <a:pt x="286490" y="420310"/>
-                  </a:lnTo>
-                  <a:lnTo>
-                    <a:pt x="358112" y="416854"/>
-                  </a:lnTo>
-                  <a:lnTo>
-                    <a:pt x="429735" y="413380"/>
-                  </a:lnTo>
-                  <a:lnTo>
-                    <a:pt x="501357" y="409889"/>
-                  </a:lnTo>
-                  <a:lnTo>
-                    <a:pt x="572980" y="406380"/>
-                  </a:lnTo>
-                  <a:lnTo>
-                    <a:pt x="644602" y="402853"/>
-                  </a:lnTo>
-                  <a:lnTo>
-                    <a:pt x="716225" y="399308"/>
-                  </a:lnTo>
-                  <a:lnTo>
-                    <a:pt x="787847" y="395746"/>
-                  </a:lnTo>
-                  <a:lnTo>
-                    <a:pt x="859470" y="392165"/>
-                  </a:lnTo>
-                  <a:lnTo>
-                    <a:pt x="931092" y="388567"/>
-                  </a:lnTo>
-                  <a:lnTo>
-                    <a:pt x="1002715" y="384950"/>
-                  </a:lnTo>
-                  <a:lnTo>
-                    <a:pt x="1074337" y="381314"/>
-                  </a:lnTo>
-                  <a:lnTo>
-                    <a:pt x="1145960" y="377661"/>
-                  </a:lnTo>
-                  <a:lnTo>
-                    <a:pt x="1217582" y="373989"/>
-                  </a:lnTo>
-                  <a:lnTo>
-                    <a:pt x="1289205" y="370298"/>
-                  </a:lnTo>
-                  <a:lnTo>
-                    <a:pt x="1360827" y="366588"/>
-                  </a:lnTo>
-                  <a:lnTo>
-                    <a:pt x="1432450" y="362860"/>
-                  </a:lnTo>
-                  <a:lnTo>
-                    <a:pt x="1504073" y="359113"/>
-                  </a:lnTo>
-                  <a:lnTo>
-                    <a:pt x="1575695" y="355347"/>
-                  </a:lnTo>
-                  <a:lnTo>
-                    <a:pt x="1647318" y="351562"/>
-                  </a:lnTo>
-                  <a:lnTo>
-                    <a:pt x="1718940" y="347758"/>
-                  </a:lnTo>
-                  <a:lnTo>
-                    <a:pt x="1790563" y="343934"/>
-                  </a:lnTo>
-                  <a:lnTo>
-                    <a:pt x="1862185" y="340091"/>
-                  </a:lnTo>
-                  <a:lnTo>
-                    <a:pt x="1933808" y="336229"/>
-                  </a:lnTo>
-                  <a:lnTo>
-                    <a:pt x="2005430" y="332347"/>
-                  </a:lnTo>
-                  <a:lnTo>
-                    <a:pt x="2077053" y="328445"/>
-                  </a:lnTo>
-                  <a:lnTo>
-                    <a:pt x="2148675" y="324524"/>
-                  </a:lnTo>
-                  <a:lnTo>
-                    <a:pt x="2220298" y="320583"/>
-                  </a:lnTo>
-                  <a:lnTo>
-                    <a:pt x="2291920" y="316622"/>
-                  </a:lnTo>
-                  <a:lnTo>
-                    <a:pt x="2363543" y="312641"/>
-                  </a:lnTo>
-                  <a:lnTo>
-                    <a:pt x="2435165" y="308639"/>
-                  </a:lnTo>
-                  <a:lnTo>
-                    <a:pt x="2506788" y="304618"/>
-                  </a:lnTo>
-                  <a:lnTo>
-                    <a:pt x="2578410" y="300576"/>
-                  </a:lnTo>
-                  <a:lnTo>
-                    <a:pt x="2650033" y="296513"/>
-                  </a:lnTo>
-                  <a:lnTo>
-                    <a:pt x="2721655" y="292430"/>
-                  </a:lnTo>
-                  <a:lnTo>
-                    <a:pt x="2793278" y="288326"/>
-                  </a:lnTo>
-                  <a:lnTo>
-                    <a:pt x="2864901" y="284202"/>
-                  </a:lnTo>
-                  <a:lnTo>
-                    <a:pt x="2936523" y="280057"/>
-                  </a:lnTo>
-                  <a:lnTo>
-                    <a:pt x="3008146" y="275890"/>
-                  </a:lnTo>
-                  <a:lnTo>
-                    <a:pt x="3079768" y="271703"/>
-                  </a:lnTo>
-                  <a:lnTo>
-                    <a:pt x="3151391" y="267494"/>
-                  </a:lnTo>
-                  <a:lnTo>
-                    <a:pt x="3223013" y="263264"/>
-                  </a:lnTo>
-                  <a:lnTo>
-                    <a:pt x="3294636" y="259013"/>
-                  </a:lnTo>
-                  <a:lnTo>
-                    <a:pt x="3366258" y="254740"/>
-                  </a:lnTo>
-                  <a:lnTo>
-                    <a:pt x="3437881" y="250445"/>
-                  </a:lnTo>
-                  <a:lnTo>
-                    <a:pt x="3509503" y="246129"/>
-                  </a:lnTo>
-                  <a:lnTo>
-                    <a:pt x="3581126" y="241791"/>
-                  </a:lnTo>
-                  <a:lnTo>
-                    <a:pt x="3652748" y="237431"/>
-                  </a:lnTo>
-                  <a:lnTo>
-                    <a:pt x="3724371" y="233049"/>
-                  </a:lnTo>
-                  <a:lnTo>
-                    <a:pt x="3795993" y="228644"/>
-                  </a:lnTo>
-                  <a:lnTo>
-                    <a:pt x="3867616" y="224218"/>
-                  </a:lnTo>
-                  <a:lnTo>
-                    <a:pt x="3939238" y="219769"/>
-                  </a:lnTo>
-                  <a:lnTo>
-                    <a:pt x="4010861" y="215297"/>
-                  </a:lnTo>
-                  <a:lnTo>
-                    <a:pt x="4082483" y="210803"/>
-                  </a:lnTo>
-                  <a:lnTo>
-                    <a:pt x="4154106" y="206286"/>
-                  </a:lnTo>
-                  <a:lnTo>
-                    <a:pt x="4225729" y="201746"/>
-                  </a:lnTo>
-                  <a:lnTo>
-                    <a:pt x="4297351" y="197183"/>
-                  </a:lnTo>
-                  <a:lnTo>
-                    <a:pt x="4368974" y="192597"/>
-                  </a:lnTo>
-                  <a:lnTo>
-                    <a:pt x="4440596" y="187988"/>
-                  </a:lnTo>
-                  <a:lnTo>
-                    <a:pt x="4512219" y="183356"/>
-                  </a:lnTo>
-                  <a:lnTo>
-                    <a:pt x="4583841" y="178700"/>
-                  </a:lnTo>
-                  <a:lnTo>
-                    <a:pt x="4655464" y="174020"/>
-                  </a:lnTo>
-                  <a:lnTo>
-                    <a:pt x="4727086" y="169317"/>
-                  </a:lnTo>
-                  <a:lnTo>
-                    <a:pt x="4798709" y="164590"/>
-                  </a:lnTo>
-                  <a:lnTo>
-                    <a:pt x="4870331" y="159839"/>
-                  </a:lnTo>
-                  <a:lnTo>
-                    <a:pt x="4941954" y="155064"/>
-                  </a:lnTo>
-                  <a:lnTo>
-                    <a:pt x="5013576" y="150264"/>
-                  </a:lnTo>
-                  <a:lnTo>
-                    <a:pt x="5085199" y="145441"/>
-                  </a:lnTo>
-                  <a:lnTo>
-                    <a:pt x="5156821" y="140593"/>
-                  </a:lnTo>
-                  <a:lnTo>
-                    <a:pt x="5228444" y="135721"/>
-                  </a:lnTo>
-                  <a:lnTo>
-                    <a:pt x="5300066" y="130823"/>
-                  </a:lnTo>
-                  <a:lnTo>
-                    <a:pt x="5371689" y="125901"/>
-                  </a:lnTo>
-                  <a:lnTo>
-                    <a:pt x="5443311" y="120955"/>
-                  </a:lnTo>
-                  <a:lnTo>
-                    <a:pt x="5514934" y="115983"/>
-                  </a:lnTo>
-                  <a:lnTo>
-                    <a:pt x="5586557" y="110985"/>
-                  </a:lnTo>
-                  <a:lnTo>
-                    <a:pt x="5658179" y="105963"/>
-                  </a:lnTo>
-                  <a:lnTo>
-                    <a:pt x="5729802" y="100915"/>
-                  </a:lnTo>
-                  <a:lnTo>
-                    <a:pt x="5801424" y="95842"/>
-                  </a:lnTo>
-                  <a:lnTo>
-                    <a:pt x="5873047" y="90743"/>
-                  </a:lnTo>
-                  <a:lnTo>
-                    <a:pt x="5944669" y="85618"/>
-                  </a:lnTo>
-                  <a:lnTo>
-                    <a:pt x="6016292" y="80467"/>
-                  </a:lnTo>
-                  <a:lnTo>
-                    <a:pt x="6087914" y="75290"/>
-                  </a:lnTo>
-                  <a:lnTo>
-                    <a:pt x="6159537" y="70087"/>
-                  </a:lnTo>
-                  <a:lnTo>
-                    <a:pt x="6231159" y="64857"/>
-                  </a:lnTo>
-                  <a:lnTo>
-                    <a:pt x="6302782" y="59602"/>
-                  </a:lnTo>
-                  <a:lnTo>
-                    <a:pt x="6374404" y="54319"/>
-                  </a:lnTo>
-                  <a:lnTo>
-                    <a:pt x="6446027" y="49010"/>
-                  </a:lnTo>
-                  <a:lnTo>
-                    <a:pt x="6517649" y="43673"/>
-                  </a:lnTo>
-                  <a:lnTo>
-                    <a:pt x="6589272" y="38310"/>
-                  </a:lnTo>
-                  <a:lnTo>
-                    <a:pt x="6660894" y="32920"/>
-                  </a:lnTo>
-                  <a:lnTo>
-                    <a:pt x="6732517" y="27502"/>
-                  </a:lnTo>
-                  <a:lnTo>
-                    <a:pt x="6804139" y="22057"/>
-                  </a:lnTo>
-                  <a:lnTo>
-                    <a:pt x="6875762" y="16584"/>
-                  </a:lnTo>
-                  <a:lnTo>
-                    <a:pt x="6947385" y="11084"/>
-                  </a:lnTo>
-                  <a:lnTo>
-                    <a:pt x="7019007" y="5556"/>
-                  </a:lnTo>
-                  <a:lnTo>
-                    <a:pt x="7090630" y="0"/>
+                    <a:pt x="70547" y="401611"/>
+                  </a:lnTo>
+                  <a:lnTo>
+                    <a:pt x="141094" y="398436"/>
+                  </a:lnTo>
+                  <a:lnTo>
+                    <a:pt x="211641" y="395244"/>
+                  </a:lnTo>
+                  <a:lnTo>
+                    <a:pt x="282188" y="392037"/>
+                  </a:lnTo>
+                  <a:lnTo>
+                    <a:pt x="352735" y="388813"/>
+                  </a:lnTo>
+                  <a:lnTo>
+                    <a:pt x="423283" y="385573"/>
+                  </a:lnTo>
+                  <a:lnTo>
+                    <a:pt x="493830" y="382317"/>
+                  </a:lnTo>
+                  <a:lnTo>
+                    <a:pt x="564377" y="379044"/>
+                  </a:lnTo>
+                  <a:lnTo>
+                    <a:pt x="634924" y="375754"/>
+                  </a:lnTo>
+                  <a:lnTo>
+                    <a:pt x="705471" y="372448"/>
+                  </a:lnTo>
+                  <a:lnTo>
+                    <a:pt x="776018" y="369125"/>
+                  </a:lnTo>
+                  <a:lnTo>
+                    <a:pt x="846566" y="365786"/>
+                  </a:lnTo>
+                  <a:lnTo>
+                    <a:pt x="917113" y="362429"/>
+                  </a:lnTo>
+                  <a:lnTo>
+                    <a:pt x="987660" y="359055"/>
+                  </a:lnTo>
+                  <a:lnTo>
+                    <a:pt x="1058207" y="355665"/>
+                  </a:lnTo>
+                  <a:lnTo>
+                    <a:pt x="1128754" y="352257"/>
+                  </a:lnTo>
+                  <a:lnTo>
+                    <a:pt x="1199301" y="348832"/>
+                  </a:lnTo>
+                  <a:lnTo>
+                    <a:pt x="1269849" y="345389"/>
+                  </a:lnTo>
+                  <a:lnTo>
+                    <a:pt x="1340396" y="341929"/>
+                  </a:lnTo>
+                  <a:lnTo>
+                    <a:pt x="1410943" y="338452"/>
+                  </a:lnTo>
+                  <a:lnTo>
+                    <a:pt x="1481490" y="334957"/>
+                  </a:lnTo>
+                  <a:lnTo>
+                    <a:pt x="1552037" y="331444"/>
+                  </a:lnTo>
+                  <a:lnTo>
+                    <a:pt x="1622584" y="327914"/>
+                  </a:lnTo>
+                  <a:lnTo>
+                    <a:pt x="1693132" y="324365"/>
+                  </a:lnTo>
+                  <a:lnTo>
+                    <a:pt x="1763679" y="320799"/>
+                  </a:lnTo>
+                  <a:lnTo>
+                    <a:pt x="1834226" y="317215"/>
+                  </a:lnTo>
+                  <a:lnTo>
+                    <a:pt x="1904773" y="313612"/>
+                  </a:lnTo>
+                  <a:lnTo>
+                    <a:pt x="1975320" y="309991"/>
+                  </a:lnTo>
+                  <a:lnTo>
+                    <a:pt x="2045868" y="306352"/>
+                  </a:lnTo>
+                  <a:lnTo>
+                    <a:pt x="2116415" y="302694"/>
+                  </a:lnTo>
+                  <a:lnTo>
+                    <a:pt x="2186962" y="299018"/>
+                  </a:lnTo>
+                  <a:lnTo>
+                    <a:pt x="2257509" y="295324"/>
+                  </a:lnTo>
+                  <a:lnTo>
+                    <a:pt x="2328056" y="291610"/>
+                  </a:lnTo>
+                  <a:lnTo>
+                    <a:pt x="2398603" y="287878"/>
+                  </a:lnTo>
+                  <a:lnTo>
+                    <a:pt x="2469151" y="284127"/>
+                  </a:lnTo>
+                  <a:lnTo>
+                    <a:pt x="2539698" y="280357"/>
+                  </a:lnTo>
+                  <a:lnTo>
+                    <a:pt x="2610245" y="276568"/>
+                  </a:lnTo>
+                  <a:lnTo>
+                    <a:pt x="2680792" y="272759"/>
+                  </a:lnTo>
+                  <a:lnTo>
+                    <a:pt x="2751339" y="268932"/>
+                  </a:lnTo>
+                  <a:lnTo>
+                    <a:pt x="2821886" y="265085"/>
+                  </a:lnTo>
+                  <a:lnTo>
+                    <a:pt x="2892434" y="261218"/>
+                  </a:lnTo>
+                  <a:lnTo>
+                    <a:pt x="2962981" y="257332"/>
+                  </a:lnTo>
+                  <a:lnTo>
+                    <a:pt x="3033528" y="253426"/>
+                  </a:lnTo>
+                  <a:lnTo>
+                    <a:pt x="3104075" y="249501"/>
+                  </a:lnTo>
+                  <a:lnTo>
+                    <a:pt x="3174622" y="245555"/>
+                  </a:lnTo>
+                  <a:lnTo>
+                    <a:pt x="3245169" y="241590"/>
+                  </a:lnTo>
+                  <a:lnTo>
+                    <a:pt x="3315717" y="237605"/>
+                  </a:lnTo>
+                  <a:lnTo>
+                    <a:pt x="3386264" y="233599"/>
+                  </a:lnTo>
+                  <a:lnTo>
+                    <a:pt x="3456811" y="229573"/>
+                  </a:lnTo>
+                  <a:lnTo>
+                    <a:pt x="3527358" y="225527"/>
+                  </a:lnTo>
+                  <a:lnTo>
+                    <a:pt x="3597905" y="221460"/>
+                  </a:lnTo>
+                  <a:lnTo>
+                    <a:pt x="3668452" y="217372"/>
+                  </a:lnTo>
+                  <a:lnTo>
+                    <a:pt x="3739000" y="213264"/>
+                  </a:lnTo>
+                  <a:lnTo>
+                    <a:pt x="3809547" y="209135"/>
+                  </a:lnTo>
+                  <a:lnTo>
+                    <a:pt x="3880094" y="204986"/>
+                  </a:lnTo>
+                  <a:lnTo>
+                    <a:pt x="3950641" y="200815"/>
+                  </a:lnTo>
+                  <a:lnTo>
+                    <a:pt x="4021188" y="196623"/>
+                  </a:lnTo>
+                  <a:lnTo>
+                    <a:pt x="4091736" y="192410"/>
+                  </a:lnTo>
+                  <a:lnTo>
+                    <a:pt x="4162283" y="188175"/>
+                  </a:lnTo>
+                  <a:lnTo>
+                    <a:pt x="4232830" y="183919"/>
+                  </a:lnTo>
+                  <a:lnTo>
+                    <a:pt x="4303377" y="179642"/>
+                  </a:lnTo>
+                  <a:lnTo>
+                    <a:pt x="4373924" y="175343"/>
+                  </a:lnTo>
+                  <a:lnTo>
+                    <a:pt x="4444471" y="171022"/>
+                  </a:lnTo>
+                  <a:lnTo>
+                    <a:pt x="4515019" y="166679"/>
+                  </a:lnTo>
+                  <a:lnTo>
+                    <a:pt x="4585566" y="162314"/>
+                  </a:lnTo>
+                  <a:lnTo>
+                    <a:pt x="4656113" y="157927"/>
+                  </a:lnTo>
+                  <a:lnTo>
+                    <a:pt x="4726660" y="153518"/>
+                  </a:lnTo>
+                  <a:lnTo>
+                    <a:pt x="4797207" y="149087"/>
+                  </a:lnTo>
+                  <a:lnTo>
+                    <a:pt x="4867754" y="144633"/>
+                  </a:lnTo>
+                  <a:lnTo>
+                    <a:pt x="4938302" y="140157"/>
+                  </a:lnTo>
+                  <a:lnTo>
+                    <a:pt x="5008849" y="135658"/>
+                  </a:lnTo>
+                  <a:lnTo>
+                    <a:pt x="5079396" y="131136"/>
+                  </a:lnTo>
+                  <a:lnTo>
+                    <a:pt x="5149943" y="126591"/>
+                  </a:lnTo>
+                  <a:lnTo>
+                    <a:pt x="5220490" y="122023"/>
+                  </a:lnTo>
+                  <a:lnTo>
+                    <a:pt x="5291037" y="117432"/>
+                  </a:lnTo>
+                  <a:lnTo>
+                    <a:pt x="5361585" y="112818"/>
+                  </a:lnTo>
+                  <a:lnTo>
+                    <a:pt x="5432132" y="108181"/>
+                  </a:lnTo>
+                  <a:lnTo>
+                    <a:pt x="5502679" y="103520"/>
+                  </a:lnTo>
+                  <a:lnTo>
+                    <a:pt x="5573226" y="98835"/>
+                  </a:lnTo>
+                  <a:lnTo>
+                    <a:pt x="5643773" y="94127"/>
+                  </a:lnTo>
+                  <a:lnTo>
+                    <a:pt x="5714320" y="89395"/>
+                  </a:lnTo>
+                  <a:lnTo>
+                    <a:pt x="5784868" y="84639"/>
+                  </a:lnTo>
+                  <a:lnTo>
+                    <a:pt x="5855415" y="79859"/>
+                  </a:lnTo>
+                  <a:lnTo>
+                    <a:pt x="5925962" y="75054"/>
+                  </a:lnTo>
+                  <a:lnTo>
+                    <a:pt x="5996509" y="70226"/>
+                  </a:lnTo>
+                  <a:lnTo>
+                    <a:pt x="6067056" y="65372"/>
+                  </a:lnTo>
+                  <a:lnTo>
+                    <a:pt x="6137604" y="60495"/>
+                  </a:lnTo>
+                  <a:lnTo>
+                    <a:pt x="6208151" y="55592"/>
+                  </a:lnTo>
+                  <a:lnTo>
+                    <a:pt x="6278698" y="50665"/>
+                  </a:lnTo>
+                  <a:lnTo>
+                    <a:pt x="6349245" y="45713"/>
+                  </a:lnTo>
+                  <a:lnTo>
+                    <a:pt x="6419792" y="40736"/>
+                  </a:lnTo>
+                  <a:lnTo>
+                    <a:pt x="6490339" y="35733"/>
+                  </a:lnTo>
+                  <a:lnTo>
+                    <a:pt x="6560887" y="30705"/>
+                  </a:lnTo>
+                  <a:lnTo>
+                    <a:pt x="6631434" y="25652"/>
+                  </a:lnTo>
+                  <a:lnTo>
+                    <a:pt x="6701981" y="20573"/>
+                  </a:lnTo>
+                  <a:lnTo>
+                    <a:pt x="6772528" y="15469"/>
+                  </a:lnTo>
+                  <a:lnTo>
+                    <a:pt x="6843075" y="10338"/>
+                  </a:lnTo>
+                  <a:lnTo>
+                    <a:pt x="6913622" y="5182"/>
+                  </a:lnTo>
+                  <a:lnTo>
+                    <a:pt x="6984170" y="0"/>
                   </a:lnTo>
                 </a:path>
               </a:pathLst>
@@ -4665,21 +4665,21 @@
           </p:nvSpPr>
           <p:spPr>
             <a:xfrm>
-              <a:off x="817517" y="4727786"/>
-              <a:ext cx="7799693" cy="0"/>
+              <a:off x="915645" y="4684908"/>
+              <a:ext cx="7682587" cy="0"/>
             </a:xfrm>
             <a:custGeom>
               <a:avLst/>
               <a:pathLst>
-                <a:path w="7799693" h="0">
+                <a:path w="7682587" h="0">
                   <a:moveTo>
                     <a:pt x="0" y="0"/>
                   </a:moveTo>
                   <a:lnTo>
-                    <a:pt x="7799693" y="0"/>
-                  </a:lnTo>
-                  <a:lnTo>
-                    <a:pt x="7799693" y="0"/>
+                    <a:pt x="7682587" y="0"/>
+                  </a:lnTo>
+                  <a:lnTo>
+                    <a:pt x="7682587" y="0"/>
                   </a:lnTo>
                 </a:path>
               </a:pathLst>
@@ -4708,15 +4708,15 @@
           </p:nvSpPr>
           <p:spPr>
             <a:xfrm>
-              <a:off x="4222163" y="2073503"/>
-              <a:ext cx="0" cy="3649639"/>
+              <a:off x="4269172" y="2209169"/>
+              <a:ext cx="0" cy="3404141"/>
             </a:xfrm>
             <a:custGeom>
               <a:avLst/>
               <a:pathLst>
-                <a:path w="0" h="3649639">
+                <a:path w="0" h="3404141">
                   <a:moveTo>
-                    <a:pt x="0" y="3649639"/>
+                    <a:pt x="0" y="3404141"/>
                   </a:moveTo>
                   <a:lnTo>
                     <a:pt x="0" y="0"/>
@@ -4751,8 +4751,8 @@
           </p:nvSpPr>
           <p:spPr>
             <a:xfrm>
-              <a:off x="692708" y="5517199"/>
-              <a:ext cx="62179" cy="80101"/>
+              <a:off x="756929" y="5407599"/>
+              <a:ext cx="79004" cy="101955"/>
             </a:xfrm>
             <a:prstGeom prst="rect">
               <a:avLst/>
@@ -4765,7 +4765,7 @@
             <a:p>
               <a:pPr algn="l" marL="0" marR="0" indent="0">
                 <a:lnSpc>
-                  <a:spcPts val="880"/>
+                  <a:spcPts val="1120"/>
                 </a:lnSpc>
                 <a:spcBef>
                   <a:spcPts val="0"/>
@@ -4775,7 +4775,7 @@
                 </a:spcAft>
               </a:pPr>
               <a:r>
-                <a:rPr sz="880">
+                <a:rPr sz="1120">
                   <a:solidFill>
                     <a:srgbClr val="4D4D4D">
                       <a:alpha val="100000"/>
@@ -4797,8 +4797,8 @@
           </p:nvSpPr>
           <p:spPr>
             <a:xfrm>
-              <a:off x="692708" y="4687735"/>
-              <a:ext cx="62179" cy="80101"/>
+              <a:off x="756929" y="4633931"/>
+              <a:ext cx="79004" cy="101955"/>
             </a:xfrm>
             <a:prstGeom prst="rect">
               <a:avLst/>
@@ -4811,7 +4811,7 @@
             <a:p>
               <a:pPr algn="l" marL="0" marR="0" indent="0">
                 <a:lnSpc>
-                  <a:spcPts val="880"/>
+                  <a:spcPts val="1120"/>
                 </a:lnSpc>
                 <a:spcBef>
                   <a:spcPts val="0"/>
@@ -4821,7 +4821,7 @@
                 </a:spcAft>
               </a:pPr>
               <a:r>
-                <a:rPr sz="880">
+                <a:rPr sz="1120">
                   <a:solidFill>
                     <a:srgbClr val="4D4D4D">
                       <a:alpha val="100000"/>
@@ -4843,8 +4843,8 @@
           </p:nvSpPr>
           <p:spPr>
             <a:xfrm>
-              <a:off x="692708" y="3858272"/>
-              <a:ext cx="62179" cy="80101"/>
+              <a:off x="756929" y="3860262"/>
+              <a:ext cx="79004" cy="101955"/>
             </a:xfrm>
             <a:prstGeom prst="rect">
               <a:avLst/>
@@ -4857,7 +4857,7 @@
             <a:p>
               <a:pPr algn="l" marL="0" marR="0" indent="0">
                 <a:lnSpc>
-                  <a:spcPts val="880"/>
+                  <a:spcPts val="1120"/>
                 </a:lnSpc>
                 <a:spcBef>
                   <a:spcPts val="0"/>
@@ -4867,7 +4867,7 @@
                 </a:spcAft>
               </a:pPr>
               <a:r>
-                <a:rPr sz="880">
+                <a:rPr sz="1120">
                   <a:solidFill>
                     <a:srgbClr val="4D4D4D">
                       <a:alpha val="100000"/>
@@ -4889,8 +4889,8 @@
           </p:nvSpPr>
           <p:spPr>
             <a:xfrm>
-              <a:off x="692708" y="3028808"/>
-              <a:ext cx="62179" cy="80101"/>
+              <a:off x="756929" y="3086593"/>
+              <a:ext cx="79004" cy="101955"/>
             </a:xfrm>
             <a:prstGeom prst="rect">
               <a:avLst/>
@@ -4903,7 +4903,7 @@
             <a:p>
               <a:pPr algn="l" marL="0" marR="0" indent="0">
                 <a:lnSpc>
-                  <a:spcPts val="880"/>
+                  <a:spcPts val="1120"/>
                 </a:lnSpc>
                 <a:spcBef>
                   <a:spcPts val="0"/>
@@ -4913,7 +4913,7 @@
                 </a:spcAft>
               </a:pPr>
               <a:r>
-                <a:rPr sz="880">
+                <a:rPr sz="1120">
                   <a:solidFill>
                     <a:srgbClr val="4D4D4D">
                       <a:alpha val="100000"/>
@@ -4935,8 +4935,8 @@
           </p:nvSpPr>
           <p:spPr>
             <a:xfrm>
-              <a:off x="692708" y="2199345"/>
-              <a:ext cx="62179" cy="80101"/>
+              <a:off x="756929" y="2312925"/>
+              <a:ext cx="79004" cy="101955"/>
             </a:xfrm>
             <a:prstGeom prst="rect">
               <a:avLst/>
@@ -4949,7 +4949,7 @@
             <a:p>
               <a:pPr algn="l" marL="0" marR="0" indent="0">
                 <a:lnSpc>
-                  <a:spcPts val="880"/>
+                  <a:spcPts val="1120"/>
                 </a:lnSpc>
                 <a:spcBef>
                   <a:spcPts val="0"/>
@@ -4959,7 +4959,7 @@
                 </a:spcAft>
               </a:pPr>
               <a:r>
-                <a:rPr sz="880">
+                <a:rPr sz="1120">
                   <a:solidFill>
                     <a:srgbClr val="4D4D4D">
                       <a:alpha val="100000"/>
@@ -4981,8 +4981,8 @@
           </p:nvSpPr>
           <p:spPr>
             <a:xfrm>
-              <a:off x="1328653" y="5785772"/>
-              <a:ext cx="223753" cy="80101"/>
+              <a:off x="1387159" y="5693022"/>
+              <a:ext cx="284286" cy="101955"/>
             </a:xfrm>
             <a:prstGeom prst="rect">
               <a:avLst/>
@@ -4995,7 +4995,7 @@
             <a:p>
               <a:pPr algn="l" marL="0" marR="0" indent="0">
                 <a:lnSpc>
-                  <a:spcPts val="880"/>
+                  <a:spcPts val="1120"/>
                 </a:lnSpc>
                 <a:spcBef>
                   <a:spcPts val="0"/>
@@ -5005,7 +5005,7 @@
                 </a:spcAft>
               </a:pPr>
               <a:r>
-                <a:rPr sz="880">
+                <a:rPr sz="1120">
                   <a:solidFill>
                     <a:srgbClr val="4D4D4D">
                       <a:alpha val="100000"/>
@@ -5027,8 +5027,8 @@
           </p:nvSpPr>
           <p:spPr>
             <a:xfrm>
-              <a:off x="2724172" y="5785772"/>
-              <a:ext cx="161574" cy="80101"/>
+              <a:off x="2770605" y="5693022"/>
+              <a:ext cx="205282" cy="101955"/>
             </a:xfrm>
             <a:prstGeom prst="rect">
               <a:avLst/>
@@ -5041,7 +5041,7 @@
             <a:p>
               <a:pPr algn="l" marL="0" marR="0" indent="0">
                 <a:lnSpc>
-                  <a:spcPts val="880"/>
+                  <a:spcPts val="1120"/>
                 </a:lnSpc>
                 <a:spcBef>
                   <a:spcPts val="0"/>
@@ -5051,7 +5051,7 @@
                 </a:spcAft>
               </a:pPr>
               <a:r>
-                <a:rPr sz="880">
+                <a:rPr sz="1120">
                   <a:solidFill>
                     <a:srgbClr val="4D4D4D">
                       <a:alpha val="100000"/>
@@ -5073,8 +5073,8 @@
           </p:nvSpPr>
           <p:spPr>
             <a:xfrm>
-              <a:off x="4138300" y="5785772"/>
-              <a:ext cx="62179" cy="80101"/>
+              <a:off x="4177689" y="5693022"/>
+              <a:ext cx="79004" cy="101955"/>
             </a:xfrm>
             <a:prstGeom prst="rect">
               <a:avLst/>
@@ -5087,7 +5087,7 @@
             <a:p>
               <a:pPr algn="l" marL="0" marR="0" indent="0">
                 <a:lnSpc>
-                  <a:spcPts val="880"/>
+                  <a:spcPts val="1120"/>
                 </a:lnSpc>
                 <a:spcBef>
                   <a:spcPts val="0"/>
@@ -5097,7 +5097,7 @@
                 </a:spcAft>
               </a:pPr>
               <a:r>
-                <a:rPr sz="880">
+                <a:rPr sz="1120">
                   <a:solidFill>
                     <a:srgbClr val="4D4D4D">
                       <a:alpha val="100000"/>
@@ -5119,8 +5119,8 @@
           </p:nvSpPr>
           <p:spPr>
             <a:xfrm>
-              <a:off x="5471640" y="5785772"/>
-              <a:ext cx="124358" cy="80101"/>
+              <a:off x="5482131" y="5693022"/>
+              <a:ext cx="158008" cy="101955"/>
             </a:xfrm>
             <a:prstGeom prst="rect">
               <a:avLst/>
@@ -5133,7 +5133,7 @@
             <a:p>
               <a:pPr algn="l" marL="0" marR="0" indent="0">
                 <a:lnSpc>
-                  <a:spcPts val="880"/>
+                  <a:spcPts val="1120"/>
                 </a:lnSpc>
                 <a:spcBef>
                   <a:spcPts val="0"/>
@@ -5143,7 +5143,7 @@
                 </a:spcAft>
               </a:pPr>
               <a:r>
-                <a:rPr sz="880">
+                <a:rPr sz="1120">
                   <a:solidFill>
                     <a:srgbClr val="4D4D4D">
                       <a:alpha val="100000"/>
@@ -5165,8 +5165,8 @@
           </p:nvSpPr>
           <p:spPr>
             <a:xfrm>
-              <a:off x="6804980" y="5785772"/>
-              <a:ext cx="186537" cy="80101"/>
+              <a:off x="6786573" y="5693022"/>
+              <a:ext cx="237012" cy="101955"/>
             </a:xfrm>
             <a:prstGeom prst="rect">
               <a:avLst/>
@@ -5179,7 +5179,7 @@
             <a:p>
               <a:pPr algn="l" marL="0" marR="0" indent="0">
                 <a:lnSpc>
-                  <a:spcPts val="880"/>
+                  <a:spcPts val="1120"/>
                 </a:lnSpc>
                 <a:spcBef>
                   <a:spcPts val="0"/>
@@ -5189,7 +5189,7 @@
                 </a:spcAft>
               </a:pPr>
               <a:r>
-                <a:rPr sz="880">
+                <a:rPr sz="1120">
                   <a:solidFill>
                     <a:srgbClr val="4D4D4D">
                       <a:alpha val="100000"/>
@@ -5211,8 +5211,8 @@
           </p:nvSpPr>
           <p:spPr>
             <a:xfrm>
-              <a:off x="8169410" y="5785772"/>
-              <a:ext cx="186537" cy="80101"/>
+              <a:off x="8130517" y="5693022"/>
+              <a:ext cx="237012" cy="101955"/>
             </a:xfrm>
             <a:prstGeom prst="rect">
               <a:avLst/>
@@ -5225,7 +5225,7 @@
             <a:p>
               <a:pPr algn="l" marL="0" marR="0" indent="0">
                 <a:lnSpc>
-                  <a:spcPts val="880"/>
+                  <a:spcPts val="1120"/>
                 </a:lnSpc>
                 <a:spcBef>
                   <a:spcPts val="0"/>
@@ -5235,7 +5235,7 @@
                 </a:spcAft>
               </a:pPr>
               <a:r>
-                <a:rPr sz="880">
+                <a:rPr sz="1120">
                   <a:solidFill>
                     <a:srgbClr val="4D4D4D">
                       <a:alpha val="100000"/>
@@ -5257,8 +5257,8 @@
           </p:nvSpPr>
           <p:spPr>
             <a:xfrm>
-              <a:off x="3987536" y="5925448"/>
-              <a:ext cx="1459656" cy="100218"/>
+              <a:off x="3828319" y="5870717"/>
+              <a:ext cx="1857237" cy="127558"/>
             </a:xfrm>
             <a:prstGeom prst="rect">
               <a:avLst/>
@@ -5271,7 +5271,7 @@
             <a:p>
               <a:pPr algn="l" marL="0" marR="0" indent="0">
                 <a:lnSpc>
-                  <a:spcPts val="1100"/>
+                  <a:spcPts val="1400"/>
                 </a:lnSpc>
                 <a:spcBef>
                   <a:spcPts val="0"/>
@@ -5281,7 +5281,7 @@
                 </a:spcAft>
               </a:pPr>
               <a:r>
-                <a:rPr sz="1100">
+                <a:rPr sz="1400">
                   <a:solidFill>
                     <a:srgbClr val="000000">
                       <a:alpha val="100000"/>
@@ -5303,8 +5303,8 @@
           </p:nvSpPr>
           <p:spPr>
             <a:xfrm rot="-5400000">
-              <a:off x="68446" y="3848213"/>
-              <a:ext cx="1016904" cy="100218"/>
+              <a:off x="-37527" y="3847460"/>
+              <a:ext cx="1294150" cy="127558"/>
             </a:xfrm>
             <a:prstGeom prst="rect">
               <a:avLst/>
@@ -5317,7 +5317,7 @@
             <a:p>
               <a:pPr algn="l" marL="0" marR="0" indent="0">
                 <a:lnSpc>
-                  <a:spcPts val="1100"/>
+                  <a:spcPts val="1400"/>
                 </a:lnSpc>
                 <a:spcBef>
                   <a:spcPts val="0"/>
@@ -5327,7 +5327,7 @@
                 </a:spcAft>
               </a:pPr>
               <a:r>
-                <a:rPr sz="1100">
+                <a:rPr sz="1400">
                   <a:solidFill>
                     <a:srgbClr val="000000">
                       <a:alpha val="100000"/>
@@ -5349,8 +5349,8 @@
           </p:nvSpPr>
           <p:spPr>
             <a:xfrm>
-              <a:off x="817517" y="1896563"/>
-              <a:ext cx="4433376" cy="82021"/>
+              <a:off x="915645" y="1977589"/>
+              <a:ext cx="5912784" cy="109362"/>
             </a:xfrm>
             <a:prstGeom prst="rect">
               <a:avLst/>
@@ -5363,7 +5363,7 @@
             <a:p>
               <a:pPr algn="l" marL="0" marR="0" indent="0">
                 <a:lnSpc>
-                  <a:spcPts val="900"/>
+                  <a:spcPts val="1200"/>
                 </a:lnSpc>
                 <a:spcBef>
                   <a:spcPts val="0"/>
@@ -5373,7 +5373,7 @@
                 </a:spcAft>
               </a:pPr>
               <a:r>
-                <a:rPr sz="900">
+                <a:rPr sz="1200">
                   <a:solidFill>
                     <a:srgbClr val="404040">
                       <a:alpha val="100000"/>
@@ -5395,8 +5395,8 @@
           </p:nvSpPr>
           <p:spPr>
             <a:xfrm>
-              <a:off x="817517" y="1669789"/>
-              <a:ext cx="1936790" cy="120152"/>
+              <a:off x="915645" y="1688767"/>
+              <a:ext cx="2465771" cy="153070"/>
             </a:xfrm>
             <a:prstGeom prst="rect">
               <a:avLst/>
@@ -5409,7 +5409,7 @@
             <a:p>
               <a:pPr algn="l" marL="0" marR="0" indent="0">
                 <a:lnSpc>
-                  <a:spcPts val="1320"/>
+                  <a:spcPts val="1680"/>
                 </a:lnSpc>
                 <a:spcBef>
                   <a:spcPts val="0"/>
@@ -5419,7 +5419,7 @@
                 </a:spcAft>
               </a:pPr>
               <a:r>
-                <a:rPr sz="1320">
+                <a:rPr sz="1680">
                   <a:solidFill>
                     <a:srgbClr val="000000">
                       <a:alpha val="100000"/>
